--- a/מצגת פרויקט גמר - פעילות גופנית ותזונה ומחלות כרוניות.pptx
+++ b/מצגת פרויקט גמר - פעילות גופנית ותזונה ומחלות כרוניות.pptx
@@ -21,9 +21,14 @@
     <p:sldId id="269" r:id="rId15"/>
     <p:sldId id="270" r:id="rId16"/>
     <p:sldId id="271" r:id="rId17"/>
+    <p:sldId id="272" r:id="rId18"/>
+    <p:sldId id="273" r:id="rId19"/>
+    <p:sldId id="274" r:id="rId20"/>
+    <p:sldId id="275" r:id="rId21"/>
+    <p:sldId id="276" r:id="rId22"/>
   </p:sldIdLst>
   <p:notesMasterIdLst>
-    <p:notesMasterId r:id="rId18"/>
+    <p:notesMasterId r:id="rId23"/>
   </p:notesMasterIdLst>
   <p:sldSz cx="12192000" cy="6858000"/>
   <p:notesSz cx="6858000" cy="12192000"/>
@@ -1133,7 +1138,7 @@
           <a:p>
             <a:r>
               <a:rPr lang="en-US" dirty="0"/>
-              <a:t>לסיים בהדגשה שהמסקנה מעשית וברת יישום, ושהמלצות המחקר אינן דורשות משאבים חריגים.</a:t>
+              <a:t>להציג את המגבלות בכנות: זה מחזק את אמינות העבודה ולא מחליש אותה.</a:t>
             </a:r>
             <a:endParaRPr lang="en-US" dirty="0"/>
           </a:p>
@@ -1157,6 +1162,270 @@
             <a:fld id="{F7021451-1387-4CA6-816F-3879F97B5CBC}" type="slidenum">
               <a:rPr lang="en-US"/>
               <a:t>16</a:t>
+            </a:fld>
+            <a:endParaRPr lang="en-US"/>
+          </a:p>
+        </p:txBody>
+      </p:sp>
+    </p:spTree>
+    <p:extLst>
+      <p:ext uri="{BB962C8B-B14F-4D97-AF65-F5344CB8AC3E}">
+        <p14:creationId xmlns:p14="http://schemas.microsoft.com/office/powerpoint/2010/main" val="1024086991"/>
+      </p:ext>
+    </p:extLst>
+  </p:cSld>
+  <p:clrMapOvr>
+    <a:masterClrMapping/>
+  </p:clrMapOvr>
+</p:notes>
+</file>
+
+<file path=ppt/notesSlides/notesSlide17.xml><?xml version="1.0" encoding="utf-8"?>
+<p:notes xmlns:a="http://schemas.openxmlformats.org/drawingml/2006/main" xmlns:r="http://schemas.openxmlformats.org/officeDocument/2006/relationships" xmlns:p="http://schemas.openxmlformats.org/presentationml/2006/main">
+  <p:cSld>
+    <p:spTree>
+      <p:nvGrpSpPr>
+        <p:cNvPr id="1" name=""/>
+        <p:cNvGrpSpPr/>
+        <p:nvPr/>
+      </p:nvGrpSpPr>
+      <p:grpSpPr>
+        <a:xfrm>
+          <a:off x="0" y="0"/>
+          <a:ext cx="0" cy="0"/>
+          <a:chOff x="0" y="0"/>
+          <a:chExt cx="0" cy="0"/>
+        </a:xfrm>
+      </p:grpSpPr>
+      <p:sp>
+        <p:nvSpPr>
+          <p:cNvPr id="2" name="Slide Image Placeholder 1"/>
+          <p:cNvSpPr>
+            <a:spLocks noGrp="1" noRot="1" noChangeAspect="1"/>
+          </p:cNvSpPr>
+          <p:nvPr>
+            <p:ph type="sldImg"/>
+          </p:nvPr>
+        </p:nvSpPr>
+        <p:spPr/>
+      </p:sp>
+      <p:sp>
+        <p:nvSpPr>
+          <p:cNvPr id="3" name="Notes Placeholder 2"/>
+          <p:cNvSpPr>
+            <a:spLocks noGrp="1"/>
+          </p:cNvSpPr>
+          <p:nvPr>
+            <p:ph type="body" idx="1"/>
+          </p:nvPr>
+        </p:nvSpPr>
+        <p:spPr/>
+        <p:txBody>
+          <a:bodyPr/>
+          <a:lstStyle/>
+          <a:p>
+            <a:r>
+              <a:rPr lang="en-US" dirty="0"/>
+              <a:t>להדגיש שהמסקנה מעשית וברת יישום, ושההמלצות אינן דורשות משאבים חריגים.</a:t>
+            </a:r>
+            <a:endParaRPr lang="en-US" dirty="0"/>
+          </a:p>
+        </p:txBody>
+      </p:sp>
+      <p:sp>
+        <p:nvSpPr>
+          <p:cNvPr id="4" name="Slide Number Placeholder 3"/>
+          <p:cNvSpPr>
+            <a:spLocks noGrp="1"/>
+          </p:cNvSpPr>
+          <p:nvPr>
+            <p:ph type="sldNum" sz="quarter" idx="10"/>
+          </p:nvPr>
+        </p:nvSpPr>
+        <p:spPr/>
+        <p:txBody>
+          <a:bodyPr/>
+          <a:lstStyle/>
+          <a:p>
+            <a:fld id="{F7021451-1387-4CA6-816F-3879F97B5CBC}" type="slidenum">
+              <a:rPr lang="en-US"/>
+              <a:t>17</a:t>
+            </a:fld>
+            <a:endParaRPr lang="en-US"/>
+          </a:p>
+        </p:txBody>
+      </p:sp>
+    </p:spTree>
+    <p:extLst>
+      <p:ext uri="{BB962C8B-B14F-4D97-AF65-F5344CB8AC3E}">
+        <p14:creationId xmlns:p14="http://schemas.microsoft.com/office/powerpoint/2010/main" val="1024086991"/>
+      </p:ext>
+    </p:extLst>
+  </p:cSld>
+  <p:clrMapOvr>
+    <a:masterClrMapping/>
+  </p:clrMapOvr>
+</p:notes>
+</file>
+
+<file path=ppt/notesSlides/notesSlide18.xml><?xml version="1.0" encoding="utf-8"?>
+<p:notes xmlns:a="http://schemas.openxmlformats.org/drawingml/2006/main" xmlns:r="http://schemas.openxmlformats.org/officeDocument/2006/relationships" xmlns:p="http://schemas.openxmlformats.org/presentationml/2006/main">
+  <p:cSld>
+    <p:spTree>
+      <p:nvGrpSpPr>
+        <p:cNvPr id="1" name=""/>
+        <p:cNvGrpSpPr/>
+        <p:nvPr/>
+      </p:nvGrpSpPr>
+      <p:grpSpPr>
+        <a:xfrm>
+          <a:off x="0" y="0"/>
+          <a:ext cx="0" cy="0"/>
+          <a:chOff x="0" y="0"/>
+          <a:chExt cx="0" cy="0"/>
+        </a:xfrm>
+      </p:grpSpPr>
+      <p:sp>
+        <p:nvSpPr>
+          <p:cNvPr id="2" name="Slide Image Placeholder 1"/>
+          <p:cNvSpPr>
+            <a:spLocks noGrp="1" noRot="1" noChangeAspect="1"/>
+          </p:cNvSpPr>
+          <p:nvPr>
+            <p:ph type="sldImg"/>
+          </p:nvPr>
+        </p:nvSpPr>
+        <p:spPr/>
+      </p:sp>
+      <p:sp>
+        <p:nvSpPr>
+          <p:cNvPr id="3" name="Notes Placeholder 2"/>
+          <p:cNvSpPr>
+            <a:spLocks noGrp="1"/>
+          </p:cNvSpPr>
+          <p:nvPr>
+            <p:ph type="body" idx="1"/>
+          </p:nvPr>
+        </p:nvSpPr>
+        <p:spPr/>
+        <p:txBody>
+          <a:bodyPr/>
+          <a:lstStyle/>
+          <a:p>
+            <a:r>
+              <a:rPr lang="en-US" dirty="0"/>
+              <a:t>כל מקור שאוזכר במצגת מופיע ברשימה, וכל פריט ברשימה אוזכר במצגת. הרשימה המלאה מופיעה בעבודה הכתובה.</a:t>
+            </a:r>
+            <a:endParaRPr lang="en-US" dirty="0"/>
+          </a:p>
+        </p:txBody>
+      </p:sp>
+      <p:sp>
+        <p:nvSpPr>
+          <p:cNvPr id="4" name="Slide Number Placeholder 3"/>
+          <p:cNvSpPr>
+            <a:spLocks noGrp="1"/>
+          </p:cNvSpPr>
+          <p:nvPr>
+            <p:ph type="sldNum" sz="quarter" idx="10"/>
+          </p:nvPr>
+        </p:nvSpPr>
+        <p:spPr/>
+        <p:txBody>
+          <a:bodyPr/>
+          <a:lstStyle/>
+          <a:p>
+            <a:fld id="{F7021451-1387-4CA6-816F-3879F97B5CBC}" type="slidenum">
+              <a:rPr lang="en-US"/>
+              <a:t>18</a:t>
+            </a:fld>
+            <a:endParaRPr lang="en-US"/>
+          </a:p>
+        </p:txBody>
+      </p:sp>
+    </p:spTree>
+    <p:extLst>
+      <p:ext uri="{BB962C8B-B14F-4D97-AF65-F5344CB8AC3E}">
+        <p14:creationId xmlns:p14="http://schemas.microsoft.com/office/powerpoint/2010/main" val="1024086991"/>
+      </p:ext>
+    </p:extLst>
+  </p:cSld>
+  <p:clrMapOvr>
+    <a:masterClrMapping/>
+  </p:clrMapOvr>
+</p:notes>
+</file>
+
+<file path=ppt/notesSlides/notesSlide19.xml><?xml version="1.0" encoding="utf-8"?>
+<p:notes xmlns:a="http://schemas.openxmlformats.org/drawingml/2006/main" xmlns:r="http://schemas.openxmlformats.org/officeDocument/2006/relationships" xmlns:p="http://schemas.openxmlformats.org/presentationml/2006/main">
+  <p:cSld>
+    <p:spTree>
+      <p:nvGrpSpPr>
+        <p:cNvPr id="1" name=""/>
+        <p:cNvGrpSpPr/>
+        <p:nvPr/>
+      </p:nvGrpSpPr>
+      <p:grpSpPr>
+        <a:xfrm>
+          <a:off x="0" y="0"/>
+          <a:ext cx="0" cy="0"/>
+          <a:chOff x="0" y="0"/>
+          <a:chExt cx="0" cy="0"/>
+        </a:xfrm>
+      </p:grpSpPr>
+      <p:sp>
+        <p:nvSpPr>
+          <p:cNvPr id="2" name="Slide Image Placeholder 1"/>
+          <p:cNvSpPr>
+            <a:spLocks noGrp="1" noRot="1" noChangeAspect="1"/>
+          </p:cNvSpPr>
+          <p:nvPr>
+            <p:ph type="sldImg"/>
+          </p:nvPr>
+        </p:nvSpPr>
+        <p:spPr/>
+      </p:sp>
+      <p:sp>
+        <p:nvSpPr>
+          <p:cNvPr id="3" name="Notes Placeholder 2"/>
+          <p:cNvSpPr>
+            <a:spLocks noGrp="1"/>
+          </p:cNvSpPr>
+          <p:nvPr>
+            <p:ph type="body" idx="1"/>
+          </p:nvPr>
+        </p:nvSpPr>
+        <p:spPr/>
+        <p:txBody>
+          <a:bodyPr/>
+          <a:lstStyle/>
+          <a:p>
+            <a:r>
+              <a:rPr lang="en-US" dirty="0"/>
+              <a:t>כל מקור שאוזכר במצגת מופיע ברשימה, וכל פריט ברשימה אוזכר במצגת. הרשימה המלאה מופיעה בעבודה הכתובה.</a:t>
+            </a:r>
+            <a:endParaRPr lang="en-US" dirty="0"/>
+          </a:p>
+        </p:txBody>
+      </p:sp>
+      <p:sp>
+        <p:nvSpPr>
+          <p:cNvPr id="4" name="Slide Number Placeholder 3"/>
+          <p:cNvSpPr>
+            <a:spLocks noGrp="1"/>
+          </p:cNvSpPr>
+          <p:nvPr>
+            <p:ph type="sldNum" sz="quarter" idx="10"/>
+          </p:nvPr>
+        </p:nvSpPr>
+        <p:spPr/>
+        <p:txBody>
+          <a:bodyPr/>
+          <a:lstStyle/>
+          <a:p>
+            <a:fld id="{F7021451-1387-4CA6-816F-3879F97B5CBC}" type="slidenum">
+              <a:rPr lang="en-US"/>
+              <a:t>19</a:t>
             </a:fld>
             <a:endParaRPr lang="en-US"/>
           </a:p>
@@ -1245,6 +1514,182 @@
             <a:fld id="{F7021451-1387-4CA6-816F-3879F97B5CBC}" type="slidenum">
               <a:rPr lang="en-US"/>
               <a:t>2</a:t>
+            </a:fld>
+            <a:endParaRPr lang="en-US"/>
+          </a:p>
+        </p:txBody>
+      </p:sp>
+    </p:spTree>
+    <p:extLst>
+      <p:ext uri="{BB962C8B-B14F-4D97-AF65-F5344CB8AC3E}">
+        <p14:creationId xmlns:p14="http://schemas.microsoft.com/office/powerpoint/2010/main" val="1024086991"/>
+      </p:ext>
+    </p:extLst>
+  </p:cSld>
+  <p:clrMapOvr>
+    <a:masterClrMapping/>
+  </p:clrMapOvr>
+</p:notes>
+</file>
+
+<file path=ppt/notesSlides/notesSlide20.xml><?xml version="1.0" encoding="utf-8"?>
+<p:notes xmlns:a="http://schemas.openxmlformats.org/drawingml/2006/main" xmlns:r="http://schemas.openxmlformats.org/officeDocument/2006/relationships" xmlns:p="http://schemas.openxmlformats.org/presentationml/2006/main">
+  <p:cSld>
+    <p:spTree>
+      <p:nvGrpSpPr>
+        <p:cNvPr id="1" name=""/>
+        <p:cNvGrpSpPr/>
+        <p:nvPr/>
+      </p:nvGrpSpPr>
+      <p:grpSpPr>
+        <a:xfrm>
+          <a:off x="0" y="0"/>
+          <a:ext cx="0" cy="0"/>
+          <a:chOff x="0" y="0"/>
+          <a:chExt cx="0" cy="0"/>
+        </a:xfrm>
+      </p:grpSpPr>
+      <p:sp>
+        <p:nvSpPr>
+          <p:cNvPr id="2" name="Slide Image Placeholder 1"/>
+          <p:cNvSpPr>
+            <a:spLocks noGrp="1" noRot="1" noChangeAspect="1"/>
+          </p:cNvSpPr>
+          <p:nvPr>
+            <p:ph type="sldImg"/>
+          </p:nvPr>
+        </p:nvSpPr>
+        <p:spPr/>
+      </p:sp>
+      <p:sp>
+        <p:nvSpPr>
+          <p:cNvPr id="3" name="Notes Placeholder 2"/>
+          <p:cNvSpPr>
+            <a:spLocks noGrp="1"/>
+          </p:cNvSpPr>
+          <p:nvPr>
+            <p:ph type="body" idx="1"/>
+          </p:nvPr>
+        </p:nvSpPr>
+        <p:spPr/>
+        <p:txBody>
+          <a:bodyPr/>
+          <a:lstStyle/>
+          <a:p>
+            <a:r>
+              <a:rPr lang="en-US" dirty="0"/>
+              <a:t>כל מקור שאוזכר במצגת מופיע ברשימה, וכל פריט ברשימה אוזכר במצגת. הרשימה המלאה מופיעה בעבודה הכתובה.</a:t>
+            </a:r>
+            <a:endParaRPr lang="en-US" dirty="0"/>
+          </a:p>
+        </p:txBody>
+      </p:sp>
+      <p:sp>
+        <p:nvSpPr>
+          <p:cNvPr id="4" name="Slide Number Placeholder 3"/>
+          <p:cNvSpPr>
+            <a:spLocks noGrp="1"/>
+          </p:cNvSpPr>
+          <p:nvPr>
+            <p:ph type="sldNum" sz="quarter" idx="10"/>
+          </p:nvPr>
+        </p:nvSpPr>
+        <p:spPr/>
+        <p:txBody>
+          <a:bodyPr/>
+          <a:lstStyle/>
+          <a:p>
+            <a:fld id="{F7021451-1387-4CA6-816F-3879F97B5CBC}" type="slidenum">
+              <a:rPr lang="en-US"/>
+              <a:t>20</a:t>
+            </a:fld>
+            <a:endParaRPr lang="en-US"/>
+          </a:p>
+        </p:txBody>
+      </p:sp>
+    </p:spTree>
+    <p:extLst>
+      <p:ext uri="{BB962C8B-B14F-4D97-AF65-F5344CB8AC3E}">
+        <p14:creationId xmlns:p14="http://schemas.microsoft.com/office/powerpoint/2010/main" val="1024086991"/>
+      </p:ext>
+    </p:extLst>
+  </p:cSld>
+  <p:clrMapOvr>
+    <a:masterClrMapping/>
+  </p:clrMapOvr>
+</p:notes>
+</file>
+
+<file path=ppt/notesSlides/notesSlide21.xml><?xml version="1.0" encoding="utf-8"?>
+<p:notes xmlns:a="http://schemas.openxmlformats.org/drawingml/2006/main" xmlns:r="http://schemas.openxmlformats.org/officeDocument/2006/relationships" xmlns:p="http://schemas.openxmlformats.org/presentationml/2006/main">
+  <p:cSld>
+    <p:spTree>
+      <p:nvGrpSpPr>
+        <p:cNvPr id="1" name=""/>
+        <p:cNvGrpSpPr/>
+        <p:nvPr/>
+      </p:nvGrpSpPr>
+      <p:grpSpPr>
+        <a:xfrm>
+          <a:off x="0" y="0"/>
+          <a:ext cx="0" cy="0"/>
+          <a:chOff x="0" y="0"/>
+          <a:chExt cx="0" cy="0"/>
+        </a:xfrm>
+      </p:grpSpPr>
+      <p:sp>
+        <p:nvSpPr>
+          <p:cNvPr id="2" name="Slide Image Placeholder 1"/>
+          <p:cNvSpPr>
+            <a:spLocks noGrp="1" noRot="1" noChangeAspect="1"/>
+          </p:cNvSpPr>
+          <p:nvPr>
+            <p:ph type="sldImg"/>
+          </p:nvPr>
+        </p:nvSpPr>
+        <p:spPr/>
+      </p:sp>
+      <p:sp>
+        <p:nvSpPr>
+          <p:cNvPr id="3" name="Notes Placeholder 2"/>
+          <p:cNvSpPr>
+            <a:spLocks noGrp="1"/>
+          </p:cNvSpPr>
+          <p:nvPr>
+            <p:ph type="body" idx="1"/>
+          </p:nvPr>
+        </p:nvSpPr>
+        <p:spPr/>
+        <p:txBody>
+          <a:bodyPr/>
+          <a:lstStyle/>
+          <a:p>
+            <a:r>
+              <a:rPr lang="en-US" dirty="0"/>
+              <a:t>שקופית סיום. כאן נפתח את הרצפה לשאלות.</a:t>
+            </a:r>
+            <a:endParaRPr lang="en-US" dirty="0"/>
+          </a:p>
+        </p:txBody>
+      </p:sp>
+      <p:sp>
+        <p:nvSpPr>
+          <p:cNvPr id="4" name="Slide Number Placeholder 3"/>
+          <p:cNvSpPr>
+            <a:spLocks noGrp="1"/>
+          </p:cNvSpPr>
+          <p:nvPr>
+            <p:ph type="sldNum" sz="quarter" idx="10"/>
+          </p:nvPr>
+        </p:nvSpPr>
+        <p:spPr/>
+        <p:txBody>
+          <a:bodyPr/>
+          <a:lstStyle/>
+          <a:p>
+            <a:fld id="{F7021451-1387-4CA6-816F-3879F97B5CBC}" type="slidenum">
+              <a:rPr lang="en-US"/>
+              <a:t>21</a:t>
             </a:fld>
             <a:endParaRPr lang="en-US"/>
           </a:p>
@@ -2515,7 +2960,7 @@
                 <a:ea typeface="Arial" pitchFamily="34" charset="-122"/>
                 <a:cs typeface="Arial" pitchFamily="34" charset="-120"/>
               </a:rPr>
-              <a:t>מהי ההשפעה של פעילות גופנית ותזונה מאוזנת</a:t>
+              <a:t>‏מהי ההשפעה של פעילות גופנית ותזונה מאוזנת‏</a:t>
             </a:r>
             <a:endParaRPr lang="en-US" sz="3300" dirty="0"/>
           </a:p>
@@ -2535,7 +2980,7 @@
                 <a:ea typeface="Arial" pitchFamily="34" charset="-122"/>
                 <a:cs typeface="Arial" pitchFamily="34" charset="-120"/>
               </a:rPr>
-              <a:t>על הסיכון להתפתחות מחלות כרוניות בקרב מבוגרים?</a:t>
+              <a:t>‏על הסיכון להתפתחות מחלות כרוניות בקרב מבוגרים?‏</a:t>
             </a:r>
             <a:endParaRPr lang="en-US" sz="3300" dirty="0"/>
           </a:p>
@@ -2995,7 +3440,7 @@
                 <a:ea typeface="Arial" pitchFamily="34" charset="-122"/>
                 <a:cs typeface="Arial" pitchFamily="34" charset="-120"/>
               </a:rPr>
-              <a:t>הפער בין הידע לבין היישום עלה בכל שנים עשר הראיונות. הניסוח החד ביותר הובא בדברי מרואיין בן ארבעים וארבע מחורה, שאינו עוסק בפעילות גופנית ומעשן קופסה וחצי ביום: “אני יודע את כל זה, אני יודע הכול ולא עושה כלום. בן אדם לא מאמין שזה יקרה לו, עד שזה קורה לו” (מרואיין 5). גמלאי בן שישים ושמונה הצביע על גורם עומק, ולפיו תפיסת המחלה בדורו היא תפיסה של גורל ולא של בחירה: “כל החיים שלי דברים קרו לי, לא אני קרהתי אותם” (מרואיין 11).</a:t>
+              <a:t>‏הפער בין הידע לבין היישום עלה בכל שנים עשר הראיונות. הניסוח החד ביותר הובא בדברי מרואיין בן ארבעים וארבע מחורה, שאינו עוסק בפעילות גופנית ומעשן קופסה וחצי ביום: “אני יודע את כל זה, אני יודע הכול ולא עושה כלום. בן אדם לא מאמין שזה יקרה לו, עד שזה קורה לו” ‏(מרואיין 5)‏. גמלאי בן שישים ושמונה הצביע על גורם עומק, ולפיו תפיסת המחלה בדורו היא תפיסה של גורל ולא של בחירה: “כל החיים שלי דברים קרו לי, לא אני קרהתי אותם” ‏(מרואיין 11)‏.‏</a:t>
             </a:r>
             <a:endParaRPr lang="en-US" sz="1550" dirty="0"/>
           </a:p>
@@ -3018,7 +3463,7 @@
                 <a:ea typeface="Arial" pitchFamily="34" charset="-122"/>
                 <a:cs typeface="Arial" pitchFamily="34" charset="-120"/>
               </a:rPr>
-              <a:t>תפקידה הכפול של המשפחה עלה אף הוא בכל הראיונות. מצד אחד היא תוארה כתנאי להצלחה, ומורה בן חמישים וחמש שירד שנים עשר קילוגרם ייחס את השינוי לשותפות עם בת זוגו וכינה זאת “הפרויקט המשותף הכי מוצלח שלנו אחרי הילדים” (מרואיין 9). מצד שני, מנהגי האירוח והכיבוד תוארו כחסם המרכזי בפני תזונה מאוזנת, ומרואיינת בת שישים ושש הסבירה כי “אצלנו כבוד לאימא זה אוכל” (מרואיינת 6).</a:t>
+              <a:t>‏תפקידה הכפול של המשפחה עלה אף הוא בכל הראיונות. מצד אחד היא תוארה כתנאי להצלחה, ומורה בן חמישים וחמש שירד שנים עשר קילוגרם ייחס את השינוי לשותפות עם בת זוגו וכינה זאת “הפרויקט המשותף הכי מוצלח שלנו אחרי הילדים” ‏(מרואיין 9)‏. מצד שני, מנהגי האירוח והכיבוד תוארו כחסם המרכזי בפני תזונה מאוזנת, ומרואיינת בת שישים ושש הסבירה כי “אצלנו כבוד לאימא זה אוכל” ‏(מרואיינת 6)‏.‏</a:t>
             </a:r>
             <a:endParaRPr lang="en-US" sz="1550" dirty="0"/>
           </a:p>
@@ -3041,7 +3486,7 @@
                 <a:ea typeface="Arial" pitchFamily="34" charset="-122"/>
                 <a:cs typeface="Arial" pitchFamily="34" charset="-120"/>
               </a:rPr>
-              <a:t>הניסוח החריף ביותר לתמה זו הובא בדברי מרואיין 11: “מרוב כבוד הם עושים אותי נכה, הכבוד שלנו לזקנים הורג את הזקנים”. חשיבותו של ממצא זה בכך שהחסם אינו נובע מהזנחה או מאדישות, אלא דווקא ממימוש של ערך חברתי מרכזי, ולכן כל התערבות המבקשת לשנותו חייבת לפעול מתוך אותו ערך ולא כנגדו.</a:t>
+              <a:t>‏הניסוח החריף ביותר לתמה זו הובא בדברי מרואיין 11: “מרוב כבוד הם עושים אותי נכה, הכבוד שלנו לזקנים הורג את הזקנים”. חשיבותו של ממצא זה בכך שהחסם אינו נובע מהזנחה או מאדישות, אלא דווקא ממימוש של ערך חברתי מרכזי, ולכן כל התערבות המבקשת לשנותו חייבת לפעול מתוך אותו ערך ולא כנגדו.‏</a:t>
             </a:r>
             <a:endParaRPr lang="en-US" sz="1550" dirty="0"/>
           </a:p>
@@ -3261,7 +3706,7 @@
                 <a:ea typeface="Arial" pitchFamily="34" charset="-122"/>
                 <a:cs typeface="Arial" pitchFamily="34" charset="-120"/>
               </a:rPr>
-              <a:t>חסם התשתית עלה בעשרה מתוך שנים עשר הראיונות, ובמרכזו הפער החד בין תושבי ערד לבין תושבי היישובים הבדואיים. מורה בגמלאות בן שבעים ואחת תיאר את ערד כ“עיר של הולכים, מרחקים קצרים, מדרכות, אוויר צלול” (מרואיין 7), ואילו מרואיין 11 סיכם את מצבו במשפט “יש לי משפחה שכל זקן יהודי היה מקנא בה, ואין לי מדרכה אחת ללכת עליה”. חמש מתוך שש המרואיינות התייחסו להיעדרן של מסגרות ספורט מותאמות לנשים וקשרו זאת לנורמות חברתיות.</a:t>
+              <a:t>‏חסם התשתית עלה בעשרה מתוך שנים עשר הראיונות, ובמרכזו הפער החד בין תושבי ערד לבין תושבי היישובים הבדואיים. מורה בגמלאות בן שבעים ואחת תיאר את ערד כ“עיר של הולכים, מרחקים קצרים, מדרכות, אוויר צלול” ‏(מרואיין 7)‏, ואילו מרואיין 11 סיכם את מצבו במשפט “יש לי משפחה שכל זקן יהודי היה מקנא בה, ואין לי מדרכה אחת ללכת עליה”. חמש מתוך שש המרואיינות התייחסו להיעדרן של מסגרות ספורט מותאמות לנשים וקשרו זאת לנורמות חברתיות.‏</a:t>
             </a:r>
             <a:endParaRPr lang="en-US" sz="1550" dirty="0"/>
           </a:p>
@@ -3284,7 +3729,7 @@
                 <a:ea typeface="Arial" pitchFamily="34" charset="-122"/>
                 <a:cs typeface="Arial" pitchFamily="34" charset="-120"/>
               </a:rPr>
-              <a:t>עדות משמעותית לכך שהחסם הוא מבני ולא מוטיבציוני עלתה מריאיון עם סייעת בת ארבעים וחמש, המקיימת שגרת הליכה עם שתי חברות זה ארבע שנים. לדבריה, בעקבות הקבוצה שלהן קמו עוד שתי קבוצות נשים בשכונה, אך ההליכה מתאפשרת רק במסלול אחד שיש בו מדרכה ותאורה (מרואיינת 8). מכאן שתשתית מינימלית מספיקה כדי שתיווצר פעילות שאף מתפשטת.</a:t>
+              <a:t>‏עדות משמעותית לכך שהחסם הוא מבני ולא מוטיבציוני עלתה מריאיון עם סייעת בת ארבעים וחמש, המקיימת שגרת הליכה עם שתי חברות זה ארבע שנים. לדבריה, בעקבות הקבוצה שלהן קמו עוד שתי קבוצות נשים בשכונה, אך ההליכה מתאפשרת רק במסלול אחד שיש בו מדרכה ותאורה ‏(מרואיינת 8)‏. מכאן שתשתית מינימלית מספיקה כדי שתיווצר פעילות שאף מתפשטת.‏</a:t>
             </a:r>
             <a:endParaRPr lang="en-US" sz="1550" dirty="0"/>
           </a:p>
@@ -3307,7 +3752,7 @@
                 <a:ea typeface="Arial" pitchFamily="34" charset="-122"/>
                 <a:cs typeface="Arial" pitchFamily="34" charset="-120"/>
               </a:rPr>
-              <a:t>בתשעה ראיונות זוהתה נקודת מפנה, שלפיה השינוי בפועל לא התרחש בעקבות ידע או הסברה אלא בעקבות אבחנה או אירוע בריאותי. גמלאי בן שישים ושלוש, שעבר צנתור בגיל חמישים ותשע, ניסח את עצתו לאחרים במשפט “אל תחכה לצנתור שלך” (מרואיין 3). משמעות הדפוס כפולה: מצד אחד הוא מלמד כי בני חמישים, שישים ושבעים מסוגלים לשינוי עמוק ומתמשך, ומצד שני הוא מלמד כי המערכת מחמיצה חלון הזדמנויות ארוך שבמהלכו ניתן היה למנוע את הנזק.</a:t>
+              <a:t>‏בתשעה ראיונות זוהתה נקודת מפנה, שלפיה השינוי בפועל לא התרחש בעקבות ידע או הסברה אלא בעקבות אבחנה או אירוע בריאותי. גמלאי בן שישים ושלוש, שעבר צנתור בגיל חמישים ותשע, ניסח את עצתו לאחרים במשפט “אל תחכה לצנתור שלך” ‏(מרואיין 3)‏. משמעות הדפוס כפולה: מצד אחד הוא מלמד כי בני חמישים, שישים ושבעים מסוגלים לשינוי עמוק ומתמשך, ומצד שני הוא מלמד כי המערכת מחמיצה חלון הזדמנויות ארוך שבמהלכו ניתן היה למנוע את הנזק.‏</a:t>
             </a:r>
             <a:endParaRPr lang="en-US" sz="1550" dirty="0"/>
           </a:p>
@@ -3527,7 +3972,7 @@
                 <a:ea typeface="Arial" pitchFamily="34" charset="-122"/>
                 <a:cs typeface="Arial" pitchFamily="34" charset="-120"/>
               </a:rPr>
-              <a:t>באחד עשר ראיונות עלתה הערכה גבוהה לאיכות המעקב הרפואי הניתן לאחר אבחנה, לצד ביקורת עקבית על היעדר יוזמה מונעת קודם לה. מרואיין 3 ניסח את ההבחנה במפורש: “המערכת שלנו מצוינת בלטפל בחולים, וחלשה בלמנוע מבריאים להפוך לחולים”. גמלאי שאינו יודע קרוא וכתוב סיכם את כל הליווי שקיבל בשתים עשרה שנות סוכרת כדף מודפס אחד בעברית (מרואיין 11), ממצא הממחיש כי היעדר ההתאמה הלשונית אינו פרט טכני אלא חסם מהותי.</a:t>
+              <a:t>‏באחד עשר ראיונות עלתה הערכה גבוהה לאיכות המעקב הרפואי הניתן לאחר אבחנה, לצד ביקורת עקבית על היעדר יוזמה מונעת קודם לה. מרואיין 3 ניסח את ההבחנה במפורש: “המערכת שלנו מצוינת בלטפל בחולים, וחלשה בלמנוע מבריאים להפוך לחולים”. גמלאי שאינו יודע קרוא וכתוב סיכם את כל הליווי שקיבל בשתים עשרה שנות סוכרת כדף מודפס אחד בעברית ‏(מרואיין 11)‏, ממצא הממחיש כי היעדר ההתאמה הלשונית אינו פרט טכני אלא חסם מהותי.‏</a:t>
             </a:r>
             <a:endParaRPr lang="en-US" sz="1550" dirty="0"/>
           </a:p>
@@ -3550,7 +3995,7 @@
                 <a:ea typeface="Arial" pitchFamily="34" charset="-122"/>
                 <a:cs typeface="Arial" pitchFamily="34" charset="-120"/>
               </a:rPr>
-              <a:t>לצד הביקורת עלו גם דוגמאות להתערבות מוצלחת, ובכולן חזר מאפיין משותף של פנייה אישית ויזומה: הפניה כתובה למסגרת קונקרטית, שיחת טלפון של אחות בשפה הערבית, וסדנה קבוצתית מובנית. שלושת המנגנונים הללו פשוטים וזולים יחסית לעלות הטיפול במחלה שכבר התפתחה.</a:t>
+              <a:t>‏לצד הביקורת עלו גם דוגמאות להתערבות מוצלחת, ובכולן חזר מאפיין משותף של פנייה אישית ויזומה: הפניה כתובה למסגרת קונקרטית, שיחת טלפון של אחות בשפה הערבית, וסדנה קבוצתית מובנית. שלושת המנגנונים הללו פשוטים וזולים יחסית לעלות הטיפול במחלה שכבר התפתחה.‏</a:t>
             </a:r>
             <a:endParaRPr lang="en-US" sz="1550" dirty="0"/>
           </a:p>
@@ -3573,7 +4018,7 @@
                 <a:ea typeface="Arial" pitchFamily="34" charset="-122"/>
                 <a:cs typeface="Arial" pitchFamily="34" charset="-120"/>
               </a:rPr>
-              <a:t>בכל הראיונות תוארה סביבת מידע רוויה, ובה זרם מתמיד של טענות על תרופות פלא ברשתות החברתיות, שהובילו במקרים מסוימים אף להפסקת טיפול תרופתי. הממצא המרכזי נוגע לקריטריון שלפיו נבנה האמון: המרואיינים לא ייחסו אמון לפי סמכות מקצועית בלבד, אלא לפי שילוב של היכרות אישית, שפה משותפת והיעדר אינטרס כלכלי, כפי שניסחה זאת מרואיינת 8: “מידע בריאותי לוקחים ממי שאחראי עלייך, לא ממי שמרוויח ממך”.</a:t>
+              <a:t>‏בכל הראיונות תוארה סביבת מידע רוויה, ובה זרם מתמיד של טענות על תרופות פלא ברשתות החברתיות, שהובילו במקרים מסוימים אף להפסקת טיפול תרופתי. הממצא המרכזי נוגע לקריטריון שלפיו נבנה האמון: המרואיינים לא ייחסו אמון לפי סמכות מקצועית בלבד, אלא לפי שילוב של היכרות אישית, שפה משותפת והיעדר אינטרס כלכלי, כפי שניסחה זאת מרואיינת 8: “מידע בריאותי לוקחים ממי שאחראי עלייך, לא ממי שמרוויח ממך”.‏</a:t>
             </a:r>
             <a:endParaRPr lang="en-US" sz="1550" dirty="0"/>
           </a:p>
@@ -3793,7 +4238,7 @@
                 <a:ea typeface="Arial" pitchFamily="34" charset="-122"/>
                 <a:cs typeface="Arial" pitchFamily="34" charset="-120"/>
               </a:rPr>
-              <a:t>הממצא המרכזי, ולפיו הפער אינו נובע מחוסר ידע, מחייב בחינה מחודשת של הנחת היסוד המובלעת בתכניות הסברה רבות. אם כל המרואיינים ידעו לנסח את עקרונות אורח החיים הבריא, הרי שתכנית שכל תוכנה הוא העברת מידע צפויה להניב תשואה נמוכה, והמשאב צריך להיות מופנה אל שלב היישום ולא אל שלב הידיעה. ממצא זה מתכתב עם הביקורת בספרות על הפער בין הידע המחקרי לבין הפרקטיקה בשטח.</a:t>
+              <a:t>‏הממצא המרכזי, ולפיו הפער אינו נובע מחוסר ידע, מחייב בחינה מחודשת של הנחת היסוד המובלעת בתכניות הסברה רבות. אם כל המרואיינים ידעו לנסח את עקרונות אורח החיים הבריא, הרי שתכנית שכל תוכנה הוא העברת מידע צפויה להניב תשואה נמוכה, והמשאב צריך להיות מופנה אל שלב היישום ולא אל שלב הידיעה. ממצא זה מתכתב עם הביקורת בספרות על הפער בין הידע המחקרי לבין הפרקטיקה בשטח.‏</a:t>
             </a:r>
             <a:endParaRPr lang="en-US" sz="1550" dirty="0"/>
           </a:p>
@@ -3816,7 +4261,7 @@
                 <a:ea typeface="Arial" pitchFamily="34" charset="-122"/>
                 <a:cs typeface="Arial" pitchFamily="34" charset="-120"/>
               </a:rPr>
-              <a:t>מן הראיונות עולים שלושה מנגנונים המסבירים את הפער. הראשון הוא מרחק הזמן בין ההתנהגות לבין תוצאתה, שכן גורמי הסיכון מצטברים לאורך שנים ואינם מלווים בתסמינים בשלביהם המוקדמים. השני הוא היעדר דחיפות סובייקטיבית, המסביר מדוע נקודת המפנה אצל תשעה מרואיינים הייתה דווקא אירוע בריאותי שהפך את הסיכון המופשט לחוויה מוחשית. השלישי הוא מיצוי המשאב הנפשי בסוף היום, תובנה המקבלת משנה תוקף נוכח הקשר הידוע בין מתח כרוני לבין תחלואה קרדיווסקולרית (Franklin et al., 2021).</a:t>
+              <a:t>‏מן הראיונות עולים שלושה מנגנונים המסבירים את הפער. הראשון הוא מרחק הזמן בין ההתנהגות לבין תוצאתה, שכן גורמי הסיכון מצטברים לאורך שנים ואינם מלווים בתסמינים בשלביהם המוקדמים. השני הוא היעדר דחיפות סובייקטיבית, המסביר מדוע נקודת המפנה אצל תשעה מרואיינים הייתה דווקא אירוע בריאותי שהפך את הסיכון המופשט לחוויה מוחשית. השלישי הוא מיצוי המשאב הנפשי בסוף היום, תובנה המקבלת משנה תוקף נוכח הקשר הידוע בין מתח כרוני לבין תחלואה קרדיווסקולרית ‏(Franklin et al., 2021)‏.‏</a:t>
             </a:r>
             <a:endParaRPr lang="en-US" sz="1550" dirty="0"/>
           </a:p>
@@ -3839,7 +4284,7 @@
                 <a:ea typeface="Arial" pitchFamily="34" charset="-122"/>
                 <a:cs typeface="Arial" pitchFamily="34" charset="-120"/>
               </a:rPr>
-              <a:t>ההשוואה הבין-דורית שערכו מרואיינים מבוגרים באופן עצמאי זה מזה, ולפיה דור הסבים כמעט לא הכיר את המחלות הללו, עולה בקנה אחד עם הספרות המצביעה על כך שדפוסי תזונה מערביים מגבירים את הסיכון לסוכרת מסוג 2 וליתר לחץ דם (Karatzi &amp; Manios, 2021).</a:t>
+              <a:t>‏ההשוואה הבין-דורית שערכו מרואיינים מבוגרים באופן עצמאי זה מזה, ולפיה דור הסבים כמעט לא הכיר את המחלות הללו, עולה בקנה אחד עם הספרות המצביעה על כך שדפוסי תזונה מערביים מגבירים את הסיכון לסוכרת מסוג 2 וליתר לחץ דם ‏(Karatzi &amp; Manios, 2021)‏.‏</a:t>
             </a:r>
             <a:endParaRPr lang="en-US" sz="1550" dirty="0"/>
           </a:p>
@@ -4020,7 +4465,7 @@
                 <a:ea typeface="Arial" pitchFamily="34" charset="-122"/>
                 <a:cs typeface="Arial" pitchFamily="34" charset="-120"/>
               </a:rPr>
-              <a:t>ממצאי המחקר מצביעים על כך שהחסמים המרכזיים לאימוץ אורח חיים בריא באוכלוסייה הנחקרת הם מבניים במידה רבה יותר מאשר אישיים. ההשוואה בין היישובים ממחישה זאת: תושבי ערד תיארו מדרכות רציפות, טיילת, חוגים במתנ"ס וקבוצות הליכה מאורגנות, ואילו תושבי כסייפה וחורה תיארו היעדר מדרכות ותאורה, היעדר מסגרות ספורט והיעדר מועדון לקשישים.</a:t>
+              <a:t>‏ממצאי המחקר מצביעים על כך שהחסמים המרכזיים לאימוץ אורח חיים בריא באוכלוסייה הנחקרת הם מבניים במידה רבה יותר מאשר אישיים. ההשוואה בין היישובים ממחישה זאת: תושבי ערד תיארו מדרכות רציפות, טיילת, חוגים במתנ"ס וקבוצות הליכה מאורגנות, ואילו תושבי כסייפה וחורה תיארו היעדר מדרכות ותאורה, היעדר מסגרות ספורט והיעדר מועדון לקשישים.‏</a:t>
             </a:r>
             <a:endParaRPr lang="en-US" sz="1550" dirty="0"/>
           </a:p>
@@ -4043,7 +4488,7 @@
                 <a:ea typeface="Arial" pitchFamily="34" charset="-122"/>
                 <a:cs typeface="Arial" pitchFamily="34" charset="-120"/>
               </a:rPr>
-              <a:t>חשוב להדגיש כי הפער בפעילות בין שתי הקבוצות אינו מוסבר בהבדלי מוטיבציה. מרואיין 11 הביע רצון מפורש להשתתף בקבוצת הליכה אילו הייתה קיימת, ומרואיינת 2 ניסחה בבירור את התנאי שיאפשר לה להתחיל. עדותה של מרואיינת 8 מוכיחה כי תשתית מינימלית מספיקה כדי שתיווצר פעילות מתמשכת. ממצא זה מחזק את הגישה הרואה בהנגשת פעילות גופנית חלק ממדיניות בריאות כוללת, ולא עניין המסור לבחירה אישית בלבד (קידום בריאות בישראל, 2023).</a:t>
+              <a:t>‏חשוב להדגיש כי הפער בפעילות בין שתי הקבוצות אינו מוסבר בהבדלי מוטיבציה. מרואיין 11 הביע רצון מפורש להשתתף בקבוצת הליכה אילו הייתה קיימת, ומרואיינת 2 ניסחה בבירור את התנאי שיאפשר לה להתחיל. עדותה של מרואיינת 8 מוכיחה כי תשתית מינימלית מספיקה כדי שתיווצר פעילות מתמשכת. ממצא זה מחזק את הגישה הרואה בהנגשת פעילות גופנית חלק ממדיניות בריאות כוללת, ולא עניין המסור לבחירה אישית בלבד ‏(קידום בריאות בישראל, 2023)‏.‏</a:t>
             </a:r>
             <a:endParaRPr lang="en-US" sz="1550" dirty="0"/>
           </a:p>
@@ -4066,7 +4511,7 @@
                 <a:ea typeface="Arial" pitchFamily="34" charset="-122"/>
                 <a:cs typeface="Arial" pitchFamily="34" charset="-120"/>
               </a:rPr>
-              <a:t>ממד נוסף שעלה בבירור הוא הממד המגדרי, שלא הופיע כלל אצל המרואיינים הגברים. חמש מתוך שש המרואיינות התייחסו להיעדר מסגרות מותאמות, וארבע מהן קשרו זאת לנורמות המגבילות יציאה לבדה בשעות הערב. משמעותו המעשית של ממצא זה היא שתכנית שאינה מתייחסת להפרדה מגדרית, לשעות פעילות מותאמות ולפתרון לשמירה על ילדים, אינה מגיעה למחצית מן האוכלוסייה.</a:t>
+              <a:t>‏ממד נוסף שעלה בבירור הוא הממד המגדרי, שלא הופיע כלל אצל המרואיינים הגברים. חמש מתוך שש המרואיינות התייחסו להיעדר מסגרות מותאמות, וארבע מהן קשרו זאת לנורמות המגבילות יציאה לבדה בשעות הערב. משמעותו המעשית של ממצא זה היא שתכנית שאינה מתייחסת להפרדה מגדרית, לשעות פעילות מותאמות ולפתרון לשמירה על ילדים, אינה מגיעה למחצית מן האוכלוסייה.‏</a:t>
             </a:r>
             <a:endParaRPr lang="en-US" sz="1550" dirty="0"/>
           </a:p>
@@ -4247,7 +4692,7 @@
                 <a:ea typeface="Arial" pitchFamily="34" charset="-122"/>
                 <a:cs typeface="Arial" pitchFamily="34" charset="-120"/>
               </a:rPr>
-              <a:t>מן הממצאים נגזרות שבע המלצות מעשיות. ראשית, מומלץ להנהיג מרשם לפעילות גופנית, שבו הצוות הרפואי רושם בכתב מסגרת קונקרטית הכוללת שם קבוצה, מקום, יום ושעה, שכן מן הראיונות עולה כי מטופלים מבצעים מרשמים ומתעלמים מהמלצות כלליות. שנית, מומלץ להקים קבוצות הליכה שכונתיות מונחות, מודל הדורש מדריך אחד ומסלול קיים בלבד, בתוספת מנגנון מעקב פשוט הכולל שיחת טלפון למי שנעדר.</a:t>
+              <a:t>‏מן הממצאים נגזרות שבע המלצות מעשיות. ראשית, מומלץ להנהיג מרשם לפעילות גופנית, שבו הצוות הרפואי רושם בכתב מסגרת קונקרטית הכוללת שם קבוצה, מקום, יום ושעה, שכן מן הראיונות עולה כי מטופלים מבצעים מרשמים ומתעלמים מהמלצות כלליות. שנית, מומלץ להקים קבוצות הליכה שכונתיות מונחות, מודל הדורש מדריך אחד ומסלול קיים בלבד, בתוספת מנגנון מעקב פשוט הכולל שיחת טלפון למי שנעדר.‏</a:t>
             </a:r>
             <a:endParaRPr lang="en-US" sz="1550" dirty="0"/>
           </a:p>
@@ -4270,7 +4715,7 @@
                 <a:ea typeface="Arial" pitchFamily="34" charset="-122"/>
                 <a:cs typeface="Arial" pitchFamily="34" charset="-120"/>
               </a:rPr>
-              <a:t>שלישית, ובאופן דחוף, מומלץ להשקיע בתשתית הליכה ביישובי הבדואים בנגב: מדרכה רציפה, תאורה וספסלים לאורך מסלול אחד לפחות בכל שכונה. זוהי ההשקעה בעלת התשואה הבריאותית הגבוהה ביותר ביחס לעלותה. רביעית, מומלץ להקים מסגרות ספורט נפרדות לנשים בתוך היישובים, בהפעלת מדריכות ובשעות אחר הצהריים, שכן היעדרן מהווה חסם מוחלט בפני מחצית האוכלוסייה.</a:t>
+              <a:t>‏שלישית, ובאופן דחוף, מומלץ להשקיע בתשתית הליכה ביישובי הבדואים בנגב: מדרכה רציפה, תאורה וספסלים לאורך מסלול אחד לפחות בכל שכונה. זוהי ההשקעה בעלת התשואה הבריאותית הגבוהה ביותר ביחס לעלותה. רביעית, מומלץ להקים מסגרות ספורט נפרדות לנשים בתוך היישובים, בהפעלת מדריכות ובשעות אחר הצהריים, שכן היעדרן מהווה חסם מוחלט בפני מחצית האוכלוסייה.‏</a:t>
             </a:r>
             <a:endParaRPr lang="en-US" sz="1550" dirty="0"/>
           </a:p>
@@ -4293,7 +4738,7 @@
                 <a:ea typeface="Arial" pitchFamily="34" charset="-122"/>
                 <a:cs typeface="Arial" pitchFamily="34" charset="-120"/>
               </a:rPr>
-              <a:t>חמישית, מומלץ להנהיג פנייה יזומה טלפונית בשפה הערבית אל בעלי גורמי סיכון שאינם מגיעים לבדיקות, מאחר שדיוור אוטומטי ועלונים כתובים נמצאו בלתי אפקטיביים, ובפרט בקרב מבוגרים שאינם קוראים. שישית, מומלץ לשלב את מוסדות הקהילה, ובהם המסגד, בתי הספר וטיפות החלב, כערוצי הסברה המגיעים אל מי שאינו פוקד את המרפאה. שביעית, מומלץ לשלב אנשים מן הקהילה שעברו שינוי מוצלח כמעבירי מסר, שכן עדותו של אדם מוכר מן היישוב משכנעת יותר מהרצאה של גורם חיצוני.</a:t>
+              <a:t>‏חמישית, מומלץ להנהיג פנייה יזומה טלפונית בשפה הערבית אל בעלי גורמי סיכון שאינם מגיעים לבדיקות, מאחר שדיוור אוטומטי ועלונים כתובים נמצאו בלתי אפקטיביים, ובפרט בקרב מבוגרים שאינם קוראים. שישית, מומלץ לשלב את מוסדות הקהילה, ובהם המסגד, בתי הספר וטיפות החלב, כערוצי הסברה המגיעים אל מי שאינו פוקד את המרפאה. שביעית, מומלץ לשלב אנשים מן הקהילה שעברו שינוי מוצלח כמעבירי מסר, שכן עדותו של אדם מוכר מן היישוב משכנעת יותר מהרצאה של גורם חיצוני.‏</a:t>
             </a:r>
             <a:endParaRPr lang="en-US" sz="1550" dirty="0"/>
           </a:p>
@@ -4374,65 +4819,241 @@
       </p:grpSpPr>
       <p:sp>
         <p:nvSpPr>
-          <p:cNvPr id="2" name="Shape 0"/>
+          <p:cNvPr id="2" name="Text 0"/>
+          <p:cNvSpPr txBox="1"/>
+          <p:nvPr/>
+        </p:nvSpPr>
+        <p:spPr>
+          <a:xfrm>
+            <a:off x="1417320" y="274320"/>
+            <a:ext cx="10271455" cy="603504"/>
+          </a:xfrm>
+          <a:prstGeom prst="rect">
+            <a:avLst/>
+          </a:prstGeom>
+          <a:noFill/>
+          <a:ln/>
+        </p:spPr>
+        <p:txBody>
+          <a:bodyPr wrap="square" lIns="0" tIns="0" rIns="0" bIns="0" rtlCol="0" anchor="ctr"/>
+          <a:lstStyle/>
+          <a:p>
+            <a:pPr rtl="1" algn="r" indent="0" marL="0">
+              <a:buNone/>
+            </a:pPr>
+            <a:r>
+              <a:rPr lang="en-US" sz="3100" b="1" dirty="0">
+                <a:solidFill>
+                  <a:srgbClr val="0C3B44"/>
+                </a:solidFill>
+                <a:latin typeface="Arial" pitchFamily="34" charset="0"/>
+                <a:ea typeface="Arial" pitchFamily="34" charset="-122"/>
+                <a:cs typeface="Arial" pitchFamily="34" charset="-120"/>
+              </a:rPr>
+              <a:t>מגבלות המחקר</a:t>
+            </a:r>
+            <a:endParaRPr lang="en-US" sz="3100" dirty="0"/>
+          </a:p>
+        </p:txBody>
+      </p:sp>
+      <p:sp>
+        <p:nvSpPr>
+          <p:cNvPr id="3" name="Shape 1"/>
           <p:cNvSpPr/>
           <p:nvPr/>
         </p:nvSpPr>
         <p:spPr>
           <a:xfrm>
-            <a:off x="10442448" y="5760720"/>
-            <a:ext cx="1243584" cy="749808"/>
+            <a:off x="502920" y="1133856"/>
+            <a:ext cx="11185855" cy="5065776"/>
           </a:xfrm>
           <a:prstGeom prst="roundRect">
             <a:avLst>
-              <a:gd name="adj" fmla="val 10976"/>
+              <a:gd name="adj" fmla="val 1805"/>
             </a:avLst>
           </a:prstGeom>
           <a:solidFill>
-            <a:srgbClr val="FFFFFF"/>
+            <a:srgbClr val="F2F8F9"/>
           </a:solidFill>
           <a:ln w="12700">
             <a:solidFill>
-              <a:srgbClr val="FFFFFF"/>
+              <a:srgbClr val="F2F8F9"/>
             </a:solidFill>
             <a:prstDash val="solid"/>
           </a:ln>
         </p:spPr>
       </p:sp>
-      <p:pic>
-        <p:nvPicPr>
-          <p:cNvPr id="3" name="Image 0" descr="logo.jpg">    </p:cNvPr>
-          <p:cNvPicPr>
-            <a:picLocks noChangeAspect="1"/>
-          </p:cNvPicPr>
+      <p:sp>
+        <p:nvSpPr>
+          <p:cNvPr id="4" name="Text 2"/>
+          <p:cNvSpPr txBox="1"/>
           <p:nvPr/>
-        </p:nvPicPr>
-        <p:blipFill>
-          <a:blip r:embed="rId1"/>
-          <a:stretch>
-            <a:fillRect/>
-          </a:stretch>
-        </p:blipFill>
-        <p:spPr>
-          <a:xfrm>
-            <a:off x="10680192" y="5843016"/>
-            <a:ext cx="585216" cy="585216"/>
+        </p:nvSpPr>
+        <p:spPr>
+          <a:xfrm>
+            <a:off x="886968" y="1408176"/>
+            <a:ext cx="10417759" cy="4791456"/>
           </a:xfrm>
           <a:prstGeom prst="rect">
             <a:avLst/>
           </a:prstGeom>
-        </p:spPr>
-      </p:pic>
-      <p:sp>
-        <p:nvSpPr>
-          <p:cNvPr id="4" name="Text 1"/>
+          <a:noFill/>
+          <a:ln/>
+        </p:spPr>
+        <p:txBody>
+          <a:bodyPr wrap="square" lIns="0" tIns="0" rIns="0" bIns="0" rtlCol="0" anchor="t"/>
+          <a:lstStyle/>
+          <a:p>
+            <a:pPr algn="r" indent="0" marL="0">
+              <a:lnSpc>
+                <a:spcPts val="2500"/>
+              </a:lnSpc>
+              <a:buNone/>
+            </a:pPr>
+            <a:r>
+              <a:rPr lang="en-US" sz="1550" dirty="0">
+                <a:solidFill>
+                  <a:srgbClr val="0C3B44"/>
+                </a:solidFill>
+                <a:latin typeface="Arial" pitchFamily="34" charset="0"/>
+                <a:ea typeface="Arial" pitchFamily="34" charset="-122"/>
+                <a:cs typeface="Arial" pitchFamily="34" charset="-120"/>
+              </a:rPr>
+              <a:t>‏למחקר זה מספר מגבלות שיש להביאן בחשבון בפרשנות הממצאים. ראשית, מדובר במחקר איכותני בהיקף מצומצם של שנים עשר משתתפים, ולפיכך אין בו כדי לקבוע שיעורים או להכליל סטטיסטית לאוכלוסייה. מטרתו היא הבנת משמעות ולא מדידת שכיחות, ויש לקרוא את ממצאיו באופן זה.‏</a:t>
+            </a:r>
+            <a:endParaRPr lang="en-US" sz="1550" dirty="0"/>
+          </a:p>
+          <a:p>
+            <a:pPr algn="r" indent="0" marL="0">
+              <a:lnSpc>
+                <a:spcPts val="2500"/>
+              </a:lnSpc>
+              <a:spcBef>
+                <a:spcPts val="700"/>
+              </a:spcBef>
+              <a:buNone/>
+            </a:pPr>
+            <a:r>
+              <a:rPr lang="en-US" sz="1550" dirty="0">
+                <a:solidFill>
+                  <a:srgbClr val="0C3B44"/>
+                </a:solidFill>
+                <a:latin typeface="Arial" pitchFamily="34" charset="0"/>
+                <a:ea typeface="Arial" pitchFamily="34" charset="-122"/>
+                <a:cs typeface="Arial" pitchFamily="34" charset="-120"/>
+              </a:rPr>
+              <a:t>‏שנית, הדגימה הייתה מכוונת ונעשתה בשיטת כדור השלג דרך מעגלי היכרות של החוקרים, שיטה העלולה ליצור הטיה לטובת אנשים הנכונים לשוחח על בריאותם. שלישית, הנתונים מבוססים על דיווח עצמי ולפיכך חשופים להטיית רצייה חברתית, מגבלה המתחדדת בשל ההיכרות המוקדמת בין החוקרים לבין חלק מן המרואיינים, אף שהיכרות זו תרמה גם לפתיחות ולאמון.‏</a:t>
+            </a:r>
+            <a:endParaRPr lang="en-US" sz="1550" dirty="0"/>
+          </a:p>
+          <a:p>
+            <a:pPr algn="r" indent="0" marL="0">
+              <a:lnSpc>
+                <a:spcPts val="2500"/>
+              </a:lnSpc>
+              <a:spcBef>
+                <a:spcPts val="700"/>
+              </a:spcBef>
+              <a:buNone/>
+            </a:pPr>
+            <a:r>
+              <a:rPr lang="en-US" sz="1550" dirty="0">
+                <a:solidFill>
+                  <a:srgbClr val="0C3B44"/>
+                </a:solidFill>
+                <a:latin typeface="Arial" pitchFamily="34" charset="0"/>
+                <a:ea typeface="Arial" pitchFamily="34" charset="-122"/>
+                <a:cs typeface="Arial" pitchFamily="34" charset="-120"/>
+              </a:rPr>
+              <a:t>‏רביעית, ארבעה ראיונות נערכו בערבית ותורגמו לעברית, וכל תרגום כרוך באובדן ניואנסים ובפרט בביטויים תרבותיים. חמישית, המחקר נערך בשלושה יישובים במחוז הדרום, ולפיכך ממצאיו משקפים הקשר מקומי ספציפי. ייחודו של הקשר זה הוא בעת ובעונה אחת יתרון של המחקר, המאפשר העמקה בהקשר שנחקר מעט, ומגבלה המצמצמת את יכולת ההשלכה על אוכלוסיות אחרות בישראל.‏</a:t>
+            </a:r>
+            <a:endParaRPr lang="en-US" sz="1550" dirty="0"/>
+          </a:p>
+        </p:txBody>
+      </p:sp>
+      <p:sp>
+        <p:nvSpPr>
+          <p:cNvPr id="25" name="Slide Number Placeholder 0"/>
+          <p:cNvSpPr>
+            <a:spLocks noGrp="1"/>
+          </p:cNvSpPr>
+          <p:nvPr>
+            <p:ph type="sldNum" sz="quarter" idx="4294967295"/>
+          </p:nvPr>
+        </p:nvSpPr>
+        <p:spPr>
+          <a:xfrm>
+            <a:off x="502920" y="6327648"/>
+            <a:ext cx="457200" cy="274320"/>
+          </a:xfrm>
+          <a:prstGeom prst="rect">
+            <a:avLst/>
+          </a:prstGeom>
+          <a:extLst>
+            <a:ext uri="{C572A759-6A51-4108-AA02-DFA0A04FC94B}">
+              <ma14:wrappingTextBoxFlag xmlns:ma14="http://schemas.microsoft.com/office/mac/drawingml/2011/main" val="0"/>
+            </a:ext>
+          </a:extLst>
+        </p:spPr>
+        <p:txBody>
+          <a:bodyPr/>
+          <a:lstStyle>
+            <a:lvl1pPr>
+              <a:defRPr sz="1000">
+                <a:solidFill>
+                  <a:srgbClr val="56686D"/>
+                </a:solidFill>
+                <a:latin typeface="Arial"/>
+                <a:ea typeface="Arial"/>
+                <a:cs typeface="Arial"/>
+              </a:defRPr>
+            </a:lvl1pPr>
+          </a:lstStyle>
+          <a:p>
+            <a:pPr algn="l"/>
+            <a:fld id="{F7021451-1387-4CA6-816F-3879F97B5CBC}" type="slidenum">
+              <a:rPr b="0" lang="en-US"/>
+              <a:t>16</a:t>
+            </a:fld>
+            <a:endParaRPr lang="en-US"/>
+          </a:p>
+        </p:txBody>
+      </p:sp>
+    </p:spTree>
+  </p:cSld>
+  <p:clrMapOvr>
+    <a:masterClrMapping/>
+  </p:clrMapOvr>
+</p:sld>
+</file>
+
+<file path=ppt/slides/slide17.xml><?xml version="1.0" encoding="utf-8"?>
+<p:sld xmlns:a="http://schemas.openxmlformats.org/drawingml/2006/main" xmlns:r="http://schemas.openxmlformats.org/officeDocument/2006/relationships" xmlns:p="http://schemas.openxmlformats.org/presentationml/2006/main">
+  <p:cSld name="Slide 17">
+    <p:spTree>
+      <p:nvGrpSpPr>
+        <p:cNvPr id="1" name=""/>
+        <p:cNvGrpSpPr/>
+        <p:nvPr/>
+      </p:nvGrpSpPr>
+      <p:grpSpPr>
+        <a:xfrm>
+          <a:off x="0" y="0"/>
+          <a:ext cx="0" cy="0"/>
+          <a:chOff x="0" y="0"/>
+          <a:chExt cx="0" cy="0"/>
+        </a:xfrm>
+      </p:grpSpPr>
+      <p:sp>
+        <p:nvSpPr>
+          <p:cNvPr id="2" name="Text 0"/>
           <p:cNvSpPr txBox="1"/>
           <p:nvPr/>
         </p:nvSpPr>
         <p:spPr>
           <a:xfrm>
-            <a:off x="502920" y="384048"/>
-            <a:ext cx="11185855" cy="640080"/>
+            <a:off x="1417320" y="274320"/>
+            <a:ext cx="10271455" cy="603504"/>
           </a:xfrm>
           <a:prstGeom prst="rect">
             <a:avLst/>
@@ -4450,13 +5071,13 @@
             <a:r>
               <a:rPr lang="en-US" sz="3100" b="1" dirty="0">
                 <a:solidFill>
-                  <a:srgbClr val="FFFFFF"/>
-                </a:solidFill>
-                <a:latin typeface="Arial" pitchFamily="34" charset="0"/>
-                <a:ea typeface="Arial" pitchFamily="34" charset="-122"/>
-                <a:cs typeface="Arial" pitchFamily="34" charset="-120"/>
-              </a:rPr>
-              <a:t>מגבלות המחקר וסיכום</a:t>
+                  <a:srgbClr val="0C3B44"/>
+                </a:solidFill>
+                <a:latin typeface="Arial" pitchFamily="34" charset="0"/>
+                <a:ea typeface="Arial" pitchFamily="34" charset="-122"/>
+                <a:cs typeface="Arial" pitchFamily="34" charset="-120"/>
+              </a:rPr>
+              <a:t>סיכום ומסקנות</a:t>
             </a:r>
             <a:endParaRPr lang="en-US" sz="3100" dirty="0"/>
           </a:p>
@@ -4464,14 +5085,41 @@
       </p:sp>
       <p:sp>
         <p:nvSpPr>
-          <p:cNvPr id="5" name="Text 2"/>
+          <p:cNvPr id="3" name="Shape 1"/>
+          <p:cNvSpPr/>
+          <p:nvPr/>
+        </p:nvSpPr>
+        <p:spPr>
+          <a:xfrm>
+            <a:off x="502920" y="1133856"/>
+            <a:ext cx="11185855" cy="5065776"/>
+          </a:xfrm>
+          <a:prstGeom prst="roundRect">
+            <a:avLst>
+              <a:gd name="adj" fmla="val 1805"/>
+            </a:avLst>
+          </a:prstGeom>
+          <a:solidFill>
+            <a:srgbClr val="F2F8F9"/>
+          </a:solidFill>
+          <a:ln w="12700">
+            <a:solidFill>
+              <a:srgbClr val="F2F8F9"/>
+            </a:solidFill>
+            <a:prstDash val="solid"/>
+          </a:ln>
+        </p:spPr>
+      </p:sp>
+      <p:sp>
+        <p:nvSpPr>
+          <p:cNvPr id="4" name="Text 2"/>
           <p:cNvSpPr txBox="1"/>
           <p:nvPr/>
         </p:nvSpPr>
         <p:spPr>
           <a:xfrm>
-            <a:off x="502920" y="1225296"/>
-            <a:ext cx="11185855" cy="4206240"/>
+            <a:off x="886968" y="1408176"/>
+            <a:ext cx="10417759" cy="4791456"/>
           </a:xfrm>
           <a:prstGeom prst="rect">
             <a:avLst/>
@@ -4485,81 +5133,154 @@
           <a:p>
             <a:pPr algn="r" indent="0" marL="0">
               <a:lnSpc>
-                <a:spcPts val="2600"/>
+                <a:spcPts val="2500"/>
               </a:lnSpc>
               <a:buNone/>
             </a:pPr>
             <a:r>
-              <a:rPr lang="en-US" sz="1500" dirty="0">
-                <a:solidFill>
-                  <a:srgbClr val="BFE3DD"/>
-                </a:solidFill>
-                <a:latin typeface="Arial" pitchFamily="34" charset="0"/>
-                <a:ea typeface="Arial" pitchFamily="34" charset="-122"/>
-                <a:cs typeface="Arial" pitchFamily="34" charset="-120"/>
-              </a:rPr>
-              <a:t>למחקר זה מספר מגבלות שיש להביאן בחשבון בפרשנות הממצאים. ראשית, מדובר במחקר איכותני בהיקף מצומצם של שנים עשר משתתפים, ולפיכך אין בו כדי לקבוע שיעורים או להכליל סטטיסטית, ומטרתו היא הבנת משמעות ולא מדידת שכיחות. שנית, הדגימה הייתה מכוונת ונעשתה בשיטת כדור השלג, העלולה ליצור הטיה לטובת אנשים הנכונים לשוחח על בריאותם.</a:t>
-            </a:r>
-            <a:endParaRPr lang="en-US" sz="1500" dirty="0"/>
+              <a:rPr lang="en-US" sz="1550" dirty="0">
+                <a:solidFill>
+                  <a:srgbClr val="0C3B44"/>
+                </a:solidFill>
+                <a:latin typeface="Arial" pitchFamily="34" charset="0"/>
+                <a:ea typeface="Arial" pitchFamily="34" charset="-122"/>
+                <a:cs typeface="Arial" pitchFamily="34" charset="-120"/>
+              </a:rPr>
+              <a:t>‏העבודה יצאה מנקודת מוצא של פער בין ידע ליישום, ומסתיימת בהבנה כי הפער אינו פער של מודעות אלא של תנאים. ארבע מסקנות מרכזיות עולות ממנה. הראשונה היא שהחסם המרכזי אינו חסם של ידע, שכן כל המרואיינים ידעו לנסח את עקרונות אורח החיים הבריא. השנייה היא שאורח חיים בריא הוא תוצר של תשתית ושל מסגרת, ולא של כוח רצון אישי.‏</a:t>
+            </a:r>
+            <a:endParaRPr lang="en-US" sz="1550" dirty="0"/>
           </a:p>
           <a:p>
             <a:pPr algn="r" indent="0" marL="0">
               <a:lnSpc>
-                <a:spcPts val="2600"/>
+                <a:spcPts val="2500"/>
               </a:lnSpc>
               <a:spcBef>
-                <a:spcPts val="800"/>
+                <a:spcPts val="700"/>
               </a:spcBef>
               <a:buNone/>
             </a:pPr>
             <a:r>
-              <a:rPr lang="en-US" sz="1500" dirty="0">
-                <a:solidFill>
-                  <a:srgbClr val="BFE3DD"/>
-                </a:solidFill>
-                <a:latin typeface="Arial" pitchFamily="34" charset="0"/>
-                <a:ea typeface="Arial" pitchFamily="34" charset="-122"/>
-                <a:cs typeface="Arial" pitchFamily="34" charset="-120"/>
-              </a:rPr>
-              <a:t>שלישית, הנתונים מבוססים על דיווח עצמי ולפיכך חשופים להטיית רצייה חברתית. רביעית, ארבעה ראיונות תורגמו מערבית, וכל תרגום כרוך באובדן ניואנסים. חמישית, המחקר נערך בשלושה יישובים בדרום, ולפיכך ממצאיו משקפים הקשר מקומי ספציפי, שהוא בעת ובעונה אחת יתרון של המחקר ומגבלה שלו.</a:t>
-            </a:r>
-            <a:endParaRPr lang="en-US" sz="1500" dirty="0"/>
+              <a:rPr lang="en-US" sz="1550" dirty="0">
+                <a:solidFill>
+                  <a:srgbClr val="0C3B44"/>
+                </a:solidFill>
+                <a:latin typeface="Arial" pitchFamily="34" charset="0"/>
+                <a:ea typeface="Arial" pitchFamily="34" charset="-122"/>
+                <a:cs typeface="Arial" pitchFamily="34" charset="-120"/>
+              </a:rPr>
+              <a:t>‏המסקנה השלישית היא שהשינוי בפועל מתרחש ברוב המקרים רק לאחר אירוע בריאותי, כלומר מאוחר מדי, אף שהוא מוכיח כי בני חמישים, שישים ושבעים מסוגלים לשינוי עמוק ומתמשך. המסקנה הרביעית היא שמערכת הבריאות נתפסת כמצוינת בטיפול וכחלשה במניעה יזומה, ושהמנגנונים שנמצאו אפקטיביים בפועל פשוטים וזולים יחסית לעלות הטיפול במחלה שכבר התפתחה.‏</a:t>
+            </a:r>
+            <a:endParaRPr lang="en-US" sz="1550" dirty="0"/>
           </a:p>
           <a:p>
             <a:pPr algn="r" indent="0" marL="0">
               <a:lnSpc>
-                <a:spcPts val="2600"/>
+                <a:spcPts val="2500"/>
               </a:lnSpc>
               <a:spcBef>
-                <a:spcPts val="1200"/>
+                <a:spcPts val="700"/>
               </a:spcBef>
               <a:buNone/>
             </a:pPr>
             <a:r>
-              <a:rPr lang="en-US" sz="1600" b="1" dirty="0">
-                <a:solidFill>
-                  <a:srgbClr val="FFFFFF"/>
-                </a:solidFill>
-                <a:latin typeface="Arial" pitchFamily="34" charset="0"/>
-                <a:ea typeface="Arial" pitchFamily="34" charset="-122"/>
-                <a:cs typeface="Arial" pitchFamily="34" charset="-120"/>
-              </a:rPr>
-              <a:t>לסיכום, העבודה יצאה מנקודת מוצא של פער בין ידע ליישום, ומסתיימת בהבנה כי הפער אינו פער של מודעות אלא של תנאים. המרואיינים ידעו כמעט תמיד מה נכון לעשות; מה שחסר להם היה מקום ללכת בו, קבוצה שתחכה להם, טלפון שיזכיר, ומישהו שידבר איתם בשפה שהם מבינים. אלה אינם משאבים יקרים במונחי מערכת בריאות, ובוודאי לא ביחס לעלות הטיפול בסוכרת, בשבץ ובאי-ספיקת לב.</a:t>
-            </a:r>
-            <a:endParaRPr lang="en-US" sz="1500" dirty="0"/>
-          </a:p>
-        </p:txBody>
-      </p:sp>
-      <p:sp>
-        <p:nvSpPr>
-          <p:cNvPr id="6" name="Text 3"/>
+              <a:rPr lang="en-US" sz="1550" dirty="0">
+                <a:solidFill>
+                  <a:srgbClr val="0C3B44"/>
+                </a:solidFill>
+                <a:latin typeface="Arial" pitchFamily="34" charset="0"/>
+                <a:ea typeface="Arial" pitchFamily="34" charset="-122"/>
+                <a:cs typeface="Arial" pitchFamily="34" charset="-120"/>
+              </a:rPr>
+              <a:t>‏המרואיינים ידעו כמעט תמיד מה נכון לעשות. מה שחסר להם היה מקום ללכת בו, קבוצה שתחכה להם, טלפון שיזכיר, ומישהו שידבר איתם בשפה שהם מבינים. אלה אינם משאבים יקרים במונחי מערכת בריאות, ובוודאי לא ביחס לעלות הטיפול בסוכרת, בשבץ ובאי-ספיקת לב.‏</a:t>
+            </a:r>
+            <a:endParaRPr lang="en-US" sz="1550" dirty="0"/>
+          </a:p>
+        </p:txBody>
+      </p:sp>
+      <p:sp>
+        <p:nvSpPr>
+          <p:cNvPr id="25" name="Slide Number Placeholder 0"/>
+          <p:cNvSpPr>
+            <a:spLocks noGrp="1"/>
+          </p:cNvSpPr>
+          <p:nvPr>
+            <p:ph type="sldNum" sz="quarter" idx="4294967295"/>
+          </p:nvPr>
+        </p:nvSpPr>
+        <p:spPr>
+          <a:xfrm>
+            <a:off x="502920" y="6327648"/>
+            <a:ext cx="457200" cy="274320"/>
+          </a:xfrm>
+          <a:prstGeom prst="rect">
+            <a:avLst/>
+          </a:prstGeom>
+          <a:extLst>
+            <a:ext uri="{C572A759-6A51-4108-AA02-DFA0A04FC94B}">
+              <ma14:wrappingTextBoxFlag xmlns:ma14="http://schemas.microsoft.com/office/mac/drawingml/2011/main" val="0"/>
+            </a:ext>
+          </a:extLst>
+        </p:spPr>
+        <p:txBody>
+          <a:bodyPr/>
+          <a:lstStyle>
+            <a:lvl1pPr>
+              <a:defRPr sz="1000">
+                <a:solidFill>
+                  <a:srgbClr val="56686D"/>
+                </a:solidFill>
+                <a:latin typeface="Arial"/>
+                <a:ea typeface="Arial"/>
+                <a:cs typeface="Arial"/>
+              </a:defRPr>
+            </a:lvl1pPr>
+          </a:lstStyle>
+          <a:p>
+            <a:pPr algn="l"/>
+            <a:fld id="{F7021451-1387-4CA6-816F-3879F97B5CBC}" type="slidenum">
+              <a:rPr b="0" lang="en-US"/>
+              <a:t>17</a:t>
+            </a:fld>
+            <a:endParaRPr lang="en-US"/>
+          </a:p>
+        </p:txBody>
+      </p:sp>
+    </p:spTree>
+  </p:cSld>
+  <p:clrMapOvr>
+    <a:masterClrMapping/>
+  </p:clrMapOvr>
+</p:sld>
+</file>
+
+<file path=ppt/slides/slide18.xml><?xml version="1.0" encoding="utf-8"?>
+<p:sld xmlns:a="http://schemas.openxmlformats.org/drawingml/2006/main" xmlns:r="http://schemas.openxmlformats.org/officeDocument/2006/relationships" xmlns:p="http://schemas.openxmlformats.org/presentationml/2006/main">
+  <p:cSld name="Slide 18">
+    <p:spTree>
+      <p:nvGrpSpPr>
+        <p:cNvPr id="1" name=""/>
+        <p:cNvGrpSpPr/>
+        <p:nvPr/>
+      </p:nvGrpSpPr>
+      <p:grpSpPr>
+        <a:xfrm>
+          <a:off x="0" y="0"/>
+          <a:ext cx="0" cy="0"/>
+          <a:chOff x="0" y="0"/>
+          <a:chExt cx="0" cy="0"/>
+        </a:xfrm>
+      </p:grpSpPr>
+      <p:sp>
+        <p:nvSpPr>
+          <p:cNvPr id="2" name="Text 0"/>
           <p:cNvSpPr txBox="1"/>
           <p:nvPr/>
         </p:nvSpPr>
         <p:spPr>
           <a:xfrm>
-            <a:off x="502920" y="5577840"/>
-            <a:ext cx="6858000" cy="457200"/>
+            <a:off x="1417320" y="274320"/>
+            <a:ext cx="10271455" cy="603504"/>
           </a:xfrm>
           <a:prstGeom prst="rect">
             <a:avLst/>
@@ -4575,30 +5296,30 @@
               <a:buNone/>
             </a:pPr>
             <a:r>
-              <a:rPr lang="en-US" sz="2400" b="1" dirty="0">
-                <a:solidFill>
-                  <a:srgbClr val="1D9E9A"/>
-                </a:solidFill>
-                <a:latin typeface="Arial" pitchFamily="34" charset="0"/>
-                <a:ea typeface="Arial" pitchFamily="34" charset="-122"/>
-                <a:cs typeface="Arial" pitchFamily="34" charset="-120"/>
-              </a:rPr>
-              <a:t>תודה על ההקשבה</a:t>
-            </a:r>
-            <a:endParaRPr lang="en-US" sz="2400" dirty="0"/>
-          </a:p>
-        </p:txBody>
-      </p:sp>
-      <p:sp>
-        <p:nvSpPr>
-          <p:cNvPr id="7" name="Text 4"/>
+              <a:rPr lang="en-US" sz="3100" b="1" dirty="0">
+                <a:solidFill>
+                  <a:srgbClr val="0C3B44"/>
+                </a:solidFill>
+                <a:latin typeface="Arial" pitchFamily="34" charset="0"/>
+                <a:ea typeface="Arial" pitchFamily="34" charset="-122"/>
+                <a:cs typeface="Arial" pitchFamily="34" charset="-120"/>
+              </a:rPr>
+              <a:t>רשימת מקורות</a:t>
+            </a:r>
+            <a:endParaRPr lang="en-US" sz="3100" dirty="0"/>
+          </a:p>
+        </p:txBody>
+      </p:sp>
+      <p:sp>
+        <p:nvSpPr>
+          <p:cNvPr id="3" name="Text 1"/>
           <p:cNvSpPr txBox="1"/>
           <p:nvPr/>
         </p:nvSpPr>
         <p:spPr>
           <a:xfrm>
-            <a:off x="502920" y="6053328"/>
-            <a:ext cx="8229600" cy="329184"/>
+            <a:off x="1417320" y="877824"/>
+            <a:ext cx="10271455" cy="310896"/>
           </a:xfrm>
           <a:prstGeom prst="rect">
             <a:avLst/>
@@ -4614,17 +5335,630 @@
               <a:buNone/>
             </a:pPr>
             <a:r>
-              <a:rPr lang="en-US" sz="1250" dirty="0">
-                <a:solidFill>
-                  <a:srgbClr val="BFE3DD"/>
-                </a:solidFill>
-                <a:latin typeface="Arial" pitchFamily="34" charset="0"/>
-                <a:ea typeface="Arial" pitchFamily="34" charset="-122"/>
-                <a:cs typeface="Arial" pitchFamily="34" charset="-120"/>
-              </a:rPr>
-              <a:t>המרכז האקדמי פרס  |  החוג למנהל מערכות בריאות  |  תשפ"ו 2026</a:t>
-            </a:r>
-            <a:endParaRPr lang="en-US" sz="1250" dirty="0"/>
+              <a:rPr lang="en-US" sz="1500" b="1" dirty="0">
+                <a:solidFill>
+                  <a:srgbClr val="1D9E9A"/>
+                </a:solidFill>
+                <a:latin typeface="Arial" pitchFamily="34" charset="0"/>
+                <a:ea typeface="Arial" pitchFamily="34" charset="-122"/>
+                <a:cs typeface="Arial" pitchFamily="34" charset="-120"/>
+              </a:rPr>
+              <a:t>מקורות בעברית ובאנגלית, לפי סדר הא-ב</a:t>
+            </a:r>
+            <a:endParaRPr lang="en-US" sz="1500" dirty="0"/>
+          </a:p>
+        </p:txBody>
+      </p:sp>
+      <p:sp>
+        <p:nvSpPr>
+          <p:cNvPr id="4" name="Shape 2"/>
+          <p:cNvSpPr/>
+          <p:nvPr/>
+        </p:nvSpPr>
+        <p:spPr>
+          <a:xfrm>
+            <a:off x="502920" y="1316736"/>
+            <a:ext cx="11185855" cy="4882896"/>
+          </a:xfrm>
+          <a:prstGeom prst="roundRect">
+            <a:avLst>
+              <a:gd name="adj" fmla="val 1873"/>
+            </a:avLst>
+          </a:prstGeom>
+          <a:solidFill>
+            <a:srgbClr val="F2F8F9"/>
+          </a:solidFill>
+          <a:ln w="12700">
+            <a:solidFill>
+              <a:srgbClr val="F2F8F9"/>
+            </a:solidFill>
+            <a:prstDash val="solid"/>
+          </a:ln>
+        </p:spPr>
+      </p:sp>
+      <p:sp>
+        <p:nvSpPr>
+          <p:cNvPr id="5" name="Text 3"/>
+          <p:cNvSpPr txBox="1"/>
+          <p:nvPr/>
+        </p:nvSpPr>
+        <p:spPr>
+          <a:xfrm>
+            <a:off x="886968" y="1591056"/>
+            <a:ext cx="10417759" cy="4334256"/>
+          </a:xfrm>
+          <a:prstGeom prst="rect">
+            <a:avLst/>
+          </a:prstGeom>
+          <a:noFill/>
+          <a:ln/>
+        </p:spPr>
+        <p:txBody>
+          <a:bodyPr wrap="square" lIns="0" tIns="0" rIns="0" bIns="0" rtlCol="0" anchor="t"/>
+          <a:lstStyle/>
+          <a:p>
+            <a:pPr algn="r" indent="0" marL="0">
+              <a:lnSpc>
+                <a:spcPts val="1700"/>
+              </a:lnSpc>
+              <a:buNone/>
+            </a:pPr>
+            <a:r>
+              <a:rPr lang="en-US" sz="1200" dirty="0">
+                <a:solidFill>
+                  <a:srgbClr val="0C3B44"/>
+                </a:solidFill>
+                <a:latin typeface="Arial" pitchFamily="34" charset="0"/>
+                <a:ea typeface="Arial" pitchFamily="34" charset="-122"/>
+                <a:cs typeface="Arial" pitchFamily="34" charset="-120"/>
+              </a:rPr>
+              <a:t>‏המרכז הלאומי לבקרת מחלות ‏(2023)‏. סקר בריאות לאומי בישראל INHIS-4, 2018-2020, ממצאים נבחרים. משרד הבריאות.‏</a:t>
+            </a:r>
+            <a:endParaRPr lang="en-US" sz="1200" dirty="0"/>
+          </a:p>
+          <a:p>
+            <a:pPr algn="r" indent="0" marL="0">
+              <a:lnSpc>
+                <a:spcPts val="1700"/>
+              </a:lnSpc>
+              <a:spcBef>
+                <a:spcPts val="600"/>
+              </a:spcBef>
+              <a:buNone/>
+            </a:pPr>
+            <a:r>
+              <a:rPr lang="en-US" sz="1200" dirty="0">
+                <a:solidFill>
+                  <a:srgbClr val="0C3B44"/>
+                </a:solidFill>
+                <a:latin typeface="Arial" pitchFamily="34" charset="0"/>
+                <a:ea typeface="Arial" pitchFamily="34" charset="-122"/>
+                <a:cs typeface="Arial" pitchFamily="34" charset="-120"/>
+              </a:rPr>
+              <a:t>‏המרכז הלאומי לבקרת מחלות ‏(2025)‏. מגמות במצב הסוכרת בישראל בשנים 2012-2023. משרד הבריאות.‏</a:t>
+            </a:r>
+            <a:endParaRPr lang="en-US" sz="1200" dirty="0"/>
+          </a:p>
+          <a:p>
+            <a:pPr algn="r" indent="0" marL="0">
+              <a:lnSpc>
+                <a:spcPts val="1700"/>
+              </a:lnSpc>
+              <a:spcBef>
+                <a:spcPts val="600"/>
+              </a:spcBef>
+              <a:buNone/>
+            </a:pPr>
+            <a:r>
+              <a:rPr lang="en-US" sz="1200" dirty="0">
+                <a:solidFill>
+                  <a:srgbClr val="0C3B44"/>
+                </a:solidFill>
+                <a:latin typeface="Arial" pitchFamily="34" charset="0"/>
+                <a:ea typeface="Arial" pitchFamily="34" charset="-122"/>
+                <a:cs typeface="Arial" pitchFamily="34" charset="-120"/>
+              </a:rPr>
+              <a:t>‏צבר בן-יהושע, נ' ‏(2016)‏. מסורות וזרמים במחקר האיכותני: תפיסות, אסטרטגיות וכלים מתקדמים. מכון מופ"ת.‏</a:t>
+            </a:r>
+            <a:endParaRPr lang="en-US" sz="1200" dirty="0"/>
+          </a:p>
+          <a:p>
+            <a:pPr algn="r" indent="0" marL="0">
+              <a:lnSpc>
+                <a:spcPts val="1700"/>
+              </a:lnSpc>
+              <a:spcBef>
+                <a:spcPts val="600"/>
+              </a:spcBef>
+              <a:buNone/>
+            </a:pPr>
+            <a:r>
+              <a:rPr lang="en-US" sz="1200" dirty="0">
+                <a:solidFill>
+                  <a:srgbClr val="0C3B44"/>
+                </a:solidFill>
+                <a:latin typeface="Arial" pitchFamily="34" charset="0"/>
+                <a:ea typeface="Arial" pitchFamily="34" charset="-122"/>
+                <a:cs typeface="Arial" pitchFamily="34" charset="-120"/>
+              </a:rPr>
+              <a:t>‏קידום בריאות בישראל, כתב עת ישראלי לחינוך ולקידום הבריאות ‏(2023)‏. גיליון 11. המרכז לקידום בריאות, אוניברסיטת אריאל בשומרון.‏</a:t>
+            </a:r>
+            <a:endParaRPr lang="en-US" sz="1200" dirty="0"/>
+          </a:p>
+          <a:p>
+            <a:pPr algn="r" indent="0" marL="0">
+              <a:lnSpc>
+                <a:spcPts val="1700"/>
+              </a:lnSpc>
+              <a:spcBef>
+                <a:spcPts val="600"/>
+              </a:spcBef>
+              <a:buNone/>
+            </a:pPr>
+            <a:r>
+              <a:rPr lang="en-US" sz="1200" dirty="0">
+                <a:solidFill>
+                  <a:srgbClr val="0C3B44"/>
+                </a:solidFill>
+                <a:latin typeface="Arial" pitchFamily="34" charset="0"/>
+                <a:ea typeface="Arial" pitchFamily="34" charset="-122"/>
+                <a:cs typeface="Arial" pitchFamily="34" charset="-120"/>
+              </a:rPr>
+              <a:t>‏שקדי, א' ‏(2003)‏. מילים המנסות לגעת: מחקר איכותני, תיאוריה ויישום. רמות.‏</a:t>
+            </a:r>
+            <a:endParaRPr lang="en-US" sz="1200" dirty="0"/>
+          </a:p>
+          <a:p>
+            <a:pPr algn="r" indent="0" marL="0">
+              <a:lnSpc>
+                <a:spcPts val="1700"/>
+              </a:lnSpc>
+              <a:spcBef>
+                <a:spcPts val="600"/>
+              </a:spcBef>
+              <a:buNone/>
+            </a:pPr>
+            <a:r>
+              <a:rPr lang="en-US" sz="1200" dirty="0">
+                <a:solidFill>
+                  <a:srgbClr val="0C3B44"/>
+                </a:solidFill>
+                <a:latin typeface="Arial" pitchFamily="34" charset="0"/>
+                <a:ea typeface="Arial" pitchFamily="34" charset="-122"/>
+                <a:cs typeface="Arial" pitchFamily="34" charset="-120"/>
+              </a:rPr>
+              <a:t>‏Braun, V., &amp; Clarke, V. ‏(2006)‏. Using thematic analysis in psychology. Qualitative Research in Psychology, 3‏(2)‏, 77-101.‏</a:t>
+            </a:r>
+            <a:endParaRPr lang="en-US" sz="1200" dirty="0"/>
+          </a:p>
+          <a:p>
+            <a:pPr algn="r" indent="0" marL="0">
+              <a:lnSpc>
+                <a:spcPts val="1700"/>
+              </a:lnSpc>
+              <a:spcBef>
+                <a:spcPts val="600"/>
+              </a:spcBef>
+              <a:buNone/>
+            </a:pPr>
+            <a:r>
+              <a:rPr lang="en-US" sz="1200" dirty="0">
+                <a:solidFill>
+                  <a:srgbClr val="0C3B44"/>
+                </a:solidFill>
+                <a:latin typeface="Arial" pitchFamily="34" charset="0"/>
+                <a:ea typeface="Arial" pitchFamily="34" charset="-122"/>
+                <a:cs typeface="Arial" pitchFamily="34" charset="-120"/>
+              </a:rPr>
+              <a:t>‏Filippou, C. D., Tsioufis, C. P., Thomopoulos, C. G., Mihas, C. C., &amp; Tousoulis, D. I. ‏(2020)‏. Dietary approaches to stop hypertension ‏(DASH)‏ diet and blood pressure reduction in adults with and without hypertension. Advances in Nutrition, 11‏(5)‏, 1150-1160.‏</a:t>
+            </a:r>
+            <a:endParaRPr lang="en-US" sz="1200" dirty="0"/>
+          </a:p>
+        </p:txBody>
+      </p:sp>
+      <p:sp>
+        <p:nvSpPr>
+          <p:cNvPr id="25" name="Slide Number Placeholder 0"/>
+          <p:cNvSpPr>
+            <a:spLocks noGrp="1"/>
+          </p:cNvSpPr>
+          <p:nvPr>
+            <p:ph type="sldNum" sz="quarter" idx="4294967295"/>
+          </p:nvPr>
+        </p:nvSpPr>
+        <p:spPr>
+          <a:xfrm>
+            <a:off x="502920" y="6327648"/>
+            <a:ext cx="457200" cy="274320"/>
+          </a:xfrm>
+          <a:prstGeom prst="rect">
+            <a:avLst/>
+          </a:prstGeom>
+          <a:extLst>
+            <a:ext uri="{C572A759-6A51-4108-AA02-DFA0A04FC94B}">
+              <ma14:wrappingTextBoxFlag xmlns:ma14="http://schemas.microsoft.com/office/mac/drawingml/2011/main" val="0"/>
+            </a:ext>
+          </a:extLst>
+        </p:spPr>
+        <p:txBody>
+          <a:bodyPr/>
+          <a:lstStyle>
+            <a:lvl1pPr>
+              <a:defRPr sz="1000">
+                <a:solidFill>
+                  <a:srgbClr val="56686D"/>
+                </a:solidFill>
+                <a:latin typeface="Arial"/>
+                <a:ea typeface="Arial"/>
+                <a:cs typeface="Arial"/>
+              </a:defRPr>
+            </a:lvl1pPr>
+          </a:lstStyle>
+          <a:p>
+            <a:pPr algn="l"/>
+            <a:fld id="{F7021451-1387-4CA6-816F-3879F97B5CBC}" type="slidenum">
+              <a:rPr b="0" lang="en-US"/>
+              <a:t>18</a:t>
+            </a:fld>
+            <a:endParaRPr lang="en-US"/>
+          </a:p>
+        </p:txBody>
+      </p:sp>
+    </p:spTree>
+  </p:cSld>
+  <p:clrMapOvr>
+    <a:masterClrMapping/>
+  </p:clrMapOvr>
+</p:sld>
+</file>
+
+<file path=ppt/slides/slide19.xml><?xml version="1.0" encoding="utf-8"?>
+<p:sld xmlns:a="http://schemas.openxmlformats.org/drawingml/2006/main" xmlns:r="http://schemas.openxmlformats.org/officeDocument/2006/relationships" xmlns:p="http://schemas.openxmlformats.org/presentationml/2006/main">
+  <p:cSld name="Slide 19">
+    <p:spTree>
+      <p:nvGrpSpPr>
+        <p:cNvPr id="1" name=""/>
+        <p:cNvGrpSpPr/>
+        <p:nvPr/>
+      </p:nvGrpSpPr>
+      <p:grpSpPr>
+        <a:xfrm>
+          <a:off x="0" y="0"/>
+          <a:ext cx="0" cy="0"/>
+          <a:chOff x="0" y="0"/>
+          <a:chExt cx="0" cy="0"/>
+        </a:xfrm>
+      </p:grpSpPr>
+      <p:sp>
+        <p:nvSpPr>
+          <p:cNvPr id="2" name="Text 0"/>
+          <p:cNvSpPr txBox="1"/>
+          <p:nvPr/>
+        </p:nvSpPr>
+        <p:spPr>
+          <a:xfrm>
+            <a:off x="1417320" y="274320"/>
+            <a:ext cx="10271455" cy="603504"/>
+          </a:xfrm>
+          <a:prstGeom prst="rect">
+            <a:avLst/>
+          </a:prstGeom>
+          <a:noFill/>
+          <a:ln/>
+        </p:spPr>
+        <p:txBody>
+          <a:bodyPr wrap="square" lIns="0" tIns="0" rIns="0" bIns="0" rtlCol="0" anchor="ctr"/>
+          <a:lstStyle/>
+          <a:p>
+            <a:pPr rtl="1" algn="r" indent="0" marL="0">
+              <a:buNone/>
+            </a:pPr>
+            <a:r>
+              <a:rPr lang="en-US" sz="3100" b="1" dirty="0">
+                <a:solidFill>
+                  <a:srgbClr val="0C3B44"/>
+                </a:solidFill>
+                <a:latin typeface="Arial" pitchFamily="34" charset="0"/>
+                <a:ea typeface="Arial" pitchFamily="34" charset="-122"/>
+                <a:cs typeface="Arial" pitchFamily="34" charset="-120"/>
+              </a:rPr>
+              <a:t>רשימת מקורות</a:t>
+            </a:r>
+            <a:endParaRPr lang="en-US" sz="3100" dirty="0"/>
+          </a:p>
+        </p:txBody>
+      </p:sp>
+      <p:sp>
+        <p:nvSpPr>
+          <p:cNvPr id="3" name="Text 1"/>
+          <p:cNvSpPr txBox="1"/>
+          <p:nvPr/>
+        </p:nvSpPr>
+        <p:spPr>
+          <a:xfrm>
+            <a:off x="1417320" y="877824"/>
+            <a:ext cx="10271455" cy="310896"/>
+          </a:xfrm>
+          <a:prstGeom prst="rect">
+            <a:avLst/>
+          </a:prstGeom>
+          <a:noFill/>
+          <a:ln/>
+        </p:spPr>
+        <p:txBody>
+          <a:bodyPr wrap="square" lIns="0" tIns="0" rIns="0" bIns="0" rtlCol="0" anchor="ctr"/>
+          <a:lstStyle/>
+          <a:p>
+            <a:pPr rtl="1" algn="r" indent="0" marL="0">
+              <a:buNone/>
+            </a:pPr>
+            <a:r>
+              <a:rPr lang="en-US" sz="1500" b="1" dirty="0">
+                <a:solidFill>
+                  <a:srgbClr val="1D9E9A"/>
+                </a:solidFill>
+                <a:latin typeface="Arial" pitchFamily="34" charset="0"/>
+                <a:ea typeface="Arial" pitchFamily="34" charset="-122"/>
+                <a:cs typeface="Arial" pitchFamily="34" charset="-120"/>
+              </a:rPr>
+              <a:t>המשך רשימת המקורות</a:t>
+            </a:r>
+            <a:endParaRPr lang="en-US" sz="1500" dirty="0"/>
+          </a:p>
+        </p:txBody>
+      </p:sp>
+      <p:sp>
+        <p:nvSpPr>
+          <p:cNvPr id="4" name="Shape 2"/>
+          <p:cNvSpPr/>
+          <p:nvPr/>
+        </p:nvSpPr>
+        <p:spPr>
+          <a:xfrm>
+            <a:off x="502920" y="1316736"/>
+            <a:ext cx="11185855" cy="4882896"/>
+          </a:xfrm>
+          <a:prstGeom prst="roundRect">
+            <a:avLst>
+              <a:gd name="adj" fmla="val 1873"/>
+            </a:avLst>
+          </a:prstGeom>
+          <a:solidFill>
+            <a:srgbClr val="F2F8F9"/>
+          </a:solidFill>
+          <a:ln w="12700">
+            <a:solidFill>
+              <a:srgbClr val="F2F8F9"/>
+            </a:solidFill>
+            <a:prstDash val="solid"/>
+          </a:ln>
+        </p:spPr>
+      </p:sp>
+      <p:sp>
+        <p:nvSpPr>
+          <p:cNvPr id="5" name="Text 3"/>
+          <p:cNvSpPr txBox="1"/>
+          <p:nvPr/>
+        </p:nvSpPr>
+        <p:spPr>
+          <a:xfrm>
+            <a:off x="886968" y="1591056"/>
+            <a:ext cx="10417759" cy="4334256"/>
+          </a:xfrm>
+          <a:prstGeom prst="rect">
+            <a:avLst/>
+          </a:prstGeom>
+          <a:noFill/>
+          <a:ln/>
+        </p:spPr>
+        <p:txBody>
+          <a:bodyPr wrap="square" lIns="0" tIns="0" rIns="0" bIns="0" rtlCol="0" anchor="t"/>
+          <a:lstStyle/>
+          <a:p>
+            <a:pPr algn="r" indent="0" marL="0">
+              <a:lnSpc>
+                <a:spcPts val="1700"/>
+              </a:lnSpc>
+              <a:buNone/>
+            </a:pPr>
+            <a:r>
+              <a:rPr lang="en-US" sz="1200" dirty="0">
+                <a:solidFill>
+                  <a:srgbClr val="0C3B44"/>
+                </a:solidFill>
+                <a:latin typeface="Arial" pitchFamily="34" charset="0"/>
+                <a:ea typeface="Arial" pitchFamily="34" charset="-122"/>
+                <a:cs typeface="Arial" pitchFamily="34" charset="-120"/>
+              </a:rPr>
+              <a:t>‏Franklin, B. A., Rusia, A., Haskin-Popp, C., &amp; Tawney, A. ‏(2021)‏. Chronic stress, exercise and cardiovascular disease. International Journal of Environmental Research and Public Health, 18‏(18)‏, Article 9922.‏</a:t>
+            </a:r>
+            <a:endParaRPr lang="en-US" sz="1200" dirty="0"/>
+          </a:p>
+          <a:p>
+            <a:pPr algn="r" indent="0" marL="0">
+              <a:lnSpc>
+                <a:spcPts val="1700"/>
+              </a:lnSpc>
+              <a:spcBef>
+                <a:spcPts val="600"/>
+              </a:spcBef>
+              <a:buNone/>
+            </a:pPr>
+            <a:r>
+              <a:rPr lang="en-US" sz="1200" dirty="0">
+                <a:solidFill>
+                  <a:srgbClr val="0C3B44"/>
+                </a:solidFill>
+                <a:latin typeface="Arial" pitchFamily="34" charset="0"/>
+                <a:ea typeface="Arial" pitchFamily="34" charset="-122"/>
+                <a:cs typeface="Arial" pitchFamily="34" charset="-120"/>
+              </a:rPr>
+              <a:t>‏Geidl, W., Schlesinger, S., Mino, E., Miranda, L., &amp; Pfeifer, K. ‏(2020)‏. Dose-response relationship between physical activity and mortality in adults with noncommunicable diseases. International Journal of Behavioral Nutrition and Physical Activity, 17, Article 109.‏</a:t>
+            </a:r>
+            <a:endParaRPr lang="en-US" sz="1200" dirty="0"/>
+          </a:p>
+          <a:p>
+            <a:pPr algn="r" indent="0" marL="0">
+              <a:lnSpc>
+                <a:spcPts val="1700"/>
+              </a:lnSpc>
+              <a:spcBef>
+                <a:spcPts val="600"/>
+              </a:spcBef>
+              <a:buNone/>
+            </a:pPr>
+            <a:r>
+              <a:rPr lang="en-US" sz="1200" dirty="0">
+                <a:solidFill>
+                  <a:srgbClr val="0C3B44"/>
+                </a:solidFill>
+                <a:latin typeface="Arial" pitchFamily="34" charset="0"/>
+                <a:ea typeface="Arial" pitchFamily="34" charset="-122"/>
+                <a:cs typeface="Arial" pitchFamily="34" charset="-120"/>
+              </a:rPr>
+              <a:t>‏Hareer, L. W., Lau, Y. Y., Mole, F., Reidlinger, D. P., &amp; Thomas, C. ‏(2024)‏. The effectiveness of the Mediterranean diet for primary and secondary prevention of cardiovascular disease: An umbrella review. Nutrition &amp; Dietetics, 81‏(4)‏.‏</a:t>
+            </a:r>
+            <a:endParaRPr lang="en-US" sz="1200" dirty="0"/>
+          </a:p>
+          <a:p>
+            <a:pPr algn="r" indent="0" marL="0">
+              <a:lnSpc>
+                <a:spcPts val="1700"/>
+              </a:lnSpc>
+              <a:spcBef>
+                <a:spcPts val="600"/>
+              </a:spcBef>
+              <a:buNone/>
+            </a:pPr>
+            <a:r>
+              <a:rPr lang="en-US" sz="1200" dirty="0">
+                <a:solidFill>
+                  <a:srgbClr val="0C3B44"/>
+                </a:solidFill>
+                <a:latin typeface="Arial" pitchFamily="34" charset="0"/>
+                <a:ea typeface="Arial" pitchFamily="34" charset="-122"/>
+                <a:cs typeface="Arial" pitchFamily="34" charset="-120"/>
+              </a:rPr>
+              <a:t>‏Karatzi, K., &amp; Manios, Y. ‏(2021)‏. The role of lifestyle, eating habits and social environment in the prevention and treatment of type 2 diabetes and hypertension. Nutrients, 13‏(5)‏, Article 1460.‏</a:t>
+            </a:r>
+            <a:endParaRPr lang="en-US" sz="1200" dirty="0"/>
+          </a:p>
+          <a:p>
+            <a:pPr algn="r" indent="0" marL="0">
+              <a:lnSpc>
+                <a:spcPts val="1700"/>
+              </a:lnSpc>
+              <a:spcBef>
+                <a:spcPts val="600"/>
+              </a:spcBef>
+              <a:buNone/>
+            </a:pPr>
+            <a:r>
+              <a:rPr lang="en-US" sz="1200" dirty="0">
+                <a:solidFill>
+                  <a:srgbClr val="0C3B44"/>
+                </a:solidFill>
+                <a:latin typeface="Arial" pitchFamily="34" charset="0"/>
+                <a:ea typeface="Arial" pitchFamily="34" charset="-122"/>
+                <a:cs typeface="Arial" pitchFamily="34" charset="-120"/>
+              </a:rPr>
+              <a:t>‏Laffond, A., Rivera-Picón, C., Rodríguez-Muñoz, P. M., Morales-Gázquez, M. J., &amp; Fernández-García, R. ‏(2023)‏. Mediterranean diet for primary and secondary prevention of cardiovascular disease and mortality: An updated systematic review. Nutrients, 15‏(15)‏, Article 3356.‏</a:t>
+            </a:r>
+            <a:endParaRPr lang="en-US" sz="1200" dirty="0"/>
+          </a:p>
+          <a:p>
+            <a:pPr algn="r" indent="0" marL="0">
+              <a:lnSpc>
+                <a:spcPts val="1700"/>
+              </a:lnSpc>
+              <a:spcBef>
+                <a:spcPts val="600"/>
+              </a:spcBef>
+              <a:buNone/>
+            </a:pPr>
+            <a:r>
+              <a:rPr lang="en-US" sz="1200" dirty="0">
+                <a:solidFill>
+                  <a:srgbClr val="0C3B44"/>
+                </a:solidFill>
+                <a:latin typeface="Arial" pitchFamily="34" charset="0"/>
+                <a:ea typeface="Arial" pitchFamily="34" charset="-122"/>
+                <a:cs typeface="Arial" pitchFamily="34" charset="-120"/>
+              </a:rPr>
+              <a:t>‏Lai, C., Fu, R., Huang, C., Wang, L., Ren, H., Zhu, Y., &amp; Zhang, X. ‏(2024)‏. Healthy lifestyle decreases the risk of the first incidence of non-communicable chronic disease and its progression to multimorbidity. The Journal of Nutrition, Health and Aging, 28‏(3)‏, Article 100164.‏</a:t>
+            </a:r>
+            <a:endParaRPr lang="en-US" sz="1200" dirty="0"/>
+          </a:p>
+          <a:p>
+            <a:pPr algn="r" indent="0" marL="0">
+              <a:lnSpc>
+                <a:spcPts val="1700"/>
+              </a:lnSpc>
+              <a:spcBef>
+                <a:spcPts val="600"/>
+              </a:spcBef>
+              <a:buNone/>
+            </a:pPr>
+            <a:r>
+              <a:rPr lang="en-US" sz="1200" dirty="0">
+                <a:solidFill>
+                  <a:srgbClr val="0C3B44"/>
+                </a:solidFill>
+                <a:latin typeface="Arial" pitchFamily="34" charset="0"/>
+                <a:ea typeface="Arial" pitchFamily="34" charset="-122"/>
+                <a:cs typeface="Arial" pitchFamily="34" charset="-120"/>
+              </a:rPr>
+              <a:t>‏Levi, S., Endy Findling, L., Endevelt, R., Hostovsky, M., Stern, F., &amp; Aflalo, E. ‏(2025)‏. Reflecting on a decade of action: A review of select indicators for the Israel National Program for Active and Healthy Living Efsharibari, 2011-2022. Israel Journal of Health Policy Research, 14‏(1)‏, Article 60.‏</a:t>
+            </a:r>
+            <a:endParaRPr lang="en-US" sz="1200" dirty="0"/>
+          </a:p>
+        </p:txBody>
+      </p:sp>
+      <p:sp>
+        <p:nvSpPr>
+          <p:cNvPr id="25" name="Slide Number Placeholder 0"/>
+          <p:cNvSpPr>
+            <a:spLocks noGrp="1"/>
+          </p:cNvSpPr>
+          <p:nvPr>
+            <p:ph type="sldNum" sz="quarter" idx="4294967295"/>
+          </p:nvPr>
+        </p:nvSpPr>
+        <p:spPr>
+          <a:xfrm>
+            <a:off x="502920" y="6327648"/>
+            <a:ext cx="457200" cy="274320"/>
+          </a:xfrm>
+          <a:prstGeom prst="rect">
+            <a:avLst/>
+          </a:prstGeom>
+          <a:extLst>
+            <a:ext uri="{C572A759-6A51-4108-AA02-DFA0A04FC94B}">
+              <ma14:wrappingTextBoxFlag xmlns:ma14="http://schemas.microsoft.com/office/mac/drawingml/2011/main" val="0"/>
+            </a:ext>
+          </a:extLst>
+        </p:spPr>
+        <p:txBody>
+          <a:bodyPr/>
+          <a:lstStyle>
+            <a:lvl1pPr>
+              <a:defRPr sz="1000">
+                <a:solidFill>
+                  <a:srgbClr val="56686D"/>
+                </a:solidFill>
+                <a:latin typeface="Arial"/>
+                <a:ea typeface="Arial"/>
+                <a:cs typeface="Arial"/>
+              </a:defRPr>
+            </a:lvl1pPr>
+          </a:lstStyle>
+          <a:p>
+            <a:pPr algn="l"/>
+            <a:fld id="{F7021451-1387-4CA6-816F-3879F97B5CBC}" type="slidenum">
+              <a:rPr b="0" lang="en-US"/>
+              <a:t>19</a:t>
+            </a:fld>
+            <a:endParaRPr lang="en-US"/>
           </a:p>
         </p:txBody>
       </p:sp>
@@ -4755,7 +6089,7 @@
                 <a:ea typeface="Arial" pitchFamily="34" charset="-122"/>
                 <a:cs typeface="Arial" pitchFamily="34" charset="-120"/>
               </a:rPr>
-              <a:t>המחלות הכרוניות, ובהן סוכרת מסוג 2, יתר לחץ דם ומחלות לב וכלי דם, מהוות כיום את גורם התחלואה והתמותה המרכזי בישראל ובעולם, וארגון הבריאות העולמי מייחס חלק ניכר מנטל זה לגורמי אורח חיים הניתנים לשינוי (World Health Organization, 2023). בישראל מיוחסים כ-85% ממקרי המוות למחלות לא מדבקות (Levi et al., 2025), וכ-56% מהאוכלוסייה הבוגרת סובלים מעודף משקל או מהשמנה (המרכז הלאומי לבקרת מחלות, 2023).</a:t>
+              <a:t>‏המחלות הכרוניות, ובהן סוכרת מסוג 2, יתר לחץ דם ומחלות לב וכלי דם, מהוות כיום את גורם התחלואה והתמותה המרכזי בישראל ובעולם, וארגון הבריאות העולמי מייחס חלק ניכר מנטל זה לגורמי אורח חיים הניתנים לשינוי ‏(World Health Organization, 2023)‏. בישראל מיוחסים כ-85%‏ ממקרי המוות למחלות לא מדבקות ‏(Levi et al., 2025)‏, וכ-56%‏ מהאוכלוסייה הבוגרת סובלים מעודף משקל או מהשמנה ‏(המרכז הלאומי לבקרת מחלות, 2023)‏.‏</a:t>
             </a:r>
             <a:endParaRPr lang="en-US" sz="1550" dirty="0"/>
           </a:p>
@@ -4778,7 +6112,7 @@
                 <a:ea typeface="Arial" pitchFamily="34" charset="-122"/>
                 <a:cs typeface="Arial" pitchFamily="34" charset="-120"/>
               </a:rPr>
-              <a:t>ייחודו של נטל תחלואה זה טמון בכך שחלק ניכר ממנו ניתן למניעה. בסיס הראיות הקושר בין תזונה מאוזנת ופעילות גופנית סדירה לבין הפחתת הסיכון לתחלואה הוא מן המבוססים ברפואה המונעת, ואף על פי כן שני שלישים מהמבוגרים בישראל אינם עומדים בהמלצות לפעילות גופנית, ושיעורי הסוכרת ממשיכים לעלות (המרכז הלאומי לבקרת מחלות, 2025). הפער הזה, שבין הידוע לבין הנעשה, הוא נקודת המוצא של המחקר הנוכחי.</a:t>
+              <a:t>‏ייחודו של נטל תחלואה זה טמון בכך שחלק ניכר ממנו ניתן למניעה. בסיס הראיות הקושר בין תזונה מאוזנת ופעילות גופנית סדירה לבין הפחתת הסיכון לתחלואה הוא מן המבוססים ברפואה המונעת, ואף על פי כן שני שלישים מהמבוגרים בישראל אינם עומדים בהמלצות לפעילות גופנית, ושיעורי הסוכרת ממשיכים לעלות ‏(המרכז הלאומי לבקרת מחלות, 2025)‏. הפער הזה, שבין הידוע לבין הנעשה, הוא נקודת המוצא של המחקר הנוכחי.‏</a:t>
             </a:r>
             <a:endParaRPr lang="en-US" sz="1550" dirty="0"/>
           </a:p>
@@ -4801,7 +6135,7 @@
                 <a:ea typeface="Arial" pitchFamily="34" charset="-122"/>
                 <a:cs typeface="Arial" pitchFamily="34" charset="-120"/>
               </a:rPr>
-              <a:t>בנגב מתחדד הפער אף יותר. החברה הבדואית מתאפיינת בשיעורי סוכרת והשמנה מן הגבוהים בישראל, לצד תשתיות מוגבלות לפעילות גופנית וחסמי נגישות לשירותי בריאות (Treister-Goltzman &amp; Peleg, 2015), ומכאן הצורך לבחון כיצד נחווה הקשר בין אורח חיים לבריאות בקרב מבוגרים החיים בהקשר זה.</a:t>
+              <a:t>‏בנגב מתחדד הפער אף יותר. החברה הבדואית מתאפיינת בשיעורי סוכרת והשמנה מן הגבוהים בישראל, לצד תשתיות מוגבלות לפעילות גופנית וחסמי נגישות לשירותי בריאות ‏(Treister-Goltzman &amp; Peleg, 2015)‏, ומכאן הצורך לבחון כיצד נחווה הקשר בין אורח חיים לבריאות בקרב מבוגרים החיים בהקשר זה.‏</a:t>
             </a:r>
             <a:endParaRPr lang="en-US" sz="1550" dirty="0"/>
           </a:p>
@@ -4852,6 +6186,573 @@
               <a:t>2</a:t>
             </a:fld>
             <a:endParaRPr lang="en-US"/>
+          </a:p>
+        </p:txBody>
+      </p:sp>
+    </p:spTree>
+  </p:cSld>
+  <p:clrMapOvr>
+    <a:masterClrMapping/>
+  </p:clrMapOvr>
+</p:sld>
+</file>
+
+<file path=ppt/slides/slide20.xml><?xml version="1.0" encoding="utf-8"?>
+<p:sld xmlns:a="http://schemas.openxmlformats.org/drawingml/2006/main" xmlns:r="http://schemas.openxmlformats.org/officeDocument/2006/relationships" xmlns:p="http://schemas.openxmlformats.org/presentationml/2006/main">
+  <p:cSld name="Slide 20">
+    <p:spTree>
+      <p:nvGrpSpPr>
+        <p:cNvPr id="1" name=""/>
+        <p:cNvGrpSpPr/>
+        <p:nvPr/>
+      </p:nvGrpSpPr>
+      <p:grpSpPr>
+        <a:xfrm>
+          <a:off x="0" y="0"/>
+          <a:ext cx="0" cy="0"/>
+          <a:chOff x="0" y="0"/>
+          <a:chExt cx="0" cy="0"/>
+        </a:xfrm>
+      </p:grpSpPr>
+      <p:sp>
+        <p:nvSpPr>
+          <p:cNvPr id="2" name="Text 0"/>
+          <p:cNvSpPr txBox="1"/>
+          <p:nvPr/>
+        </p:nvSpPr>
+        <p:spPr>
+          <a:xfrm>
+            <a:off x="1417320" y="274320"/>
+            <a:ext cx="10271455" cy="603504"/>
+          </a:xfrm>
+          <a:prstGeom prst="rect">
+            <a:avLst/>
+          </a:prstGeom>
+          <a:noFill/>
+          <a:ln/>
+        </p:spPr>
+        <p:txBody>
+          <a:bodyPr wrap="square" lIns="0" tIns="0" rIns="0" bIns="0" rtlCol="0" anchor="ctr"/>
+          <a:lstStyle/>
+          <a:p>
+            <a:pPr rtl="1" algn="r" indent="0" marL="0">
+              <a:buNone/>
+            </a:pPr>
+            <a:r>
+              <a:rPr lang="en-US" sz="3100" b="1" dirty="0">
+                <a:solidFill>
+                  <a:srgbClr val="0C3B44"/>
+                </a:solidFill>
+                <a:latin typeface="Arial" pitchFamily="34" charset="0"/>
+                <a:ea typeface="Arial" pitchFamily="34" charset="-122"/>
+                <a:cs typeface="Arial" pitchFamily="34" charset="-120"/>
+              </a:rPr>
+              <a:t>רשימת מקורות</a:t>
+            </a:r>
+            <a:endParaRPr lang="en-US" sz="3100" dirty="0"/>
+          </a:p>
+        </p:txBody>
+      </p:sp>
+      <p:sp>
+        <p:nvSpPr>
+          <p:cNvPr id="3" name="Text 1"/>
+          <p:cNvSpPr txBox="1"/>
+          <p:nvPr/>
+        </p:nvSpPr>
+        <p:spPr>
+          <a:xfrm>
+            <a:off x="1417320" y="877824"/>
+            <a:ext cx="10271455" cy="310896"/>
+          </a:xfrm>
+          <a:prstGeom prst="rect">
+            <a:avLst/>
+          </a:prstGeom>
+          <a:noFill/>
+          <a:ln/>
+        </p:spPr>
+        <p:txBody>
+          <a:bodyPr wrap="square" lIns="0" tIns="0" rIns="0" bIns="0" rtlCol="0" anchor="ctr"/>
+          <a:lstStyle/>
+          <a:p>
+            <a:pPr rtl="1" algn="r" indent="0" marL="0">
+              <a:buNone/>
+            </a:pPr>
+            <a:r>
+              <a:rPr lang="en-US" sz="1500" b="1" dirty="0">
+                <a:solidFill>
+                  <a:srgbClr val="1D9E9A"/>
+                </a:solidFill>
+                <a:latin typeface="Arial" pitchFamily="34" charset="0"/>
+                <a:ea typeface="Arial" pitchFamily="34" charset="-122"/>
+                <a:cs typeface="Arial" pitchFamily="34" charset="-120"/>
+              </a:rPr>
+              <a:t>המשך רשימת המקורות</a:t>
+            </a:r>
+            <a:endParaRPr lang="en-US" sz="1500" dirty="0"/>
+          </a:p>
+        </p:txBody>
+      </p:sp>
+      <p:sp>
+        <p:nvSpPr>
+          <p:cNvPr id="4" name="Shape 2"/>
+          <p:cNvSpPr/>
+          <p:nvPr/>
+        </p:nvSpPr>
+        <p:spPr>
+          <a:xfrm>
+            <a:off x="502920" y="1316736"/>
+            <a:ext cx="11185855" cy="4882896"/>
+          </a:xfrm>
+          <a:prstGeom prst="roundRect">
+            <a:avLst>
+              <a:gd name="adj" fmla="val 1873"/>
+            </a:avLst>
+          </a:prstGeom>
+          <a:solidFill>
+            <a:srgbClr val="F2F8F9"/>
+          </a:solidFill>
+          <a:ln w="12700">
+            <a:solidFill>
+              <a:srgbClr val="F2F8F9"/>
+            </a:solidFill>
+            <a:prstDash val="solid"/>
+          </a:ln>
+        </p:spPr>
+      </p:sp>
+      <p:sp>
+        <p:nvSpPr>
+          <p:cNvPr id="5" name="Text 3"/>
+          <p:cNvSpPr txBox="1"/>
+          <p:nvPr/>
+        </p:nvSpPr>
+        <p:spPr>
+          <a:xfrm>
+            <a:off x="886968" y="1591056"/>
+            <a:ext cx="10417759" cy="4334256"/>
+          </a:xfrm>
+          <a:prstGeom prst="rect">
+            <a:avLst/>
+          </a:prstGeom>
+          <a:noFill/>
+          <a:ln/>
+        </p:spPr>
+        <p:txBody>
+          <a:bodyPr wrap="square" lIns="0" tIns="0" rIns="0" bIns="0" rtlCol="0" anchor="t"/>
+          <a:lstStyle/>
+          <a:p>
+            <a:pPr algn="r" indent="0" marL="0">
+              <a:lnSpc>
+                <a:spcPts val="1700"/>
+              </a:lnSpc>
+              <a:buNone/>
+            </a:pPr>
+            <a:r>
+              <a:rPr lang="en-US" sz="1200" dirty="0">
+                <a:solidFill>
+                  <a:srgbClr val="0C3B44"/>
+                </a:solidFill>
+                <a:latin typeface="Arial" pitchFamily="34" charset="0"/>
+                <a:ea typeface="Arial" pitchFamily="34" charset="-122"/>
+                <a:cs typeface="Arial" pitchFamily="34" charset="-120"/>
+              </a:rPr>
+              <a:t>‏Lincoln, Y. S., &amp; Guba, E. G. ‏(1985)‏. Naturalistic inquiry. Sage.‏</a:t>
+            </a:r>
+            <a:endParaRPr lang="en-US" sz="1200" dirty="0"/>
+          </a:p>
+          <a:p>
+            <a:pPr algn="r" indent="0" marL="0">
+              <a:lnSpc>
+                <a:spcPts val="1700"/>
+              </a:lnSpc>
+              <a:spcBef>
+                <a:spcPts val="600"/>
+              </a:spcBef>
+              <a:buNone/>
+            </a:pPr>
+            <a:r>
+              <a:rPr lang="en-US" sz="1200" dirty="0">
+                <a:solidFill>
+                  <a:srgbClr val="0C3B44"/>
+                </a:solidFill>
+                <a:latin typeface="Arial" pitchFamily="34" charset="0"/>
+                <a:ea typeface="Arial" pitchFamily="34" charset="-122"/>
+                <a:cs typeface="Arial" pitchFamily="34" charset="-120"/>
+              </a:rPr>
+              <a:t>‏Reges, O., Leibowitz, M., Hirsch, A., Dicker, D., Finer, N., &amp; Feldman, B. ‏(2020)‏. A comprehensive descriptive assessment of obesity related chronic morbidity and estimated annual cost burden. Israel Journal of Health Policy Research, 9‏(1)‏, Article 32.‏</a:t>
+            </a:r>
+            <a:endParaRPr lang="en-US" sz="1200" dirty="0"/>
+          </a:p>
+          <a:p>
+            <a:pPr algn="r" indent="0" marL="0">
+              <a:lnSpc>
+                <a:spcPts val="1700"/>
+              </a:lnSpc>
+              <a:spcBef>
+                <a:spcPts val="600"/>
+              </a:spcBef>
+              <a:buNone/>
+            </a:pPr>
+            <a:r>
+              <a:rPr lang="en-US" sz="1200" dirty="0">
+                <a:solidFill>
+                  <a:srgbClr val="0C3B44"/>
+                </a:solidFill>
+                <a:latin typeface="Arial" pitchFamily="34" charset="0"/>
+                <a:ea typeface="Arial" pitchFamily="34" charset="-122"/>
+                <a:cs typeface="Arial" pitchFamily="34" charset="-120"/>
+              </a:rPr>
+              <a:t>‏Treister-Goltzman, Y., &amp; Peleg, R. ‏(2015)‏. Health and morbidity among Bedouin women in southern Israel: A descriptive literature review of the past two decades. Journal of Community Health, 40‏(6)‏, 1213-1223.‏</a:t>
+            </a:r>
+            <a:endParaRPr lang="en-US" sz="1200" dirty="0"/>
+          </a:p>
+          <a:p>
+            <a:pPr algn="r" indent="0" marL="0">
+              <a:lnSpc>
+                <a:spcPts val="1700"/>
+              </a:lnSpc>
+              <a:spcBef>
+                <a:spcPts val="600"/>
+              </a:spcBef>
+              <a:buNone/>
+            </a:pPr>
+            <a:r>
+              <a:rPr lang="en-US" sz="1200" dirty="0">
+                <a:solidFill>
+                  <a:srgbClr val="0C3B44"/>
+                </a:solidFill>
+                <a:latin typeface="Arial" pitchFamily="34" charset="0"/>
+                <a:ea typeface="Arial" pitchFamily="34" charset="-122"/>
+                <a:cs typeface="Arial" pitchFamily="34" charset="-120"/>
+              </a:rPr>
+              <a:t>‏van der Velde, J. H. P. M., Boone, S. C., Winters-van Eekelen, E., Schrauwen, P., &amp; Rosendaal, F. R. ‏(2024)‏. Lifestyle factors and incident multimorbidity related to chronic disease: A population-based cohort study. European Journal of Ageing, 21, Article 36.‏</a:t>
+            </a:r>
+            <a:endParaRPr lang="en-US" sz="1200" dirty="0"/>
+          </a:p>
+          <a:p>
+            <a:pPr algn="r" indent="0" marL="0">
+              <a:lnSpc>
+                <a:spcPts val="1700"/>
+              </a:lnSpc>
+              <a:spcBef>
+                <a:spcPts val="600"/>
+              </a:spcBef>
+              <a:buNone/>
+            </a:pPr>
+            <a:r>
+              <a:rPr lang="en-US" sz="1200" dirty="0">
+                <a:solidFill>
+                  <a:srgbClr val="0C3B44"/>
+                </a:solidFill>
+                <a:latin typeface="Arial" pitchFamily="34" charset="0"/>
+                <a:ea typeface="Arial" pitchFamily="34" charset="-122"/>
+                <a:cs typeface="Arial" pitchFamily="34" charset="-120"/>
+              </a:rPr>
+              <a:t>‏World Health Organization. ‏(2023)‏. Noncommunicable diseases [Fact sheet]. World Health Organization.‏</a:t>
+            </a:r>
+            <a:endParaRPr lang="en-US" sz="1200" dirty="0"/>
+          </a:p>
+          <a:p>
+            <a:pPr algn="r" indent="0" marL="0">
+              <a:lnSpc>
+                <a:spcPts val="1700"/>
+              </a:lnSpc>
+              <a:spcBef>
+                <a:spcPts val="600"/>
+              </a:spcBef>
+              <a:buNone/>
+            </a:pPr>
+            <a:r>
+              <a:rPr lang="en-US" sz="1200" dirty="0">
+                <a:solidFill>
+                  <a:srgbClr val="0C3B44"/>
+                </a:solidFill>
+                <a:latin typeface="Arial" pitchFamily="34" charset="0"/>
+                <a:ea typeface="Arial" pitchFamily="34" charset="-122"/>
+                <a:cs typeface="Arial" pitchFamily="34" charset="-120"/>
+              </a:rPr>
+              <a:t>‏Zhang, Y.-B., Chen, C., Pan, X.-F., Guo, J., Li, Y., Franco, O. H., &amp; Pan, A. ‏(2021)‏. Associations of healthy lifestyle and socioeconomic status with mortality and incident cardiovascular disease: Two prospective cohort studies. BMJ, 373, Article n604.‏</a:t>
+            </a:r>
+            <a:endParaRPr lang="en-US" sz="1200" dirty="0"/>
+          </a:p>
+        </p:txBody>
+      </p:sp>
+      <p:sp>
+        <p:nvSpPr>
+          <p:cNvPr id="25" name="Slide Number Placeholder 0"/>
+          <p:cNvSpPr>
+            <a:spLocks noGrp="1"/>
+          </p:cNvSpPr>
+          <p:nvPr>
+            <p:ph type="sldNum" sz="quarter" idx="4294967295"/>
+          </p:nvPr>
+        </p:nvSpPr>
+        <p:spPr>
+          <a:xfrm>
+            <a:off x="502920" y="6327648"/>
+            <a:ext cx="457200" cy="274320"/>
+          </a:xfrm>
+          <a:prstGeom prst="rect">
+            <a:avLst/>
+          </a:prstGeom>
+          <a:extLst>
+            <a:ext uri="{C572A759-6A51-4108-AA02-DFA0A04FC94B}">
+              <ma14:wrappingTextBoxFlag xmlns:ma14="http://schemas.microsoft.com/office/mac/drawingml/2011/main" val="0"/>
+            </a:ext>
+          </a:extLst>
+        </p:spPr>
+        <p:txBody>
+          <a:bodyPr/>
+          <a:lstStyle>
+            <a:lvl1pPr>
+              <a:defRPr sz="1000">
+                <a:solidFill>
+                  <a:srgbClr val="56686D"/>
+                </a:solidFill>
+                <a:latin typeface="Arial"/>
+                <a:ea typeface="Arial"/>
+                <a:cs typeface="Arial"/>
+              </a:defRPr>
+            </a:lvl1pPr>
+          </a:lstStyle>
+          <a:p>
+            <a:pPr algn="l"/>
+            <a:fld id="{F7021451-1387-4CA6-816F-3879F97B5CBC}" type="slidenum">
+              <a:rPr b="0" lang="en-US"/>
+              <a:t>20</a:t>
+            </a:fld>
+            <a:endParaRPr lang="en-US"/>
+          </a:p>
+        </p:txBody>
+      </p:sp>
+    </p:spTree>
+  </p:cSld>
+  <p:clrMapOvr>
+    <a:masterClrMapping/>
+  </p:clrMapOvr>
+</p:sld>
+</file>
+
+<file path=ppt/slides/slide21.xml><?xml version="1.0" encoding="utf-8"?>
+<p:sld xmlns:a="http://schemas.openxmlformats.org/drawingml/2006/main" xmlns:r="http://schemas.openxmlformats.org/officeDocument/2006/relationships" xmlns:p="http://schemas.openxmlformats.org/presentationml/2006/main">
+  <p:cSld name="Slide 21">
+    <p:spTree>
+      <p:nvGrpSpPr>
+        <p:cNvPr id="1" name=""/>
+        <p:cNvGrpSpPr/>
+        <p:nvPr/>
+      </p:nvGrpSpPr>
+      <p:grpSpPr>
+        <a:xfrm>
+          <a:off x="0" y="0"/>
+          <a:ext cx="0" cy="0"/>
+          <a:chOff x="0" y="0"/>
+          <a:chExt cx="0" cy="0"/>
+        </a:xfrm>
+      </p:grpSpPr>
+      <p:sp>
+        <p:nvSpPr>
+          <p:cNvPr id="2" name="Shape 0"/>
+          <p:cNvSpPr/>
+          <p:nvPr/>
+        </p:nvSpPr>
+        <p:spPr>
+          <a:xfrm>
+            <a:off x="5148072" y="1371600"/>
+            <a:ext cx="1883664" cy="1883664"/>
+          </a:xfrm>
+          <a:prstGeom prst="roundRect">
+            <a:avLst>
+              <a:gd name="adj" fmla="val 7767"/>
+            </a:avLst>
+          </a:prstGeom>
+          <a:solidFill>
+            <a:srgbClr val="FFFFFF"/>
+          </a:solidFill>
+          <a:ln w="12700">
+            <a:solidFill>
+              <a:srgbClr val="FFFFFF"/>
+            </a:solidFill>
+            <a:prstDash val="solid"/>
+          </a:ln>
+        </p:spPr>
+      </p:sp>
+      <p:pic>
+        <p:nvPicPr>
+          <p:cNvPr id="3" name="Image 0" descr="logo.jpg">    </p:cNvPr>
+          <p:cNvPicPr>
+            <a:picLocks noChangeAspect="1"/>
+          </p:cNvPicPr>
+          <p:nvPr/>
+        </p:nvPicPr>
+        <p:blipFill>
+          <a:blip r:embed="rId1"/>
+          <a:stretch>
+            <a:fillRect/>
+          </a:stretch>
+        </p:blipFill>
+        <p:spPr>
+          <a:xfrm>
+            <a:off x="5468112" y="1691640"/>
+            <a:ext cx="1243584" cy="1243584"/>
+          </a:xfrm>
+          <a:prstGeom prst="rect">
+            <a:avLst/>
+          </a:prstGeom>
+        </p:spPr>
+      </p:pic>
+      <p:sp>
+        <p:nvSpPr>
+          <p:cNvPr id="4" name="Text 1"/>
+          <p:cNvSpPr txBox="1"/>
+          <p:nvPr/>
+        </p:nvSpPr>
+        <p:spPr>
+          <a:xfrm>
+            <a:off x="502920" y="3657600"/>
+            <a:ext cx="11185855" cy="731520"/>
+          </a:xfrm>
+          <a:prstGeom prst="rect">
+            <a:avLst/>
+          </a:prstGeom>
+          <a:noFill/>
+          <a:ln/>
+        </p:spPr>
+        <p:txBody>
+          <a:bodyPr wrap="square" lIns="0" tIns="0" rIns="0" bIns="0" rtlCol="0" anchor="ctr"/>
+          <a:lstStyle/>
+          <a:p>
+            <a:pPr rtl="1" algn="ctr" indent="0" marL="0">
+              <a:buNone/>
+            </a:pPr>
+            <a:r>
+              <a:rPr lang="en-US" sz="4000" b="1" dirty="0">
+                <a:solidFill>
+                  <a:srgbClr val="FFFFFF"/>
+                </a:solidFill>
+                <a:latin typeface="Arial" pitchFamily="34" charset="0"/>
+                <a:ea typeface="Arial" pitchFamily="34" charset="-122"/>
+                <a:cs typeface="Arial" pitchFamily="34" charset="-120"/>
+              </a:rPr>
+              <a:t>תודה על ההקשבה</a:t>
+            </a:r>
+            <a:endParaRPr lang="en-US" sz="4000" dirty="0"/>
+          </a:p>
+        </p:txBody>
+      </p:sp>
+      <p:sp>
+        <p:nvSpPr>
+          <p:cNvPr id="5" name="Text 2"/>
+          <p:cNvSpPr txBox="1"/>
+          <p:nvPr/>
+        </p:nvSpPr>
+        <p:spPr>
+          <a:xfrm>
+            <a:off x="502920" y="4498848"/>
+            <a:ext cx="11185855" cy="402336"/>
+          </a:xfrm>
+          <a:prstGeom prst="rect">
+            <a:avLst/>
+          </a:prstGeom>
+          <a:noFill/>
+          <a:ln/>
+        </p:spPr>
+        <p:txBody>
+          <a:bodyPr wrap="square" lIns="0" tIns="0" rIns="0" bIns="0" rtlCol="0" anchor="ctr"/>
+          <a:lstStyle/>
+          <a:p>
+            <a:pPr rtl="1" algn="ctr" indent="0" marL="0">
+              <a:buNone/>
+            </a:pPr>
+            <a:r>
+              <a:rPr lang="en-US" sz="1700" b="1" dirty="0">
+                <a:solidFill>
+                  <a:srgbClr val="1D9E9A"/>
+                </a:solidFill>
+                <a:latin typeface="Arial" pitchFamily="34" charset="0"/>
+                <a:ea typeface="Arial" pitchFamily="34" charset="-122"/>
+                <a:cs typeface="Arial" pitchFamily="34" charset="-120"/>
+              </a:rPr>
+              <a:t>המרכז האקדמי פרס  |  החוג למנהל מערכות בריאות</a:t>
+            </a:r>
+            <a:endParaRPr lang="en-US" sz="1700" dirty="0"/>
+          </a:p>
+        </p:txBody>
+      </p:sp>
+      <p:sp>
+        <p:nvSpPr>
+          <p:cNvPr id="6" name="Text 3"/>
+          <p:cNvSpPr txBox="1"/>
+          <p:nvPr/>
+        </p:nvSpPr>
+        <p:spPr>
+          <a:xfrm>
+            <a:off x="502920" y="4974336"/>
+            <a:ext cx="11185855" cy="365760"/>
+          </a:xfrm>
+          <a:prstGeom prst="rect">
+            <a:avLst/>
+          </a:prstGeom>
+          <a:noFill/>
+          <a:ln/>
+        </p:spPr>
+        <p:txBody>
+          <a:bodyPr wrap="square" lIns="0" tIns="0" rIns="0" bIns="0" rtlCol="0" anchor="ctr"/>
+          <a:lstStyle/>
+          <a:p>
+            <a:pPr rtl="1" algn="ctr" indent="0" marL="0">
+              <a:buNone/>
+            </a:pPr>
+            <a:r>
+              <a:rPr lang="en-US" sz="1500" dirty="0">
+                <a:solidFill>
+                  <a:srgbClr val="BFE3DD"/>
+                </a:solidFill>
+                <a:latin typeface="Arial" pitchFamily="34" charset="0"/>
+                <a:ea typeface="Arial" pitchFamily="34" charset="-122"/>
+                <a:cs typeface="Arial" pitchFamily="34" charset="-120"/>
+              </a:rPr>
+              <a:t>מוחמד אבו גודה  |  ראמי אבו גאמע  |  מוחמד אלדואיקה</a:t>
+            </a:r>
+            <a:endParaRPr lang="en-US" sz="1500" dirty="0"/>
+          </a:p>
+        </p:txBody>
+      </p:sp>
+      <p:sp>
+        <p:nvSpPr>
+          <p:cNvPr id="7" name="Text 4"/>
+          <p:cNvSpPr txBox="1"/>
+          <p:nvPr/>
+        </p:nvSpPr>
+        <p:spPr>
+          <a:xfrm>
+            <a:off x="502920" y="5394960"/>
+            <a:ext cx="11185855" cy="365760"/>
+          </a:xfrm>
+          <a:prstGeom prst="rect">
+            <a:avLst/>
+          </a:prstGeom>
+          <a:noFill/>
+          <a:ln/>
+        </p:spPr>
+        <p:txBody>
+          <a:bodyPr wrap="square" lIns="0" tIns="0" rIns="0" bIns="0" rtlCol="0" anchor="ctr"/>
+          <a:lstStyle/>
+          <a:p>
+            <a:pPr rtl="1" algn="ctr" indent="0" marL="0">
+              <a:buNone/>
+            </a:pPr>
+            <a:r>
+              <a:rPr lang="en-US" sz="1400" dirty="0">
+                <a:solidFill>
+                  <a:srgbClr val="BFE3DD"/>
+                </a:solidFill>
+                <a:latin typeface="Arial" pitchFamily="34" charset="0"/>
+                <a:ea typeface="Arial" pitchFamily="34" charset="-122"/>
+                <a:cs typeface="Arial" pitchFamily="34" charset="-120"/>
+              </a:rPr>
+              <a:t>‏בהנחיית ד"ר אסנת בשקין  |  שנה"ל תשפ"ו, 2026‏</a:t>
+            </a:r>
+            <a:endParaRPr lang="en-US" sz="1400" dirty="0"/>
           </a:p>
         </p:txBody>
       </p:sp>
@@ -4982,7 +6883,7 @@
                 <a:ea typeface="Arial" pitchFamily="34" charset="-122"/>
                 <a:cs typeface="Arial" pitchFamily="34" charset="-120"/>
               </a:rPr>
-              <a:t>שאלת המחקר המרכזית</a:t>
+              <a:t>‏שאלת המחקר המרכזית‏</a:t>
             </a:r>
             <a:endParaRPr lang="en-US" sz="1700" dirty="0"/>
           </a:p>
@@ -5005,7 +6906,7 @@
                 <a:ea typeface="Arial" pitchFamily="34" charset="-122"/>
                 <a:cs typeface="Arial" pitchFamily="34" charset="-120"/>
               </a:rPr>
-              <a:t>מהי ההשפעה של פעילות גופנית ותזונה מאוזנת על הסיכון להתפתחות מחלות כרוניות בקרב מבוגרים, כפי שהיא נתפסת ונחווית על ידי המבוגרים עצמם. לצד שאלה זו נבחנו שלוש שאלות משנה: כיצד תופסים מבוגרים את הקשר בין אורח חייהם לבין בריאותם, מהם הגורמים המסייעים והחוסמים אימוץ של פעילות גופנית ותזונה מאוזנת בחיי היומיום, ומהו תפקידה של מערכת הבריאות כפי שהוא נתפס בעיני המטופלים.</a:t>
+              <a:t>‏מהי ההשפעה של פעילות גופנית ותזונה מאוזנת על הסיכון להתפתחות מחלות כרוניות בקרב מבוגרים, כפי שהיא נתפסת ונחווית על ידי המבוגרים עצמם. לצד שאלה זו נבחנו שלוש שאלות משנה: כיצד תופסים מבוגרים את הקשר בין אורח חייהם לבין בריאותם, מהם הגורמים המסייעים והחוסמים אימוץ של פעילות גופנית ותזונה מאוזנת בחיי היומיום, ומהו תפקידה של מערכת הבריאות כפי שהוא נתפס בעיני המטופלים.‏</a:t>
             </a:r>
             <a:endParaRPr lang="en-US" sz="1700" dirty="0"/>
           </a:p>
@@ -5028,7 +6929,7 @@
                 <a:ea typeface="Arial" pitchFamily="34" charset="-122"/>
                 <a:cs typeface="Arial" pitchFamily="34" charset="-120"/>
               </a:rPr>
-              <a:t>מטרות המחקר</a:t>
+              <a:t>‏מטרות המחקר‏</a:t>
             </a:r>
             <a:endParaRPr lang="en-US" sz="1700" dirty="0"/>
           </a:p>
@@ -5051,7 +6952,7 @@
                 <a:ea typeface="Arial" pitchFamily="34" charset="-122"/>
                 <a:cs typeface="Arial" pitchFamily="34" charset="-120"/>
               </a:rPr>
-              <a:t>המחקר מבקש לבחון את תפיסותיהם של מבוגרים ביחס לקשר שבין אורח חייהם לבריאותם, ולזהות את החסמים ואת המנופים לאימוץ הרגלים בריאים כפי שהם נחווים בשטח ולא כפי שהם משוערים מראש. בהמשך לכך מבקש המחקר לעמוד על האופן שבו נתפס תפקידם של רופא המשפחה ושל קופת החולים בקידום המניעה, ועל בסיס כל אלה לגזור המלצות יישומיות לקופות החולים ולרשויות המקומיות, המותאמות להקשר החברתי והתרבותי של אוכלוסיית הנגב.</a:t>
+              <a:t>‏המחקר מבקש לבחון את תפיסותיהם של מבוגרים ביחס לקשר שבין אורח חייהם לבריאותם, ולזהות את החסמים ואת המנופים לאימוץ הרגלים בריאים כפי שהם נחווים בשטח ולא כפי שהם משוערים מראש. בהמשך לכך מבקש המחקר לעמוד על האופן שבו נתפס תפקידם של רופא המשפחה ושל קופת החולים בקידום המניעה, ועל בסיס כל אלה לגזור המלצות יישומיות לקופות החולים ולרשויות המקומיות, המותאמות להקשר החברתי והתרבותי של אוכלוסיית הנגב.‏</a:t>
             </a:r>
             <a:endParaRPr lang="en-US" sz="1700" dirty="0"/>
           </a:p>
@@ -5271,7 +7172,7 @@
                 <a:ea typeface="Arial" pitchFamily="34" charset="-122"/>
                 <a:cs typeface="Arial" pitchFamily="34" charset="-120"/>
               </a:rPr>
-              <a:t>מחלות כרוניות מוגדרות כמצבים בריאותיים ממושכים המתפתחים באופן הדרגתי ומלווים את הפרט לאורך שנים רבות. בשונה ממחלות חריפות הן אינן ניתנות לריפוי מלא במרבית המקרים אלא מנוהלות לאורך זמן, ולפיכך השפעתן על איכות החיים ועל מערכת הבריאות היא מצטברת ומתמשכת.</a:t>
+              <a:t>‏מחלות כרוניות מוגדרות כמצבים בריאותיים ממושכים המתפתחים באופן הדרגתי ומלווים את הפרט לאורך שנים רבות. בשונה ממחלות חריפות הן אינן ניתנות לריפוי מלא במרבית המקרים אלא מנוהלות לאורך זמן, ולפיכך השפעתן על איכות החיים ועל מערכת הבריאות היא מצטברת ומתמשכת.‏</a:t>
             </a:r>
             <a:endParaRPr lang="en-US" sz="1550" dirty="0"/>
           </a:p>
@@ -5294,7 +7195,7 @@
                 <a:ea typeface="Arial" pitchFamily="34" charset="-122"/>
                 <a:cs typeface="Arial" pitchFamily="34" charset="-120"/>
               </a:rPr>
-              <a:t>רב-תחלואה</a:t>
+              <a:t>‏רב-תחלואה‏</a:t>
             </a:r>
             <a:endParaRPr lang="en-US" sz="1550" dirty="0"/>
           </a:p>
@@ -5317,7 +7218,7 @@
                 <a:ea typeface="Arial" pitchFamily="34" charset="-122"/>
                 <a:cs typeface="Arial" pitchFamily="34" charset="-120"/>
               </a:rPr>
-              <a:t>מאפיין בולט של מחלות אלו הוא נטייתן להופיע יחד באותו אדם. מחקר עוקבה שבחן יותר ממאה ושלושים אלף נבדקים מצא כי גורמי אורח חיים מסבירים חלק ניכר מן ההיארעות המשולבת, וכי העישון הוא הגורם הבודד התורם ביותר להתפתחותה (van der Velde et al., 2024). ממצא זה מלמד כי הופעתן המשותפת אינה מקרית אלא קשורה בדפוסי התנהגות משותפים.</a:t>
+              <a:t>‏מאפיין בולט של מחלות אלו הוא נטייתן להופיע יחד באותו אדם. מחקר עוקבה שבחן יותר ממאה ושלושים אלף נבדקים מצא כי גורמי אורח חיים מסבירים חלק ניכר מן ההיארעות המשולבת, וכי העישון הוא הגורם הבודד התורם ביותר להתפתחותה ‏(van der Velde et al., 2024)‏. ממצא זה מלמד כי הופעתן המשותפת אינה מקרית אלא קשורה בדפוסי התנהגות משותפים.‏</a:t>
             </a:r>
             <a:endParaRPr lang="en-US" sz="1550" dirty="0"/>
           </a:p>
@@ -5340,7 +7241,7 @@
                 <a:ea typeface="Arial" pitchFamily="34" charset="-122"/>
                 <a:cs typeface="Arial" pitchFamily="34" charset="-120"/>
               </a:rPr>
-              <a:t>הנטל הכלכלי</a:t>
+              <a:t>‏הנטל הכלכלי‏</a:t>
             </a:r>
             <a:endParaRPr lang="en-US" sz="1550" dirty="0"/>
           </a:p>
@@ -5363,7 +7264,7 @@
                 <a:ea typeface="Arial" pitchFamily="34" charset="-122"/>
                 <a:cs typeface="Arial" pitchFamily="34" charset="-120"/>
               </a:rPr>
-              <a:t>מחקר ישראלי שהתבסס על נתוניהם של למעלה ממיליון ושלושת רבעי מיליון מבוגרים מצא קשר מובהק בין עלייה במדד מסת הגוף לבין שכיחותן של סוכרת, יתר לחץ דם ומחלת לב איסכמית, וכן בין עלייה זו לבין גידול בעלות הטיפול הרפואי (Reges et al., 2020). מכאן שלנטל התחלואה ביטוי כלכלי ישיר ומדיד, וכי ההשקעה במניעה היא שיקול כלכלי ולא בריאותי בלבד.</a:t>
+              <a:t>‏מחקר ישראלי שהתבסס על נתוניהם של למעלה ממיליון ושלושת רבעי מיליון מבוגרים מצא קשר מובהק בין עלייה במדד מסת הגוף לבין שכיחותן של סוכרת, יתר לחץ דם ומחלת לב איסכמית, וכן בין עלייה זו לבין גידול בעלות הטיפול הרפואי ‏(Reges et al., 2020)‏. מכאן שלנטל התחלואה ביטוי כלכלי ישיר ומדיד, וכי ההשקעה במניעה היא שיקול כלכלי ולא בריאותי בלבד.‏</a:t>
             </a:r>
             <a:endParaRPr lang="en-US" sz="1550" dirty="0"/>
           </a:p>
@@ -5583,7 +7484,7 @@
                 <a:ea typeface="Arial" pitchFamily="34" charset="-122"/>
                 <a:cs typeface="Arial" pitchFamily="34" charset="-120"/>
               </a:rPr>
-              <a:t>התזונה והפעילות הגופנית הם שני רכיבי אורח החיים בעלי בסיס הראיות המבוסס ביותר ביחס למניעת מחלות כרוניות, ועוצמתו של בסיס זה נובעת לא רק ממספר המחקרים אלא גם מאיכותם המתודולוגית.</a:t>
+              <a:t>‏התזונה והפעילות הגופנית הם שני רכיבי אורח החיים בעלי בסיס הראיות המבוסס ביותר ביחס למניעת מחלות כרוניות, ועוצמתו של בסיס זה נובעת לא רק ממספר המחקרים אלא גם מאיכותם המתודולוגית.‏</a:t>
             </a:r>
             <a:endParaRPr lang="en-US" sz="1550" dirty="0"/>
           </a:p>
@@ -5606,7 +7507,7 @@
                 <a:ea typeface="Arial" pitchFamily="34" charset="-122"/>
                 <a:cs typeface="Arial" pitchFamily="34" charset="-120"/>
               </a:rPr>
-              <a:t>התזונה</a:t>
+              <a:t>‏התזונה‏</a:t>
             </a:r>
             <a:endParaRPr lang="en-US" sz="1550" dirty="0"/>
           </a:p>
@@ -5629,7 +7530,7 @@
                 <a:ea typeface="Arial" pitchFamily="34" charset="-122"/>
                 <a:cs typeface="Arial" pitchFamily="34" charset="-120"/>
               </a:rPr>
-              <a:t>סקירת-על שבחנה שמונה עשרה מטא-אנליזות מצאה כי הדיאטה הים-תיכונית קשורה בהפחתת התמותה ממחלות לב וכלי דם (Hareer et al., 2024), וסקירה שיטתית עדכנית מצאה כי היצמדות גבוהה אליה קשורה בתמותה כללית מופחתת, הן במניעה ראשונית והן במניעה שניונית (Laffond et al., 2023). סקירה של שלושים ניסויים מבוקרים הראתה כי דיאטת DASH מביאה לירידה מובהקת בלחץ הדם הסיסטולי והדיאסטולי כאחד (Filippou et al., 2020).</a:t>
+              <a:t>‏סקירת-על שבחנה שמונה עשרה מטא-אנליזות מצאה כי הדיאטה הים-תיכונית קשורה בהפחתת התמותה ממחלות לב וכלי דם ‏(Hareer et al., 2024)‏, וסקירה שיטתית עדכנית מצאה כי היצמדות גבוהה אליה קשורה בתמותה כללית מופחתת, הן במניעה ראשונית והן במניעה שניונית ‏(Laffond et al., 2023)‏. סקירה של שלושים ניסויים מבוקרים הראתה כי דיאטת DASH מביאה לירידה מובהקת בלחץ הדם הסיסטולי והדיאסטולי כאחד ‏(Filippou et al., 2020)‏.‏</a:t>
             </a:r>
             <a:endParaRPr lang="en-US" sz="1550" dirty="0"/>
           </a:p>
@@ -5652,7 +7553,7 @@
                 <a:ea typeface="Arial" pitchFamily="34" charset="-122"/>
                 <a:cs typeface="Arial" pitchFamily="34" charset="-120"/>
               </a:rPr>
-              <a:t>הפעילות הגופנית</a:t>
+              <a:t>‏הפעילות הגופנית‏</a:t>
             </a:r>
             <a:endParaRPr lang="en-US" sz="1550" dirty="0"/>
           </a:p>
@@ -5675,7 +7576,7 @@
                 <a:ea typeface="Arial" pitchFamily="34" charset="-122"/>
                 <a:cs typeface="Arial" pitchFamily="34" charset="-120"/>
               </a:rPr>
-              <a:t>מטא-אנליזה של מחקרי עוקבה מצאה יחס מינון-תגובה, שלפיו כל עלייה בהיקף הפעילות קשורה בירידה בתמותה בקרב חולים במחלות לא מדבקות (Geidl et al., 2020). ממצא זה מלמד כי אין מדובר בסף שמעבר לו מושגת תועלת, אלא בקשר רציף שבו כל תוספת תורמת. שילובם של שני הרכיבים יוצר אפקט משלים, ואשכול של הרגלים בריאים נמצא קשור לסיכון מופחת לתחלואה ולתמותה על פני קבוצות חברתיות-כלכליות שונות (Lai et al., 2024; Zhang et al., 2021).</a:t>
+              <a:t>‏מטא-אנליזה של מחקרי עוקבה מצאה יחס מינון-תגובה, שלפיו כל עלייה בהיקף הפעילות קשורה בירידה בתמותה בקרב חולים במחלות לא מדבקות ‏(Geidl et al., 2020)‏. ממצא זה מלמד כי אין מדובר בסף שמעבר לו מושגת תועלת, אלא בקשר רציף שבו כל תוספת תורמת. שילובם של שני הרכיבים יוצר אפקט משלים, ואשכול של הרגלים בריאים נמצא קשור לסיכון מופחת לתחלואה ולתמותה על פני קבוצות חברתיות-כלכליות שונות ‏(Lai et al., 2024; Zhang et al., 2021)‏.‏</a:t>
             </a:r>
             <a:endParaRPr lang="en-US" sz="1550" dirty="0"/>
           </a:p>
@@ -5856,7 +7757,7 @@
                 <a:ea typeface="Arial" pitchFamily="34" charset="-122"/>
                 <a:cs typeface="Arial" pitchFamily="34" charset="-120"/>
               </a:rPr>
-              <a:t>המודל שבבסיס המחקר מבחין בין שלוש חוליות. בקצה האחד ניצב הידע המדעי המבוסס, ובו המלצות ברורות לתזונה מאוזנת ולפעילות גופנית סדירה, הנתמכות בסקירות-על ובמטא-אנליזות. בקצה האחר ניצבת התוצאה הבריאותית, כלומר הסיכון להתפתחותן של מחלות כרוניות ובהן סוכרת מסוג 2, יתר לחץ דם ומחלות לב וכלי דם.</a:t>
+              <a:t>‏המודל שבבסיס המחקר מבחין בין שלוש חוליות. בקצה האחד ניצב הידע המדעי המבוסס, ובו המלצות ברורות לתזונה מאוזנת ולפעילות גופנית סדירה, הנתמכות בסקירות-על ובמטא-אנליזות. בקצה האחר ניצבת התוצאה הבריאותית, כלומר הסיכון להתפתחותן של מחלות כרוניות ובהן סוכרת מסוג 2, יתר לחץ דם ומחלות לב וכלי דם.‏</a:t>
             </a:r>
             <a:endParaRPr lang="en-US" sz="1550" dirty="0"/>
           </a:p>
@@ -5879,7 +7780,7 @@
                 <a:ea typeface="Arial" pitchFamily="34" charset="-122"/>
                 <a:cs typeface="Arial" pitchFamily="34" charset="-120"/>
               </a:rPr>
-              <a:t>הספרות הכמותית ביססה היטב את הקשר בין שני הקצוות הללו, אך התמקדה פחות בחוליה שביניהם. בחוליה זו פועלים בו זמנית חסמים ומנופים: מצד אחד תשתית פיזית חסרה, נורמות חברתיות ומגדריות, עומס חיים והיעדר ליווי מערכתי מתמשך, ומצד שני תמיכה משפחתית, מסגרת קבוצתית ומעקב רפואי יזום. הרכיבים אינם פועלים בבידוד אלא מזינים זה את זה, ולכן התערבות בממד אחד עשויה להשפיע על ממדים נוספים.</a:t>
+              <a:t>‏הספרות הכמותית ביססה היטב את הקשר בין שני הקצוות הללו, אך התמקדה פחות בחוליה שביניהם. בחוליה זו פועלים בו זמנית חסמים ומנופים: מצד אחד תשתית פיזית חסרה, נורמות חברתיות ומגדריות, עומס חיים והיעדר ליווי מערכתי מתמשך, ומצד שני תמיכה משפחתית, מסגרת קבוצתית ומעקב רפואי יזום. הרכיבים אינם פועלים בבידוד אלא מזינים זה את זה, ולכן התערבות בממד אחד עשויה להשפיע על ממדים נוספים.‏</a:t>
             </a:r>
             <a:endParaRPr lang="en-US" sz="1550" dirty="0"/>
           </a:p>
@@ -5902,7 +7803,7 @@
                 <a:ea typeface="Arial" pitchFamily="34" charset="-122"/>
                 <a:cs typeface="Arial" pitchFamily="34" charset="-120"/>
               </a:rPr>
-              <a:t>המחקר הנוכחי ממקם את עצמו בחוליה זו. הוא אינו מבקש לאשש מחדש קשר שכבר הוכח, אלא לבחון מה מתרחש בפועל בין הידע לבין ההתנהגות בחיי היומיום של מבוגרים בנגב, ומהם התנאים המאפשרים או המונעים את התרגום של האחד לשני.</a:t>
+              <a:t>‏המחקר הנוכחי ממקם את עצמו בחוליה זו. הוא אינו מבקש לאשש מחדש קשר שכבר הוכח, אלא לבחון מה מתרחש בפועל בין הידע לבין ההתנהגות בחיי היומיום של מבוגרים בנגב, ומהם התנאים המאפשרים או המונעים את התרגום של האחד לשני.‏</a:t>
             </a:r>
             <a:endParaRPr lang="en-US" sz="1550" dirty="0"/>
           </a:p>
@@ -6083,7 +7984,7 @@
                 <a:ea typeface="Arial" pitchFamily="34" charset="-122"/>
                 <a:cs typeface="Arial" pitchFamily="34" charset="-120"/>
               </a:rPr>
-              <a:t>המחקר נערך בגישה איכותנית, ובתוכה בגישה הפנומנולוגית, המתמקדת בחקר משמעותה של חוויה אנושית כפי שהיא נתפסת על ידי החווים אותה (צבר בן-יהושע, 2016). בחירה זו נגזרת משאלת המחקר עצמה: הקשר הסטטיסטי בין תזונה ופעילות גופנית לבין תחלואה כרונית נחקר בהרחבה במחקרים כמותיים, ואילו השאלה מדוע אנשים המכירים את ההמלצות אינם מיישמים אותן מחייבת גישה המאפשרת לרדת לרזולוציה של חיי היומיום (שקדי, 2003).</a:t>
+              <a:t>‏המחקר נערך בגישה איכותנית, ובתוכה בגישה הפנומנולוגית, המתמקדת בחקר משמעותה של חוויה אנושית כפי שהיא נתפסת על ידי החווים אותה ‏(צבר בן-יהושע, 2016)‏. בחירה זו נגזרת משאלת המחקר עצמה: הקשר הסטטיסטי בין תזונה ופעילות גופנית לבין תחלואה כרונית נחקר בהרחבה במחקרים כמותיים, ואילו השאלה מדוע אנשים המכירים את ההמלצות אינם מיישמים אותן מחייבת גישה המאפשרת לרדת לרזולוציה של חיי היומיום ‏(שקדי, 2003)‏.‏</a:t>
             </a:r>
             <a:endParaRPr lang="en-US" sz="1550" dirty="0"/>
           </a:p>
@@ -6106,7 +8007,7 @@
                 <a:ea typeface="Arial" pitchFamily="34" charset="-122"/>
                 <a:cs typeface="Arial" pitchFamily="34" charset="-120"/>
               </a:rPr>
-              <a:t>כלי המחקר היה ריאיון עומק חצי מובנה בן חמש עשרה שאלות פתוחות, ובהן שאלת פתיחה כללית. מבנה זה נבחר משום שהוא משלב אחידות, המאפשרת השוואה בין המרואיינים, עם גמישות המאפשרת העמקה בנושאים העולים מן המרואיין עצמו. השאלות אורגנו בארבעה אשכולות, שעסקו בתפיסות בריאות, בהתנהגות בפועל, בהקשר המשפחתי והקהילתי, ובמערכת הבריאות ובמקורות המידע. הראיונות נערכו פנים אל פנים במקום שבחר המרואיין, נמשכו בין שלושים לארבעים וחמש דקות, הוקלטו באישור המשתתפים ותומללו במלואם.</a:t>
+              <a:t>‏כלי המחקר היה ריאיון עומק חצי מובנה בן חמש עשרה שאלות פתוחות, ובהן שאלת פתיחה כללית. מבנה זה נבחר משום שהוא משלב אחידות, המאפשרת השוואה בין המרואיינים, עם גמישות המאפשרת העמקה בנושאים העולים מן המרואיין עצמו. השאלות אורגנו בארבעה אשכולות, שעסקו בתפיסות בריאות, בהתנהגות בפועל, בהקשר המשפחתי והקהילתי, ובמערכת הבריאות ובמקורות המידע. הראיונות נערכו פנים אל פנים במקום שבחר המרואיין, נמשכו בין שלושים לארבעים וחמש דקות, הוקלטו באישור המשתתפים ותומללו במלואם.‏</a:t>
             </a:r>
             <a:endParaRPr lang="en-US" sz="1550" dirty="0"/>
           </a:p>
@@ -6129,7 +8030,7 @@
                 <a:ea typeface="Arial" pitchFamily="34" charset="-122"/>
                 <a:cs typeface="Arial" pitchFamily="34" charset="-120"/>
               </a:rPr>
-              <a:t>ניתוח הנתונים נעשה בשיטת הניתוח התמטי בשישה שלבים, מקידוד פתוח ועד גיבוש התמות הסופיות ובחירת הציטוטים המייצגים (Braun &amp; Clarke, 2006). כל אחד משלושת החוקרים ניתח את החומר בנפרד, וההשוואה בין הניתוחים סייעה לזהות פרשנויות שאינן נשענות על הנתונים ולחזק את אמינות הממצאים (Lincoln &amp; Guba, 1985).</a:t>
+              <a:t>‏ניתוח הנתונים נעשה בשיטת הניתוח התמטי בשישה שלבים, מקידוד פתוח ועד גיבוש התמות הסופיות ובחירת הציטוטים המייצגים ‏(Braun &amp; Clarke, 2006)‏. כל אחד משלושת החוקרים ניתח את החומר בנפרד, וההשוואה בין הניתוחים סייעה לזהות פרשנויות שאינן נשענות על הנתונים ולחזק את אמינות הממצאים ‏(Lincoln &amp; Guba, 1985)‏.‏</a:t>
             </a:r>
             <a:endParaRPr lang="en-US" sz="1550" dirty="0"/>
           </a:p>
@@ -6310,7 +8211,7 @@
                 <a:ea typeface="Arial" pitchFamily="34" charset="-122"/>
                 <a:cs typeface="Arial" pitchFamily="34" charset="-120"/>
               </a:rPr>
-              <a:t>אוכלוסיית המחקר כללה שנים עשר משתתפים, שישה גברים ושש נשים, בגילאי ארבעים וארבע עד שבעים ואחת, תושבי שלושה יישובים במחוז הדרום: כסייפה, ערד וחורה. הדגימה הייתה מכוונת ומגוונת, ונשמרה בה שונות מרבית בארבעה ממדים: מצב בריאותי, מגדר, רקע חברתי-תרבותי ורמת הפעילות הגופנית. כך נכללו במדגם חולים כרוניים ותיקים, אנשים במצב טרום-סוכרתי, מחלים מאירוע לב ואנשים ללא אבחנה מוכרת, לצד מי שמקיימים שגרת פעילות מבוססת ומי שאינם עוסקים בפעילות גופנית כלל.</a:t>
+              <a:t>‏אוכלוסיית המחקר כללה שנים עשר משתתפים, שישה גברים ושש נשים, בגילאי ארבעים וארבע עד שבעים ואחת, תושבי שלושה יישובים במחוז הדרום: כסייפה, ערד וחורה. הדגימה הייתה מכוונת ומגוונת, ונשמרה בה שונות מרבית בארבעה ממדים: מצב בריאותי, מגדר, רקע חברתי-תרבותי ורמת הפעילות הגופנית. כך נכללו במדגם חולים כרוניים ותיקים, אנשים במצב טרום-סוכרתי, מחלים מאירוע לב ואנשים ללא אבחנה מוכרת, לצד מי שמקיימים שגרת פעילות מבוססת ומי שאינם עוסקים בפעילות גופנית כלל.‏</a:t>
             </a:r>
             <a:endParaRPr lang="en-US" sz="1550" dirty="0"/>
           </a:p>
@@ -6333,7 +8234,7 @@
                 <a:ea typeface="Arial" pitchFamily="34" charset="-122"/>
                 <a:cs typeface="Arial" pitchFamily="34" charset="-120"/>
               </a:rPr>
-              <a:t>שמונה ראיונות נערכו בעברית וארבעה בערבית לפי בחירת המרואיין, ותורגמו לעברית על ידי החוקרים תוך שמירה על סגנון הדיבור ועל הביטויים האופייניים, כדי לשמר את הקול האותנטי של המרואיינים.</a:t>
+              <a:t>‏שמונה ראיונות נערכו בעברית וארבעה בערבית לפי בחירת המרואיין, ותורגמו לעברית על ידי החוקרים תוך שמירה על סגנון הדיבור ועל הביטויים האופייניים, כדי לשמר את הקול האותנטי של המרואיינים.‏</a:t>
             </a:r>
             <a:endParaRPr lang="en-US" sz="1550" dirty="0"/>
           </a:p>
@@ -6356,7 +8257,7 @@
                 <a:ea typeface="Arial" pitchFamily="34" charset="-122"/>
                 <a:cs typeface="Arial" pitchFamily="34" charset="-120"/>
               </a:rPr>
-              <a:t>המחקר נערך תוך הקפדה על עקרונות אתיקה מקובלים. כל המשתתפים נתנו הסכמה מדעת, ההשתתפות הייתה וולונטרית וללא תמורה, וכל הפרטים המזהים הושמטו מן התמלילים כך שכל משתתף מסומן במספר בלבד. היבט אתי נוסף נוגע לכך ששלושת החוקרים הם בני החברה הנחקרת, מצב שיצר יתרון של אמון ופתיחות לצד סיכון להטיה, אשר צומצם בהבהרה למרואיינים כי אין תשובות נכונות או שגויות וכי המחקר אינו בוחן אותם.</a:t>
+              <a:t>‏המחקר נערך תוך הקפדה על עקרונות אתיקה מקובלים. כל המשתתפים נתנו הסכמה מדעת, ההשתתפות הייתה וולונטרית וללא תמורה, וכל הפרטים המזהים הושמטו מן התמלילים כך שכל משתתף מסומן במספר בלבד. היבט אתי נוסף נוגע לכך ששלושת החוקרים הם בני החברה הנחקרת, מצב שיצר יתרון של אמון ופתיחות לצד סיכון להטיה, אשר צומצם בהבהרה למרואיינים כי אין תשובות נכונות או שגויות וכי המחקר אינו בוחן אותם.‏</a:t>
             </a:r>
             <a:endParaRPr lang="en-US" sz="1550" dirty="0"/>
           </a:p>
@@ -6576,7 +8477,7 @@
                 <a:ea typeface="Arial" pitchFamily="34" charset="-122"/>
                 <a:cs typeface="Arial" pitchFamily="34" charset="-120"/>
               </a:rPr>
-              <a:t>מניתוח שנים עשר הראיונות עלו שש תמות מרכזיות, המצטרפות יחד לתמונה אחת. התמה הראשונה, שעלתה בכל הראיונות, היא הפער בין הידע לבין היישום, ולצידה התמה השנייה, שעניינה תפקידה הכפול של המשפחה כמנוע וכבלם בו זמנית. התמה השלישית עוסקת בתשתית הפיזית והמגדרית כתנאי מקדים לפעילות, והרביעית בנקודת המפנה, כלומר באירוע הבריאותי שהוא הטריגר השכיח ביותר לשינוי בפועל.</a:t>
+              <a:t>‏מניתוח שנים עשר הראיונות עלו שש תמות מרכזיות, המצטרפות יחד לתמונה אחת. התמה הראשונה, שעלתה בכל הראיונות, היא הפער בין הידע לבין היישום, ולצידה התמה השנייה, שעניינה תפקידה הכפול של המשפחה כמנוע וכבלם בו זמנית. התמה השלישית עוסקת בתשתית הפיזית והמגדרית כתנאי מקדים לפעילות, והרביעית בנקודת המפנה, כלומר באירוע הבריאותי שהוא הטריגר השכיח ביותר לשינוי בפועל.‏</a:t>
             </a:r>
             <a:endParaRPr lang="en-US" sz="1550" dirty="0"/>
           </a:p>
@@ -6599,7 +8500,7 @@
                 <a:ea typeface="Arial" pitchFamily="34" charset="-122"/>
                 <a:cs typeface="Arial" pitchFamily="34" charset="-120"/>
               </a:rPr>
-              <a:t>התמה החמישית עוסקת בתפיסת מערכת הבריאות כמצוינת בטיפול וחלשה במניעה יזומה, והשישית בסביבת מידע רוויה שבה האמון נבנה על היכרות אישית ועל שפה משותפת יותר מאשר על סמכות מקצועית פורמלית.</a:t>
+              <a:t>‏התמה החמישית עוסקת בתפיסת מערכת הבריאות כמצוינת בטיפול וחלשה במניעה יזומה, והשישית בסביבת מידע רוויה שבה האמון נבנה על היכרות אישית ועל שפה משותפת יותר מאשר על סמכות מקצועית פורמלית.‏</a:t>
             </a:r>
             <a:endParaRPr lang="en-US" sz="1550" dirty="0"/>
           </a:p>
@@ -6622,7 +8523,7 @@
                 <a:ea typeface="Arial" pitchFamily="34" charset="-122"/>
                 <a:cs typeface="Arial" pitchFamily="34" charset="-120"/>
               </a:rPr>
-              <a:t>הקו המחבר בין שש התמות הוא שהחסם המרכזי אינו מצוי בידע. כל המשתתפים, לרבות מרואיין שאינו יודע קרוא וכתוב, ידעו לנסח את עקרונות אורח החיים הבריא, והקושי שדווח היה בהתמדה וביישום ולא בהבנה. הציטוטים המובאים בשקופיות הבאות הם דברי משתתפי המחקר כלשונם, ומספר המרואיין מצוין בסוגריים.</a:t>
+              <a:t>‏הקו המחבר בין שש התמות הוא שהחסם המרכזי אינו מצוי בידע. כל המשתתפים, לרבות מרואיין שאינו יודע קרוא וכתוב, ידעו לנסח את עקרונות אורח החיים הבריא, והקושי שדווח היה בהתמדה וביישום ולא בהבנה. הציטוטים המובאים בשקופיות הבאות הם דברי משתתפי המחקר כלשונם, ומספר המרואיין מצוין בסוגריים.‏</a:t>
             </a:r>
             <a:endParaRPr lang="en-US" sz="1550" dirty="0"/>
           </a:p>

--- a/מצגת פרויקט גמר - פעילות גופנית ותזונה ומחלות כרוניות.pptx
+++ b/מצגת פרויקט גמר - פעילות גופנית ותזונה ומחלות כרוניות.pptx
@@ -24,11 +24,9 @@
     <p:sldId id="272" r:id="rId18"/>
     <p:sldId id="273" r:id="rId19"/>
     <p:sldId id="274" r:id="rId20"/>
-    <p:sldId id="275" r:id="rId21"/>
-    <p:sldId id="276" r:id="rId22"/>
   </p:sldIdLst>
   <p:notesMasterIdLst>
-    <p:notesMasterId r:id="rId23"/>
+    <p:notesMasterId r:id="rId21"/>
   </p:notesMasterIdLst>
   <p:sldSz cx="12192000" cy="6858000"/>
   <p:notesSz cx="6858000" cy="12192000"/>
@@ -1314,7 +1312,7 @@
           <a:p>
             <a:r>
               <a:rPr lang="en-US" dirty="0"/>
-              <a:t>כל מקור שאוזכר במצגת מופיע ברשימה, וכל פריט ברשימה אוזכר במצגת. הרשימה המלאה מופיעה בעבודה הכתובה.</a:t>
+              <a:t>כל מקור שאוזכר במצגת מופיע ברשימה, וכל פריט ברשימה אוזכר במצגת. הרשימה הביבליוגרפית המלאה, בפורמט APA מלא, מופיעה בעבודה הכתובה.</a:t>
             </a:r>
             <a:endParaRPr lang="en-US" dirty="0"/>
           </a:p>
@@ -1402,7 +1400,7 @@
           <a:p>
             <a:r>
               <a:rPr lang="en-US" dirty="0"/>
-              <a:t>כל מקור שאוזכר במצגת מופיע ברשימה, וכל פריט ברשימה אוזכר במצגת. הרשימה המלאה מופיעה בעבודה הכתובה.</a:t>
+              <a:t>שקופית סיום. כאן נפתח את הרצפה לשאלות.</a:t>
             </a:r>
             <a:endParaRPr lang="en-US" dirty="0"/>
           </a:p>
@@ -1514,182 +1512,6 @@
             <a:fld id="{F7021451-1387-4CA6-816F-3879F97B5CBC}" type="slidenum">
               <a:rPr lang="en-US"/>
               <a:t>2</a:t>
-            </a:fld>
-            <a:endParaRPr lang="en-US"/>
-          </a:p>
-        </p:txBody>
-      </p:sp>
-    </p:spTree>
-    <p:extLst>
-      <p:ext uri="{BB962C8B-B14F-4D97-AF65-F5344CB8AC3E}">
-        <p14:creationId xmlns:p14="http://schemas.microsoft.com/office/powerpoint/2010/main" val="1024086991"/>
-      </p:ext>
-    </p:extLst>
-  </p:cSld>
-  <p:clrMapOvr>
-    <a:masterClrMapping/>
-  </p:clrMapOvr>
-</p:notes>
-</file>
-
-<file path=ppt/notesSlides/notesSlide20.xml><?xml version="1.0" encoding="utf-8"?>
-<p:notes xmlns:a="http://schemas.openxmlformats.org/drawingml/2006/main" xmlns:r="http://schemas.openxmlformats.org/officeDocument/2006/relationships" xmlns:p="http://schemas.openxmlformats.org/presentationml/2006/main">
-  <p:cSld>
-    <p:spTree>
-      <p:nvGrpSpPr>
-        <p:cNvPr id="1" name=""/>
-        <p:cNvGrpSpPr/>
-        <p:nvPr/>
-      </p:nvGrpSpPr>
-      <p:grpSpPr>
-        <a:xfrm>
-          <a:off x="0" y="0"/>
-          <a:ext cx="0" cy="0"/>
-          <a:chOff x="0" y="0"/>
-          <a:chExt cx="0" cy="0"/>
-        </a:xfrm>
-      </p:grpSpPr>
-      <p:sp>
-        <p:nvSpPr>
-          <p:cNvPr id="2" name="Slide Image Placeholder 1"/>
-          <p:cNvSpPr>
-            <a:spLocks noGrp="1" noRot="1" noChangeAspect="1"/>
-          </p:cNvSpPr>
-          <p:nvPr>
-            <p:ph type="sldImg"/>
-          </p:nvPr>
-        </p:nvSpPr>
-        <p:spPr/>
-      </p:sp>
-      <p:sp>
-        <p:nvSpPr>
-          <p:cNvPr id="3" name="Notes Placeholder 2"/>
-          <p:cNvSpPr>
-            <a:spLocks noGrp="1"/>
-          </p:cNvSpPr>
-          <p:nvPr>
-            <p:ph type="body" idx="1"/>
-          </p:nvPr>
-        </p:nvSpPr>
-        <p:spPr/>
-        <p:txBody>
-          <a:bodyPr/>
-          <a:lstStyle/>
-          <a:p>
-            <a:r>
-              <a:rPr lang="en-US" dirty="0"/>
-              <a:t>כל מקור שאוזכר במצגת מופיע ברשימה, וכל פריט ברשימה אוזכר במצגת. הרשימה המלאה מופיעה בעבודה הכתובה.</a:t>
-            </a:r>
-            <a:endParaRPr lang="en-US" dirty="0"/>
-          </a:p>
-        </p:txBody>
-      </p:sp>
-      <p:sp>
-        <p:nvSpPr>
-          <p:cNvPr id="4" name="Slide Number Placeholder 3"/>
-          <p:cNvSpPr>
-            <a:spLocks noGrp="1"/>
-          </p:cNvSpPr>
-          <p:nvPr>
-            <p:ph type="sldNum" sz="quarter" idx="10"/>
-          </p:nvPr>
-        </p:nvSpPr>
-        <p:spPr/>
-        <p:txBody>
-          <a:bodyPr/>
-          <a:lstStyle/>
-          <a:p>
-            <a:fld id="{F7021451-1387-4CA6-816F-3879F97B5CBC}" type="slidenum">
-              <a:rPr lang="en-US"/>
-              <a:t>20</a:t>
-            </a:fld>
-            <a:endParaRPr lang="en-US"/>
-          </a:p>
-        </p:txBody>
-      </p:sp>
-    </p:spTree>
-    <p:extLst>
-      <p:ext uri="{BB962C8B-B14F-4D97-AF65-F5344CB8AC3E}">
-        <p14:creationId xmlns:p14="http://schemas.microsoft.com/office/powerpoint/2010/main" val="1024086991"/>
-      </p:ext>
-    </p:extLst>
-  </p:cSld>
-  <p:clrMapOvr>
-    <a:masterClrMapping/>
-  </p:clrMapOvr>
-</p:notes>
-</file>
-
-<file path=ppt/notesSlides/notesSlide21.xml><?xml version="1.0" encoding="utf-8"?>
-<p:notes xmlns:a="http://schemas.openxmlformats.org/drawingml/2006/main" xmlns:r="http://schemas.openxmlformats.org/officeDocument/2006/relationships" xmlns:p="http://schemas.openxmlformats.org/presentationml/2006/main">
-  <p:cSld>
-    <p:spTree>
-      <p:nvGrpSpPr>
-        <p:cNvPr id="1" name=""/>
-        <p:cNvGrpSpPr/>
-        <p:nvPr/>
-      </p:nvGrpSpPr>
-      <p:grpSpPr>
-        <a:xfrm>
-          <a:off x="0" y="0"/>
-          <a:ext cx="0" cy="0"/>
-          <a:chOff x="0" y="0"/>
-          <a:chExt cx="0" cy="0"/>
-        </a:xfrm>
-      </p:grpSpPr>
-      <p:sp>
-        <p:nvSpPr>
-          <p:cNvPr id="2" name="Slide Image Placeholder 1"/>
-          <p:cNvSpPr>
-            <a:spLocks noGrp="1" noRot="1" noChangeAspect="1"/>
-          </p:cNvSpPr>
-          <p:nvPr>
-            <p:ph type="sldImg"/>
-          </p:nvPr>
-        </p:nvSpPr>
-        <p:spPr/>
-      </p:sp>
-      <p:sp>
-        <p:nvSpPr>
-          <p:cNvPr id="3" name="Notes Placeholder 2"/>
-          <p:cNvSpPr>
-            <a:spLocks noGrp="1"/>
-          </p:cNvSpPr>
-          <p:nvPr>
-            <p:ph type="body" idx="1"/>
-          </p:nvPr>
-        </p:nvSpPr>
-        <p:spPr/>
-        <p:txBody>
-          <a:bodyPr/>
-          <a:lstStyle/>
-          <a:p>
-            <a:r>
-              <a:rPr lang="en-US" dirty="0"/>
-              <a:t>שקופית סיום. כאן נפתח את הרצפה לשאלות.</a:t>
-            </a:r>
-            <a:endParaRPr lang="en-US" dirty="0"/>
-          </a:p>
-        </p:txBody>
-      </p:sp>
-      <p:sp>
-        <p:nvSpPr>
-          <p:cNvPr id="4" name="Slide Number Placeholder 3"/>
-          <p:cNvSpPr>
-            <a:spLocks noGrp="1"/>
-          </p:cNvSpPr>
-          <p:nvPr>
-            <p:ph type="sldNum" sz="quarter" idx="10"/>
-          </p:nvPr>
-        </p:nvSpPr>
-        <p:spPr/>
-        <p:txBody>
-          <a:bodyPr/>
-          <a:lstStyle/>
-          <a:p>
-            <a:fld id="{F7021451-1387-4CA6-816F-3879F97B5CBC}" type="slidenum">
-              <a:rPr lang="en-US"/>
-              <a:t>21</a:t>
             </a:fld>
             <a:endParaRPr lang="en-US"/>
           </a:p>
@@ -3307,8 +3129,8 @@
         </p:nvSpPr>
         <p:spPr>
           <a:xfrm>
-            <a:off x="1417320" y="274320"/>
-            <a:ext cx="10271455" cy="603504"/>
+            <a:off x="1417320" y="265176"/>
+            <a:ext cx="10271455" cy="237744"/>
           </a:xfrm>
           <a:prstGeom prst="rect">
             <a:avLst/>
@@ -3324,17 +3146,17 @@
               <a:buNone/>
             </a:pPr>
             <a:r>
-              <a:rPr lang="en-US" sz="3100" b="1" dirty="0">
-                <a:solidFill>
-                  <a:srgbClr val="0C3B44"/>
-                </a:solidFill>
-                <a:latin typeface="Arial" pitchFamily="34" charset="0"/>
-                <a:ea typeface="Arial" pitchFamily="34" charset="-122"/>
-                <a:cs typeface="Arial" pitchFamily="34" charset="-120"/>
-              </a:rPr>
-              <a:t>ממצאים מרכזיים</a:t>
-            </a:r>
-            <a:endParaRPr lang="en-US" sz="3100" dirty="0"/>
+              <a:rPr lang="en-US" sz="1250" b="1" spc="140" kern="0" dirty="0">
+                <a:solidFill>
+                  <a:srgbClr val="1D9E9A"/>
+                </a:solidFill>
+                <a:latin typeface="Arial" pitchFamily="34" charset="0"/>
+                <a:ea typeface="Arial" pitchFamily="34" charset="-122"/>
+                <a:cs typeface="Arial" pitchFamily="34" charset="-120"/>
+              </a:rPr>
+              <a:t>ממצאים</a:t>
+            </a:r>
+            <a:endParaRPr lang="en-US" sz="1250" dirty="0"/>
           </a:p>
         </p:txBody>
       </p:sp>
@@ -3346,8 +3168,8 @@
         </p:nvSpPr>
         <p:spPr>
           <a:xfrm>
-            <a:off x="1417320" y="877824"/>
-            <a:ext cx="10271455" cy="310896"/>
+            <a:off x="1417320" y="484632"/>
+            <a:ext cx="10271455" cy="530352"/>
           </a:xfrm>
           <a:prstGeom prst="rect">
             <a:avLst/>
@@ -3363,9 +3185,48 @@
               <a:buNone/>
             </a:pPr>
             <a:r>
+              <a:rPr lang="en-US" sz="3000" b="1" dirty="0">
+                <a:solidFill>
+                  <a:srgbClr val="0C3B44"/>
+                </a:solidFill>
+                <a:latin typeface="Arial" pitchFamily="34" charset="0"/>
+                <a:ea typeface="Arial" pitchFamily="34" charset="-122"/>
+                <a:cs typeface="Arial" pitchFamily="34" charset="-120"/>
+              </a:rPr>
+              <a:t>ממצאים מרכזיים</a:t>
+            </a:r>
+            <a:endParaRPr lang="en-US" sz="3000" dirty="0"/>
+          </a:p>
+        </p:txBody>
+      </p:sp>
+      <p:sp>
+        <p:nvSpPr>
+          <p:cNvPr id="4" name="Text 2"/>
+          <p:cNvSpPr txBox="1"/>
+          <p:nvPr/>
+        </p:nvSpPr>
+        <p:spPr>
+          <a:xfrm>
+            <a:off x="1417320" y="996696"/>
+            <a:ext cx="10271455" cy="274320"/>
+          </a:xfrm>
+          <a:prstGeom prst="rect">
+            <a:avLst/>
+          </a:prstGeom>
+          <a:noFill/>
+          <a:ln/>
+        </p:spPr>
+        <p:txBody>
+          <a:bodyPr wrap="square" lIns="0" tIns="0" rIns="0" bIns="0" rtlCol="0" anchor="ctr"/>
+          <a:lstStyle/>
+          <a:p>
+            <a:pPr rtl="1" algn="r" indent="0" marL="0">
+              <a:buNone/>
+            </a:pPr>
+            <a:r>
               <a:rPr lang="en-US" sz="1500" b="1" dirty="0">
                 <a:solidFill>
-                  <a:srgbClr val="1D9E9A"/>
+                  <a:srgbClr val="0E6E7E"/>
                 </a:solidFill>
                 <a:latin typeface="Arial" pitchFamily="34" charset="0"/>
                 <a:ea typeface="Arial" pitchFamily="34" charset="-122"/>
@@ -3379,18 +3240,18 @@
       </p:sp>
       <p:sp>
         <p:nvSpPr>
-          <p:cNvPr id="4" name="Shape 2"/>
+          <p:cNvPr id="5" name="Shape 3"/>
           <p:cNvSpPr/>
           <p:nvPr/>
         </p:nvSpPr>
         <p:spPr>
           <a:xfrm>
-            <a:off x="502920" y="1316736"/>
-            <a:ext cx="11185855" cy="4882896"/>
+            <a:off x="502920" y="1307592"/>
+            <a:ext cx="11185855" cy="4910328"/>
           </a:xfrm>
           <a:prstGeom prst="roundRect">
             <a:avLst>
-              <a:gd name="adj" fmla="val 1873"/>
+              <a:gd name="adj" fmla="val 2235"/>
             </a:avLst>
           </a:prstGeom>
           <a:solidFill>
@@ -3398,7 +3259,7 @@
           </a:solidFill>
           <a:ln w="12700">
             <a:solidFill>
-              <a:srgbClr val="F2F8F9"/>
+              <a:srgbClr val="D5E7E9"/>
             </a:solidFill>
             <a:prstDash val="solid"/>
           </a:ln>
@@ -3406,14 +3267,14 @@
       </p:sp>
       <p:sp>
         <p:nvSpPr>
-          <p:cNvPr id="5" name="Text 3"/>
+          <p:cNvPr id="6" name="Text 4"/>
           <p:cNvSpPr txBox="1"/>
           <p:nvPr/>
         </p:nvSpPr>
         <p:spPr>
           <a:xfrm>
-            <a:off x="886968" y="1591056"/>
-            <a:ext cx="10417759" cy="4608576"/>
+            <a:off x="923544" y="1545336"/>
+            <a:ext cx="10344607" cy="4782312"/>
           </a:xfrm>
           <a:prstGeom prst="rect">
             <a:avLst/>
@@ -3427,12 +3288,12 @@
           <a:p>
             <a:pPr algn="r" indent="0" marL="0">
               <a:lnSpc>
-                <a:spcPts val="2500"/>
+                <a:spcPts val="2600"/>
               </a:lnSpc>
               <a:buNone/>
             </a:pPr>
             <a:r>
-              <a:rPr lang="en-US" sz="1550" dirty="0">
+              <a:rPr lang="en-US" sz="1700" dirty="0">
                 <a:solidFill>
                   <a:srgbClr val="0C3B44"/>
                 </a:solidFill>
@@ -3442,12 +3303,12 @@
               </a:rPr>
               <a:t>‏הפער בין הידע לבין היישום עלה בכל שנים עשר הראיונות. הניסוח החד ביותר הובא בדברי מרואיין בן ארבעים וארבע מחורה, שאינו עוסק בפעילות גופנית ומעשן קופסה וחצי ביום: “אני יודע את כל זה, אני יודע הכול ולא עושה כלום. בן אדם לא מאמין שזה יקרה לו, עד שזה קורה לו” ‏(מרואיין 5)‏. גמלאי בן שישים ושמונה הצביע על גורם עומק, ולפיו תפיסת המחלה בדורו היא תפיסה של גורל ולא של בחירה: “כל החיים שלי דברים קרו לי, לא אני קרהתי אותם” ‏(מרואיין 11)‏.‏</a:t>
             </a:r>
-            <a:endParaRPr lang="en-US" sz="1550" dirty="0"/>
+            <a:endParaRPr lang="en-US" sz="1700" dirty="0"/>
           </a:p>
           <a:p>
             <a:pPr algn="r" indent="0" marL="0">
               <a:lnSpc>
-                <a:spcPts val="2500"/>
+                <a:spcPts val="2600"/>
               </a:lnSpc>
               <a:spcBef>
                 <a:spcPts val="700"/>
@@ -3455,7 +3316,7 @@
               <a:buNone/>
             </a:pPr>
             <a:r>
-              <a:rPr lang="en-US" sz="1550" dirty="0">
+              <a:rPr lang="en-US" sz="1700" dirty="0">
                 <a:solidFill>
                   <a:srgbClr val="0C3B44"/>
                 </a:solidFill>
@@ -3465,12 +3326,12 @@
               </a:rPr>
               <a:t>‏תפקידה הכפול של המשפחה עלה אף הוא בכל הראיונות. מצד אחד היא תוארה כתנאי להצלחה, ומורה בן חמישים וחמש שירד שנים עשר קילוגרם ייחס את השינוי לשותפות עם בת זוגו וכינה זאת “הפרויקט המשותף הכי מוצלח שלנו אחרי הילדים” ‏(מרואיין 9)‏. מצד שני, מנהגי האירוח והכיבוד תוארו כחסם המרכזי בפני תזונה מאוזנת, ומרואיינת בת שישים ושש הסבירה כי “אצלנו כבוד לאימא זה אוכל” ‏(מרואיינת 6)‏.‏</a:t>
             </a:r>
-            <a:endParaRPr lang="en-US" sz="1550" dirty="0"/>
+            <a:endParaRPr lang="en-US" sz="1700" dirty="0"/>
           </a:p>
           <a:p>
             <a:pPr algn="r" indent="0" marL="0">
               <a:lnSpc>
-                <a:spcPts val="2500"/>
+                <a:spcPts val="2600"/>
               </a:lnSpc>
               <a:spcBef>
                 <a:spcPts val="700"/>
@@ -3478,7 +3339,7 @@
               <a:buNone/>
             </a:pPr>
             <a:r>
-              <a:rPr lang="en-US" sz="1550" dirty="0">
+              <a:rPr lang="en-US" sz="1700" dirty="0">
                 <a:solidFill>
                   <a:srgbClr val="0C3B44"/>
                 </a:solidFill>
@@ -3488,7 +3349,7 @@
               </a:rPr>
               <a:t>‏הניסוח החריף ביותר לתמה זו הובא בדברי מרואיין 11: “מרוב כבוד הם עושים אותי נכה, הכבוד שלנו לזקנים הורג את הזקנים”. חשיבותו של ממצא זה בכך שהחסם אינו נובע מהזנחה או מאדישות, אלא דווקא ממימוש של ערך חברתי מרכזי, ולכן כל התערבות המבקשת לשנותו חייבת לפעול מתוך אותו ערך ולא כנגדו.‏</a:t>
             </a:r>
-            <a:endParaRPr lang="en-US" sz="1550" dirty="0"/>
+            <a:endParaRPr lang="en-US" sz="1700" dirty="0"/>
           </a:p>
         </p:txBody>
       </p:sp>
@@ -3573,8 +3434,8 @@
         </p:nvSpPr>
         <p:spPr>
           <a:xfrm>
-            <a:off x="1417320" y="274320"/>
-            <a:ext cx="10271455" cy="603504"/>
+            <a:off x="1417320" y="265176"/>
+            <a:ext cx="10271455" cy="237744"/>
           </a:xfrm>
           <a:prstGeom prst="rect">
             <a:avLst/>
@@ -3590,17 +3451,17 @@
               <a:buNone/>
             </a:pPr>
             <a:r>
-              <a:rPr lang="en-US" sz="3100" b="1" dirty="0">
-                <a:solidFill>
-                  <a:srgbClr val="0C3B44"/>
-                </a:solidFill>
-                <a:latin typeface="Arial" pitchFamily="34" charset="0"/>
-                <a:ea typeface="Arial" pitchFamily="34" charset="-122"/>
-                <a:cs typeface="Arial" pitchFamily="34" charset="-120"/>
-              </a:rPr>
-              <a:t>ממצאים מרכזיים</a:t>
-            </a:r>
-            <a:endParaRPr lang="en-US" sz="3100" dirty="0"/>
+              <a:rPr lang="en-US" sz="1250" b="1" spc="140" kern="0" dirty="0">
+                <a:solidFill>
+                  <a:srgbClr val="1D9E9A"/>
+                </a:solidFill>
+                <a:latin typeface="Arial" pitchFamily="34" charset="0"/>
+                <a:ea typeface="Arial" pitchFamily="34" charset="-122"/>
+                <a:cs typeface="Arial" pitchFamily="34" charset="-120"/>
+              </a:rPr>
+              <a:t>ממצאים</a:t>
+            </a:r>
+            <a:endParaRPr lang="en-US" sz="1250" dirty="0"/>
           </a:p>
         </p:txBody>
       </p:sp>
@@ -3612,8 +3473,8 @@
         </p:nvSpPr>
         <p:spPr>
           <a:xfrm>
-            <a:off x="1417320" y="877824"/>
-            <a:ext cx="10271455" cy="310896"/>
+            <a:off x="1417320" y="484632"/>
+            <a:ext cx="10271455" cy="530352"/>
           </a:xfrm>
           <a:prstGeom prst="rect">
             <a:avLst/>
@@ -3629,9 +3490,48 @@
               <a:buNone/>
             </a:pPr>
             <a:r>
+              <a:rPr lang="en-US" sz="3000" b="1" dirty="0">
+                <a:solidFill>
+                  <a:srgbClr val="0C3B44"/>
+                </a:solidFill>
+                <a:latin typeface="Arial" pitchFamily="34" charset="0"/>
+                <a:ea typeface="Arial" pitchFamily="34" charset="-122"/>
+                <a:cs typeface="Arial" pitchFamily="34" charset="-120"/>
+              </a:rPr>
+              <a:t>ממצאים מרכזיים</a:t>
+            </a:r>
+            <a:endParaRPr lang="en-US" sz="3000" dirty="0"/>
+          </a:p>
+        </p:txBody>
+      </p:sp>
+      <p:sp>
+        <p:nvSpPr>
+          <p:cNvPr id="4" name="Text 2"/>
+          <p:cNvSpPr txBox="1"/>
+          <p:nvPr/>
+        </p:nvSpPr>
+        <p:spPr>
+          <a:xfrm>
+            <a:off x="1417320" y="996696"/>
+            <a:ext cx="10271455" cy="274320"/>
+          </a:xfrm>
+          <a:prstGeom prst="rect">
+            <a:avLst/>
+          </a:prstGeom>
+          <a:noFill/>
+          <a:ln/>
+        </p:spPr>
+        <p:txBody>
+          <a:bodyPr wrap="square" lIns="0" tIns="0" rIns="0" bIns="0" rtlCol="0" anchor="ctr"/>
+          <a:lstStyle/>
+          <a:p>
+            <a:pPr rtl="1" algn="r" indent="0" marL="0">
+              <a:buNone/>
+            </a:pPr>
+            <a:r>
               <a:rPr lang="en-US" sz="1500" b="1" dirty="0">
                 <a:solidFill>
-                  <a:srgbClr val="1D9E9A"/>
+                  <a:srgbClr val="0E6E7E"/>
                 </a:solidFill>
                 <a:latin typeface="Arial" pitchFamily="34" charset="0"/>
                 <a:ea typeface="Arial" pitchFamily="34" charset="-122"/>
@@ -3645,18 +3545,18 @@
       </p:sp>
       <p:sp>
         <p:nvSpPr>
-          <p:cNvPr id="4" name="Shape 2"/>
+          <p:cNvPr id="5" name="Shape 3"/>
           <p:cNvSpPr/>
           <p:nvPr/>
         </p:nvSpPr>
         <p:spPr>
           <a:xfrm>
-            <a:off x="502920" y="1316736"/>
-            <a:ext cx="11185855" cy="4882896"/>
+            <a:off x="502920" y="1307592"/>
+            <a:ext cx="11185855" cy="4910328"/>
           </a:xfrm>
           <a:prstGeom prst="roundRect">
             <a:avLst>
-              <a:gd name="adj" fmla="val 1873"/>
+              <a:gd name="adj" fmla="val 2235"/>
             </a:avLst>
           </a:prstGeom>
           <a:solidFill>
@@ -3664,7 +3564,7 @@
           </a:solidFill>
           <a:ln w="12700">
             <a:solidFill>
-              <a:srgbClr val="F2F8F9"/>
+              <a:srgbClr val="D5E7E9"/>
             </a:solidFill>
             <a:prstDash val="solid"/>
           </a:ln>
@@ -3672,14 +3572,14 @@
       </p:sp>
       <p:sp>
         <p:nvSpPr>
-          <p:cNvPr id="5" name="Text 3"/>
+          <p:cNvPr id="6" name="Text 4"/>
           <p:cNvSpPr txBox="1"/>
           <p:nvPr/>
         </p:nvSpPr>
         <p:spPr>
           <a:xfrm>
-            <a:off x="886968" y="1591056"/>
-            <a:ext cx="10417759" cy="4608576"/>
+            <a:off x="923544" y="1545336"/>
+            <a:ext cx="10344607" cy="4782312"/>
           </a:xfrm>
           <a:prstGeom prst="rect">
             <a:avLst/>
@@ -3693,12 +3593,12 @@
           <a:p>
             <a:pPr algn="r" indent="0" marL="0">
               <a:lnSpc>
-                <a:spcPts val="2500"/>
+                <a:spcPts val="2600"/>
               </a:lnSpc>
               <a:buNone/>
             </a:pPr>
             <a:r>
-              <a:rPr lang="en-US" sz="1550" dirty="0">
+              <a:rPr lang="en-US" sz="1700" dirty="0">
                 <a:solidFill>
                   <a:srgbClr val="0C3B44"/>
                 </a:solidFill>
@@ -3706,14 +3606,14 @@
                 <a:ea typeface="Arial" pitchFamily="34" charset="-122"/>
                 <a:cs typeface="Arial" pitchFamily="34" charset="-120"/>
               </a:rPr>
-              <a:t>‏חסם התשתית עלה בעשרה מתוך שנים עשר הראיונות, ובמרכזו הפער החד בין תושבי ערד לבין תושבי היישובים הבדואיים. מורה בגמלאות בן שבעים ואחת תיאר את ערד כ“עיר של הולכים, מרחקים קצרים, מדרכות, אוויר צלול” ‏(מרואיין 7)‏, ואילו מרואיין 11 סיכם את מצבו במשפט “יש לי משפחה שכל זקן יהודי היה מקנא בה, ואין לי מדרכה אחת ללכת עליה”. חמש מתוך שש המרואיינות התייחסו להיעדרן של מסגרות ספורט מותאמות לנשים וקשרו זאת לנורמות חברתיות.‏</a:t>
-            </a:r>
-            <a:endParaRPr lang="en-US" sz="1550" dirty="0"/>
+              <a:t>‏חסם התשתית עלה בעשרה מתוך שנים עשר הראיונות, ובמרכזו הפער החד בין תושבי ערד לבין תושבי היישובים הבדואיים. מורה בגמלאות בן שבעים ואחת תיאר את ערד כ“עיר של הולכים, מרחקים קצרים, מדרכות” ‏(מרואיין 7)‏, ואילו מרואיין 11 סיכם את מצבו במשפט “יש לי משפחה שכל זקן יהודי היה מקנא בה, ואין לי מדרכה אחת ללכת עליה”. חמש מתוך שש המרואיינות התייחסו להיעדרן של מסגרות ספורט מותאמות לנשים וקשרו זאת לנורמות חברתיות.‏</a:t>
+            </a:r>
+            <a:endParaRPr lang="en-US" sz="1700" dirty="0"/>
           </a:p>
           <a:p>
             <a:pPr algn="r" indent="0" marL="0">
               <a:lnSpc>
-                <a:spcPts val="2500"/>
+                <a:spcPts val="2600"/>
               </a:lnSpc>
               <a:spcBef>
                 <a:spcPts val="700"/>
@@ -3721,7 +3621,7 @@
               <a:buNone/>
             </a:pPr>
             <a:r>
-              <a:rPr lang="en-US" sz="1550" dirty="0">
+              <a:rPr lang="en-US" sz="1700" dirty="0">
                 <a:solidFill>
                   <a:srgbClr val="0C3B44"/>
                 </a:solidFill>
@@ -3729,14 +3629,14 @@
                 <a:ea typeface="Arial" pitchFamily="34" charset="-122"/>
                 <a:cs typeface="Arial" pitchFamily="34" charset="-120"/>
               </a:rPr>
-              <a:t>‏עדות משמעותית לכך שהחסם הוא מבני ולא מוטיבציוני עלתה מריאיון עם סייעת בת ארבעים וחמש, המקיימת שגרת הליכה עם שתי חברות זה ארבע שנים. לדבריה, בעקבות הקבוצה שלהן קמו עוד שתי קבוצות נשים בשכונה, אך ההליכה מתאפשרת רק במסלול אחד שיש בו מדרכה ותאורה ‏(מרואיינת 8)‏. מכאן שתשתית מינימלית מספיקה כדי שתיווצר פעילות שאף מתפשטת.‏</a:t>
-            </a:r>
-            <a:endParaRPr lang="en-US" sz="1550" dirty="0"/>
+              <a:t>‏עדות לכך שהחסם מבני ולא מוטיבציוני עלתה מריאיון עם סייעת בת ארבעים וחמש, המקיימת שגרת הליכה עם שתי חברות זה ארבע שנים. לדבריה, בעקבות הקבוצה שלהן קמו עוד שתי קבוצות נשים בשכונה, אך ההליכה מתאפשרת רק במסלול אחד שיש בו מדרכה ותאורה ‏(מרואיינת 8)‏.‏</a:t>
+            </a:r>
+            <a:endParaRPr lang="en-US" sz="1700" dirty="0"/>
           </a:p>
           <a:p>
             <a:pPr algn="r" indent="0" marL="0">
               <a:lnSpc>
-                <a:spcPts val="2500"/>
+                <a:spcPts val="2600"/>
               </a:lnSpc>
               <a:spcBef>
                 <a:spcPts val="700"/>
@@ -3744,7 +3644,7 @@
               <a:buNone/>
             </a:pPr>
             <a:r>
-              <a:rPr lang="en-US" sz="1550" dirty="0">
+              <a:rPr lang="en-US" sz="1700" dirty="0">
                 <a:solidFill>
                   <a:srgbClr val="0C3B44"/>
                 </a:solidFill>
@@ -3752,9 +3652,9 @@
                 <a:ea typeface="Arial" pitchFamily="34" charset="-122"/>
                 <a:cs typeface="Arial" pitchFamily="34" charset="-120"/>
               </a:rPr>
-              <a:t>‏בתשעה ראיונות זוהתה נקודת מפנה, שלפיה השינוי בפועל לא התרחש בעקבות ידע או הסברה אלא בעקבות אבחנה או אירוע בריאותי. גמלאי בן שישים ושלוש, שעבר צנתור בגיל חמישים ותשע, ניסח את עצתו לאחרים במשפט “אל תחכה לצנתור שלך” ‏(מרואיין 3)‏. משמעות הדפוס כפולה: מצד אחד הוא מלמד כי בני חמישים, שישים ושבעים מסוגלים לשינוי עמוק ומתמשך, ומצד שני הוא מלמד כי המערכת מחמיצה חלון הזדמנויות ארוך שבמהלכו ניתן היה למנוע את הנזק.‏</a:t>
-            </a:r>
-            <a:endParaRPr lang="en-US" sz="1550" dirty="0"/>
+              <a:t>‏בתשעה ראיונות זוהתה נקודת מפנה, שלפיה השינוי בפועל לא התרחש בעקבות ידע או הסברה אלא בעקבות אבחנה או אירוע בריאותי. גמלאי בן שישים ושלוש, שעבר צנתור בגיל חמישים ותשע, ניסח את עצתו לאחרים במשפט “אל תחכה לצנתור שלך” ‏(מרואיין 3)‏. משמעות הדפוס כפולה: מצד אחד הוא מלמד כי בני חמישים, שישים ושבעים מסוגלים לשינוי עמוק ומתמשך, ומצד שני כי המערכת מחמיצה חלון הזדמנויות ארוך שבו ניתן היה למנוע את הנזק.‏</a:t>
+            </a:r>
+            <a:endParaRPr lang="en-US" sz="1700" dirty="0"/>
           </a:p>
         </p:txBody>
       </p:sp>
@@ -3839,8 +3739,8 @@
         </p:nvSpPr>
         <p:spPr>
           <a:xfrm>
-            <a:off x="1417320" y="274320"/>
-            <a:ext cx="10271455" cy="603504"/>
+            <a:off x="1417320" y="265176"/>
+            <a:ext cx="10271455" cy="237744"/>
           </a:xfrm>
           <a:prstGeom prst="rect">
             <a:avLst/>
@@ -3856,17 +3756,17 @@
               <a:buNone/>
             </a:pPr>
             <a:r>
-              <a:rPr lang="en-US" sz="3100" b="1" dirty="0">
-                <a:solidFill>
-                  <a:srgbClr val="0C3B44"/>
-                </a:solidFill>
-                <a:latin typeface="Arial" pitchFamily="34" charset="0"/>
-                <a:ea typeface="Arial" pitchFamily="34" charset="-122"/>
-                <a:cs typeface="Arial" pitchFamily="34" charset="-120"/>
-              </a:rPr>
-              <a:t>ממצאים מרכזיים</a:t>
-            </a:r>
-            <a:endParaRPr lang="en-US" sz="3100" dirty="0"/>
+              <a:rPr lang="en-US" sz="1250" b="1" spc="140" kern="0" dirty="0">
+                <a:solidFill>
+                  <a:srgbClr val="1D9E9A"/>
+                </a:solidFill>
+                <a:latin typeface="Arial" pitchFamily="34" charset="0"/>
+                <a:ea typeface="Arial" pitchFamily="34" charset="-122"/>
+                <a:cs typeface="Arial" pitchFamily="34" charset="-120"/>
+              </a:rPr>
+              <a:t>ממצאים</a:t>
+            </a:r>
+            <a:endParaRPr lang="en-US" sz="1250" dirty="0"/>
           </a:p>
         </p:txBody>
       </p:sp>
@@ -3878,8 +3778,8 @@
         </p:nvSpPr>
         <p:spPr>
           <a:xfrm>
-            <a:off x="1417320" y="877824"/>
-            <a:ext cx="10271455" cy="310896"/>
+            <a:off x="1417320" y="484632"/>
+            <a:ext cx="10271455" cy="530352"/>
           </a:xfrm>
           <a:prstGeom prst="rect">
             <a:avLst/>
@@ -3895,9 +3795,48 @@
               <a:buNone/>
             </a:pPr>
             <a:r>
+              <a:rPr lang="en-US" sz="3000" b="1" dirty="0">
+                <a:solidFill>
+                  <a:srgbClr val="0C3B44"/>
+                </a:solidFill>
+                <a:latin typeface="Arial" pitchFamily="34" charset="0"/>
+                <a:ea typeface="Arial" pitchFamily="34" charset="-122"/>
+                <a:cs typeface="Arial" pitchFamily="34" charset="-120"/>
+              </a:rPr>
+              <a:t>ממצאים מרכזיים</a:t>
+            </a:r>
+            <a:endParaRPr lang="en-US" sz="3000" dirty="0"/>
+          </a:p>
+        </p:txBody>
+      </p:sp>
+      <p:sp>
+        <p:nvSpPr>
+          <p:cNvPr id="4" name="Text 2"/>
+          <p:cNvSpPr txBox="1"/>
+          <p:nvPr/>
+        </p:nvSpPr>
+        <p:spPr>
+          <a:xfrm>
+            <a:off x="1417320" y="996696"/>
+            <a:ext cx="10271455" cy="274320"/>
+          </a:xfrm>
+          <a:prstGeom prst="rect">
+            <a:avLst/>
+          </a:prstGeom>
+          <a:noFill/>
+          <a:ln/>
+        </p:spPr>
+        <p:txBody>
+          <a:bodyPr wrap="square" lIns="0" tIns="0" rIns="0" bIns="0" rtlCol="0" anchor="ctr"/>
+          <a:lstStyle/>
+          <a:p>
+            <a:pPr rtl="1" algn="r" indent="0" marL="0">
+              <a:buNone/>
+            </a:pPr>
+            <a:r>
               <a:rPr lang="en-US" sz="1500" b="1" dirty="0">
                 <a:solidFill>
-                  <a:srgbClr val="1D9E9A"/>
+                  <a:srgbClr val="0E6E7E"/>
                 </a:solidFill>
                 <a:latin typeface="Arial" pitchFamily="34" charset="0"/>
                 <a:ea typeface="Arial" pitchFamily="34" charset="-122"/>
@@ -3911,18 +3850,18 @@
       </p:sp>
       <p:sp>
         <p:nvSpPr>
-          <p:cNvPr id="4" name="Shape 2"/>
+          <p:cNvPr id="5" name="Shape 3"/>
           <p:cNvSpPr/>
           <p:nvPr/>
         </p:nvSpPr>
         <p:spPr>
           <a:xfrm>
-            <a:off x="502920" y="1316736"/>
-            <a:ext cx="11185855" cy="4882896"/>
+            <a:off x="502920" y="1307592"/>
+            <a:ext cx="11185855" cy="4910328"/>
           </a:xfrm>
           <a:prstGeom prst="roundRect">
             <a:avLst>
-              <a:gd name="adj" fmla="val 1873"/>
+              <a:gd name="adj" fmla="val 2235"/>
             </a:avLst>
           </a:prstGeom>
           <a:solidFill>
@@ -3930,7 +3869,7 @@
           </a:solidFill>
           <a:ln w="12700">
             <a:solidFill>
-              <a:srgbClr val="F2F8F9"/>
+              <a:srgbClr val="D5E7E9"/>
             </a:solidFill>
             <a:prstDash val="solid"/>
           </a:ln>
@@ -3938,14 +3877,14 @@
       </p:sp>
       <p:sp>
         <p:nvSpPr>
-          <p:cNvPr id="5" name="Text 3"/>
+          <p:cNvPr id="6" name="Text 4"/>
           <p:cNvSpPr txBox="1"/>
           <p:nvPr/>
         </p:nvSpPr>
         <p:spPr>
           <a:xfrm>
-            <a:off x="886968" y="1591056"/>
-            <a:ext cx="10417759" cy="4608576"/>
+            <a:off x="923544" y="1545336"/>
+            <a:ext cx="10344607" cy="4782312"/>
           </a:xfrm>
           <a:prstGeom prst="rect">
             <a:avLst/>
@@ -3959,12 +3898,12 @@
           <a:p>
             <a:pPr algn="r" indent="0" marL="0">
               <a:lnSpc>
-                <a:spcPts val="2500"/>
+                <a:spcPts val="2600"/>
               </a:lnSpc>
               <a:buNone/>
             </a:pPr>
             <a:r>
-              <a:rPr lang="en-US" sz="1550" dirty="0">
+              <a:rPr lang="en-US" sz="1700" dirty="0">
                 <a:solidFill>
                   <a:srgbClr val="0C3B44"/>
                 </a:solidFill>
@@ -3974,12 +3913,12 @@
               </a:rPr>
               <a:t>‏באחד עשר ראיונות עלתה הערכה גבוהה לאיכות המעקב הרפואי הניתן לאחר אבחנה, לצד ביקורת עקבית על היעדר יוזמה מונעת קודם לה. מרואיין 3 ניסח את ההבחנה במפורש: “המערכת שלנו מצוינת בלטפל בחולים, וחלשה בלמנוע מבריאים להפוך לחולים”. גמלאי שאינו יודע קרוא וכתוב סיכם את כל הליווי שקיבל בשתים עשרה שנות סוכרת כדף מודפס אחד בעברית ‏(מרואיין 11)‏, ממצא הממחיש כי היעדר ההתאמה הלשונית אינו פרט טכני אלא חסם מהותי.‏</a:t>
             </a:r>
-            <a:endParaRPr lang="en-US" sz="1550" dirty="0"/>
+            <a:endParaRPr lang="en-US" sz="1700" dirty="0"/>
           </a:p>
           <a:p>
             <a:pPr algn="r" indent="0" marL="0">
               <a:lnSpc>
-                <a:spcPts val="2500"/>
+                <a:spcPts val="2600"/>
               </a:lnSpc>
               <a:spcBef>
                 <a:spcPts val="700"/>
@@ -3987,7 +3926,7 @@
               <a:buNone/>
             </a:pPr>
             <a:r>
-              <a:rPr lang="en-US" sz="1550" dirty="0">
+              <a:rPr lang="en-US" sz="1700" dirty="0">
                 <a:solidFill>
                   <a:srgbClr val="0C3B44"/>
                 </a:solidFill>
@@ -3997,12 +3936,12 @@
               </a:rPr>
               <a:t>‏לצד הביקורת עלו גם דוגמאות להתערבות מוצלחת, ובכולן חזר מאפיין משותף של פנייה אישית ויזומה: הפניה כתובה למסגרת קונקרטית, שיחת טלפון של אחות בשפה הערבית, וסדנה קבוצתית מובנית. שלושת המנגנונים הללו פשוטים וזולים יחסית לעלות הטיפול במחלה שכבר התפתחה.‏</a:t>
             </a:r>
-            <a:endParaRPr lang="en-US" sz="1550" dirty="0"/>
+            <a:endParaRPr lang="en-US" sz="1700" dirty="0"/>
           </a:p>
           <a:p>
             <a:pPr algn="r" indent="0" marL="0">
               <a:lnSpc>
-                <a:spcPts val="2500"/>
+                <a:spcPts val="2600"/>
               </a:lnSpc>
               <a:spcBef>
                 <a:spcPts val="700"/>
@@ -4010,7 +3949,7 @@
               <a:buNone/>
             </a:pPr>
             <a:r>
-              <a:rPr lang="en-US" sz="1550" dirty="0">
+              <a:rPr lang="en-US" sz="1700" dirty="0">
                 <a:solidFill>
                   <a:srgbClr val="0C3B44"/>
                 </a:solidFill>
@@ -4020,7 +3959,7 @@
               </a:rPr>
               <a:t>‏בכל הראיונות תוארה סביבת מידע רוויה, ובה זרם מתמיד של טענות על תרופות פלא ברשתות החברתיות, שהובילו במקרים מסוימים אף להפסקת טיפול תרופתי. הממצא המרכזי נוגע לקריטריון שלפיו נבנה האמון: המרואיינים לא ייחסו אמון לפי סמכות מקצועית בלבד, אלא לפי שילוב של היכרות אישית, שפה משותפת והיעדר אינטרס כלכלי, כפי שניסחה זאת מרואיינת 8: “מידע בריאותי לוקחים ממי שאחראי עלייך, לא ממי שמרוויח ממך”.‏</a:t>
             </a:r>
-            <a:endParaRPr lang="en-US" sz="1550" dirty="0"/>
+            <a:endParaRPr lang="en-US" sz="1700" dirty="0"/>
           </a:p>
         </p:txBody>
       </p:sp>
@@ -4105,8 +4044,8 @@
         </p:nvSpPr>
         <p:spPr>
           <a:xfrm>
-            <a:off x="1417320" y="274320"/>
-            <a:ext cx="10271455" cy="603504"/>
+            <a:off x="1417320" y="265176"/>
+            <a:ext cx="10271455" cy="237744"/>
           </a:xfrm>
           <a:prstGeom prst="rect">
             <a:avLst/>
@@ -4122,17 +4061,17 @@
               <a:buNone/>
             </a:pPr>
             <a:r>
-              <a:rPr lang="en-US" sz="3100" b="1" dirty="0">
-                <a:solidFill>
-                  <a:srgbClr val="0C3B44"/>
-                </a:solidFill>
-                <a:latin typeface="Arial" pitchFamily="34" charset="0"/>
-                <a:ea typeface="Arial" pitchFamily="34" charset="-122"/>
-                <a:cs typeface="Arial" pitchFamily="34" charset="-120"/>
-              </a:rPr>
-              <a:t>משמעות הממצאים</a:t>
-            </a:r>
-            <a:endParaRPr lang="en-US" sz="3100" dirty="0"/>
+              <a:rPr lang="en-US" sz="1250" b="1" spc="140" kern="0" dirty="0">
+                <a:solidFill>
+                  <a:srgbClr val="1D9E9A"/>
+                </a:solidFill>
+                <a:latin typeface="Arial" pitchFamily="34" charset="0"/>
+                <a:ea typeface="Arial" pitchFamily="34" charset="-122"/>
+                <a:cs typeface="Arial" pitchFamily="34" charset="-120"/>
+              </a:rPr>
+              <a:t>דיון</a:t>
+            </a:r>
+            <a:endParaRPr lang="en-US" sz="1250" dirty="0"/>
           </a:p>
         </p:txBody>
       </p:sp>
@@ -4144,8 +4083,8 @@
         </p:nvSpPr>
         <p:spPr>
           <a:xfrm>
-            <a:off x="1417320" y="877824"/>
-            <a:ext cx="10271455" cy="310896"/>
+            <a:off x="1417320" y="484632"/>
+            <a:ext cx="10271455" cy="530352"/>
           </a:xfrm>
           <a:prstGeom prst="rect">
             <a:avLst/>
@@ -4161,9 +4100,48 @@
               <a:buNone/>
             </a:pPr>
             <a:r>
+              <a:rPr lang="en-US" sz="3000" b="1" dirty="0">
+                <a:solidFill>
+                  <a:srgbClr val="0C3B44"/>
+                </a:solidFill>
+                <a:latin typeface="Arial" pitchFamily="34" charset="0"/>
+                <a:ea typeface="Arial" pitchFamily="34" charset="-122"/>
+                <a:cs typeface="Arial" pitchFamily="34" charset="-120"/>
+              </a:rPr>
+              <a:t>משמעות הממצאים</a:t>
+            </a:r>
+            <a:endParaRPr lang="en-US" sz="3000" dirty="0"/>
+          </a:p>
+        </p:txBody>
+      </p:sp>
+      <p:sp>
+        <p:nvSpPr>
+          <p:cNvPr id="4" name="Text 2"/>
+          <p:cNvSpPr txBox="1"/>
+          <p:nvPr/>
+        </p:nvSpPr>
+        <p:spPr>
+          <a:xfrm>
+            <a:off x="1417320" y="996696"/>
+            <a:ext cx="10271455" cy="274320"/>
+          </a:xfrm>
+          <a:prstGeom prst="rect">
+            <a:avLst/>
+          </a:prstGeom>
+          <a:noFill/>
+          <a:ln/>
+        </p:spPr>
+        <p:txBody>
+          <a:bodyPr wrap="square" lIns="0" tIns="0" rIns="0" bIns="0" rtlCol="0" anchor="ctr"/>
+          <a:lstStyle/>
+          <a:p>
+            <a:pPr rtl="1" algn="r" indent="0" marL="0">
+              <a:buNone/>
+            </a:pPr>
+            <a:r>
               <a:rPr lang="en-US" sz="1500" b="1" dirty="0">
                 <a:solidFill>
-                  <a:srgbClr val="1D9E9A"/>
+                  <a:srgbClr val="0E6E7E"/>
                 </a:solidFill>
                 <a:latin typeface="Arial" pitchFamily="34" charset="0"/>
                 <a:ea typeface="Arial" pitchFamily="34" charset="-122"/>
@@ -4177,18 +4155,18 @@
       </p:sp>
       <p:sp>
         <p:nvSpPr>
-          <p:cNvPr id="4" name="Shape 2"/>
+          <p:cNvPr id="5" name="Shape 3"/>
           <p:cNvSpPr/>
           <p:nvPr/>
         </p:nvSpPr>
         <p:spPr>
           <a:xfrm>
-            <a:off x="502920" y="1316736"/>
-            <a:ext cx="11185855" cy="4882896"/>
+            <a:off x="502920" y="1307592"/>
+            <a:ext cx="11185855" cy="4910328"/>
           </a:xfrm>
           <a:prstGeom prst="roundRect">
             <a:avLst>
-              <a:gd name="adj" fmla="val 1873"/>
+              <a:gd name="adj" fmla="val 2235"/>
             </a:avLst>
           </a:prstGeom>
           <a:solidFill>
@@ -4196,7 +4174,7 @@
           </a:solidFill>
           <a:ln w="12700">
             <a:solidFill>
-              <a:srgbClr val="F2F8F9"/>
+              <a:srgbClr val="D5E7E9"/>
             </a:solidFill>
             <a:prstDash val="solid"/>
           </a:ln>
@@ -4204,14 +4182,14 @@
       </p:sp>
       <p:sp>
         <p:nvSpPr>
-          <p:cNvPr id="5" name="Text 3"/>
+          <p:cNvPr id="6" name="Text 4"/>
           <p:cNvSpPr txBox="1"/>
           <p:nvPr/>
         </p:nvSpPr>
         <p:spPr>
           <a:xfrm>
-            <a:off x="886968" y="1591056"/>
-            <a:ext cx="10417759" cy="4608576"/>
+            <a:off x="923544" y="1545336"/>
+            <a:ext cx="10344607" cy="4782312"/>
           </a:xfrm>
           <a:prstGeom prst="rect">
             <a:avLst/>
@@ -4225,12 +4203,12 @@
           <a:p>
             <a:pPr algn="r" indent="0" marL="0">
               <a:lnSpc>
-                <a:spcPts val="2500"/>
+                <a:spcPts val="2600"/>
               </a:lnSpc>
               <a:buNone/>
             </a:pPr>
             <a:r>
-              <a:rPr lang="en-US" sz="1550" dirty="0">
+              <a:rPr lang="en-US" sz="1700" dirty="0">
                 <a:solidFill>
                   <a:srgbClr val="0C3B44"/>
                 </a:solidFill>
@@ -4240,12 +4218,12 @@
               </a:rPr>
               <a:t>‏הממצא המרכזי, ולפיו הפער אינו נובע מחוסר ידע, מחייב בחינה מחודשת של הנחת היסוד המובלעת בתכניות הסברה רבות. אם כל המרואיינים ידעו לנסח את עקרונות אורח החיים הבריא, הרי שתכנית שכל תוכנה הוא העברת מידע צפויה להניב תשואה נמוכה, והמשאב צריך להיות מופנה אל שלב היישום ולא אל שלב הידיעה. ממצא זה מתכתב עם הביקורת בספרות על הפער בין הידע המחקרי לבין הפרקטיקה בשטח.‏</a:t>
             </a:r>
-            <a:endParaRPr lang="en-US" sz="1550" dirty="0"/>
+            <a:endParaRPr lang="en-US" sz="1700" dirty="0"/>
           </a:p>
           <a:p>
             <a:pPr algn="r" indent="0" marL="0">
               <a:lnSpc>
-                <a:spcPts val="2500"/>
+                <a:spcPts val="2600"/>
               </a:lnSpc>
               <a:spcBef>
                 <a:spcPts val="700"/>
@@ -4253,7 +4231,7 @@
               <a:buNone/>
             </a:pPr>
             <a:r>
-              <a:rPr lang="en-US" sz="1550" dirty="0">
+              <a:rPr lang="en-US" sz="1700" dirty="0">
                 <a:solidFill>
                   <a:srgbClr val="0C3B44"/>
                 </a:solidFill>
@@ -4263,12 +4241,12 @@
               </a:rPr>
               <a:t>‏מן הראיונות עולים שלושה מנגנונים המסבירים את הפער. הראשון הוא מרחק הזמן בין ההתנהגות לבין תוצאתה, שכן גורמי הסיכון מצטברים לאורך שנים ואינם מלווים בתסמינים בשלביהם המוקדמים. השני הוא היעדר דחיפות סובייקטיבית, המסביר מדוע נקודת המפנה אצל תשעה מרואיינים הייתה דווקא אירוע בריאותי שהפך את הסיכון המופשט לחוויה מוחשית. השלישי הוא מיצוי המשאב הנפשי בסוף היום, תובנה המקבלת משנה תוקף נוכח הקשר הידוע בין מתח כרוני לבין תחלואה קרדיווסקולרית ‏(Franklin et al., 2021)‏.‏</a:t>
             </a:r>
-            <a:endParaRPr lang="en-US" sz="1550" dirty="0"/>
+            <a:endParaRPr lang="en-US" sz="1700" dirty="0"/>
           </a:p>
           <a:p>
             <a:pPr algn="r" indent="0" marL="0">
               <a:lnSpc>
-                <a:spcPts val="2500"/>
+                <a:spcPts val="2600"/>
               </a:lnSpc>
               <a:spcBef>
                 <a:spcPts val="700"/>
@@ -4276,7 +4254,7 @@
               <a:buNone/>
             </a:pPr>
             <a:r>
-              <a:rPr lang="en-US" sz="1550" dirty="0">
+              <a:rPr lang="en-US" sz="1700" dirty="0">
                 <a:solidFill>
                   <a:srgbClr val="0C3B44"/>
                 </a:solidFill>
@@ -4286,7 +4264,7 @@
               </a:rPr>
               <a:t>‏ההשוואה הבין-דורית שערכו מרואיינים מבוגרים באופן עצמאי זה מזה, ולפיה דור הסבים כמעט לא הכיר את המחלות הללו, עולה בקנה אחד עם הספרות המצביעה על כך שדפוסי תזונה מערביים מגבירים את הסיכון לסוכרת מסוג 2 וליתר לחץ דם ‏(Karatzi &amp; Manios, 2021)‏.‏</a:t>
             </a:r>
-            <a:endParaRPr lang="en-US" sz="1550" dirty="0"/>
+            <a:endParaRPr lang="en-US" sz="1700" dirty="0"/>
           </a:p>
         </p:txBody>
       </p:sp>
@@ -4371,8 +4349,8 @@
         </p:nvSpPr>
         <p:spPr>
           <a:xfrm>
-            <a:off x="1417320" y="274320"/>
-            <a:ext cx="10271455" cy="603504"/>
+            <a:off x="1417320" y="265176"/>
+            <a:ext cx="10271455" cy="237744"/>
           </a:xfrm>
           <a:prstGeom prst="rect">
             <a:avLst/>
@@ -4388,7 +4366,46 @@
               <a:buNone/>
             </a:pPr>
             <a:r>
-              <a:rPr lang="en-US" sz="3100" b="1" dirty="0">
+              <a:rPr lang="en-US" sz="1250" b="1" spc="140" kern="0" dirty="0">
+                <a:solidFill>
+                  <a:srgbClr val="1D9E9A"/>
+                </a:solidFill>
+                <a:latin typeface="Arial" pitchFamily="34" charset="0"/>
+                <a:ea typeface="Arial" pitchFamily="34" charset="-122"/>
+                <a:cs typeface="Arial" pitchFamily="34" charset="-120"/>
+              </a:rPr>
+              <a:t>דיון</a:t>
+            </a:r>
+            <a:endParaRPr lang="en-US" sz="1250" dirty="0"/>
+          </a:p>
+        </p:txBody>
+      </p:sp>
+      <p:sp>
+        <p:nvSpPr>
+          <p:cNvPr id="3" name="Text 1"/>
+          <p:cNvSpPr txBox="1"/>
+          <p:nvPr/>
+        </p:nvSpPr>
+        <p:spPr>
+          <a:xfrm>
+            <a:off x="1417320" y="484632"/>
+            <a:ext cx="10271455" cy="530352"/>
+          </a:xfrm>
+          <a:prstGeom prst="rect">
+            <a:avLst/>
+          </a:prstGeom>
+          <a:noFill/>
+          <a:ln/>
+        </p:spPr>
+        <p:txBody>
+          <a:bodyPr wrap="square" lIns="0" tIns="0" rIns="0" bIns="0" rtlCol="0" anchor="ctr"/>
+          <a:lstStyle/>
+          <a:p>
+            <a:pPr rtl="1" algn="r" indent="0" marL="0">
+              <a:buNone/>
+            </a:pPr>
+            <a:r>
+              <a:rPr lang="en-US" sz="3000" b="1" dirty="0">
                 <a:solidFill>
                   <a:srgbClr val="0C3B44"/>
                 </a:solidFill>
@@ -4398,24 +4415,24 @@
               </a:rPr>
               <a:t>חסמים מבניים לעומת חסמים אישיים</a:t>
             </a:r>
-            <a:endParaRPr lang="en-US" sz="3100" dirty="0"/>
-          </a:p>
-        </p:txBody>
-      </p:sp>
-      <p:sp>
-        <p:nvSpPr>
-          <p:cNvPr id="3" name="Shape 1"/>
+            <a:endParaRPr lang="en-US" sz="3000" dirty="0"/>
+          </a:p>
+        </p:txBody>
+      </p:sp>
+      <p:sp>
+        <p:nvSpPr>
+          <p:cNvPr id="4" name="Shape 2"/>
           <p:cNvSpPr/>
           <p:nvPr/>
         </p:nvSpPr>
         <p:spPr>
           <a:xfrm>
-            <a:off x="502920" y="1133856"/>
-            <a:ext cx="11185855" cy="5065776"/>
+            <a:off x="502920" y="1088136"/>
+            <a:ext cx="11185855" cy="5129784"/>
           </a:xfrm>
           <a:prstGeom prst="roundRect">
             <a:avLst>
-              <a:gd name="adj" fmla="val 1805"/>
+              <a:gd name="adj" fmla="val 2139"/>
             </a:avLst>
           </a:prstGeom>
           <a:solidFill>
@@ -4423,7 +4440,7 @@
           </a:solidFill>
           <a:ln w="12700">
             <a:solidFill>
-              <a:srgbClr val="F2F8F9"/>
+              <a:srgbClr val="D5E7E9"/>
             </a:solidFill>
             <a:prstDash val="solid"/>
           </a:ln>
@@ -4431,14 +4448,14 @@
       </p:sp>
       <p:sp>
         <p:nvSpPr>
-          <p:cNvPr id="4" name="Text 2"/>
+          <p:cNvPr id="5" name="Text 3"/>
           <p:cNvSpPr txBox="1"/>
           <p:nvPr/>
         </p:nvSpPr>
         <p:spPr>
           <a:xfrm>
-            <a:off x="886968" y="1408176"/>
-            <a:ext cx="10417759" cy="4791456"/>
+            <a:off x="923544" y="1325880"/>
+            <a:ext cx="10344607" cy="5001768"/>
           </a:xfrm>
           <a:prstGeom prst="rect">
             <a:avLst/>
@@ -4452,12 +4469,12 @@
           <a:p>
             <a:pPr algn="r" indent="0" marL="0">
               <a:lnSpc>
-                <a:spcPts val="2500"/>
+                <a:spcPts val="2600"/>
               </a:lnSpc>
               <a:buNone/>
             </a:pPr>
             <a:r>
-              <a:rPr lang="en-US" sz="1550" dirty="0">
+              <a:rPr lang="en-US" sz="1700" dirty="0">
                 <a:solidFill>
                   <a:srgbClr val="0C3B44"/>
                 </a:solidFill>
@@ -4467,12 +4484,12 @@
               </a:rPr>
               <a:t>‏ממצאי המחקר מצביעים על כך שהחסמים המרכזיים לאימוץ אורח חיים בריא באוכלוסייה הנחקרת הם מבניים במידה רבה יותר מאשר אישיים. ההשוואה בין היישובים ממחישה זאת: תושבי ערד תיארו מדרכות רציפות, טיילת, חוגים במתנ"ס וקבוצות הליכה מאורגנות, ואילו תושבי כסייפה וחורה תיארו היעדר מדרכות ותאורה, היעדר מסגרות ספורט והיעדר מועדון לקשישים.‏</a:t>
             </a:r>
-            <a:endParaRPr lang="en-US" sz="1550" dirty="0"/>
+            <a:endParaRPr lang="en-US" sz="1700" dirty="0"/>
           </a:p>
           <a:p>
             <a:pPr algn="r" indent="0" marL="0">
               <a:lnSpc>
-                <a:spcPts val="2500"/>
+                <a:spcPts val="2600"/>
               </a:lnSpc>
               <a:spcBef>
                 <a:spcPts val="700"/>
@@ -4480,7 +4497,7 @@
               <a:buNone/>
             </a:pPr>
             <a:r>
-              <a:rPr lang="en-US" sz="1550" dirty="0">
+              <a:rPr lang="en-US" sz="1700" dirty="0">
                 <a:solidFill>
                   <a:srgbClr val="0C3B44"/>
                 </a:solidFill>
@@ -4490,12 +4507,12 @@
               </a:rPr>
               <a:t>‏חשוב להדגיש כי הפער בפעילות בין שתי הקבוצות אינו מוסבר בהבדלי מוטיבציה. מרואיין 11 הביע רצון מפורש להשתתף בקבוצת הליכה אילו הייתה קיימת, ומרואיינת 2 ניסחה בבירור את התנאי שיאפשר לה להתחיל. עדותה של מרואיינת 8 מוכיחה כי תשתית מינימלית מספיקה כדי שתיווצר פעילות מתמשכת. ממצא זה מחזק את הגישה הרואה בהנגשת פעילות גופנית חלק ממדיניות בריאות כוללת, ולא עניין המסור לבחירה אישית בלבד ‏(קידום בריאות בישראל, 2023)‏.‏</a:t>
             </a:r>
-            <a:endParaRPr lang="en-US" sz="1550" dirty="0"/>
+            <a:endParaRPr lang="en-US" sz="1700" dirty="0"/>
           </a:p>
           <a:p>
             <a:pPr algn="r" indent="0" marL="0">
               <a:lnSpc>
-                <a:spcPts val="2500"/>
+                <a:spcPts val="2600"/>
               </a:lnSpc>
               <a:spcBef>
                 <a:spcPts val="700"/>
@@ -4503,7 +4520,7 @@
               <a:buNone/>
             </a:pPr>
             <a:r>
-              <a:rPr lang="en-US" sz="1550" dirty="0">
+              <a:rPr lang="en-US" sz="1700" dirty="0">
                 <a:solidFill>
                   <a:srgbClr val="0C3B44"/>
                 </a:solidFill>
@@ -4513,7 +4530,7 @@
               </a:rPr>
               <a:t>‏ממד נוסף שעלה בבירור הוא הממד המגדרי, שלא הופיע כלל אצל המרואיינים הגברים. חמש מתוך שש המרואיינות התייחסו להיעדר מסגרות מותאמות, וארבע מהן קשרו זאת לנורמות המגבילות יציאה לבדה בשעות הערב. משמעותו המעשית של ממצא זה היא שתכנית שאינה מתייחסת להפרדה מגדרית, לשעות פעילות מותאמות ולפתרון לשמירה על ילדים, אינה מגיעה למחצית מן האוכלוסייה.‏</a:t>
             </a:r>
-            <a:endParaRPr lang="en-US" sz="1550" dirty="0"/>
+            <a:endParaRPr lang="en-US" sz="1700" dirty="0"/>
           </a:p>
         </p:txBody>
       </p:sp>
@@ -4598,8 +4615,8 @@
         </p:nvSpPr>
         <p:spPr>
           <a:xfrm>
-            <a:off x="1417320" y="274320"/>
-            <a:ext cx="10271455" cy="603504"/>
+            <a:off x="1417320" y="265176"/>
+            <a:ext cx="10271455" cy="237744"/>
           </a:xfrm>
           <a:prstGeom prst="rect">
             <a:avLst/>
@@ -4615,7 +4632,46 @@
               <a:buNone/>
             </a:pPr>
             <a:r>
-              <a:rPr lang="en-US" sz="3100" b="1" dirty="0">
+              <a:rPr lang="en-US" sz="1250" b="1" spc="140" kern="0" dirty="0">
+                <a:solidFill>
+                  <a:srgbClr val="1D9E9A"/>
+                </a:solidFill>
+                <a:latin typeface="Arial" pitchFamily="34" charset="0"/>
+                <a:ea typeface="Arial" pitchFamily="34" charset="-122"/>
+                <a:cs typeface="Arial" pitchFamily="34" charset="-120"/>
+              </a:rPr>
+              <a:t>המלצות</a:t>
+            </a:r>
+            <a:endParaRPr lang="en-US" sz="1250" dirty="0"/>
+          </a:p>
+        </p:txBody>
+      </p:sp>
+      <p:sp>
+        <p:nvSpPr>
+          <p:cNvPr id="3" name="Text 1"/>
+          <p:cNvSpPr txBox="1"/>
+          <p:nvPr/>
+        </p:nvSpPr>
+        <p:spPr>
+          <a:xfrm>
+            <a:off x="1417320" y="484632"/>
+            <a:ext cx="10271455" cy="530352"/>
+          </a:xfrm>
+          <a:prstGeom prst="rect">
+            <a:avLst/>
+          </a:prstGeom>
+          <a:noFill/>
+          <a:ln/>
+        </p:spPr>
+        <p:txBody>
+          <a:bodyPr wrap="square" lIns="0" tIns="0" rIns="0" bIns="0" rtlCol="0" anchor="ctr"/>
+          <a:lstStyle/>
+          <a:p>
+            <a:pPr rtl="1" algn="r" indent="0" marL="0">
+              <a:buNone/>
+            </a:pPr>
+            <a:r>
+              <a:rPr lang="en-US" sz="3000" b="1" dirty="0">
                 <a:solidFill>
                   <a:srgbClr val="0C3B44"/>
                 </a:solidFill>
@@ -4625,24 +4681,24 @@
               </a:rPr>
               <a:t>המלצות יישומיות</a:t>
             </a:r>
-            <a:endParaRPr lang="en-US" sz="3100" dirty="0"/>
-          </a:p>
-        </p:txBody>
-      </p:sp>
-      <p:sp>
-        <p:nvSpPr>
-          <p:cNvPr id="3" name="Shape 1"/>
+            <a:endParaRPr lang="en-US" sz="3000" dirty="0"/>
+          </a:p>
+        </p:txBody>
+      </p:sp>
+      <p:sp>
+        <p:nvSpPr>
+          <p:cNvPr id="4" name="Shape 2"/>
           <p:cNvSpPr/>
           <p:nvPr/>
         </p:nvSpPr>
         <p:spPr>
           <a:xfrm>
-            <a:off x="502920" y="1133856"/>
-            <a:ext cx="11185855" cy="5065776"/>
+            <a:off x="502920" y="1088136"/>
+            <a:ext cx="11185855" cy="5129784"/>
           </a:xfrm>
           <a:prstGeom prst="roundRect">
             <a:avLst>
-              <a:gd name="adj" fmla="val 1805"/>
+              <a:gd name="adj" fmla="val 2139"/>
             </a:avLst>
           </a:prstGeom>
           <a:solidFill>
@@ -4650,7 +4706,7 @@
           </a:solidFill>
           <a:ln w="12700">
             <a:solidFill>
-              <a:srgbClr val="F2F8F9"/>
+              <a:srgbClr val="D5E7E9"/>
             </a:solidFill>
             <a:prstDash val="solid"/>
           </a:ln>
@@ -4658,14 +4714,14 @@
       </p:sp>
       <p:sp>
         <p:nvSpPr>
-          <p:cNvPr id="4" name="Text 2"/>
+          <p:cNvPr id="5" name="Text 3"/>
           <p:cNvSpPr txBox="1"/>
           <p:nvPr/>
         </p:nvSpPr>
         <p:spPr>
           <a:xfrm>
-            <a:off x="886968" y="1408176"/>
-            <a:ext cx="10417759" cy="4791456"/>
+            <a:off x="923544" y="1325880"/>
+            <a:ext cx="10344607" cy="5001768"/>
           </a:xfrm>
           <a:prstGeom prst="rect">
             <a:avLst/>
@@ -4679,12 +4735,12 @@
           <a:p>
             <a:pPr algn="r" indent="0" marL="0">
               <a:lnSpc>
-                <a:spcPts val="2500"/>
+                <a:spcPts val="2600"/>
               </a:lnSpc>
               <a:buNone/>
             </a:pPr>
             <a:r>
-              <a:rPr lang="en-US" sz="1550" dirty="0">
+              <a:rPr lang="en-US" sz="1700" dirty="0">
                 <a:solidFill>
                   <a:srgbClr val="0C3B44"/>
                 </a:solidFill>
@@ -4694,12 +4750,12 @@
               </a:rPr>
               <a:t>‏מן הממצאים נגזרות שבע המלצות מעשיות. ראשית, מומלץ להנהיג מרשם לפעילות גופנית, שבו הצוות הרפואי רושם בכתב מסגרת קונקרטית הכוללת שם קבוצה, מקום, יום ושעה, שכן מן הראיונות עולה כי מטופלים מבצעים מרשמים ומתעלמים מהמלצות כלליות. שנית, מומלץ להקים קבוצות הליכה שכונתיות מונחות, מודל הדורש מדריך אחד ומסלול קיים בלבד, בתוספת מנגנון מעקב פשוט הכולל שיחת טלפון למי שנעדר.‏</a:t>
             </a:r>
-            <a:endParaRPr lang="en-US" sz="1550" dirty="0"/>
+            <a:endParaRPr lang="en-US" sz="1700" dirty="0"/>
           </a:p>
           <a:p>
             <a:pPr algn="r" indent="0" marL="0">
               <a:lnSpc>
-                <a:spcPts val="2500"/>
+                <a:spcPts val="2600"/>
               </a:lnSpc>
               <a:spcBef>
                 <a:spcPts val="700"/>
@@ -4707,7 +4763,7 @@
               <a:buNone/>
             </a:pPr>
             <a:r>
-              <a:rPr lang="en-US" sz="1550" dirty="0">
+              <a:rPr lang="en-US" sz="1700" dirty="0">
                 <a:solidFill>
                   <a:srgbClr val="0C3B44"/>
                 </a:solidFill>
@@ -4717,12 +4773,12 @@
               </a:rPr>
               <a:t>‏שלישית, ובאופן דחוף, מומלץ להשקיע בתשתית הליכה ביישובי הבדואים בנגב: מדרכה רציפה, תאורה וספסלים לאורך מסלול אחד לפחות בכל שכונה. זוהי ההשקעה בעלת התשואה הבריאותית הגבוהה ביותר ביחס לעלותה. רביעית, מומלץ להקים מסגרות ספורט נפרדות לנשים בתוך היישובים, בהפעלת מדריכות ובשעות אחר הצהריים, שכן היעדרן מהווה חסם מוחלט בפני מחצית האוכלוסייה.‏</a:t>
             </a:r>
-            <a:endParaRPr lang="en-US" sz="1550" dirty="0"/>
+            <a:endParaRPr lang="en-US" sz="1700" dirty="0"/>
           </a:p>
           <a:p>
             <a:pPr algn="r" indent="0" marL="0">
               <a:lnSpc>
-                <a:spcPts val="2500"/>
+                <a:spcPts val="2600"/>
               </a:lnSpc>
               <a:spcBef>
                 <a:spcPts val="700"/>
@@ -4730,7 +4786,7 @@
               <a:buNone/>
             </a:pPr>
             <a:r>
-              <a:rPr lang="en-US" sz="1550" dirty="0">
+              <a:rPr lang="en-US" sz="1700" dirty="0">
                 <a:solidFill>
                   <a:srgbClr val="0C3B44"/>
                 </a:solidFill>
@@ -4740,7 +4796,7 @@
               </a:rPr>
               <a:t>‏חמישית, מומלץ להנהיג פנייה יזומה טלפונית בשפה הערבית אל בעלי גורמי סיכון שאינם מגיעים לבדיקות, מאחר שדיוור אוטומטי ועלונים כתובים נמצאו בלתי אפקטיביים, ובפרט בקרב מבוגרים שאינם קוראים. שישית, מומלץ לשלב את מוסדות הקהילה, ובהם המסגד, בתי הספר וטיפות החלב, כערוצי הסברה המגיעים אל מי שאינו פוקד את המרפאה. שביעית, מומלץ לשלב אנשים מן הקהילה שעברו שינוי מוצלח כמעבירי מסר, שכן עדותו של אדם מוכר מן היישוב משכנעת יותר מהרצאה של גורם חיצוני.‏</a:t>
             </a:r>
-            <a:endParaRPr lang="en-US" sz="1550" dirty="0"/>
+            <a:endParaRPr lang="en-US" sz="1700" dirty="0"/>
           </a:p>
         </p:txBody>
       </p:sp>
@@ -4825,8 +4881,8 @@
         </p:nvSpPr>
         <p:spPr>
           <a:xfrm>
-            <a:off x="1417320" y="274320"/>
-            <a:ext cx="10271455" cy="603504"/>
+            <a:off x="1417320" y="265176"/>
+            <a:ext cx="10271455" cy="237744"/>
           </a:xfrm>
           <a:prstGeom prst="rect">
             <a:avLst/>
@@ -4842,7 +4898,46 @@
               <a:buNone/>
             </a:pPr>
             <a:r>
-              <a:rPr lang="en-US" sz="3100" b="1" dirty="0">
+              <a:rPr lang="en-US" sz="1250" b="1" spc="140" kern="0" dirty="0">
+                <a:solidFill>
+                  <a:srgbClr val="1D9E9A"/>
+                </a:solidFill>
+                <a:latin typeface="Arial" pitchFamily="34" charset="0"/>
+                <a:ea typeface="Arial" pitchFamily="34" charset="-122"/>
+                <a:cs typeface="Arial" pitchFamily="34" charset="-120"/>
+              </a:rPr>
+              <a:t>מגבלות</a:t>
+            </a:r>
+            <a:endParaRPr lang="en-US" sz="1250" dirty="0"/>
+          </a:p>
+        </p:txBody>
+      </p:sp>
+      <p:sp>
+        <p:nvSpPr>
+          <p:cNvPr id="3" name="Text 1"/>
+          <p:cNvSpPr txBox="1"/>
+          <p:nvPr/>
+        </p:nvSpPr>
+        <p:spPr>
+          <a:xfrm>
+            <a:off x="1417320" y="484632"/>
+            <a:ext cx="10271455" cy="530352"/>
+          </a:xfrm>
+          <a:prstGeom prst="rect">
+            <a:avLst/>
+          </a:prstGeom>
+          <a:noFill/>
+          <a:ln/>
+        </p:spPr>
+        <p:txBody>
+          <a:bodyPr wrap="square" lIns="0" tIns="0" rIns="0" bIns="0" rtlCol="0" anchor="ctr"/>
+          <a:lstStyle/>
+          <a:p>
+            <a:pPr rtl="1" algn="r" indent="0" marL="0">
+              <a:buNone/>
+            </a:pPr>
+            <a:r>
+              <a:rPr lang="en-US" sz="3000" b="1" dirty="0">
                 <a:solidFill>
                   <a:srgbClr val="0C3B44"/>
                 </a:solidFill>
@@ -4852,24 +4947,24 @@
               </a:rPr>
               <a:t>מגבלות המחקר</a:t>
             </a:r>
-            <a:endParaRPr lang="en-US" sz="3100" dirty="0"/>
-          </a:p>
-        </p:txBody>
-      </p:sp>
-      <p:sp>
-        <p:nvSpPr>
-          <p:cNvPr id="3" name="Shape 1"/>
+            <a:endParaRPr lang="en-US" sz="3000" dirty="0"/>
+          </a:p>
+        </p:txBody>
+      </p:sp>
+      <p:sp>
+        <p:nvSpPr>
+          <p:cNvPr id="4" name="Shape 2"/>
           <p:cNvSpPr/>
           <p:nvPr/>
         </p:nvSpPr>
         <p:spPr>
           <a:xfrm>
-            <a:off x="502920" y="1133856"/>
-            <a:ext cx="11185855" cy="5065776"/>
+            <a:off x="502920" y="1088136"/>
+            <a:ext cx="11185855" cy="5129784"/>
           </a:xfrm>
           <a:prstGeom prst="roundRect">
             <a:avLst>
-              <a:gd name="adj" fmla="val 1805"/>
+              <a:gd name="adj" fmla="val 2139"/>
             </a:avLst>
           </a:prstGeom>
           <a:solidFill>
@@ -4877,7 +4972,7 @@
           </a:solidFill>
           <a:ln w="12700">
             <a:solidFill>
-              <a:srgbClr val="F2F8F9"/>
+              <a:srgbClr val="D5E7E9"/>
             </a:solidFill>
             <a:prstDash val="solid"/>
           </a:ln>
@@ -4885,14 +4980,14 @@
       </p:sp>
       <p:sp>
         <p:nvSpPr>
-          <p:cNvPr id="4" name="Text 2"/>
+          <p:cNvPr id="5" name="Text 3"/>
           <p:cNvSpPr txBox="1"/>
           <p:nvPr/>
         </p:nvSpPr>
         <p:spPr>
           <a:xfrm>
-            <a:off x="886968" y="1408176"/>
-            <a:ext cx="10417759" cy="4791456"/>
+            <a:off x="923544" y="1325880"/>
+            <a:ext cx="10344607" cy="5001768"/>
           </a:xfrm>
           <a:prstGeom prst="rect">
             <a:avLst/>
@@ -4906,12 +5001,12 @@
           <a:p>
             <a:pPr algn="r" indent="0" marL="0">
               <a:lnSpc>
-                <a:spcPts val="2500"/>
+                <a:spcPts val="2600"/>
               </a:lnSpc>
               <a:buNone/>
             </a:pPr>
             <a:r>
-              <a:rPr lang="en-US" sz="1550" dirty="0">
+              <a:rPr lang="en-US" sz="1700" dirty="0">
                 <a:solidFill>
                   <a:srgbClr val="0C3B44"/>
                 </a:solidFill>
@@ -4921,12 +5016,12 @@
               </a:rPr>
               <a:t>‏למחקר זה מספר מגבלות שיש להביאן בחשבון בפרשנות הממצאים. ראשית, מדובר במחקר איכותני בהיקף מצומצם של שנים עשר משתתפים, ולפיכך אין בו כדי לקבוע שיעורים או להכליל סטטיסטית לאוכלוסייה. מטרתו היא הבנת משמעות ולא מדידת שכיחות, ויש לקרוא את ממצאיו באופן זה.‏</a:t>
             </a:r>
-            <a:endParaRPr lang="en-US" sz="1550" dirty="0"/>
+            <a:endParaRPr lang="en-US" sz="1700" dirty="0"/>
           </a:p>
           <a:p>
             <a:pPr algn="r" indent="0" marL="0">
               <a:lnSpc>
-                <a:spcPts val="2500"/>
+                <a:spcPts val="2600"/>
               </a:lnSpc>
               <a:spcBef>
                 <a:spcPts val="700"/>
@@ -4934,7 +5029,7 @@
               <a:buNone/>
             </a:pPr>
             <a:r>
-              <a:rPr lang="en-US" sz="1550" dirty="0">
+              <a:rPr lang="en-US" sz="1700" dirty="0">
                 <a:solidFill>
                   <a:srgbClr val="0C3B44"/>
                 </a:solidFill>
@@ -4944,12 +5039,12 @@
               </a:rPr>
               <a:t>‏שנית, הדגימה הייתה מכוונת ונעשתה בשיטת כדור השלג דרך מעגלי היכרות של החוקרים, שיטה העלולה ליצור הטיה לטובת אנשים הנכונים לשוחח על בריאותם. שלישית, הנתונים מבוססים על דיווח עצמי ולפיכך חשופים להטיית רצייה חברתית, מגבלה המתחדדת בשל ההיכרות המוקדמת בין החוקרים לבין חלק מן המרואיינים, אף שהיכרות זו תרמה גם לפתיחות ולאמון.‏</a:t>
             </a:r>
-            <a:endParaRPr lang="en-US" sz="1550" dirty="0"/>
+            <a:endParaRPr lang="en-US" sz="1700" dirty="0"/>
           </a:p>
           <a:p>
             <a:pPr algn="r" indent="0" marL="0">
               <a:lnSpc>
-                <a:spcPts val="2500"/>
+                <a:spcPts val="2600"/>
               </a:lnSpc>
               <a:spcBef>
                 <a:spcPts val="700"/>
@@ -4957,7 +5052,7 @@
               <a:buNone/>
             </a:pPr>
             <a:r>
-              <a:rPr lang="en-US" sz="1550" dirty="0">
+              <a:rPr lang="en-US" sz="1700" dirty="0">
                 <a:solidFill>
                   <a:srgbClr val="0C3B44"/>
                 </a:solidFill>
@@ -4967,7 +5062,7 @@
               </a:rPr>
               <a:t>‏רביעית, ארבעה ראיונות נערכו בערבית ותורגמו לעברית, וכל תרגום כרוך באובדן ניואנסים ובפרט בביטויים תרבותיים. חמישית, המחקר נערך בשלושה יישובים במחוז הדרום, ולפיכך ממצאיו משקפים הקשר מקומי ספציפי. ייחודו של הקשר זה הוא בעת ובעונה אחת יתרון של המחקר, המאפשר העמקה בהקשר שנחקר מעט, ומגבלה המצמצמת את יכולת ההשלכה על אוכלוסיות אחרות בישראל.‏</a:t>
             </a:r>
-            <a:endParaRPr lang="en-US" sz="1550" dirty="0"/>
+            <a:endParaRPr lang="en-US" sz="1700" dirty="0"/>
           </a:p>
         </p:txBody>
       </p:sp>
@@ -5052,8 +5147,8 @@
         </p:nvSpPr>
         <p:spPr>
           <a:xfrm>
-            <a:off x="1417320" y="274320"/>
-            <a:ext cx="10271455" cy="603504"/>
+            <a:off x="1417320" y="265176"/>
+            <a:ext cx="10271455" cy="237744"/>
           </a:xfrm>
           <a:prstGeom prst="rect">
             <a:avLst/>
@@ -5069,7 +5164,46 @@
               <a:buNone/>
             </a:pPr>
             <a:r>
-              <a:rPr lang="en-US" sz="3100" b="1" dirty="0">
+              <a:rPr lang="en-US" sz="1250" b="1" spc="140" kern="0" dirty="0">
+                <a:solidFill>
+                  <a:srgbClr val="1D9E9A"/>
+                </a:solidFill>
+                <a:latin typeface="Arial" pitchFamily="34" charset="0"/>
+                <a:ea typeface="Arial" pitchFamily="34" charset="-122"/>
+                <a:cs typeface="Arial" pitchFamily="34" charset="-120"/>
+              </a:rPr>
+              <a:t>סיכום</a:t>
+            </a:r>
+            <a:endParaRPr lang="en-US" sz="1250" dirty="0"/>
+          </a:p>
+        </p:txBody>
+      </p:sp>
+      <p:sp>
+        <p:nvSpPr>
+          <p:cNvPr id="3" name="Text 1"/>
+          <p:cNvSpPr txBox="1"/>
+          <p:nvPr/>
+        </p:nvSpPr>
+        <p:spPr>
+          <a:xfrm>
+            <a:off x="1417320" y="484632"/>
+            <a:ext cx="10271455" cy="530352"/>
+          </a:xfrm>
+          <a:prstGeom prst="rect">
+            <a:avLst/>
+          </a:prstGeom>
+          <a:noFill/>
+          <a:ln/>
+        </p:spPr>
+        <p:txBody>
+          <a:bodyPr wrap="square" lIns="0" tIns="0" rIns="0" bIns="0" rtlCol="0" anchor="ctr"/>
+          <a:lstStyle/>
+          <a:p>
+            <a:pPr rtl="1" algn="r" indent="0" marL="0">
+              <a:buNone/>
+            </a:pPr>
+            <a:r>
+              <a:rPr lang="en-US" sz="3000" b="1" dirty="0">
                 <a:solidFill>
                   <a:srgbClr val="0C3B44"/>
                 </a:solidFill>
@@ -5079,24 +5213,24 @@
               </a:rPr>
               <a:t>סיכום ומסקנות</a:t>
             </a:r>
-            <a:endParaRPr lang="en-US" sz="3100" dirty="0"/>
-          </a:p>
-        </p:txBody>
-      </p:sp>
-      <p:sp>
-        <p:nvSpPr>
-          <p:cNvPr id="3" name="Shape 1"/>
+            <a:endParaRPr lang="en-US" sz="3000" dirty="0"/>
+          </a:p>
+        </p:txBody>
+      </p:sp>
+      <p:sp>
+        <p:nvSpPr>
+          <p:cNvPr id="4" name="Shape 2"/>
           <p:cNvSpPr/>
           <p:nvPr/>
         </p:nvSpPr>
         <p:spPr>
           <a:xfrm>
-            <a:off x="502920" y="1133856"/>
-            <a:ext cx="11185855" cy="5065776"/>
+            <a:off x="502920" y="1088136"/>
+            <a:ext cx="11185855" cy="5129784"/>
           </a:xfrm>
           <a:prstGeom prst="roundRect">
             <a:avLst>
-              <a:gd name="adj" fmla="val 1805"/>
+              <a:gd name="adj" fmla="val 2139"/>
             </a:avLst>
           </a:prstGeom>
           <a:solidFill>
@@ -5104,7 +5238,7 @@
           </a:solidFill>
           <a:ln w="12700">
             <a:solidFill>
-              <a:srgbClr val="F2F8F9"/>
+              <a:srgbClr val="D5E7E9"/>
             </a:solidFill>
             <a:prstDash val="solid"/>
           </a:ln>
@@ -5112,14 +5246,14 @@
       </p:sp>
       <p:sp>
         <p:nvSpPr>
-          <p:cNvPr id="4" name="Text 2"/>
+          <p:cNvPr id="5" name="Text 3"/>
           <p:cNvSpPr txBox="1"/>
           <p:nvPr/>
         </p:nvSpPr>
         <p:spPr>
           <a:xfrm>
-            <a:off x="886968" y="1408176"/>
-            <a:ext cx="10417759" cy="4791456"/>
+            <a:off x="923544" y="1325880"/>
+            <a:ext cx="10344607" cy="5001768"/>
           </a:xfrm>
           <a:prstGeom prst="rect">
             <a:avLst/>
@@ -5133,12 +5267,12 @@
           <a:p>
             <a:pPr algn="r" indent="0" marL="0">
               <a:lnSpc>
-                <a:spcPts val="2500"/>
+                <a:spcPts val="2600"/>
               </a:lnSpc>
               <a:buNone/>
             </a:pPr>
             <a:r>
-              <a:rPr lang="en-US" sz="1550" dirty="0">
+              <a:rPr lang="en-US" sz="1700" dirty="0">
                 <a:solidFill>
                   <a:srgbClr val="0C3B44"/>
                 </a:solidFill>
@@ -5148,12 +5282,12 @@
               </a:rPr>
               <a:t>‏העבודה יצאה מנקודת מוצא של פער בין ידע ליישום, ומסתיימת בהבנה כי הפער אינו פער של מודעות אלא של תנאים. ארבע מסקנות מרכזיות עולות ממנה. הראשונה היא שהחסם המרכזי אינו חסם של ידע, שכן כל המרואיינים ידעו לנסח את עקרונות אורח החיים הבריא. השנייה היא שאורח חיים בריא הוא תוצר של תשתית ושל מסגרת, ולא של כוח רצון אישי.‏</a:t>
             </a:r>
-            <a:endParaRPr lang="en-US" sz="1550" dirty="0"/>
+            <a:endParaRPr lang="en-US" sz="1700" dirty="0"/>
           </a:p>
           <a:p>
             <a:pPr algn="r" indent="0" marL="0">
               <a:lnSpc>
-                <a:spcPts val="2500"/>
+                <a:spcPts val="2600"/>
               </a:lnSpc>
               <a:spcBef>
                 <a:spcPts val="700"/>
@@ -5161,7 +5295,7 @@
               <a:buNone/>
             </a:pPr>
             <a:r>
-              <a:rPr lang="en-US" sz="1550" dirty="0">
+              <a:rPr lang="en-US" sz="1700" dirty="0">
                 <a:solidFill>
                   <a:srgbClr val="0C3B44"/>
                 </a:solidFill>
@@ -5171,12 +5305,12 @@
               </a:rPr>
               <a:t>‏המסקנה השלישית היא שהשינוי בפועל מתרחש ברוב המקרים רק לאחר אירוע בריאותי, כלומר מאוחר מדי, אף שהוא מוכיח כי בני חמישים, שישים ושבעים מסוגלים לשינוי עמוק ומתמשך. המסקנה הרביעית היא שמערכת הבריאות נתפסת כמצוינת בטיפול וכחלשה במניעה יזומה, ושהמנגנונים שנמצאו אפקטיביים בפועל פשוטים וזולים יחסית לעלות הטיפול במחלה שכבר התפתחה.‏</a:t>
             </a:r>
-            <a:endParaRPr lang="en-US" sz="1550" dirty="0"/>
+            <a:endParaRPr lang="en-US" sz="1700" dirty="0"/>
           </a:p>
           <a:p>
             <a:pPr algn="r" indent="0" marL="0">
               <a:lnSpc>
-                <a:spcPts val="2500"/>
+                <a:spcPts val="2600"/>
               </a:lnSpc>
               <a:spcBef>
                 <a:spcPts val="700"/>
@@ -5184,7 +5318,7 @@
               <a:buNone/>
             </a:pPr>
             <a:r>
-              <a:rPr lang="en-US" sz="1550" dirty="0">
+              <a:rPr lang="en-US" sz="1700" dirty="0">
                 <a:solidFill>
                   <a:srgbClr val="0C3B44"/>
                 </a:solidFill>
@@ -5194,7 +5328,7 @@
               </a:rPr>
               <a:t>‏המרואיינים ידעו כמעט תמיד מה נכון לעשות. מה שחסר להם היה מקום ללכת בו, קבוצה שתחכה להם, טלפון שיזכיר, ומישהו שידבר איתם בשפה שהם מבינים. אלה אינם משאבים יקרים במונחי מערכת בריאות, ובוודאי לא ביחס לעלות הטיפול בסוכרת, בשבץ ובאי-ספיקת לב.‏</a:t>
             </a:r>
-            <a:endParaRPr lang="en-US" sz="1550" dirty="0"/>
+            <a:endParaRPr lang="en-US" sz="1700" dirty="0"/>
           </a:p>
         </p:txBody>
       </p:sp>
@@ -5279,8 +5413,8 @@
         </p:nvSpPr>
         <p:spPr>
           <a:xfrm>
-            <a:off x="1417320" y="274320"/>
-            <a:ext cx="10271455" cy="603504"/>
+            <a:off x="1417320" y="265176"/>
+            <a:ext cx="10271455" cy="237744"/>
           </a:xfrm>
           <a:prstGeom prst="rect">
             <a:avLst/>
@@ -5296,17 +5430,17 @@
               <a:buNone/>
             </a:pPr>
             <a:r>
-              <a:rPr lang="en-US" sz="3100" b="1" dirty="0">
-                <a:solidFill>
-                  <a:srgbClr val="0C3B44"/>
-                </a:solidFill>
-                <a:latin typeface="Arial" pitchFamily="34" charset="0"/>
-                <a:ea typeface="Arial" pitchFamily="34" charset="-122"/>
-                <a:cs typeface="Arial" pitchFamily="34" charset="-120"/>
-              </a:rPr>
-              <a:t>רשימת מקורות</a:t>
-            </a:r>
-            <a:endParaRPr lang="en-US" sz="3100" dirty="0"/>
+              <a:rPr lang="en-US" sz="1250" b="1" spc="140" kern="0" dirty="0">
+                <a:solidFill>
+                  <a:srgbClr val="1D9E9A"/>
+                </a:solidFill>
+                <a:latin typeface="Arial" pitchFamily="34" charset="0"/>
+                <a:ea typeface="Arial" pitchFamily="34" charset="-122"/>
+                <a:cs typeface="Arial" pitchFamily="34" charset="-120"/>
+              </a:rPr>
+              <a:t>מקורות</a:t>
+            </a:r>
+            <a:endParaRPr lang="en-US" sz="1250" dirty="0"/>
           </a:p>
         </p:txBody>
       </p:sp>
@@ -5318,8 +5452,8 @@
         </p:nvSpPr>
         <p:spPr>
           <a:xfrm>
-            <a:off x="1417320" y="877824"/>
-            <a:ext cx="10271455" cy="310896"/>
+            <a:off x="1417320" y="484632"/>
+            <a:ext cx="10271455" cy="530352"/>
           </a:xfrm>
           <a:prstGeom prst="rect">
             <a:avLst/>
@@ -5335,15 +5469,54 @@
               <a:buNone/>
             </a:pPr>
             <a:r>
+              <a:rPr lang="en-US" sz="3000" b="1" dirty="0">
+                <a:solidFill>
+                  <a:srgbClr val="0C3B44"/>
+                </a:solidFill>
+                <a:latin typeface="Arial" pitchFamily="34" charset="0"/>
+                <a:ea typeface="Arial" pitchFamily="34" charset="-122"/>
+                <a:cs typeface="Arial" pitchFamily="34" charset="-120"/>
+              </a:rPr>
+              <a:t>רשימת מקורות</a:t>
+            </a:r>
+            <a:endParaRPr lang="en-US" sz="3000" dirty="0"/>
+          </a:p>
+        </p:txBody>
+      </p:sp>
+      <p:sp>
+        <p:nvSpPr>
+          <p:cNvPr id="4" name="Text 2"/>
+          <p:cNvSpPr txBox="1"/>
+          <p:nvPr/>
+        </p:nvSpPr>
+        <p:spPr>
+          <a:xfrm>
+            <a:off x="1417320" y="996696"/>
+            <a:ext cx="10271455" cy="274320"/>
+          </a:xfrm>
+          <a:prstGeom prst="rect">
+            <a:avLst/>
+          </a:prstGeom>
+          <a:noFill/>
+          <a:ln/>
+        </p:spPr>
+        <p:txBody>
+          <a:bodyPr wrap="square" lIns="0" tIns="0" rIns="0" bIns="0" rtlCol="0" anchor="ctr"/>
+          <a:lstStyle/>
+          <a:p>
+            <a:pPr rtl="1" algn="r" indent="0" marL="0">
+              <a:buNone/>
+            </a:pPr>
+            <a:r>
               <a:rPr lang="en-US" sz="1500" b="1" dirty="0">
                 <a:solidFill>
-                  <a:srgbClr val="1D9E9A"/>
-                </a:solidFill>
-                <a:latin typeface="Arial" pitchFamily="34" charset="0"/>
-                <a:ea typeface="Arial" pitchFamily="34" charset="-122"/>
-                <a:cs typeface="Arial" pitchFamily="34" charset="-120"/>
-              </a:rPr>
-              <a:t>מקורות בעברית ובאנגלית, לפי סדר הא-ב</a:t>
+                  <a:srgbClr val="0E6E7E"/>
+                </a:solidFill>
+                <a:latin typeface="Arial" pitchFamily="34" charset="0"/>
+                <a:ea typeface="Arial" pitchFamily="34" charset="-122"/>
+                <a:cs typeface="Arial" pitchFamily="34" charset="-120"/>
+              </a:rPr>
+              <a:t>המקורות שאוזכרו במצגת, מקורות בעברית ואחריהם באנגלית לפי סדר הא-ב</a:t>
             </a:r>
             <a:endParaRPr lang="en-US" sz="1500" dirty="0"/>
           </a:p>
@@ -5351,18 +5524,18 @@
       </p:sp>
       <p:sp>
         <p:nvSpPr>
-          <p:cNvPr id="4" name="Shape 2"/>
+          <p:cNvPr id="5" name="Shape 3"/>
           <p:cNvSpPr/>
           <p:nvPr/>
         </p:nvSpPr>
         <p:spPr>
           <a:xfrm>
-            <a:off x="502920" y="1316736"/>
-            <a:ext cx="11185855" cy="4882896"/>
+            <a:off x="502920" y="1307592"/>
+            <a:ext cx="11185855" cy="4910328"/>
           </a:xfrm>
           <a:prstGeom prst="roundRect">
             <a:avLst>
-              <a:gd name="adj" fmla="val 1873"/>
+              <a:gd name="adj" fmla="val 2235"/>
             </a:avLst>
           </a:prstGeom>
           <a:solidFill>
@@ -5370,7 +5543,7 @@
           </a:solidFill>
           <a:ln w="12700">
             <a:solidFill>
-              <a:srgbClr val="F2F8F9"/>
+              <a:srgbClr val="D5E7E9"/>
             </a:solidFill>
             <a:prstDash val="solid"/>
           </a:ln>
@@ -5378,14 +5551,14 @@
       </p:sp>
       <p:sp>
         <p:nvSpPr>
-          <p:cNvPr id="5" name="Text 3"/>
+          <p:cNvPr id="6" name="Text 4"/>
           <p:cNvSpPr txBox="1"/>
           <p:nvPr/>
         </p:nvSpPr>
         <p:spPr>
           <a:xfrm>
-            <a:off x="886968" y="1591056"/>
-            <a:ext cx="10417759" cy="4334256"/>
+            <a:off x="6385255" y="1554480"/>
+            <a:ext cx="4882896" cy="4572000"/>
           </a:xfrm>
           <a:prstGeom prst="rect">
             <a:avLst/>
@@ -5404,7 +5577,7 @@
               <a:buNone/>
             </a:pPr>
             <a:r>
-              <a:rPr lang="en-US" sz="1200" dirty="0">
+              <a:rPr lang="en-US" sz="1250" dirty="0">
                 <a:solidFill>
                   <a:srgbClr val="0C3B44"/>
                 </a:solidFill>
@@ -5412,9 +5585,9 @@
                 <a:ea typeface="Arial" pitchFamily="34" charset="-122"/>
                 <a:cs typeface="Arial" pitchFamily="34" charset="-120"/>
               </a:rPr>
-              <a:t>‏המרכז הלאומי לבקרת מחלות ‏(2023)‏. סקר בריאות לאומי בישראל INHIS-4, 2018-2020, ממצאים נבחרים. משרד הבריאות.‏</a:t>
-            </a:r>
-            <a:endParaRPr lang="en-US" sz="1200" dirty="0"/>
+              <a:t>‏המרכז הלאומי לבקרת מחלות ‏(2023)‏. סקר בריאות לאומי INHIS-4. משרד הבריאות.‏</a:t>
+            </a:r>
+            <a:endParaRPr lang="en-US" sz="1250" dirty="0"/>
           </a:p>
           <a:p>
             <a:pPr algn="r" indent="0" marL="0">
@@ -5427,7 +5600,7 @@
               <a:buNone/>
             </a:pPr>
             <a:r>
-              <a:rPr lang="en-US" sz="1200" dirty="0">
+              <a:rPr lang="en-US" sz="1250" dirty="0">
                 <a:solidFill>
                   <a:srgbClr val="0C3B44"/>
                 </a:solidFill>
@@ -5435,9 +5608,9 @@
                 <a:ea typeface="Arial" pitchFamily="34" charset="-122"/>
                 <a:cs typeface="Arial" pitchFamily="34" charset="-120"/>
               </a:rPr>
-              <a:t>‏המרכז הלאומי לבקרת מחלות ‏(2025)‏. מגמות במצב הסוכרת בישראל בשנים 2012-2023. משרד הבריאות.‏</a:t>
-            </a:r>
-            <a:endParaRPr lang="en-US" sz="1200" dirty="0"/>
+              <a:t>‏המרכז הלאומי לבקרת מחלות ‏(2025)‏. מגמות במצב הסוכרת בישראל. משרד הבריאות.‏</a:t>
+            </a:r>
+            <a:endParaRPr lang="en-US" sz="1250" dirty="0"/>
           </a:p>
           <a:p>
             <a:pPr algn="r" indent="0" marL="0">
@@ -5450,7 +5623,7 @@
               <a:buNone/>
             </a:pPr>
             <a:r>
-              <a:rPr lang="en-US" sz="1200" dirty="0">
+              <a:rPr lang="en-US" sz="1250" dirty="0">
                 <a:solidFill>
                   <a:srgbClr val="0C3B44"/>
                 </a:solidFill>
@@ -5458,9 +5631,9 @@
                 <a:ea typeface="Arial" pitchFamily="34" charset="-122"/>
                 <a:cs typeface="Arial" pitchFamily="34" charset="-120"/>
               </a:rPr>
-              <a:t>‏צבר בן-יהושע, נ' ‏(2016)‏. מסורות וזרמים במחקר האיכותני: תפיסות, אסטרטגיות וכלים מתקדמים. מכון מופ"ת.‏</a:t>
-            </a:r>
-            <a:endParaRPr lang="en-US" sz="1200" dirty="0"/>
+              <a:t>‏צבר בן-יהושע, נ' ‏(2016)‏. מסורות וזרמים במחקר האיכותני. מכון מופ"ת.‏</a:t>
+            </a:r>
+            <a:endParaRPr lang="en-US" sz="1250" dirty="0"/>
           </a:p>
           <a:p>
             <a:pPr algn="r" indent="0" marL="0">
@@ -5473,7 +5646,7 @@
               <a:buNone/>
             </a:pPr>
             <a:r>
-              <a:rPr lang="en-US" sz="1200" dirty="0">
+              <a:rPr lang="en-US" sz="1250" dirty="0">
                 <a:solidFill>
                   <a:srgbClr val="0C3B44"/>
                 </a:solidFill>
@@ -5481,9 +5654,9 @@
                 <a:ea typeface="Arial" pitchFamily="34" charset="-122"/>
                 <a:cs typeface="Arial" pitchFamily="34" charset="-120"/>
               </a:rPr>
-              <a:t>‏קידום בריאות בישראל, כתב עת ישראלי לחינוך ולקידום הבריאות ‏(2023)‏. גיליון 11. המרכז לקידום בריאות, אוניברסיטת אריאל בשומרון.‏</a:t>
-            </a:r>
-            <a:endParaRPr lang="en-US" sz="1200" dirty="0"/>
+              <a:t>‏קידום בריאות בישראל ‏(2023)‏. גיליון 11. אוניברסיטת אריאל בשומרון.‏</a:t>
+            </a:r>
+            <a:endParaRPr lang="en-US" sz="1250" dirty="0"/>
           </a:p>
           <a:p>
             <a:pPr algn="r" indent="0" marL="0">
@@ -5496,7 +5669,7 @@
               <a:buNone/>
             </a:pPr>
             <a:r>
-              <a:rPr lang="en-US" sz="1200" dirty="0">
+              <a:rPr lang="en-US" sz="1250" dirty="0">
                 <a:solidFill>
                   <a:srgbClr val="0C3B44"/>
                 </a:solidFill>
@@ -5504,9 +5677,9 @@
                 <a:ea typeface="Arial" pitchFamily="34" charset="-122"/>
                 <a:cs typeface="Arial" pitchFamily="34" charset="-120"/>
               </a:rPr>
-              <a:t>‏שקדי, א' ‏(2003)‏. מילים המנסות לגעת: מחקר איכותני, תיאוריה ויישום. רמות.‏</a:t>
-            </a:r>
-            <a:endParaRPr lang="en-US" sz="1200" dirty="0"/>
+              <a:t>‏שקדי, א' ‏(2003)‏. מילים המנסות לגעת: מחקר איכותני. רמות.‏</a:t>
+            </a:r>
+            <a:endParaRPr lang="en-US" sz="1250" dirty="0"/>
           </a:p>
           <a:p>
             <a:pPr algn="r" indent="0" marL="0">
@@ -5519,7 +5692,7 @@
               <a:buNone/>
             </a:pPr>
             <a:r>
-              <a:rPr lang="en-US" sz="1200" dirty="0">
+              <a:rPr lang="en-US" sz="1250" dirty="0">
                 <a:solidFill>
                   <a:srgbClr val="0C3B44"/>
                 </a:solidFill>
@@ -5527,9 +5700,9 @@
                 <a:ea typeface="Arial" pitchFamily="34" charset="-122"/>
                 <a:cs typeface="Arial" pitchFamily="34" charset="-120"/>
               </a:rPr>
-              <a:t>‏Braun, V., &amp; Clarke, V. ‏(2006)‏. Using thematic analysis in psychology. Qualitative Research in Psychology, 3‏(2)‏, 77-101.‏</a:t>
-            </a:r>
-            <a:endParaRPr lang="en-US" sz="1200" dirty="0"/>
+              <a:t>‏Braun, V., &amp; Clarke, V. ‏(2006)‏. Qualitative Research in Psychology, 3‏(2)‏.‏</a:t>
+            </a:r>
+            <a:endParaRPr lang="en-US" sz="1250" dirty="0"/>
           </a:p>
           <a:p>
             <a:pPr algn="r" indent="0" marL="0">
@@ -5542,7 +5715,7 @@
               <a:buNone/>
             </a:pPr>
             <a:r>
-              <a:rPr lang="en-US" sz="1200" dirty="0">
+              <a:rPr lang="en-US" sz="1250" dirty="0">
                 <a:solidFill>
                   <a:srgbClr val="0C3B44"/>
                 </a:solidFill>
@@ -5550,9 +5723,327 @@
                 <a:ea typeface="Arial" pitchFamily="34" charset="-122"/>
                 <a:cs typeface="Arial" pitchFamily="34" charset="-120"/>
               </a:rPr>
-              <a:t>‏Filippou, C. D., Tsioufis, C. P., Thomopoulos, C. G., Mihas, C. C., &amp; Tousoulis, D. I. ‏(2020)‏. Dietary approaches to stop hypertension ‏(DASH)‏ diet and blood pressure reduction in adults with and without hypertension. Advances in Nutrition, 11‏(5)‏, 1150-1160.‏</a:t>
-            </a:r>
-            <a:endParaRPr lang="en-US" sz="1200" dirty="0"/>
+              <a:t>‏Filippou, C. D., et al. ‏(2020)‏. Advances in Nutrition, 11‏(5)‏.‏</a:t>
+            </a:r>
+            <a:endParaRPr lang="en-US" sz="1250" dirty="0"/>
+          </a:p>
+          <a:p>
+            <a:pPr algn="r" indent="0" marL="0">
+              <a:lnSpc>
+                <a:spcPts val="1700"/>
+              </a:lnSpc>
+              <a:spcBef>
+                <a:spcPts val="600"/>
+              </a:spcBef>
+              <a:buNone/>
+            </a:pPr>
+            <a:r>
+              <a:rPr lang="en-US" sz="1250" dirty="0">
+                <a:solidFill>
+                  <a:srgbClr val="0C3B44"/>
+                </a:solidFill>
+                <a:latin typeface="Arial" pitchFamily="34" charset="0"/>
+                <a:ea typeface="Arial" pitchFamily="34" charset="-122"/>
+                <a:cs typeface="Arial" pitchFamily="34" charset="-120"/>
+              </a:rPr>
+              <a:t>‏Franklin, B. A., et al. ‏(2021)‏. Int. J. of Environmental Research and Public Health, 18‏(18)‏.‏</a:t>
+            </a:r>
+            <a:endParaRPr lang="en-US" sz="1250" dirty="0"/>
+          </a:p>
+          <a:p>
+            <a:pPr algn="r" indent="0" marL="0">
+              <a:lnSpc>
+                <a:spcPts val="1700"/>
+              </a:lnSpc>
+              <a:spcBef>
+                <a:spcPts val="600"/>
+              </a:spcBef>
+              <a:buNone/>
+            </a:pPr>
+            <a:r>
+              <a:rPr lang="en-US" sz="1250" dirty="0">
+                <a:solidFill>
+                  <a:srgbClr val="0C3B44"/>
+                </a:solidFill>
+                <a:latin typeface="Arial" pitchFamily="34" charset="0"/>
+                <a:ea typeface="Arial" pitchFamily="34" charset="-122"/>
+                <a:cs typeface="Arial" pitchFamily="34" charset="-120"/>
+              </a:rPr>
+              <a:t>‏Geidl, W., et al. ‏(2020)‏. Int. J. of Behavioral Nutrition and Physical Activity, 17.‏</a:t>
+            </a:r>
+            <a:endParaRPr lang="en-US" sz="1250" dirty="0"/>
+          </a:p>
+          <a:p>
+            <a:pPr algn="r" indent="0" marL="0">
+              <a:lnSpc>
+                <a:spcPts val="1700"/>
+              </a:lnSpc>
+              <a:spcBef>
+                <a:spcPts val="600"/>
+              </a:spcBef>
+              <a:buNone/>
+            </a:pPr>
+            <a:r>
+              <a:rPr lang="en-US" sz="1250" dirty="0">
+                <a:solidFill>
+                  <a:srgbClr val="0C3B44"/>
+                </a:solidFill>
+                <a:latin typeface="Arial" pitchFamily="34" charset="0"/>
+                <a:ea typeface="Arial" pitchFamily="34" charset="-122"/>
+                <a:cs typeface="Arial" pitchFamily="34" charset="-120"/>
+              </a:rPr>
+              <a:t>‏Hareer, L. W., et al. ‏(2024)‏. Nutrition &amp; Dietetics, 81‏(4)‏.‏</a:t>
+            </a:r>
+            <a:endParaRPr lang="en-US" sz="1250" dirty="0"/>
+          </a:p>
+        </p:txBody>
+      </p:sp>
+      <p:sp>
+        <p:nvSpPr>
+          <p:cNvPr id="7" name="Text 5"/>
+          <p:cNvSpPr txBox="1"/>
+          <p:nvPr/>
+        </p:nvSpPr>
+        <p:spPr>
+          <a:xfrm>
+            <a:off x="923544" y="1554480"/>
+            <a:ext cx="4882896" cy="4572000"/>
+          </a:xfrm>
+          <a:prstGeom prst="rect">
+            <a:avLst/>
+          </a:prstGeom>
+          <a:noFill/>
+          <a:ln/>
+        </p:spPr>
+        <p:txBody>
+          <a:bodyPr wrap="square" lIns="0" tIns="0" rIns="0" bIns="0" rtlCol="0" anchor="t"/>
+          <a:lstStyle/>
+          <a:p>
+            <a:pPr algn="r" indent="0" marL="0">
+              <a:lnSpc>
+                <a:spcPts val="1700"/>
+              </a:lnSpc>
+              <a:buNone/>
+            </a:pPr>
+            <a:r>
+              <a:rPr lang="en-US" sz="1250" dirty="0">
+                <a:solidFill>
+                  <a:srgbClr val="0C3B44"/>
+                </a:solidFill>
+                <a:latin typeface="Arial" pitchFamily="34" charset="0"/>
+                <a:ea typeface="Arial" pitchFamily="34" charset="-122"/>
+                <a:cs typeface="Arial" pitchFamily="34" charset="-120"/>
+              </a:rPr>
+              <a:t>‏Karatzi, K., &amp; Manios, Y. ‏(2021)‏. Nutrients, 13‏(5)‏.‏</a:t>
+            </a:r>
+            <a:endParaRPr lang="en-US" sz="1250" dirty="0"/>
+          </a:p>
+          <a:p>
+            <a:pPr algn="r" indent="0" marL="0">
+              <a:lnSpc>
+                <a:spcPts val="1700"/>
+              </a:lnSpc>
+              <a:spcBef>
+                <a:spcPts val="600"/>
+              </a:spcBef>
+              <a:buNone/>
+            </a:pPr>
+            <a:r>
+              <a:rPr lang="en-US" sz="1250" dirty="0">
+                <a:solidFill>
+                  <a:srgbClr val="0C3B44"/>
+                </a:solidFill>
+                <a:latin typeface="Arial" pitchFamily="34" charset="0"/>
+                <a:ea typeface="Arial" pitchFamily="34" charset="-122"/>
+                <a:cs typeface="Arial" pitchFamily="34" charset="-120"/>
+              </a:rPr>
+              <a:t>‏Laffond, A., et al. ‏(2023)‏. Nutrients, 15‏(15)‏.‏</a:t>
+            </a:r>
+            <a:endParaRPr lang="en-US" sz="1250" dirty="0"/>
+          </a:p>
+          <a:p>
+            <a:pPr algn="r" indent="0" marL="0">
+              <a:lnSpc>
+                <a:spcPts val="1700"/>
+              </a:lnSpc>
+              <a:spcBef>
+                <a:spcPts val="600"/>
+              </a:spcBef>
+              <a:buNone/>
+            </a:pPr>
+            <a:r>
+              <a:rPr lang="en-US" sz="1250" dirty="0">
+                <a:solidFill>
+                  <a:srgbClr val="0C3B44"/>
+                </a:solidFill>
+                <a:latin typeface="Arial" pitchFamily="34" charset="0"/>
+                <a:ea typeface="Arial" pitchFamily="34" charset="-122"/>
+                <a:cs typeface="Arial" pitchFamily="34" charset="-120"/>
+              </a:rPr>
+              <a:t>‏Lai, C., et al. ‏(2024)‏. The Journal of Nutrition, Health and Aging, 28‏(3)‏.‏</a:t>
+            </a:r>
+            <a:endParaRPr lang="en-US" sz="1250" dirty="0"/>
+          </a:p>
+          <a:p>
+            <a:pPr algn="r" indent="0" marL="0">
+              <a:lnSpc>
+                <a:spcPts val="1700"/>
+              </a:lnSpc>
+              <a:spcBef>
+                <a:spcPts val="600"/>
+              </a:spcBef>
+              <a:buNone/>
+            </a:pPr>
+            <a:r>
+              <a:rPr lang="en-US" sz="1250" dirty="0">
+                <a:solidFill>
+                  <a:srgbClr val="0C3B44"/>
+                </a:solidFill>
+                <a:latin typeface="Arial" pitchFamily="34" charset="0"/>
+                <a:ea typeface="Arial" pitchFamily="34" charset="-122"/>
+                <a:cs typeface="Arial" pitchFamily="34" charset="-120"/>
+              </a:rPr>
+              <a:t>‏Levi, S., et al. ‏(2025)‏. Israel Journal of Health Policy Research, 14‏(1)‏.‏</a:t>
+            </a:r>
+            <a:endParaRPr lang="en-US" sz="1250" dirty="0"/>
+          </a:p>
+          <a:p>
+            <a:pPr algn="r" indent="0" marL="0">
+              <a:lnSpc>
+                <a:spcPts val="1700"/>
+              </a:lnSpc>
+              <a:spcBef>
+                <a:spcPts val="600"/>
+              </a:spcBef>
+              <a:buNone/>
+            </a:pPr>
+            <a:r>
+              <a:rPr lang="en-US" sz="1250" dirty="0">
+                <a:solidFill>
+                  <a:srgbClr val="0C3B44"/>
+                </a:solidFill>
+                <a:latin typeface="Arial" pitchFamily="34" charset="0"/>
+                <a:ea typeface="Arial" pitchFamily="34" charset="-122"/>
+                <a:cs typeface="Arial" pitchFamily="34" charset="-120"/>
+              </a:rPr>
+              <a:t>‏Lincoln, Y. S., &amp; Guba, E. G. ‏(1985)‏. Naturalistic inquiry. Sage.‏</a:t>
+            </a:r>
+            <a:endParaRPr lang="en-US" sz="1250" dirty="0"/>
+          </a:p>
+          <a:p>
+            <a:pPr algn="r" indent="0" marL="0">
+              <a:lnSpc>
+                <a:spcPts val="1700"/>
+              </a:lnSpc>
+              <a:spcBef>
+                <a:spcPts val="600"/>
+              </a:spcBef>
+              <a:buNone/>
+            </a:pPr>
+            <a:r>
+              <a:rPr lang="en-US" sz="1250" dirty="0">
+                <a:solidFill>
+                  <a:srgbClr val="0C3B44"/>
+                </a:solidFill>
+                <a:latin typeface="Arial" pitchFamily="34" charset="0"/>
+                <a:ea typeface="Arial" pitchFamily="34" charset="-122"/>
+                <a:cs typeface="Arial" pitchFamily="34" charset="-120"/>
+              </a:rPr>
+              <a:t>‏Reges, O., et al. ‏(2020)‏. Israel Journal of Health Policy Research, 9‏(1)‏.‏</a:t>
+            </a:r>
+            <a:endParaRPr lang="en-US" sz="1250" dirty="0"/>
+          </a:p>
+          <a:p>
+            <a:pPr algn="r" indent="0" marL="0">
+              <a:lnSpc>
+                <a:spcPts val="1700"/>
+              </a:lnSpc>
+              <a:spcBef>
+                <a:spcPts val="600"/>
+              </a:spcBef>
+              <a:buNone/>
+            </a:pPr>
+            <a:r>
+              <a:rPr lang="en-US" sz="1250" dirty="0">
+                <a:solidFill>
+                  <a:srgbClr val="0C3B44"/>
+                </a:solidFill>
+                <a:latin typeface="Arial" pitchFamily="34" charset="0"/>
+                <a:ea typeface="Arial" pitchFamily="34" charset="-122"/>
+                <a:cs typeface="Arial" pitchFamily="34" charset="-120"/>
+              </a:rPr>
+              <a:t>‏Treister-Goltzman, Y., &amp; Peleg, R. ‏(2015)‏. Journal of Community Health, 40‏(6)‏.‏</a:t>
+            </a:r>
+            <a:endParaRPr lang="en-US" sz="1250" dirty="0"/>
+          </a:p>
+          <a:p>
+            <a:pPr algn="r" indent="0" marL="0">
+              <a:lnSpc>
+                <a:spcPts val="1700"/>
+              </a:lnSpc>
+              <a:spcBef>
+                <a:spcPts val="600"/>
+              </a:spcBef>
+              <a:buNone/>
+            </a:pPr>
+            <a:r>
+              <a:rPr lang="en-US" sz="1250" dirty="0">
+                <a:solidFill>
+                  <a:srgbClr val="0C3B44"/>
+                </a:solidFill>
+                <a:latin typeface="Arial" pitchFamily="34" charset="0"/>
+                <a:ea typeface="Arial" pitchFamily="34" charset="-122"/>
+                <a:cs typeface="Arial" pitchFamily="34" charset="-120"/>
+              </a:rPr>
+              <a:t>‏van der Velde, J. H. P. M., et al. ‏(2024)‏. European Journal of Ageing, 21.‏</a:t>
+            </a:r>
+            <a:endParaRPr lang="en-US" sz="1250" dirty="0"/>
+          </a:p>
+          <a:p>
+            <a:pPr algn="r" indent="0" marL="0">
+              <a:lnSpc>
+                <a:spcPts val="1700"/>
+              </a:lnSpc>
+              <a:spcBef>
+                <a:spcPts val="600"/>
+              </a:spcBef>
+              <a:buNone/>
+            </a:pPr>
+            <a:r>
+              <a:rPr lang="en-US" sz="1250" dirty="0">
+                <a:solidFill>
+                  <a:srgbClr val="0C3B44"/>
+                </a:solidFill>
+                <a:latin typeface="Arial" pitchFamily="34" charset="0"/>
+                <a:ea typeface="Arial" pitchFamily="34" charset="-122"/>
+                <a:cs typeface="Arial" pitchFamily="34" charset="-120"/>
+              </a:rPr>
+              <a:t>‏World Health Organization ‏(2023)‏. Noncommunicable diseases [Fact sheet].‏</a:t>
+            </a:r>
+            <a:endParaRPr lang="en-US" sz="1250" dirty="0"/>
+          </a:p>
+          <a:p>
+            <a:pPr algn="r" indent="0" marL="0">
+              <a:lnSpc>
+                <a:spcPts val="1700"/>
+              </a:lnSpc>
+              <a:spcBef>
+                <a:spcPts val="600"/>
+              </a:spcBef>
+              <a:buNone/>
+            </a:pPr>
+            <a:r>
+              <a:rPr lang="en-US" sz="1250" dirty="0">
+                <a:solidFill>
+                  <a:srgbClr val="0C3B44"/>
+                </a:solidFill>
+                <a:latin typeface="Arial" pitchFamily="34" charset="0"/>
+                <a:ea typeface="Arial" pitchFamily="34" charset="-122"/>
+                <a:cs typeface="Arial" pitchFamily="34" charset="-120"/>
+              </a:rPr>
+              <a:t>‏Zhang, Y.-B., et al. ‏(2021)‏. BMJ, 373.‏</a:t>
+            </a:r>
+            <a:endParaRPr lang="en-US" sz="1250" dirty="0"/>
           </a:p>
         </p:txBody>
       </p:sp>
@@ -5631,119 +6122,65 @@
       </p:grpSpPr>
       <p:sp>
         <p:nvSpPr>
-          <p:cNvPr id="2" name="Text 0"/>
-          <p:cNvSpPr txBox="1"/>
-          <p:nvPr/>
-        </p:nvSpPr>
-        <p:spPr>
-          <a:xfrm>
-            <a:off x="1417320" y="274320"/>
-            <a:ext cx="10271455" cy="603504"/>
-          </a:xfrm>
-          <a:prstGeom prst="rect">
-            <a:avLst/>
-          </a:prstGeom>
-          <a:noFill/>
-          <a:ln/>
-        </p:spPr>
-        <p:txBody>
-          <a:bodyPr wrap="square" lIns="0" tIns="0" rIns="0" bIns="0" rtlCol="0" anchor="ctr"/>
-          <a:lstStyle/>
-          <a:p>
-            <a:pPr rtl="1" algn="r" indent="0" marL="0">
-              <a:buNone/>
-            </a:pPr>
-            <a:r>
-              <a:rPr lang="en-US" sz="3100" b="1" dirty="0">
-                <a:solidFill>
-                  <a:srgbClr val="0C3B44"/>
-                </a:solidFill>
-                <a:latin typeface="Arial" pitchFamily="34" charset="0"/>
-                <a:ea typeface="Arial" pitchFamily="34" charset="-122"/>
-                <a:cs typeface="Arial" pitchFamily="34" charset="-120"/>
-              </a:rPr>
-              <a:t>רשימת מקורות</a:t>
-            </a:r>
-            <a:endParaRPr lang="en-US" sz="3100" dirty="0"/>
-          </a:p>
-        </p:txBody>
-      </p:sp>
-      <p:sp>
-        <p:nvSpPr>
-          <p:cNvPr id="3" name="Text 1"/>
-          <p:cNvSpPr txBox="1"/>
-          <p:nvPr/>
-        </p:nvSpPr>
-        <p:spPr>
-          <a:xfrm>
-            <a:off x="1417320" y="877824"/>
-            <a:ext cx="10271455" cy="310896"/>
-          </a:xfrm>
-          <a:prstGeom prst="rect">
-            <a:avLst/>
-          </a:prstGeom>
-          <a:noFill/>
-          <a:ln/>
-        </p:spPr>
-        <p:txBody>
-          <a:bodyPr wrap="square" lIns="0" tIns="0" rIns="0" bIns="0" rtlCol="0" anchor="ctr"/>
-          <a:lstStyle/>
-          <a:p>
-            <a:pPr rtl="1" algn="r" indent="0" marL="0">
-              <a:buNone/>
-            </a:pPr>
-            <a:r>
-              <a:rPr lang="en-US" sz="1500" b="1" dirty="0">
-                <a:solidFill>
-                  <a:srgbClr val="1D9E9A"/>
-                </a:solidFill>
-                <a:latin typeface="Arial" pitchFamily="34" charset="0"/>
-                <a:ea typeface="Arial" pitchFamily="34" charset="-122"/>
-                <a:cs typeface="Arial" pitchFamily="34" charset="-120"/>
-              </a:rPr>
-              <a:t>המשך רשימת המקורות</a:t>
-            </a:r>
-            <a:endParaRPr lang="en-US" sz="1500" dirty="0"/>
-          </a:p>
-        </p:txBody>
-      </p:sp>
-      <p:sp>
-        <p:nvSpPr>
-          <p:cNvPr id="4" name="Shape 2"/>
+          <p:cNvPr id="2" name="Shape 0"/>
           <p:cNvSpPr/>
           <p:nvPr/>
         </p:nvSpPr>
         <p:spPr>
           <a:xfrm>
-            <a:off x="502920" y="1316736"/>
-            <a:ext cx="11185855" cy="4882896"/>
+            <a:off x="5148072" y="1371600"/>
+            <a:ext cx="1883664" cy="1883664"/>
           </a:xfrm>
           <a:prstGeom prst="roundRect">
             <a:avLst>
-              <a:gd name="adj" fmla="val 1873"/>
+              <a:gd name="adj" fmla="val 7767"/>
             </a:avLst>
           </a:prstGeom>
           <a:solidFill>
-            <a:srgbClr val="F2F8F9"/>
+            <a:srgbClr val="FFFFFF"/>
           </a:solidFill>
           <a:ln w="12700">
             <a:solidFill>
-              <a:srgbClr val="F2F8F9"/>
+              <a:srgbClr val="FFFFFF"/>
             </a:solidFill>
             <a:prstDash val="solid"/>
           </a:ln>
         </p:spPr>
       </p:sp>
-      <p:sp>
-        <p:nvSpPr>
-          <p:cNvPr id="5" name="Text 3"/>
+      <p:pic>
+        <p:nvPicPr>
+          <p:cNvPr id="3" name="Image 0" descr="logo.jpg">    </p:cNvPr>
+          <p:cNvPicPr>
+            <a:picLocks noChangeAspect="1"/>
+          </p:cNvPicPr>
+          <p:nvPr/>
+        </p:nvPicPr>
+        <p:blipFill>
+          <a:blip r:embed="rId1"/>
+          <a:stretch>
+            <a:fillRect/>
+          </a:stretch>
+        </p:blipFill>
+        <p:spPr>
+          <a:xfrm>
+            <a:off x="5468112" y="1691640"/>
+            <a:ext cx="1243584" cy="1243584"/>
+          </a:xfrm>
+          <a:prstGeom prst="rect">
+            <a:avLst/>
+          </a:prstGeom>
+        </p:spPr>
+      </p:pic>
+      <p:sp>
+        <p:nvSpPr>
+          <p:cNvPr id="4" name="Text 1"/>
           <p:cNvSpPr txBox="1"/>
           <p:nvPr/>
         </p:nvSpPr>
         <p:spPr>
           <a:xfrm>
-            <a:off x="886968" y="1591056"/>
-            <a:ext cx="10417759" cy="4334256"/>
+            <a:off x="502920" y="3657600"/>
+            <a:ext cx="11185855" cy="731520"/>
           </a:xfrm>
           <a:prstGeom prst="rect">
             <a:avLst/>
@@ -5752,213 +6189,141 @@
           <a:ln/>
         </p:spPr>
         <p:txBody>
-          <a:bodyPr wrap="square" lIns="0" tIns="0" rIns="0" bIns="0" rtlCol="0" anchor="t"/>
-          <a:lstStyle/>
-          <a:p>
-            <a:pPr algn="r" indent="0" marL="0">
-              <a:lnSpc>
-                <a:spcPts val="1700"/>
-              </a:lnSpc>
-              <a:buNone/>
-            </a:pPr>
-            <a:r>
-              <a:rPr lang="en-US" sz="1200" dirty="0">
-                <a:solidFill>
-                  <a:srgbClr val="0C3B44"/>
-                </a:solidFill>
-                <a:latin typeface="Arial" pitchFamily="34" charset="0"/>
-                <a:ea typeface="Arial" pitchFamily="34" charset="-122"/>
-                <a:cs typeface="Arial" pitchFamily="34" charset="-120"/>
-              </a:rPr>
-              <a:t>‏Franklin, B. A., Rusia, A., Haskin-Popp, C., &amp; Tawney, A. ‏(2021)‏. Chronic stress, exercise and cardiovascular disease. International Journal of Environmental Research and Public Health, 18‏(18)‏, Article 9922.‏</a:t>
-            </a:r>
-            <a:endParaRPr lang="en-US" sz="1200" dirty="0"/>
-          </a:p>
-          <a:p>
-            <a:pPr algn="r" indent="0" marL="0">
-              <a:lnSpc>
-                <a:spcPts val="1700"/>
-              </a:lnSpc>
-              <a:spcBef>
-                <a:spcPts val="600"/>
-              </a:spcBef>
-              <a:buNone/>
-            </a:pPr>
-            <a:r>
-              <a:rPr lang="en-US" sz="1200" dirty="0">
-                <a:solidFill>
-                  <a:srgbClr val="0C3B44"/>
-                </a:solidFill>
-                <a:latin typeface="Arial" pitchFamily="34" charset="0"/>
-                <a:ea typeface="Arial" pitchFamily="34" charset="-122"/>
-                <a:cs typeface="Arial" pitchFamily="34" charset="-120"/>
-              </a:rPr>
-              <a:t>‏Geidl, W., Schlesinger, S., Mino, E., Miranda, L., &amp; Pfeifer, K. ‏(2020)‏. Dose-response relationship between physical activity and mortality in adults with noncommunicable diseases. International Journal of Behavioral Nutrition and Physical Activity, 17, Article 109.‏</a:t>
-            </a:r>
-            <a:endParaRPr lang="en-US" sz="1200" dirty="0"/>
-          </a:p>
-          <a:p>
-            <a:pPr algn="r" indent="0" marL="0">
-              <a:lnSpc>
-                <a:spcPts val="1700"/>
-              </a:lnSpc>
-              <a:spcBef>
-                <a:spcPts val="600"/>
-              </a:spcBef>
-              <a:buNone/>
-            </a:pPr>
-            <a:r>
-              <a:rPr lang="en-US" sz="1200" dirty="0">
-                <a:solidFill>
-                  <a:srgbClr val="0C3B44"/>
-                </a:solidFill>
-                <a:latin typeface="Arial" pitchFamily="34" charset="0"/>
-                <a:ea typeface="Arial" pitchFamily="34" charset="-122"/>
-                <a:cs typeface="Arial" pitchFamily="34" charset="-120"/>
-              </a:rPr>
-              <a:t>‏Hareer, L. W., Lau, Y. Y., Mole, F., Reidlinger, D. P., &amp; Thomas, C. ‏(2024)‏. The effectiveness of the Mediterranean diet for primary and secondary prevention of cardiovascular disease: An umbrella review. Nutrition &amp; Dietetics, 81‏(4)‏.‏</a:t>
-            </a:r>
-            <a:endParaRPr lang="en-US" sz="1200" dirty="0"/>
-          </a:p>
-          <a:p>
-            <a:pPr algn="r" indent="0" marL="0">
-              <a:lnSpc>
-                <a:spcPts val="1700"/>
-              </a:lnSpc>
-              <a:spcBef>
-                <a:spcPts val="600"/>
-              </a:spcBef>
-              <a:buNone/>
-            </a:pPr>
-            <a:r>
-              <a:rPr lang="en-US" sz="1200" dirty="0">
-                <a:solidFill>
-                  <a:srgbClr val="0C3B44"/>
-                </a:solidFill>
-                <a:latin typeface="Arial" pitchFamily="34" charset="0"/>
-                <a:ea typeface="Arial" pitchFamily="34" charset="-122"/>
-                <a:cs typeface="Arial" pitchFamily="34" charset="-120"/>
-              </a:rPr>
-              <a:t>‏Karatzi, K., &amp; Manios, Y. ‏(2021)‏. The role of lifestyle, eating habits and social environment in the prevention and treatment of type 2 diabetes and hypertension. Nutrients, 13‏(5)‏, Article 1460.‏</a:t>
-            </a:r>
-            <a:endParaRPr lang="en-US" sz="1200" dirty="0"/>
-          </a:p>
-          <a:p>
-            <a:pPr algn="r" indent="0" marL="0">
-              <a:lnSpc>
-                <a:spcPts val="1700"/>
-              </a:lnSpc>
-              <a:spcBef>
-                <a:spcPts val="600"/>
-              </a:spcBef>
-              <a:buNone/>
-            </a:pPr>
-            <a:r>
-              <a:rPr lang="en-US" sz="1200" dirty="0">
-                <a:solidFill>
-                  <a:srgbClr val="0C3B44"/>
-                </a:solidFill>
-                <a:latin typeface="Arial" pitchFamily="34" charset="0"/>
-                <a:ea typeface="Arial" pitchFamily="34" charset="-122"/>
-                <a:cs typeface="Arial" pitchFamily="34" charset="-120"/>
-              </a:rPr>
-              <a:t>‏Laffond, A., Rivera-Picón, C., Rodríguez-Muñoz, P. M., Morales-Gázquez, M. J., &amp; Fernández-García, R. ‏(2023)‏. Mediterranean diet for primary and secondary prevention of cardiovascular disease and mortality: An updated systematic review. Nutrients, 15‏(15)‏, Article 3356.‏</a:t>
-            </a:r>
-            <a:endParaRPr lang="en-US" sz="1200" dirty="0"/>
-          </a:p>
-          <a:p>
-            <a:pPr algn="r" indent="0" marL="0">
-              <a:lnSpc>
-                <a:spcPts val="1700"/>
-              </a:lnSpc>
-              <a:spcBef>
-                <a:spcPts val="600"/>
-              </a:spcBef>
-              <a:buNone/>
-            </a:pPr>
-            <a:r>
-              <a:rPr lang="en-US" sz="1200" dirty="0">
-                <a:solidFill>
-                  <a:srgbClr val="0C3B44"/>
-                </a:solidFill>
-                <a:latin typeface="Arial" pitchFamily="34" charset="0"/>
-                <a:ea typeface="Arial" pitchFamily="34" charset="-122"/>
-                <a:cs typeface="Arial" pitchFamily="34" charset="-120"/>
-              </a:rPr>
-              <a:t>‏Lai, C., Fu, R., Huang, C., Wang, L., Ren, H., Zhu, Y., &amp; Zhang, X. ‏(2024)‏. Healthy lifestyle decreases the risk of the first incidence of non-communicable chronic disease and its progression to multimorbidity. The Journal of Nutrition, Health and Aging, 28‏(3)‏, Article 100164.‏</a:t>
-            </a:r>
-            <a:endParaRPr lang="en-US" sz="1200" dirty="0"/>
-          </a:p>
-          <a:p>
-            <a:pPr algn="r" indent="0" marL="0">
-              <a:lnSpc>
-                <a:spcPts val="1700"/>
-              </a:lnSpc>
-              <a:spcBef>
-                <a:spcPts val="600"/>
-              </a:spcBef>
-              <a:buNone/>
-            </a:pPr>
-            <a:r>
-              <a:rPr lang="en-US" sz="1200" dirty="0">
-                <a:solidFill>
-                  <a:srgbClr val="0C3B44"/>
-                </a:solidFill>
-                <a:latin typeface="Arial" pitchFamily="34" charset="0"/>
-                <a:ea typeface="Arial" pitchFamily="34" charset="-122"/>
-                <a:cs typeface="Arial" pitchFamily="34" charset="-120"/>
-              </a:rPr>
-              <a:t>‏Levi, S., Endy Findling, L., Endevelt, R., Hostovsky, M., Stern, F., &amp; Aflalo, E. ‏(2025)‏. Reflecting on a decade of action: A review of select indicators for the Israel National Program for Active and Healthy Living Efsharibari, 2011-2022. Israel Journal of Health Policy Research, 14‏(1)‏, Article 60.‏</a:t>
-            </a:r>
-            <a:endParaRPr lang="en-US" sz="1200" dirty="0"/>
-          </a:p>
-        </p:txBody>
-      </p:sp>
-      <p:sp>
-        <p:nvSpPr>
-          <p:cNvPr id="25" name="Slide Number Placeholder 0"/>
-          <p:cNvSpPr>
-            <a:spLocks noGrp="1"/>
-          </p:cNvSpPr>
-          <p:nvPr>
-            <p:ph type="sldNum" sz="quarter" idx="4294967295"/>
-          </p:nvPr>
-        </p:nvSpPr>
-        <p:spPr>
-          <a:xfrm>
-            <a:off x="502920" y="6327648"/>
-            <a:ext cx="457200" cy="274320"/>
-          </a:xfrm>
-          <a:prstGeom prst="rect">
-            <a:avLst/>
-          </a:prstGeom>
-          <a:extLst>
-            <a:ext uri="{C572A759-6A51-4108-AA02-DFA0A04FC94B}">
-              <ma14:wrappingTextBoxFlag xmlns:ma14="http://schemas.microsoft.com/office/mac/drawingml/2011/main" val="0"/>
-            </a:ext>
-          </a:extLst>
-        </p:spPr>
-        <p:txBody>
-          <a:bodyPr/>
-          <a:lstStyle>
-            <a:lvl1pPr>
-              <a:defRPr sz="1000">
-                <a:solidFill>
-                  <a:srgbClr val="56686D"/>
-                </a:solidFill>
-                <a:latin typeface="Arial"/>
-                <a:ea typeface="Arial"/>
-                <a:cs typeface="Arial"/>
-              </a:defRPr>
-            </a:lvl1pPr>
-          </a:lstStyle>
-          <a:p>
-            <a:pPr algn="l"/>
-            <a:fld id="{F7021451-1387-4CA6-816F-3879F97B5CBC}" type="slidenum">
-              <a:rPr b="0" lang="en-US"/>
-              <a:t>19</a:t>
-            </a:fld>
-            <a:endParaRPr lang="en-US"/>
+          <a:bodyPr wrap="square" lIns="0" tIns="0" rIns="0" bIns="0" rtlCol="0" anchor="ctr"/>
+          <a:lstStyle/>
+          <a:p>
+            <a:pPr rtl="1" algn="ctr" indent="0" marL="0">
+              <a:buNone/>
+            </a:pPr>
+            <a:r>
+              <a:rPr lang="en-US" sz="4000" b="1" dirty="0">
+                <a:solidFill>
+                  <a:srgbClr val="FFFFFF"/>
+                </a:solidFill>
+                <a:latin typeface="Arial" pitchFamily="34" charset="0"/>
+                <a:ea typeface="Arial" pitchFamily="34" charset="-122"/>
+                <a:cs typeface="Arial" pitchFamily="34" charset="-120"/>
+              </a:rPr>
+              <a:t>תודה על ההקשבה</a:t>
+            </a:r>
+            <a:endParaRPr lang="en-US" sz="4000" dirty="0"/>
+          </a:p>
+        </p:txBody>
+      </p:sp>
+      <p:sp>
+        <p:nvSpPr>
+          <p:cNvPr id="5" name="Text 2"/>
+          <p:cNvSpPr txBox="1"/>
+          <p:nvPr/>
+        </p:nvSpPr>
+        <p:spPr>
+          <a:xfrm>
+            <a:off x="502920" y="4498848"/>
+            <a:ext cx="11185855" cy="402336"/>
+          </a:xfrm>
+          <a:prstGeom prst="rect">
+            <a:avLst/>
+          </a:prstGeom>
+          <a:noFill/>
+          <a:ln/>
+        </p:spPr>
+        <p:txBody>
+          <a:bodyPr wrap="square" lIns="0" tIns="0" rIns="0" bIns="0" rtlCol="0" anchor="ctr"/>
+          <a:lstStyle/>
+          <a:p>
+            <a:pPr rtl="1" algn="ctr" indent="0" marL="0">
+              <a:buNone/>
+            </a:pPr>
+            <a:r>
+              <a:rPr lang="en-US" sz="1700" b="1" dirty="0">
+                <a:solidFill>
+                  <a:srgbClr val="1D9E9A"/>
+                </a:solidFill>
+                <a:latin typeface="Arial" pitchFamily="34" charset="0"/>
+                <a:ea typeface="Arial" pitchFamily="34" charset="-122"/>
+                <a:cs typeface="Arial" pitchFamily="34" charset="-120"/>
+              </a:rPr>
+              <a:t>המרכז האקדמי פרס  |  החוג למנהל מערכות בריאות</a:t>
+            </a:r>
+            <a:endParaRPr lang="en-US" sz="1700" dirty="0"/>
+          </a:p>
+        </p:txBody>
+      </p:sp>
+      <p:sp>
+        <p:nvSpPr>
+          <p:cNvPr id="6" name="Text 3"/>
+          <p:cNvSpPr txBox="1"/>
+          <p:nvPr/>
+        </p:nvSpPr>
+        <p:spPr>
+          <a:xfrm>
+            <a:off x="502920" y="4974336"/>
+            <a:ext cx="11185855" cy="365760"/>
+          </a:xfrm>
+          <a:prstGeom prst="rect">
+            <a:avLst/>
+          </a:prstGeom>
+          <a:noFill/>
+          <a:ln/>
+        </p:spPr>
+        <p:txBody>
+          <a:bodyPr wrap="square" lIns="0" tIns="0" rIns="0" bIns="0" rtlCol="0" anchor="ctr"/>
+          <a:lstStyle/>
+          <a:p>
+            <a:pPr rtl="1" algn="ctr" indent="0" marL="0">
+              <a:buNone/>
+            </a:pPr>
+            <a:r>
+              <a:rPr lang="en-US" sz="1500" dirty="0">
+                <a:solidFill>
+                  <a:srgbClr val="BFE3DD"/>
+                </a:solidFill>
+                <a:latin typeface="Arial" pitchFamily="34" charset="0"/>
+                <a:ea typeface="Arial" pitchFamily="34" charset="-122"/>
+                <a:cs typeface="Arial" pitchFamily="34" charset="-120"/>
+              </a:rPr>
+              <a:t>מוחמד אבו גודה  |  ראמי אבו גאמע  |  מוחמד אלדואיקה</a:t>
+            </a:r>
+            <a:endParaRPr lang="en-US" sz="1500" dirty="0"/>
+          </a:p>
+        </p:txBody>
+      </p:sp>
+      <p:sp>
+        <p:nvSpPr>
+          <p:cNvPr id="7" name="Text 4"/>
+          <p:cNvSpPr txBox="1"/>
+          <p:nvPr/>
+        </p:nvSpPr>
+        <p:spPr>
+          <a:xfrm>
+            <a:off x="502920" y="5394960"/>
+            <a:ext cx="11185855" cy="365760"/>
+          </a:xfrm>
+          <a:prstGeom prst="rect">
+            <a:avLst/>
+          </a:prstGeom>
+          <a:noFill/>
+          <a:ln/>
+        </p:spPr>
+        <p:txBody>
+          <a:bodyPr wrap="square" lIns="0" tIns="0" rIns="0" bIns="0" rtlCol="0" anchor="ctr"/>
+          <a:lstStyle/>
+          <a:p>
+            <a:pPr rtl="1" algn="ctr" indent="0" marL="0">
+              <a:buNone/>
+            </a:pPr>
+            <a:r>
+              <a:rPr lang="en-US" sz="1400" dirty="0">
+                <a:solidFill>
+                  <a:srgbClr val="BFE3DD"/>
+                </a:solidFill>
+                <a:latin typeface="Arial" pitchFamily="34" charset="0"/>
+                <a:ea typeface="Arial" pitchFamily="34" charset="-122"/>
+                <a:cs typeface="Arial" pitchFamily="34" charset="-120"/>
+              </a:rPr>
+              <a:t>‏בהנחיית ד"ר אסנת בשקין  |  שנה"ל תשפ"ו, 2026‏</a:t>
+            </a:r>
+            <a:endParaRPr lang="en-US" sz="1400" dirty="0"/>
           </a:p>
         </p:txBody>
       </p:sp>
@@ -5995,8 +6360,8 @@
         </p:nvSpPr>
         <p:spPr>
           <a:xfrm>
-            <a:off x="1417320" y="274320"/>
-            <a:ext cx="10271455" cy="603504"/>
+            <a:off x="1417320" y="265176"/>
+            <a:ext cx="10271455" cy="237744"/>
           </a:xfrm>
           <a:prstGeom prst="rect">
             <a:avLst/>
@@ -6012,7 +6377,46 @@
               <a:buNone/>
             </a:pPr>
             <a:r>
-              <a:rPr lang="en-US" sz="3100" b="1" dirty="0">
+              <a:rPr lang="en-US" sz="1250" b="1" spc="140" kern="0" dirty="0">
+                <a:solidFill>
+                  <a:srgbClr val="1D9E9A"/>
+                </a:solidFill>
+                <a:latin typeface="Arial" pitchFamily="34" charset="0"/>
+                <a:ea typeface="Arial" pitchFamily="34" charset="-122"/>
+                <a:cs typeface="Arial" pitchFamily="34" charset="-120"/>
+              </a:rPr>
+              <a:t>רקע</a:t>
+            </a:r>
+            <a:endParaRPr lang="en-US" sz="1250" dirty="0"/>
+          </a:p>
+        </p:txBody>
+      </p:sp>
+      <p:sp>
+        <p:nvSpPr>
+          <p:cNvPr id="3" name="Text 1"/>
+          <p:cNvSpPr txBox="1"/>
+          <p:nvPr/>
+        </p:nvSpPr>
+        <p:spPr>
+          <a:xfrm>
+            <a:off x="1417320" y="484632"/>
+            <a:ext cx="10271455" cy="530352"/>
+          </a:xfrm>
+          <a:prstGeom prst="rect">
+            <a:avLst/>
+          </a:prstGeom>
+          <a:noFill/>
+          <a:ln/>
+        </p:spPr>
+        <p:txBody>
+          <a:bodyPr wrap="square" lIns="0" tIns="0" rIns="0" bIns="0" rtlCol="0" anchor="ctr"/>
+          <a:lstStyle/>
+          <a:p>
+            <a:pPr rtl="1" algn="r" indent="0" marL="0">
+              <a:buNone/>
+            </a:pPr>
+            <a:r>
+              <a:rPr lang="en-US" sz="3000" b="1" dirty="0">
                 <a:solidFill>
                   <a:srgbClr val="0C3B44"/>
                 </a:solidFill>
@@ -6022,24 +6426,24 @@
               </a:rPr>
               <a:t>רקע והצגת הבעיה</a:t>
             </a:r>
-            <a:endParaRPr lang="en-US" sz="3100" dirty="0"/>
-          </a:p>
-        </p:txBody>
-      </p:sp>
-      <p:sp>
-        <p:nvSpPr>
-          <p:cNvPr id="3" name="Shape 1"/>
+            <a:endParaRPr lang="en-US" sz="3000" dirty="0"/>
+          </a:p>
+        </p:txBody>
+      </p:sp>
+      <p:sp>
+        <p:nvSpPr>
+          <p:cNvPr id="4" name="Shape 2"/>
           <p:cNvSpPr/>
           <p:nvPr/>
         </p:nvSpPr>
         <p:spPr>
           <a:xfrm>
-            <a:off x="502920" y="1133856"/>
-            <a:ext cx="11185855" cy="5065776"/>
+            <a:off x="502920" y="1088136"/>
+            <a:ext cx="11185855" cy="5129784"/>
           </a:xfrm>
           <a:prstGeom prst="roundRect">
             <a:avLst>
-              <a:gd name="adj" fmla="val 1805"/>
+              <a:gd name="adj" fmla="val 2139"/>
             </a:avLst>
           </a:prstGeom>
           <a:solidFill>
@@ -6047,7 +6451,7 @@
           </a:solidFill>
           <a:ln w="12700">
             <a:solidFill>
-              <a:srgbClr val="F2F8F9"/>
+              <a:srgbClr val="D5E7E9"/>
             </a:solidFill>
             <a:prstDash val="solid"/>
           </a:ln>
@@ -6055,14 +6459,14 @@
       </p:sp>
       <p:sp>
         <p:nvSpPr>
-          <p:cNvPr id="4" name="Text 2"/>
+          <p:cNvPr id="5" name="Text 3"/>
           <p:cNvSpPr txBox="1"/>
           <p:nvPr/>
         </p:nvSpPr>
         <p:spPr>
           <a:xfrm>
-            <a:off x="886968" y="1408176"/>
-            <a:ext cx="10417759" cy="4791456"/>
+            <a:off x="923544" y="1325880"/>
+            <a:ext cx="10344607" cy="5001768"/>
           </a:xfrm>
           <a:prstGeom prst="rect">
             <a:avLst/>
@@ -6076,12 +6480,12 @@
           <a:p>
             <a:pPr algn="r" indent="0" marL="0">
               <a:lnSpc>
-                <a:spcPts val="2500"/>
+                <a:spcPts val="2600"/>
               </a:lnSpc>
               <a:buNone/>
             </a:pPr>
             <a:r>
-              <a:rPr lang="en-US" sz="1550" dirty="0">
+              <a:rPr lang="en-US" sz="1700" dirty="0">
                 <a:solidFill>
                   <a:srgbClr val="0C3B44"/>
                 </a:solidFill>
@@ -6091,12 +6495,12 @@
               </a:rPr>
               <a:t>‏המחלות הכרוניות, ובהן סוכרת מסוג 2, יתר לחץ דם ומחלות לב וכלי דם, מהוות כיום את גורם התחלואה והתמותה המרכזי בישראל ובעולם, וארגון הבריאות העולמי מייחס חלק ניכר מנטל זה לגורמי אורח חיים הניתנים לשינוי ‏(World Health Organization, 2023)‏. בישראל מיוחסים כ-85%‏ ממקרי המוות למחלות לא מדבקות ‏(Levi et al., 2025)‏, וכ-56%‏ מהאוכלוסייה הבוגרת סובלים מעודף משקל או מהשמנה ‏(המרכז הלאומי לבקרת מחלות, 2023)‏.‏</a:t>
             </a:r>
-            <a:endParaRPr lang="en-US" sz="1550" dirty="0"/>
+            <a:endParaRPr lang="en-US" sz="1700" dirty="0"/>
           </a:p>
           <a:p>
             <a:pPr algn="r" indent="0" marL="0">
               <a:lnSpc>
-                <a:spcPts val="2500"/>
+                <a:spcPts val="2600"/>
               </a:lnSpc>
               <a:spcBef>
                 <a:spcPts val="700"/>
@@ -6104,7 +6508,7 @@
               <a:buNone/>
             </a:pPr>
             <a:r>
-              <a:rPr lang="en-US" sz="1550" dirty="0">
+              <a:rPr lang="en-US" sz="1700" dirty="0">
                 <a:solidFill>
                   <a:srgbClr val="0C3B44"/>
                 </a:solidFill>
@@ -6114,12 +6518,12 @@
               </a:rPr>
               <a:t>‏ייחודו של נטל תחלואה זה טמון בכך שחלק ניכר ממנו ניתן למניעה. בסיס הראיות הקושר בין תזונה מאוזנת ופעילות גופנית סדירה לבין הפחתת הסיכון לתחלואה הוא מן המבוססים ברפואה המונעת, ואף על פי כן שני שלישים מהמבוגרים בישראל אינם עומדים בהמלצות לפעילות גופנית, ושיעורי הסוכרת ממשיכים לעלות ‏(המרכז הלאומי לבקרת מחלות, 2025)‏. הפער הזה, שבין הידוע לבין הנעשה, הוא נקודת המוצא של המחקר הנוכחי.‏</a:t>
             </a:r>
-            <a:endParaRPr lang="en-US" sz="1550" dirty="0"/>
+            <a:endParaRPr lang="en-US" sz="1700" dirty="0"/>
           </a:p>
           <a:p>
             <a:pPr algn="r" indent="0" marL="0">
               <a:lnSpc>
-                <a:spcPts val="2500"/>
+                <a:spcPts val="2600"/>
               </a:lnSpc>
               <a:spcBef>
                 <a:spcPts val="700"/>
@@ -6127,7 +6531,7 @@
               <a:buNone/>
             </a:pPr>
             <a:r>
-              <a:rPr lang="en-US" sz="1550" dirty="0">
+              <a:rPr lang="en-US" sz="1700" dirty="0">
                 <a:solidFill>
                   <a:srgbClr val="0C3B44"/>
                 </a:solidFill>
@@ -6137,7 +6541,7 @@
               </a:rPr>
               <a:t>‏בנגב מתחדד הפער אף יותר. החברה הבדואית מתאפיינת בשיעורי סוכרת והשמנה מן הגבוהים בישראל, לצד תשתיות מוגבלות לפעילות גופנית וחסמי נגישות לשירותי בריאות ‏(Treister-Goltzman &amp; Peleg, 2015)‏, ומכאן הצורך לבחון כיצד נחווה הקשר בין אורח חיים לבריאות בקרב מבוגרים החיים בהקשר זה.‏</a:t>
             </a:r>
-            <a:endParaRPr lang="en-US" sz="1550" dirty="0"/>
+            <a:endParaRPr lang="en-US" sz="1700" dirty="0"/>
           </a:p>
         </p:txBody>
       </p:sp>
@@ -6186,573 +6590,6 @@
               <a:t>2</a:t>
             </a:fld>
             <a:endParaRPr lang="en-US"/>
-          </a:p>
-        </p:txBody>
-      </p:sp>
-    </p:spTree>
-  </p:cSld>
-  <p:clrMapOvr>
-    <a:masterClrMapping/>
-  </p:clrMapOvr>
-</p:sld>
-</file>
-
-<file path=ppt/slides/slide20.xml><?xml version="1.0" encoding="utf-8"?>
-<p:sld xmlns:a="http://schemas.openxmlformats.org/drawingml/2006/main" xmlns:r="http://schemas.openxmlformats.org/officeDocument/2006/relationships" xmlns:p="http://schemas.openxmlformats.org/presentationml/2006/main">
-  <p:cSld name="Slide 20">
-    <p:spTree>
-      <p:nvGrpSpPr>
-        <p:cNvPr id="1" name=""/>
-        <p:cNvGrpSpPr/>
-        <p:nvPr/>
-      </p:nvGrpSpPr>
-      <p:grpSpPr>
-        <a:xfrm>
-          <a:off x="0" y="0"/>
-          <a:ext cx="0" cy="0"/>
-          <a:chOff x="0" y="0"/>
-          <a:chExt cx="0" cy="0"/>
-        </a:xfrm>
-      </p:grpSpPr>
-      <p:sp>
-        <p:nvSpPr>
-          <p:cNvPr id="2" name="Text 0"/>
-          <p:cNvSpPr txBox="1"/>
-          <p:nvPr/>
-        </p:nvSpPr>
-        <p:spPr>
-          <a:xfrm>
-            <a:off x="1417320" y="274320"/>
-            <a:ext cx="10271455" cy="603504"/>
-          </a:xfrm>
-          <a:prstGeom prst="rect">
-            <a:avLst/>
-          </a:prstGeom>
-          <a:noFill/>
-          <a:ln/>
-        </p:spPr>
-        <p:txBody>
-          <a:bodyPr wrap="square" lIns="0" tIns="0" rIns="0" bIns="0" rtlCol="0" anchor="ctr"/>
-          <a:lstStyle/>
-          <a:p>
-            <a:pPr rtl="1" algn="r" indent="0" marL="0">
-              <a:buNone/>
-            </a:pPr>
-            <a:r>
-              <a:rPr lang="en-US" sz="3100" b="1" dirty="0">
-                <a:solidFill>
-                  <a:srgbClr val="0C3B44"/>
-                </a:solidFill>
-                <a:latin typeface="Arial" pitchFamily="34" charset="0"/>
-                <a:ea typeface="Arial" pitchFamily="34" charset="-122"/>
-                <a:cs typeface="Arial" pitchFamily="34" charset="-120"/>
-              </a:rPr>
-              <a:t>רשימת מקורות</a:t>
-            </a:r>
-            <a:endParaRPr lang="en-US" sz="3100" dirty="0"/>
-          </a:p>
-        </p:txBody>
-      </p:sp>
-      <p:sp>
-        <p:nvSpPr>
-          <p:cNvPr id="3" name="Text 1"/>
-          <p:cNvSpPr txBox="1"/>
-          <p:nvPr/>
-        </p:nvSpPr>
-        <p:spPr>
-          <a:xfrm>
-            <a:off x="1417320" y="877824"/>
-            <a:ext cx="10271455" cy="310896"/>
-          </a:xfrm>
-          <a:prstGeom prst="rect">
-            <a:avLst/>
-          </a:prstGeom>
-          <a:noFill/>
-          <a:ln/>
-        </p:spPr>
-        <p:txBody>
-          <a:bodyPr wrap="square" lIns="0" tIns="0" rIns="0" bIns="0" rtlCol="0" anchor="ctr"/>
-          <a:lstStyle/>
-          <a:p>
-            <a:pPr rtl="1" algn="r" indent="0" marL="0">
-              <a:buNone/>
-            </a:pPr>
-            <a:r>
-              <a:rPr lang="en-US" sz="1500" b="1" dirty="0">
-                <a:solidFill>
-                  <a:srgbClr val="1D9E9A"/>
-                </a:solidFill>
-                <a:latin typeface="Arial" pitchFamily="34" charset="0"/>
-                <a:ea typeface="Arial" pitchFamily="34" charset="-122"/>
-                <a:cs typeface="Arial" pitchFamily="34" charset="-120"/>
-              </a:rPr>
-              <a:t>המשך רשימת המקורות</a:t>
-            </a:r>
-            <a:endParaRPr lang="en-US" sz="1500" dirty="0"/>
-          </a:p>
-        </p:txBody>
-      </p:sp>
-      <p:sp>
-        <p:nvSpPr>
-          <p:cNvPr id="4" name="Shape 2"/>
-          <p:cNvSpPr/>
-          <p:nvPr/>
-        </p:nvSpPr>
-        <p:spPr>
-          <a:xfrm>
-            <a:off x="502920" y="1316736"/>
-            <a:ext cx="11185855" cy="4882896"/>
-          </a:xfrm>
-          <a:prstGeom prst="roundRect">
-            <a:avLst>
-              <a:gd name="adj" fmla="val 1873"/>
-            </a:avLst>
-          </a:prstGeom>
-          <a:solidFill>
-            <a:srgbClr val="F2F8F9"/>
-          </a:solidFill>
-          <a:ln w="12700">
-            <a:solidFill>
-              <a:srgbClr val="F2F8F9"/>
-            </a:solidFill>
-            <a:prstDash val="solid"/>
-          </a:ln>
-        </p:spPr>
-      </p:sp>
-      <p:sp>
-        <p:nvSpPr>
-          <p:cNvPr id="5" name="Text 3"/>
-          <p:cNvSpPr txBox="1"/>
-          <p:nvPr/>
-        </p:nvSpPr>
-        <p:spPr>
-          <a:xfrm>
-            <a:off x="886968" y="1591056"/>
-            <a:ext cx="10417759" cy="4334256"/>
-          </a:xfrm>
-          <a:prstGeom prst="rect">
-            <a:avLst/>
-          </a:prstGeom>
-          <a:noFill/>
-          <a:ln/>
-        </p:spPr>
-        <p:txBody>
-          <a:bodyPr wrap="square" lIns="0" tIns="0" rIns="0" bIns="0" rtlCol="0" anchor="t"/>
-          <a:lstStyle/>
-          <a:p>
-            <a:pPr algn="r" indent="0" marL="0">
-              <a:lnSpc>
-                <a:spcPts val="1700"/>
-              </a:lnSpc>
-              <a:buNone/>
-            </a:pPr>
-            <a:r>
-              <a:rPr lang="en-US" sz="1200" dirty="0">
-                <a:solidFill>
-                  <a:srgbClr val="0C3B44"/>
-                </a:solidFill>
-                <a:latin typeface="Arial" pitchFamily="34" charset="0"/>
-                <a:ea typeface="Arial" pitchFamily="34" charset="-122"/>
-                <a:cs typeface="Arial" pitchFamily="34" charset="-120"/>
-              </a:rPr>
-              <a:t>‏Lincoln, Y. S., &amp; Guba, E. G. ‏(1985)‏. Naturalistic inquiry. Sage.‏</a:t>
-            </a:r>
-            <a:endParaRPr lang="en-US" sz="1200" dirty="0"/>
-          </a:p>
-          <a:p>
-            <a:pPr algn="r" indent="0" marL="0">
-              <a:lnSpc>
-                <a:spcPts val="1700"/>
-              </a:lnSpc>
-              <a:spcBef>
-                <a:spcPts val="600"/>
-              </a:spcBef>
-              <a:buNone/>
-            </a:pPr>
-            <a:r>
-              <a:rPr lang="en-US" sz="1200" dirty="0">
-                <a:solidFill>
-                  <a:srgbClr val="0C3B44"/>
-                </a:solidFill>
-                <a:latin typeface="Arial" pitchFamily="34" charset="0"/>
-                <a:ea typeface="Arial" pitchFamily="34" charset="-122"/>
-                <a:cs typeface="Arial" pitchFamily="34" charset="-120"/>
-              </a:rPr>
-              <a:t>‏Reges, O., Leibowitz, M., Hirsch, A., Dicker, D., Finer, N., &amp; Feldman, B. ‏(2020)‏. A comprehensive descriptive assessment of obesity related chronic morbidity and estimated annual cost burden. Israel Journal of Health Policy Research, 9‏(1)‏, Article 32.‏</a:t>
-            </a:r>
-            <a:endParaRPr lang="en-US" sz="1200" dirty="0"/>
-          </a:p>
-          <a:p>
-            <a:pPr algn="r" indent="0" marL="0">
-              <a:lnSpc>
-                <a:spcPts val="1700"/>
-              </a:lnSpc>
-              <a:spcBef>
-                <a:spcPts val="600"/>
-              </a:spcBef>
-              <a:buNone/>
-            </a:pPr>
-            <a:r>
-              <a:rPr lang="en-US" sz="1200" dirty="0">
-                <a:solidFill>
-                  <a:srgbClr val="0C3B44"/>
-                </a:solidFill>
-                <a:latin typeface="Arial" pitchFamily="34" charset="0"/>
-                <a:ea typeface="Arial" pitchFamily="34" charset="-122"/>
-                <a:cs typeface="Arial" pitchFamily="34" charset="-120"/>
-              </a:rPr>
-              <a:t>‏Treister-Goltzman, Y., &amp; Peleg, R. ‏(2015)‏. Health and morbidity among Bedouin women in southern Israel: A descriptive literature review of the past two decades. Journal of Community Health, 40‏(6)‏, 1213-1223.‏</a:t>
-            </a:r>
-            <a:endParaRPr lang="en-US" sz="1200" dirty="0"/>
-          </a:p>
-          <a:p>
-            <a:pPr algn="r" indent="0" marL="0">
-              <a:lnSpc>
-                <a:spcPts val="1700"/>
-              </a:lnSpc>
-              <a:spcBef>
-                <a:spcPts val="600"/>
-              </a:spcBef>
-              <a:buNone/>
-            </a:pPr>
-            <a:r>
-              <a:rPr lang="en-US" sz="1200" dirty="0">
-                <a:solidFill>
-                  <a:srgbClr val="0C3B44"/>
-                </a:solidFill>
-                <a:latin typeface="Arial" pitchFamily="34" charset="0"/>
-                <a:ea typeface="Arial" pitchFamily="34" charset="-122"/>
-                <a:cs typeface="Arial" pitchFamily="34" charset="-120"/>
-              </a:rPr>
-              <a:t>‏van der Velde, J. H. P. M., Boone, S. C., Winters-van Eekelen, E., Schrauwen, P., &amp; Rosendaal, F. R. ‏(2024)‏. Lifestyle factors and incident multimorbidity related to chronic disease: A population-based cohort study. European Journal of Ageing, 21, Article 36.‏</a:t>
-            </a:r>
-            <a:endParaRPr lang="en-US" sz="1200" dirty="0"/>
-          </a:p>
-          <a:p>
-            <a:pPr algn="r" indent="0" marL="0">
-              <a:lnSpc>
-                <a:spcPts val="1700"/>
-              </a:lnSpc>
-              <a:spcBef>
-                <a:spcPts val="600"/>
-              </a:spcBef>
-              <a:buNone/>
-            </a:pPr>
-            <a:r>
-              <a:rPr lang="en-US" sz="1200" dirty="0">
-                <a:solidFill>
-                  <a:srgbClr val="0C3B44"/>
-                </a:solidFill>
-                <a:latin typeface="Arial" pitchFamily="34" charset="0"/>
-                <a:ea typeface="Arial" pitchFamily="34" charset="-122"/>
-                <a:cs typeface="Arial" pitchFamily="34" charset="-120"/>
-              </a:rPr>
-              <a:t>‏World Health Organization. ‏(2023)‏. Noncommunicable diseases [Fact sheet]. World Health Organization.‏</a:t>
-            </a:r>
-            <a:endParaRPr lang="en-US" sz="1200" dirty="0"/>
-          </a:p>
-          <a:p>
-            <a:pPr algn="r" indent="0" marL="0">
-              <a:lnSpc>
-                <a:spcPts val="1700"/>
-              </a:lnSpc>
-              <a:spcBef>
-                <a:spcPts val="600"/>
-              </a:spcBef>
-              <a:buNone/>
-            </a:pPr>
-            <a:r>
-              <a:rPr lang="en-US" sz="1200" dirty="0">
-                <a:solidFill>
-                  <a:srgbClr val="0C3B44"/>
-                </a:solidFill>
-                <a:latin typeface="Arial" pitchFamily="34" charset="0"/>
-                <a:ea typeface="Arial" pitchFamily="34" charset="-122"/>
-                <a:cs typeface="Arial" pitchFamily="34" charset="-120"/>
-              </a:rPr>
-              <a:t>‏Zhang, Y.-B., Chen, C., Pan, X.-F., Guo, J., Li, Y., Franco, O. H., &amp; Pan, A. ‏(2021)‏. Associations of healthy lifestyle and socioeconomic status with mortality and incident cardiovascular disease: Two prospective cohort studies. BMJ, 373, Article n604.‏</a:t>
-            </a:r>
-            <a:endParaRPr lang="en-US" sz="1200" dirty="0"/>
-          </a:p>
-        </p:txBody>
-      </p:sp>
-      <p:sp>
-        <p:nvSpPr>
-          <p:cNvPr id="25" name="Slide Number Placeholder 0"/>
-          <p:cNvSpPr>
-            <a:spLocks noGrp="1"/>
-          </p:cNvSpPr>
-          <p:nvPr>
-            <p:ph type="sldNum" sz="quarter" idx="4294967295"/>
-          </p:nvPr>
-        </p:nvSpPr>
-        <p:spPr>
-          <a:xfrm>
-            <a:off x="502920" y="6327648"/>
-            <a:ext cx="457200" cy="274320"/>
-          </a:xfrm>
-          <a:prstGeom prst="rect">
-            <a:avLst/>
-          </a:prstGeom>
-          <a:extLst>
-            <a:ext uri="{C572A759-6A51-4108-AA02-DFA0A04FC94B}">
-              <ma14:wrappingTextBoxFlag xmlns:ma14="http://schemas.microsoft.com/office/mac/drawingml/2011/main" val="0"/>
-            </a:ext>
-          </a:extLst>
-        </p:spPr>
-        <p:txBody>
-          <a:bodyPr/>
-          <a:lstStyle>
-            <a:lvl1pPr>
-              <a:defRPr sz="1000">
-                <a:solidFill>
-                  <a:srgbClr val="56686D"/>
-                </a:solidFill>
-                <a:latin typeface="Arial"/>
-                <a:ea typeface="Arial"/>
-                <a:cs typeface="Arial"/>
-              </a:defRPr>
-            </a:lvl1pPr>
-          </a:lstStyle>
-          <a:p>
-            <a:pPr algn="l"/>
-            <a:fld id="{F7021451-1387-4CA6-816F-3879F97B5CBC}" type="slidenum">
-              <a:rPr b="0" lang="en-US"/>
-              <a:t>20</a:t>
-            </a:fld>
-            <a:endParaRPr lang="en-US"/>
-          </a:p>
-        </p:txBody>
-      </p:sp>
-    </p:spTree>
-  </p:cSld>
-  <p:clrMapOvr>
-    <a:masterClrMapping/>
-  </p:clrMapOvr>
-</p:sld>
-</file>
-
-<file path=ppt/slides/slide21.xml><?xml version="1.0" encoding="utf-8"?>
-<p:sld xmlns:a="http://schemas.openxmlformats.org/drawingml/2006/main" xmlns:r="http://schemas.openxmlformats.org/officeDocument/2006/relationships" xmlns:p="http://schemas.openxmlformats.org/presentationml/2006/main">
-  <p:cSld name="Slide 21">
-    <p:spTree>
-      <p:nvGrpSpPr>
-        <p:cNvPr id="1" name=""/>
-        <p:cNvGrpSpPr/>
-        <p:nvPr/>
-      </p:nvGrpSpPr>
-      <p:grpSpPr>
-        <a:xfrm>
-          <a:off x="0" y="0"/>
-          <a:ext cx="0" cy="0"/>
-          <a:chOff x="0" y="0"/>
-          <a:chExt cx="0" cy="0"/>
-        </a:xfrm>
-      </p:grpSpPr>
-      <p:sp>
-        <p:nvSpPr>
-          <p:cNvPr id="2" name="Shape 0"/>
-          <p:cNvSpPr/>
-          <p:nvPr/>
-        </p:nvSpPr>
-        <p:spPr>
-          <a:xfrm>
-            <a:off x="5148072" y="1371600"/>
-            <a:ext cx="1883664" cy="1883664"/>
-          </a:xfrm>
-          <a:prstGeom prst="roundRect">
-            <a:avLst>
-              <a:gd name="adj" fmla="val 7767"/>
-            </a:avLst>
-          </a:prstGeom>
-          <a:solidFill>
-            <a:srgbClr val="FFFFFF"/>
-          </a:solidFill>
-          <a:ln w="12700">
-            <a:solidFill>
-              <a:srgbClr val="FFFFFF"/>
-            </a:solidFill>
-            <a:prstDash val="solid"/>
-          </a:ln>
-        </p:spPr>
-      </p:sp>
-      <p:pic>
-        <p:nvPicPr>
-          <p:cNvPr id="3" name="Image 0" descr="logo.jpg">    </p:cNvPr>
-          <p:cNvPicPr>
-            <a:picLocks noChangeAspect="1"/>
-          </p:cNvPicPr>
-          <p:nvPr/>
-        </p:nvPicPr>
-        <p:blipFill>
-          <a:blip r:embed="rId1"/>
-          <a:stretch>
-            <a:fillRect/>
-          </a:stretch>
-        </p:blipFill>
-        <p:spPr>
-          <a:xfrm>
-            <a:off x="5468112" y="1691640"/>
-            <a:ext cx="1243584" cy="1243584"/>
-          </a:xfrm>
-          <a:prstGeom prst="rect">
-            <a:avLst/>
-          </a:prstGeom>
-        </p:spPr>
-      </p:pic>
-      <p:sp>
-        <p:nvSpPr>
-          <p:cNvPr id="4" name="Text 1"/>
-          <p:cNvSpPr txBox="1"/>
-          <p:nvPr/>
-        </p:nvSpPr>
-        <p:spPr>
-          <a:xfrm>
-            <a:off x="502920" y="3657600"/>
-            <a:ext cx="11185855" cy="731520"/>
-          </a:xfrm>
-          <a:prstGeom prst="rect">
-            <a:avLst/>
-          </a:prstGeom>
-          <a:noFill/>
-          <a:ln/>
-        </p:spPr>
-        <p:txBody>
-          <a:bodyPr wrap="square" lIns="0" tIns="0" rIns="0" bIns="0" rtlCol="0" anchor="ctr"/>
-          <a:lstStyle/>
-          <a:p>
-            <a:pPr rtl="1" algn="ctr" indent="0" marL="0">
-              <a:buNone/>
-            </a:pPr>
-            <a:r>
-              <a:rPr lang="en-US" sz="4000" b="1" dirty="0">
-                <a:solidFill>
-                  <a:srgbClr val="FFFFFF"/>
-                </a:solidFill>
-                <a:latin typeface="Arial" pitchFamily="34" charset="0"/>
-                <a:ea typeface="Arial" pitchFamily="34" charset="-122"/>
-                <a:cs typeface="Arial" pitchFamily="34" charset="-120"/>
-              </a:rPr>
-              <a:t>תודה על ההקשבה</a:t>
-            </a:r>
-            <a:endParaRPr lang="en-US" sz="4000" dirty="0"/>
-          </a:p>
-        </p:txBody>
-      </p:sp>
-      <p:sp>
-        <p:nvSpPr>
-          <p:cNvPr id="5" name="Text 2"/>
-          <p:cNvSpPr txBox="1"/>
-          <p:nvPr/>
-        </p:nvSpPr>
-        <p:spPr>
-          <a:xfrm>
-            <a:off x="502920" y="4498848"/>
-            <a:ext cx="11185855" cy="402336"/>
-          </a:xfrm>
-          <a:prstGeom prst="rect">
-            <a:avLst/>
-          </a:prstGeom>
-          <a:noFill/>
-          <a:ln/>
-        </p:spPr>
-        <p:txBody>
-          <a:bodyPr wrap="square" lIns="0" tIns="0" rIns="0" bIns="0" rtlCol="0" anchor="ctr"/>
-          <a:lstStyle/>
-          <a:p>
-            <a:pPr rtl="1" algn="ctr" indent="0" marL="0">
-              <a:buNone/>
-            </a:pPr>
-            <a:r>
-              <a:rPr lang="en-US" sz="1700" b="1" dirty="0">
-                <a:solidFill>
-                  <a:srgbClr val="1D9E9A"/>
-                </a:solidFill>
-                <a:latin typeface="Arial" pitchFamily="34" charset="0"/>
-                <a:ea typeface="Arial" pitchFamily="34" charset="-122"/>
-                <a:cs typeface="Arial" pitchFamily="34" charset="-120"/>
-              </a:rPr>
-              <a:t>המרכז האקדמי פרס  |  החוג למנהל מערכות בריאות</a:t>
-            </a:r>
-            <a:endParaRPr lang="en-US" sz="1700" dirty="0"/>
-          </a:p>
-        </p:txBody>
-      </p:sp>
-      <p:sp>
-        <p:nvSpPr>
-          <p:cNvPr id="6" name="Text 3"/>
-          <p:cNvSpPr txBox="1"/>
-          <p:nvPr/>
-        </p:nvSpPr>
-        <p:spPr>
-          <a:xfrm>
-            <a:off x="502920" y="4974336"/>
-            <a:ext cx="11185855" cy="365760"/>
-          </a:xfrm>
-          <a:prstGeom prst="rect">
-            <a:avLst/>
-          </a:prstGeom>
-          <a:noFill/>
-          <a:ln/>
-        </p:spPr>
-        <p:txBody>
-          <a:bodyPr wrap="square" lIns="0" tIns="0" rIns="0" bIns="0" rtlCol="0" anchor="ctr"/>
-          <a:lstStyle/>
-          <a:p>
-            <a:pPr rtl="1" algn="ctr" indent="0" marL="0">
-              <a:buNone/>
-            </a:pPr>
-            <a:r>
-              <a:rPr lang="en-US" sz="1500" dirty="0">
-                <a:solidFill>
-                  <a:srgbClr val="BFE3DD"/>
-                </a:solidFill>
-                <a:latin typeface="Arial" pitchFamily="34" charset="0"/>
-                <a:ea typeface="Arial" pitchFamily="34" charset="-122"/>
-                <a:cs typeface="Arial" pitchFamily="34" charset="-120"/>
-              </a:rPr>
-              <a:t>מוחמד אבו גודה  |  ראמי אבו גאמע  |  מוחמד אלדואיקה</a:t>
-            </a:r>
-            <a:endParaRPr lang="en-US" sz="1500" dirty="0"/>
-          </a:p>
-        </p:txBody>
-      </p:sp>
-      <p:sp>
-        <p:nvSpPr>
-          <p:cNvPr id="7" name="Text 4"/>
-          <p:cNvSpPr txBox="1"/>
-          <p:nvPr/>
-        </p:nvSpPr>
-        <p:spPr>
-          <a:xfrm>
-            <a:off x="502920" y="5394960"/>
-            <a:ext cx="11185855" cy="365760"/>
-          </a:xfrm>
-          <a:prstGeom prst="rect">
-            <a:avLst/>
-          </a:prstGeom>
-          <a:noFill/>
-          <a:ln/>
-        </p:spPr>
-        <p:txBody>
-          <a:bodyPr wrap="square" lIns="0" tIns="0" rIns="0" bIns="0" rtlCol="0" anchor="ctr"/>
-          <a:lstStyle/>
-          <a:p>
-            <a:pPr rtl="1" algn="ctr" indent="0" marL="0">
-              <a:buNone/>
-            </a:pPr>
-            <a:r>
-              <a:rPr lang="en-US" sz="1400" dirty="0">
-                <a:solidFill>
-                  <a:srgbClr val="BFE3DD"/>
-                </a:solidFill>
-                <a:latin typeface="Arial" pitchFamily="34" charset="0"/>
-                <a:ea typeface="Arial" pitchFamily="34" charset="-122"/>
-                <a:cs typeface="Arial" pitchFamily="34" charset="-120"/>
-              </a:rPr>
-              <a:t>‏בהנחיית ד"ר אסנת בשקין  |  שנה"ל תשפ"ו, 2026‏</a:t>
-            </a:r>
-            <a:endParaRPr lang="en-US" sz="1400" dirty="0"/>
           </a:p>
         </p:txBody>
       </p:sp>
@@ -6789,8 +6626,8 @@
         </p:nvSpPr>
         <p:spPr>
           <a:xfrm>
-            <a:off x="1417320" y="274320"/>
-            <a:ext cx="10271455" cy="603504"/>
+            <a:off x="1417320" y="265176"/>
+            <a:ext cx="10271455" cy="237744"/>
           </a:xfrm>
           <a:prstGeom prst="rect">
             <a:avLst/>
@@ -6806,7 +6643,46 @@
               <a:buNone/>
             </a:pPr>
             <a:r>
-              <a:rPr lang="en-US" sz="3100" b="1" dirty="0">
+              <a:rPr lang="en-US" sz="1250" b="1" spc="140" kern="0" dirty="0">
+                <a:solidFill>
+                  <a:srgbClr val="1D9E9A"/>
+                </a:solidFill>
+                <a:latin typeface="Arial" pitchFamily="34" charset="0"/>
+                <a:ea typeface="Arial" pitchFamily="34" charset="-122"/>
+                <a:cs typeface="Arial" pitchFamily="34" charset="-120"/>
+              </a:rPr>
+              <a:t>שאלת המחקר</a:t>
+            </a:r>
+            <a:endParaRPr lang="en-US" sz="1250" dirty="0"/>
+          </a:p>
+        </p:txBody>
+      </p:sp>
+      <p:sp>
+        <p:nvSpPr>
+          <p:cNvPr id="3" name="Text 1"/>
+          <p:cNvSpPr txBox="1"/>
+          <p:nvPr/>
+        </p:nvSpPr>
+        <p:spPr>
+          <a:xfrm>
+            <a:off x="1417320" y="484632"/>
+            <a:ext cx="10271455" cy="530352"/>
+          </a:xfrm>
+          <a:prstGeom prst="rect">
+            <a:avLst/>
+          </a:prstGeom>
+          <a:noFill/>
+          <a:ln/>
+        </p:spPr>
+        <p:txBody>
+          <a:bodyPr wrap="square" lIns="0" tIns="0" rIns="0" bIns="0" rtlCol="0" anchor="ctr"/>
+          <a:lstStyle/>
+          <a:p>
+            <a:pPr rtl="1" algn="r" indent="0" marL="0">
+              <a:buNone/>
+            </a:pPr>
+            <a:r>
+              <a:rPr lang="en-US" sz="3000" b="1" dirty="0">
                 <a:solidFill>
                   <a:srgbClr val="0C3B44"/>
                 </a:solidFill>
@@ -6816,24 +6692,24 @@
               </a:rPr>
               <a:t>שאלת המחקר ומטרות המחקר</a:t>
             </a:r>
-            <a:endParaRPr lang="en-US" sz="3100" dirty="0"/>
-          </a:p>
-        </p:txBody>
-      </p:sp>
-      <p:sp>
-        <p:nvSpPr>
-          <p:cNvPr id="3" name="Shape 1"/>
+            <a:endParaRPr lang="en-US" sz="3000" dirty="0"/>
+          </a:p>
+        </p:txBody>
+      </p:sp>
+      <p:sp>
+        <p:nvSpPr>
+          <p:cNvPr id="4" name="Shape 2"/>
           <p:cNvSpPr/>
           <p:nvPr/>
         </p:nvSpPr>
         <p:spPr>
           <a:xfrm>
-            <a:off x="502920" y="1133856"/>
-            <a:ext cx="11185855" cy="5065776"/>
+            <a:off x="502920" y="1088136"/>
+            <a:ext cx="11185855" cy="5129784"/>
           </a:xfrm>
           <a:prstGeom prst="roundRect">
             <a:avLst>
-              <a:gd name="adj" fmla="val 1805"/>
+              <a:gd name="adj" fmla="val 2139"/>
             </a:avLst>
           </a:prstGeom>
           <a:solidFill>
@@ -6841,7 +6717,7 @@
           </a:solidFill>
           <a:ln w="12700">
             <a:solidFill>
-              <a:srgbClr val="F2F8F9"/>
+              <a:srgbClr val="D5E7E9"/>
             </a:solidFill>
             <a:prstDash val="solid"/>
           </a:ln>
@@ -6849,14 +6725,14 @@
       </p:sp>
       <p:sp>
         <p:nvSpPr>
-          <p:cNvPr id="4" name="Text 2"/>
+          <p:cNvPr id="5" name="Text 3"/>
           <p:cNvSpPr txBox="1"/>
           <p:nvPr/>
         </p:nvSpPr>
         <p:spPr>
           <a:xfrm>
-            <a:off x="886968" y="1408176"/>
-            <a:ext cx="10417759" cy="4791456"/>
+            <a:off x="923544" y="1325880"/>
+            <a:ext cx="10344607" cy="5001768"/>
           </a:xfrm>
           <a:prstGeom prst="rect">
             <a:avLst/>
@@ -6870,12 +6746,12 @@
           <a:p>
             <a:pPr algn="r" indent="0" marL="0">
               <a:lnSpc>
-                <a:spcPts val="2500"/>
+                <a:spcPts val="2600"/>
               </a:lnSpc>
               <a:buNone/>
             </a:pPr>
             <a:r>
-              <a:rPr lang="en-US" sz="1700" b="1" dirty="0">
+              <a:rPr lang="en-US" sz="1800" b="1" dirty="0">
                 <a:solidFill>
                   <a:srgbClr val="0E6E7E"/>
                 </a:solidFill>
@@ -6885,12 +6761,12 @@
               </a:rPr>
               <a:t>‏שאלת המחקר המרכזית‏</a:t>
             </a:r>
-            <a:endParaRPr lang="en-US" sz="1700" dirty="0"/>
+            <a:endParaRPr lang="en-US" sz="1800" dirty="0"/>
           </a:p>
           <a:p>
             <a:pPr algn="r" indent="0" marL="0">
               <a:lnSpc>
-                <a:spcPts val="2500"/>
+                <a:spcPts val="2600"/>
               </a:lnSpc>
               <a:spcBef>
                 <a:spcPts val="700"/>
@@ -6898,7 +6774,7 @@
               <a:buNone/>
             </a:pPr>
             <a:r>
-              <a:rPr lang="en-US" sz="1550" dirty="0">
+              <a:rPr lang="en-US" sz="1700" dirty="0">
                 <a:solidFill>
                   <a:srgbClr val="0C3B44"/>
                 </a:solidFill>
@@ -6908,20 +6784,20 @@
               </a:rPr>
               <a:t>‏מהי ההשפעה של פעילות גופנית ותזונה מאוזנת על הסיכון להתפתחות מחלות כרוניות בקרב מבוגרים, כפי שהיא נתפסת ונחווית על ידי המבוגרים עצמם. לצד שאלה זו נבחנו שלוש שאלות משנה: כיצד תופסים מבוגרים את הקשר בין אורח חייהם לבין בריאותם, מהם הגורמים המסייעים והחוסמים אימוץ של פעילות גופנית ותזונה מאוזנת בחיי היומיום, ומהו תפקידה של מערכת הבריאות כפי שהוא נתפס בעיני המטופלים.‏</a:t>
             </a:r>
-            <a:endParaRPr lang="en-US" sz="1700" dirty="0"/>
+            <a:endParaRPr lang="en-US" sz="1800" dirty="0"/>
           </a:p>
           <a:p>
             <a:pPr algn="r" indent="0" marL="0">
               <a:lnSpc>
-                <a:spcPts val="2500"/>
+                <a:spcPts val="2600"/>
               </a:lnSpc>
               <a:spcBef>
-                <a:spcPts val="900"/>
+                <a:spcPts val="1100"/>
               </a:spcBef>
               <a:buNone/>
             </a:pPr>
             <a:r>
-              <a:rPr lang="en-US" sz="1700" b="1" dirty="0">
+              <a:rPr lang="en-US" sz="1800" b="1" dirty="0">
                 <a:solidFill>
                   <a:srgbClr val="0E6E7E"/>
                 </a:solidFill>
@@ -6931,12 +6807,12 @@
               </a:rPr>
               <a:t>‏מטרות המחקר‏</a:t>
             </a:r>
-            <a:endParaRPr lang="en-US" sz="1700" dirty="0"/>
+            <a:endParaRPr lang="en-US" sz="1800" dirty="0"/>
           </a:p>
           <a:p>
             <a:pPr algn="r" indent="0" marL="0">
               <a:lnSpc>
-                <a:spcPts val="2500"/>
+                <a:spcPts val="2600"/>
               </a:lnSpc>
               <a:spcBef>
                 <a:spcPts val="700"/>
@@ -6944,7 +6820,7 @@
               <a:buNone/>
             </a:pPr>
             <a:r>
-              <a:rPr lang="en-US" sz="1550" dirty="0">
+              <a:rPr lang="en-US" sz="1700" dirty="0">
                 <a:solidFill>
                   <a:srgbClr val="0C3B44"/>
                 </a:solidFill>
@@ -6954,7 +6830,7 @@
               </a:rPr>
               <a:t>‏המחקר מבקש לבחון את תפיסותיהם של מבוגרים ביחס לקשר שבין אורח חייהם לבריאותם, ולזהות את החסמים ואת המנופים לאימוץ הרגלים בריאים כפי שהם נחווים בשטח ולא כפי שהם משוערים מראש. בהמשך לכך מבקש המחקר לעמוד על האופן שבו נתפס תפקידם של רופא המשפחה ושל קופת החולים בקידום המניעה, ועל בסיס כל אלה לגזור המלצות יישומיות לקופות החולים ולרשויות המקומיות, המותאמות להקשר החברתי והתרבותי של אוכלוסיית הנגב.‏</a:t>
             </a:r>
-            <a:endParaRPr lang="en-US" sz="1700" dirty="0"/>
+            <a:endParaRPr lang="en-US" sz="1800" dirty="0"/>
           </a:p>
         </p:txBody>
       </p:sp>
@@ -7039,8 +6915,8 @@
         </p:nvSpPr>
         <p:spPr>
           <a:xfrm>
-            <a:off x="1417320" y="274320"/>
-            <a:ext cx="10271455" cy="603504"/>
+            <a:off x="1417320" y="265176"/>
+            <a:ext cx="10271455" cy="237744"/>
           </a:xfrm>
           <a:prstGeom prst="rect">
             <a:avLst/>
@@ -7056,9 +6932,9 @@
               <a:buNone/>
             </a:pPr>
             <a:r>
-              <a:rPr lang="en-US" sz="3100" b="1" dirty="0">
-                <a:solidFill>
-                  <a:srgbClr val="0C3B44"/>
+              <a:rPr lang="en-US" sz="1250" b="1" spc="140" kern="0" dirty="0">
+                <a:solidFill>
+                  <a:srgbClr val="1D9E9A"/>
                 </a:solidFill>
                 <a:latin typeface="Arial" pitchFamily="34" charset="0"/>
                 <a:ea typeface="Arial" pitchFamily="34" charset="-122"/>
@@ -7066,7 +6942,7 @@
               </a:rPr>
               <a:t>סקירת ספרות</a:t>
             </a:r>
-            <a:endParaRPr lang="en-US" sz="3100" dirty="0"/>
+            <a:endParaRPr lang="en-US" sz="1250" dirty="0"/>
           </a:p>
         </p:txBody>
       </p:sp>
@@ -7078,8 +6954,8 @@
         </p:nvSpPr>
         <p:spPr>
           <a:xfrm>
-            <a:off x="1417320" y="877824"/>
-            <a:ext cx="10271455" cy="310896"/>
+            <a:off x="1417320" y="484632"/>
+            <a:ext cx="10271455" cy="530352"/>
           </a:xfrm>
           <a:prstGeom prst="rect">
             <a:avLst/>
@@ -7095,9 +6971,48 @@
               <a:buNone/>
             </a:pPr>
             <a:r>
+              <a:rPr lang="en-US" sz="3000" b="1" dirty="0">
+                <a:solidFill>
+                  <a:srgbClr val="0C3B44"/>
+                </a:solidFill>
+                <a:latin typeface="Arial" pitchFamily="34" charset="0"/>
+                <a:ea typeface="Arial" pitchFamily="34" charset="-122"/>
+                <a:cs typeface="Arial" pitchFamily="34" charset="-120"/>
+              </a:rPr>
+              <a:t>סקירת ספרות</a:t>
+            </a:r>
+            <a:endParaRPr lang="en-US" sz="3000" dirty="0"/>
+          </a:p>
+        </p:txBody>
+      </p:sp>
+      <p:sp>
+        <p:nvSpPr>
+          <p:cNvPr id="4" name="Text 2"/>
+          <p:cNvSpPr txBox="1"/>
+          <p:nvPr/>
+        </p:nvSpPr>
+        <p:spPr>
+          <a:xfrm>
+            <a:off x="1417320" y="996696"/>
+            <a:ext cx="10271455" cy="274320"/>
+          </a:xfrm>
+          <a:prstGeom prst="rect">
+            <a:avLst/>
+          </a:prstGeom>
+          <a:noFill/>
+          <a:ln/>
+        </p:spPr>
+        <p:txBody>
+          <a:bodyPr wrap="square" lIns="0" tIns="0" rIns="0" bIns="0" rtlCol="0" anchor="ctr"/>
+          <a:lstStyle/>
+          <a:p>
+            <a:pPr rtl="1" algn="r" indent="0" marL="0">
+              <a:buNone/>
+            </a:pPr>
+            <a:r>
               <a:rPr lang="en-US" sz="1500" b="1" dirty="0">
                 <a:solidFill>
-                  <a:srgbClr val="1D9E9A"/>
+                  <a:srgbClr val="0E6E7E"/>
                 </a:solidFill>
                 <a:latin typeface="Arial" pitchFamily="34" charset="0"/>
                 <a:ea typeface="Arial" pitchFamily="34" charset="-122"/>
@@ -7111,18 +7026,18 @@
       </p:sp>
       <p:sp>
         <p:nvSpPr>
-          <p:cNvPr id="4" name="Shape 2"/>
+          <p:cNvPr id="5" name="Shape 3"/>
           <p:cNvSpPr/>
           <p:nvPr/>
         </p:nvSpPr>
         <p:spPr>
           <a:xfrm>
-            <a:off x="502920" y="1316736"/>
-            <a:ext cx="11185855" cy="4882896"/>
+            <a:off x="502920" y="1307592"/>
+            <a:ext cx="11185855" cy="4910328"/>
           </a:xfrm>
           <a:prstGeom prst="roundRect">
             <a:avLst>
-              <a:gd name="adj" fmla="val 1873"/>
+              <a:gd name="adj" fmla="val 2235"/>
             </a:avLst>
           </a:prstGeom>
           <a:solidFill>
@@ -7130,7 +7045,7 @@
           </a:solidFill>
           <a:ln w="12700">
             <a:solidFill>
-              <a:srgbClr val="F2F8F9"/>
+              <a:srgbClr val="D5E7E9"/>
             </a:solidFill>
             <a:prstDash val="solid"/>
           </a:ln>
@@ -7138,14 +7053,14 @@
       </p:sp>
       <p:sp>
         <p:nvSpPr>
-          <p:cNvPr id="5" name="Text 3"/>
+          <p:cNvPr id="6" name="Text 4"/>
           <p:cNvSpPr txBox="1"/>
           <p:nvPr/>
         </p:nvSpPr>
         <p:spPr>
           <a:xfrm>
-            <a:off x="886968" y="1591056"/>
-            <a:ext cx="10417759" cy="4608576"/>
+            <a:off x="923544" y="1545336"/>
+            <a:ext cx="10344607" cy="4782312"/>
           </a:xfrm>
           <a:prstGeom prst="rect">
             <a:avLst/>
@@ -7159,12 +7074,12 @@
           <a:p>
             <a:pPr algn="r" indent="0" marL="0">
               <a:lnSpc>
-                <a:spcPts val="2500"/>
+                <a:spcPts val="2600"/>
               </a:lnSpc>
               <a:buNone/>
             </a:pPr>
             <a:r>
-              <a:rPr lang="en-US" sz="1550" dirty="0">
+              <a:rPr lang="en-US" sz="1700" dirty="0">
                 <a:solidFill>
                   <a:srgbClr val="0C3B44"/>
                 </a:solidFill>
@@ -7172,22 +7087,22 @@
                 <a:ea typeface="Arial" pitchFamily="34" charset="-122"/>
                 <a:cs typeface="Arial" pitchFamily="34" charset="-120"/>
               </a:rPr>
-              <a:t>‏מחלות כרוניות מוגדרות כמצבים בריאותיים ממושכים המתפתחים באופן הדרגתי ומלווים את הפרט לאורך שנים רבות. בשונה ממחלות חריפות הן אינן ניתנות לריפוי מלא במרבית המקרים אלא מנוהלות לאורך זמן, ולפיכך השפעתן על איכות החיים ועל מערכת הבריאות היא מצטברת ומתמשכת.‏</a:t>
-            </a:r>
-            <a:endParaRPr lang="en-US" sz="1550" dirty="0"/>
+              <a:t>‏מחלות כרוניות הן מצבים בריאותיים ממושכים המתפתחים באופן הדרגתי ומלווים את הפרט לאורך שנים רבות. בשונה ממחלות חריפות הן אינן ניתנות לריפוי מלא אלא מנוהלות לאורך זמן, ולפיכך השפעתן על איכות החיים ועל מערכת הבריאות מצטברת ומתמשכת.‏</a:t>
+            </a:r>
+            <a:endParaRPr lang="en-US" sz="1700" dirty="0"/>
           </a:p>
           <a:p>
             <a:pPr algn="r" indent="0" marL="0">
               <a:lnSpc>
-                <a:spcPts val="2500"/>
+                <a:spcPts val="2600"/>
               </a:lnSpc>
               <a:spcBef>
-                <a:spcPts val="900"/>
+                <a:spcPts val="1100"/>
               </a:spcBef>
               <a:buNone/>
             </a:pPr>
             <a:r>
-              <a:rPr lang="en-US" sz="1700" b="1" dirty="0">
+              <a:rPr lang="en-US" sz="1800" b="1" dirty="0">
                 <a:solidFill>
                   <a:srgbClr val="0E6E7E"/>
                 </a:solidFill>
@@ -7197,12 +7112,12 @@
               </a:rPr>
               <a:t>‏רב-תחלואה‏</a:t>
             </a:r>
-            <a:endParaRPr lang="en-US" sz="1550" dirty="0"/>
+            <a:endParaRPr lang="en-US" sz="1700" dirty="0"/>
           </a:p>
           <a:p>
             <a:pPr algn="r" indent="0" marL="0">
               <a:lnSpc>
-                <a:spcPts val="2500"/>
+                <a:spcPts val="2600"/>
               </a:lnSpc>
               <a:spcBef>
                 <a:spcPts val="700"/>
@@ -7210,7 +7125,7 @@
               <a:buNone/>
             </a:pPr>
             <a:r>
-              <a:rPr lang="en-US" sz="1550" dirty="0">
+              <a:rPr lang="en-US" sz="1700" dirty="0">
                 <a:solidFill>
                   <a:srgbClr val="0C3B44"/>
                 </a:solidFill>
@@ -7218,22 +7133,22 @@
                 <a:ea typeface="Arial" pitchFamily="34" charset="-122"/>
                 <a:cs typeface="Arial" pitchFamily="34" charset="-120"/>
               </a:rPr>
-              <a:t>‏מאפיין בולט של מחלות אלו הוא נטייתן להופיע יחד באותו אדם. מחקר עוקבה שבחן יותר ממאה ושלושים אלף נבדקים מצא כי גורמי אורח חיים מסבירים חלק ניכר מן ההיארעות המשולבת, וכי העישון הוא הגורם הבודד התורם ביותר להתפתחותה ‏(van der Velde et al., 2024)‏. ממצא זה מלמד כי הופעתן המשותפת אינה מקרית אלא קשורה בדפוסי התנהגות משותפים.‏</a:t>
-            </a:r>
-            <a:endParaRPr lang="en-US" sz="1550" dirty="0"/>
+              <a:t>‏מאפיין בולט של מחלות אלו הוא נטייתן להופיע יחד באותו אדם. מחקר עוקבה בקרב יותר ממאה ושלושים אלף נבדקים מצא כי גורמי אורח חיים מסבירים חלק ניכר מן ההיארעות המשולבת, וכי העישון הוא הגורם התורם ביותר להתפתחותה ‏(van der Velde et al., 2024)‏. מכאן שהופעתן המשותפת אינה מקרית אלא קשורה בדפוסי התנהגות משותפים.‏</a:t>
+            </a:r>
+            <a:endParaRPr lang="en-US" sz="1700" dirty="0"/>
           </a:p>
           <a:p>
             <a:pPr algn="r" indent="0" marL="0">
               <a:lnSpc>
-                <a:spcPts val="2500"/>
+                <a:spcPts val="2600"/>
               </a:lnSpc>
               <a:spcBef>
-                <a:spcPts val="900"/>
+                <a:spcPts val="1100"/>
               </a:spcBef>
               <a:buNone/>
             </a:pPr>
             <a:r>
-              <a:rPr lang="en-US" sz="1700" b="1" dirty="0">
+              <a:rPr lang="en-US" sz="1800" b="1" dirty="0">
                 <a:solidFill>
                   <a:srgbClr val="0E6E7E"/>
                 </a:solidFill>
@@ -7243,12 +7158,12 @@
               </a:rPr>
               <a:t>‏הנטל הכלכלי‏</a:t>
             </a:r>
-            <a:endParaRPr lang="en-US" sz="1550" dirty="0"/>
+            <a:endParaRPr lang="en-US" sz="1700" dirty="0"/>
           </a:p>
           <a:p>
             <a:pPr algn="r" indent="0" marL="0">
               <a:lnSpc>
-                <a:spcPts val="2500"/>
+                <a:spcPts val="2600"/>
               </a:lnSpc>
               <a:spcBef>
                 <a:spcPts val="700"/>
@@ -7256,7 +7171,7 @@
               <a:buNone/>
             </a:pPr>
             <a:r>
-              <a:rPr lang="en-US" sz="1550" dirty="0">
+              <a:rPr lang="en-US" sz="1700" dirty="0">
                 <a:solidFill>
                   <a:srgbClr val="0C3B44"/>
                 </a:solidFill>
@@ -7264,9 +7179,9 @@
                 <a:ea typeface="Arial" pitchFamily="34" charset="-122"/>
                 <a:cs typeface="Arial" pitchFamily="34" charset="-120"/>
               </a:rPr>
-              <a:t>‏מחקר ישראלי שהתבסס על נתוניהם של למעלה ממיליון ושלושת רבעי מיליון מבוגרים מצא קשר מובהק בין עלייה במדד מסת הגוף לבין שכיחותן של סוכרת, יתר לחץ דם ומחלת לב איסכמית, וכן בין עלייה זו לבין גידול בעלות הטיפול הרפואי ‏(Reges et al., 2020)‏. מכאן שלנטל התחלואה ביטוי כלכלי ישיר ומדיד, וכי ההשקעה במניעה היא שיקול כלכלי ולא בריאותי בלבד.‏</a:t>
-            </a:r>
-            <a:endParaRPr lang="en-US" sz="1550" dirty="0"/>
+              <a:t>‏מחקר ישראלי שהתבסס על נתוניהם של למעלה ממיליון ושלושת רבעי מיליון מבוגרים מצא קשר מובהק בין עלייה במדד מסת הגוף לבין שכיחותן של סוכרת, יתר לחץ דם ומחלת לב איסכמית, וכן בין עלייה זו לבין גידול בעלות הטיפול הרפואי ‏(Reges et al., 2020)‏. מכאן שההשקעה במניעה היא שיקול כלכלי ולא בריאותי בלבד.‏</a:t>
+            </a:r>
+            <a:endParaRPr lang="en-US" sz="1700" dirty="0"/>
           </a:p>
         </p:txBody>
       </p:sp>
@@ -7351,8 +7266,8 @@
         </p:nvSpPr>
         <p:spPr>
           <a:xfrm>
-            <a:off x="1417320" y="274320"/>
-            <a:ext cx="10271455" cy="603504"/>
+            <a:off x="1417320" y="265176"/>
+            <a:ext cx="10271455" cy="237744"/>
           </a:xfrm>
           <a:prstGeom prst="rect">
             <a:avLst/>
@@ -7368,9 +7283,9 @@
               <a:buNone/>
             </a:pPr>
             <a:r>
-              <a:rPr lang="en-US" sz="3100" b="1" dirty="0">
-                <a:solidFill>
-                  <a:srgbClr val="0C3B44"/>
+              <a:rPr lang="en-US" sz="1250" b="1" spc="140" kern="0" dirty="0">
+                <a:solidFill>
+                  <a:srgbClr val="1D9E9A"/>
                 </a:solidFill>
                 <a:latin typeface="Arial" pitchFamily="34" charset="0"/>
                 <a:ea typeface="Arial" pitchFamily="34" charset="-122"/>
@@ -7378,7 +7293,7 @@
               </a:rPr>
               <a:t>סקירת ספרות</a:t>
             </a:r>
-            <a:endParaRPr lang="en-US" sz="3100" dirty="0"/>
+            <a:endParaRPr lang="en-US" sz="1250" dirty="0"/>
           </a:p>
         </p:txBody>
       </p:sp>
@@ -7390,8 +7305,8 @@
         </p:nvSpPr>
         <p:spPr>
           <a:xfrm>
-            <a:off x="1417320" y="877824"/>
-            <a:ext cx="10271455" cy="310896"/>
+            <a:off x="1417320" y="484632"/>
+            <a:ext cx="10271455" cy="530352"/>
           </a:xfrm>
           <a:prstGeom prst="rect">
             <a:avLst/>
@@ -7407,9 +7322,48 @@
               <a:buNone/>
             </a:pPr>
             <a:r>
+              <a:rPr lang="en-US" sz="3000" b="1" dirty="0">
+                <a:solidFill>
+                  <a:srgbClr val="0C3B44"/>
+                </a:solidFill>
+                <a:latin typeface="Arial" pitchFamily="34" charset="0"/>
+                <a:ea typeface="Arial" pitchFamily="34" charset="-122"/>
+                <a:cs typeface="Arial" pitchFamily="34" charset="-120"/>
+              </a:rPr>
+              <a:t>סקירת ספרות</a:t>
+            </a:r>
+            <a:endParaRPr lang="en-US" sz="3000" dirty="0"/>
+          </a:p>
+        </p:txBody>
+      </p:sp>
+      <p:sp>
+        <p:nvSpPr>
+          <p:cNvPr id="4" name="Text 2"/>
+          <p:cNvSpPr txBox="1"/>
+          <p:nvPr/>
+        </p:nvSpPr>
+        <p:spPr>
+          <a:xfrm>
+            <a:off x="1417320" y="996696"/>
+            <a:ext cx="10271455" cy="274320"/>
+          </a:xfrm>
+          <a:prstGeom prst="rect">
+            <a:avLst/>
+          </a:prstGeom>
+          <a:noFill/>
+          <a:ln/>
+        </p:spPr>
+        <p:txBody>
+          <a:bodyPr wrap="square" lIns="0" tIns="0" rIns="0" bIns="0" rtlCol="0" anchor="ctr"/>
+          <a:lstStyle/>
+          <a:p>
+            <a:pPr rtl="1" algn="r" indent="0" marL="0">
+              <a:buNone/>
+            </a:pPr>
+            <a:r>
               <a:rPr lang="en-US" sz="1500" b="1" dirty="0">
                 <a:solidFill>
-                  <a:srgbClr val="1D9E9A"/>
+                  <a:srgbClr val="0E6E7E"/>
                 </a:solidFill>
                 <a:latin typeface="Arial" pitchFamily="34" charset="0"/>
                 <a:ea typeface="Arial" pitchFamily="34" charset="-122"/>
@@ -7423,18 +7377,18 @@
       </p:sp>
       <p:sp>
         <p:nvSpPr>
-          <p:cNvPr id="4" name="Shape 2"/>
+          <p:cNvPr id="5" name="Shape 3"/>
           <p:cNvSpPr/>
           <p:nvPr/>
         </p:nvSpPr>
         <p:spPr>
           <a:xfrm>
-            <a:off x="502920" y="1316736"/>
-            <a:ext cx="11185855" cy="4882896"/>
+            <a:off x="502920" y="1307592"/>
+            <a:ext cx="11185855" cy="4910328"/>
           </a:xfrm>
           <a:prstGeom prst="roundRect">
             <a:avLst>
-              <a:gd name="adj" fmla="val 1873"/>
+              <a:gd name="adj" fmla="val 2235"/>
             </a:avLst>
           </a:prstGeom>
           <a:solidFill>
@@ -7442,7 +7396,7 @@
           </a:solidFill>
           <a:ln w="12700">
             <a:solidFill>
-              <a:srgbClr val="F2F8F9"/>
+              <a:srgbClr val="D5E7E9"/>
             </a:solidFill>
             <a:prstDash val="solid"/>
           </a:ln>
@@ -7450,14 +7404,14 @@
       </p:sp>
       <p:sp>
         <p:nvSpPr>
-          <p:cNvPr id="5" name="Text 3"/>
+          <p:cNvPr id="6" name="Text 4"/>
           <p:cNvSpPr txBox="1"/>
           <p:nvPr/>
         </p:nvSpPr>
         <p:spPr>
           <a:xfrm>
-            <a:off x="886968" y="1591056"/>
-            <a:ext cx="10417759" cy="4608576"/>
+            <a:off x="923544" y="1545336"/>
+            <a:ext cx="10344607" cy="4782312"/>
           </a:xfrm>
           <a:prstGeom prst="rect">
             <a:avLst/>
@@ -7471,12 +7425,12 @@
           <a:p>
             <a:pPr algn="r" indent="0" marL="0">
               <a:lnSpc>
-                <a:spcPts val="2500"/>
+                <a:spcPts val="2600"/>
               </a:lnSpc>
               <a:buNone/>
             </a:pPr>
             <a:r>
-              <a:rPr lang="en-US" sz="1550" dirty="0">
+              <a:rPr lang="en-US" sz="1700" dirty="0">
                 <a:solidFill>
                   <a:srgbClr val="0C3B44"/>
                 </a:solidFill>
@@ -7484,22 +7438,22 @@
                 <a:ea typeface="Arial" pitchFamily="34" charset="-122"/>
                 <a:cs typeface="Arial" pitchFamily="34" charset="-120"/>
               </a:rPr>
-              <a:t>‏התזונה והפעילות הגופנית הם שני רכיבי אורח החיים בעלי בסיס הראיות המבוסס ביותר ביחס למניעת מחלות כרוניות, ועוצמתו של בסיס זה נובעת לא רק ממספר המחקרים אלא גם מאיכותם המתודולוגית.‏</a:t>
-            </a:r>
-            <a:endParaRPr lang="en-US" sz="1550" dirty="0"/>
+              <a:t>‏שני רכיבים אלו נהנים מבסיס הראיות המבוסס ביותר ביחס למניעת מחלות כרוניות.‏</a:t>
+            </a:r>
+            <a:endParaRPr lang="en-US" sz="1700" dirty="0"/>
           </a:p>
           <a:p>
             <a:pPr algn="r" indent="0" marL="0">
               <a:lnSpc>
-                <a:spcPts val="2500"/>
+                <a:spcPts val="2600"/>
               </a:lnSpc>
               <a:spcBef>
-                <a:spcPts val="900"/>
+                <a:spcPts val="1100"/>
               </a:spcBef>
               <a:buNone/>
             </a:pPr>
             <a:r>
-              <a:rPr lang="en-US" sz="1700" b="1" dirty="0">
+              <a:rPr lang="en-US" sz="1800" b="1" dirty="0">
                 <a:solidFill>
                   <a:srgbClr val="0E6E7E"/>
                 </a:solidFill>
@@ -7509,12 +7463,12 @@
               </a:rPr>
               <a:t>‏התזונה‏</a:t>
             </a:r>
-            <a:endParaRPr lang="en-US" sz="1550" dirty="0"/>
+            <a:endParaRPr lang="en-US" sz="1700" dirty="0"/>
           </a:p>
           <a:p>
             <a:pPr algn="r" indent="0" marL="0">
               <a:lnSpc>
-                <a:spcPts val="2500"/>
+                <a:spcPts val="2600"/>
               </a:lnSpc>
               <a:spcBef>
                 <a:spcPts val="700"/>
@@ -7522,7 +7476,7 @@
               <a:buNone/>
             </a:pPr>
             <a:r>
-              <a:rPr lang="en-US" sz="1550" dirty="0">
+              <a:rPr lang="en-US" sz="1700" dirty="0">
                 <a:solidFill>
                   <a:srgbClr val="0C3B44"/>
                 </a:solidFill>
@@ -7530,22 +7484,22 @@
                 <a:ea typeface="Arial" pitchFamily="34" charset="-122"/>
                 <a:cs typeface="Arial" pitchFamily="34" charset="-120"/>
               </a:rPr>
-              <a:t>‏סקירת-על שבחנה שמונה עשרה מטא-אנליזות מצאה כי הדיאטה הים-תיכונית קשורה בהפחתת התמותה ממחלות לב וכלי דם ‏(Hareer et al., 2024)‏, וסקירה שיטתית עדכנית מצאה כי היצמדות גבוהה אליה קשורה בתמותה כללית מופחתת, הן במניעה ראשונית והן במניעה שניונית ‏(Laffond et al., 2023)‏. סקירה של שלושים ניסויים מבוקרים הראתה כי דיאטת DASH מביאה לירידה מובהקת בלחץ הדם הסיסטולי והדיאסטולי כאחד ‏(Filippou et al., 2020)‏.‏</a:t>
-            </a:r>
-            <a:endParaRPr lang="en-US" sz="1550" dirty="0"/>
+              <a:t>‏סקירת-על שבחנה שמונה עשרה מטא-אנליזות מצאה כי הדיאטה הים-תיכונית קשורה בהפחתת התמותה ממחלות לב וכלי דם ‏(Hareer et al., 2024)‏, וסקירה שיטתית עדכנית מצאה כי היצמדות גבוהה אליה קשורה בתמותה כללית מופחתת ‏(Laffond et al., 2023)‏. סקירה של שלושים ניסויים מבוקרים הראתה כי דיאטת DASH מורידה באופן מובהק את לחץ הדם ‏(Filippou et al., 2020)‏.‏</a:t>
+            </a:r>
+            <a:endParaRPr lang="en-US" sz="1700" dirty="0"/>
           </a:p>
           <a:p>
             <a:pPr algn="r" indent="0" marL="0">
               <a:lnSpc>
-                <a:spcPts val="2500"/>
+                <a:spcPts val="2600"/>
               </a:lnSpc>
               <a:spcBef>
-                <a:spcPts val="900"/>
+                <a:spcPts val="1100"/>
               </a:spcBef>
               <a:buNone/>
             </a:pPr>
             <a:r>
-              <a:rPr lang="en-US" sz="1700" b="1" dirty="0">
+              <a:rPr lang="en-US" sz="1800" b="1" dirty="0">
                 <a:solidFill>
                   <a:srgbClr val="0E6E7E"/>
                 </a:solidFill>
@@ -7555,12 +7509,12 @@
               </a:rPr>
               <a:t>‏הפעילות הגופנית‏</a:t>
             </a:r>
-            <a:endParaRPr lang="en-US" sz="1550" dirty="0"/>
+            <a:endParaRPr lang="en-US" sz="1700" dirty="0"/>
           </a:p>
           <a:p>
             <a:pPr algn="r" indent="0" marL="0">
               <a:lnSpc>
-                <a:spcPts val="2500"/>
+                <a:spcPts val="2600"/>
               </a:lnSpc>
               <a:spcBef>
                 <a:spcPts val="700"/>
@@ -7568,7 +7522,7 @@
               <a:buNone/>
             </a:pPr>
             <a:r>
-              <a:rPr lang="en-US" sz="1550" dirty="0">
+              <a:rPr lang="en-US" sz="1700" dirty="0">
                 <a:solidFill>
                   <a:srgbClr val="0C3B44"/>
                 </a:solidFill>
@@ -7576,9 +7530,9 @@
                 <a:ea typeface="Arial" pitchFamily="34" charset="-122"/>
                 <a:cs typeface="Arial" pitchFamily="34" charset="-120"/>
               </a:rPr>
-              <a:t>‏מטא-אנליזה של מחקרי עוקבה מצאה יחס מינון-תגובה, שלפיו כל עלייה בהיקף הפעילות קשורה בירידה בתמותה בקרב חולים במחלות לא מדבקות ‏(Geidl et al., 2020)‏. ממצא זה מלמד כי אין מדובר בסף שמעבר לו מושגת תועלת, אלא בקשר רציף שבו כל תוספת תורמת. שילובם של שני הרכיבים יוצר אפקט משלים, ואשכול של הרגלים בריאים נמצא קשור לסיכון מופחת לתחלואה ולתמותה על פני קבוצות חברתיות-כלכליות שונות ‏(Lai et al., 2024; Zhang et al., 2021)‏.‏</a:t>
-            </a:r>
-            <a:endParaRPr lang="en-US" sz="1550" dirty="0"/>
+              <a:t>‏מטא-אנליזה של מחקרי עוקבה מצאה יחס מינון-תגובה, שלפיו כל עלייה בהיקף הפעילות קשורה בירידה בתמותה בקרב חולים במחלות לא מדבקות ‏(Geidl et al., 2020)‏. כלומר אין מדובר בסף שמעבר לו מושגת תועלת, אלא בקשר רציף שבו כל תוספת תורמת. שילובם של שני הרכיבים יוצר אפקט משלים, ואשכול של הרגלים בריאים נמצא קשור לסיכון מופחת לתחלואה ולתמותה על פני קבוצות חברתיות-כלכליות שונות ‏(Lai et al., 2024; Zhang et al., 2021)‏.‏</a:t>
+            </a:r>
+            <a:endParaRPr lang="en-US" sz="1700" dirty="0"/>
           </a:p>
         </p:txBody>
       </p:sp>
@@ -7663,8 +7617,8 @@
         </p:nvSpPr>
         <p:spPr>
           <a:xfrm>
-            <a:off x="1417320" y="274320"/>
-            <a:ext cx="10271455" cy="603504"/>
+            <a:off x="1417320" y="265176"/>
+            <a:ext cx="10271455" cy="237744"/>
           </a:xfrm>
           <a:prstGeom prst="rect">
             <a:avLst/>
@@ -7680,7 +7634,46 @@
               <a:buNone/>
             </a:pPr>
             <a:r>
-              <a:rPr lang="en-US" sz="3100" b="1" dirty="0">
+              <a:rPr lang="en-US" sz="1250" b="1" spc="140" kern="0" dirty="0">
+                <a:solidFill>
+                  <a:srgbClr val="1D9E9A"/>
+                </a:solidFill>
+                <a:latin typeface="Arial" pitchFamily="34" charset="0"/>
+                <a:ea typeface="Arial" pitchFamily="34" charset="-122"/>
+                <a:cs typeface="Arial" pitchFamily="34" charset="-120"/>
+              </a:rPr>
+              <a:t>מסגרת תיאורטית</a:t>
+            </a:r>
+            <a:endParaRPr lang="en-US" sz="1250" dirty="0"/>
+          </a:p>
+        </p:txBody>
+      </p:sp>
+      <p:sp>
+        <p:nvSpPr>
+          <p:cNvPr id="3" name="Text 1"/>
+          <p:cNvSpPr txBox="1"/>
+          <p:nvPr/>
+        </p:nvSpPr>
+        <p:spPr>
+          <a:xfrm>
+            <a:off x="1417320" y="484632"/>
+            <a:ext cx="10271455" cy="530352"/>
+          </a:xfrm>
+          <a:prstGeom prst="rect">
+            <a:avLst/>
+          </a:prstGeom>
+          <a:noFill/>
+          <a:ln/>
+        </p:spPr>
+        <p:txBody>
+          <a:bodyPr wrap="square" lIns="0" tIns="0" rIns="0" bIns="0" rtlCol="0" anchor="ctr"/>
+          <a:lstStyle/>
+          <a:p>
+            <a:pPr rtl="1" algn="r" indent="0" marL="0">
+              <a:buNone/>
+            </a:pPr>
+            <a:r>
+              <a:rPr lang="en-US" sz="3000" b="1" dirty="0">
                 <a:solidFill>
                   <a:srgbClr val="0C3B44"/>
                 </a:solidFill>
@@ -7690,24 +7683,24 @@
               </a:rPr>
               <a:t>מסגרת תיאורטית ומודל המחקר</a:t>
             </a:r>
-            <a:endParaRPr lang="en-US" sz="3100" dirty="0"/>
-          </a:p>
-        </p:txBody>
-      </p:sp>
-      <p:sp>
-        <p:nvSpPr>
-          <p:cNvPr id="3" name="Shape 1"/>
+            <a:endParaRPr lang="en-US" sz="3000" dirty="0"/>
+          </a:p>
+        </p:txBody>
+      </p:sp>
+      <p:sp>
+        <p:nvSpPr>
+          <p:cNvPr id="4" name="Shape 2"/>
           <p:cNvSpPr/>
           <p:nvPr/>
         </p:nvSpPr>
         <p:spPr>
           <a:xfrm>
-            <a:off x="502920" y="1133856"/>
-            <a:ext cx="11185855" cy="5065776"/>
+            <a:off x="502920" y="1088136"/>
+            <a:ext cx="11185855" cy="5129784"/>
           </a:xfrm>
           <a:prstGeom prst="roundRect">
             <a:avLst>
-              <a:gd name="adj" fmla="val 1805"/>
+              <a:gd name="adj" fmla="val 2139"/>
             </a:avLst>
           </a:prstGeom>
           <a:solidFill>
@@ -7715,7 +7708,7 @@
           </a:solidFill>
           <a:ln w="12700">
             <a:solidFill>
-              <a:srgbClr val="F2F8F9"/>
+              <a:srgbClr val="D5E7E9"/>
             </a:solidFill>
             <a:prstDash val="solid"/>
           </a:ln>
@@ -7723,14 +7716,14 @@
       </p:sp>
       <p:sp>
         <p:nvSpPr>
-          <p:cNvPr id="4" name="Text 2"/>
+          <p:cNvPr id="5" name="Text 3"/>
           <p:cNvSpPr txBox="1"/>
           <p:nvPr/>
         </p:nvSpPr>
         <p:spPr>
           <a:xfrm>
-            <a:off x="886968" y="1408176"/>
-            <a:ext cx="10417759" cy="4791456"/>
+            <a:off x="923544" y="1325880"/>
+            <a:ext cx="10344607" cy="5001768"/>
           </a:xfrm>
           <a:prstGeom prst="rect">
             <a:avLst/>
@@ -7744,12 +7737,12 @@
           <a:p>
             <a:pPr algn="r" indent="0" marL="0">
               <a:lnSpc>
-                <a:spcPts val="2500"/>
+                <a:spcPts val="2600"/>
               </a:lnSpc>
               <a:buNone/>
             </a:pPr>
             <a:r>
-              <a:rPr lang="en-US" sz="1550" dirty="0">
+              <a:rPr lang="en-US" sz="1700" dirty="0">
                 <a:solidFill>
                   <a:srgbClr val="0C3B44"/>
                 </a:solidFill>
@@ -7759,12 +7752,12 @@
               </a:rPr>
               <a:t>‏המודל שבבסיס המחקר מבחין בין שלוש חוליות. בקצה האחד ניצב הידע המדעי המבוסס, ובו המלצות ברורות לתזונה מאוזנת ולפעילות גופנית סדירה, הנתמכות בסקירות-על ובמטא-אנליזות. בקצה האחר ניצבת התוצאה הבריאותית, כלומר הסיכון להתפתחותן של מחלות כרוניות ובהן סוכרת מסוג 2, יתר לחץ דם ומחלות לב וכלי דם.‏</a:t>
             </a:r>
-            <a:endParaRPr lang="en-US" sz="1550" dirty="0"/>
+            <a:endParaRPr lang="en-US" sz="1700" dirty="0"/>
           </a:p>
           <a:p>
             <a:pPr algn="r" indent="0" marL="0">
               <a:lnSpc>
-                <a:spcPts val="2500"/>
+                <a:spcPts val="2600"/>
               </a:lnSpc>
               <a:spcBef>
                 <a:spcPts val="700"/>
@@ -7772,7 +7765,7 @@
               <a:buNone/>
             </a:pPr>
             <a:r>
-              <a:rPr lang="en-US" sz="1550" dirty="0">
+              <a:rPr lang="en-US" sz="1700" dirty="0">
                 <a:solidFill>
                   <a:srgbClr val="0C3B44"/>
                 </a:solidFill>
@@ -7782,12 +7775,12 @@
               </a:rPr>
               <a:t>‏הספרות הכמותית ביססה היטב את הקשר בין שני הקצוות הללו, אך התמקדה פחות בחוליה שביניהם. בחוליה זו פועלים בו זמנית חסמים ומנופים: מצד אחד תשתית פיזית חסרה, נורמות חברתיות ומגדריות, עומס חיים והיעדר ליווי מערכתי מתמשך, ומצד שני תמיכה משפחתית, מסגרת קבוצתית ומעקב רפואי יזום. הרכיבים אינם פועלים בבידוד אלא מזינים זה את זה, ולכן התערבות בממד אחד עשויה להשפיע על ממדים נוספים.‏</a:t>
             </a:r>
-            <a:endParaRPr lang="en-US" sz="1550" dirty="0"/>
+            <a:endParaRPr lang="en-US" sz="1700" dirty="0"/>
           </a:p>
           <a:p>
             <a:pPr algn="r" indent="0" marL="0">
               <a:lnSpc>
-                <a:spcPts val="2500"/>
+                <a:spcPts val="2600"/>
               </a:lnSpc>
               <a:spcBef>
                 <a:spcPts val="700"/>
@@ -7795,7 +7788,7 @@
               <a:buNone/>
             </a:pPr>
             <a:r>
-              <a:rPr lang="en-US" sz="1550" dirty="0">
+              <a:rPr lang="en-US" sz="1700" dirty="0">
                 <a:solidFill>
                   <a:srgbClr val="0C3B44"/>
                 </a:solidFill>
@@ -7805,7 +7798,7 @@
               </a:rPr>
               <a:t>‏המחקר הנוכחי ממקם את עצמו בחוליה זו. הוא אינו מבקש לאשש מחדש קשר שכבר הוכח, אלא לבחון מה מתרחש בפועל בין הידע לבין ההתנהגות בחיי היומיום של מבוגרים בנגב, ומהם התנאים המאפשרים או המונעים את התרגום של האחד לשני.‏</a:t>
             </a:r>
-            <a:endParaRPr lang="en-US" sz="1550" dirty="0"/>
+            <a:endParaRPr lang="en-US" sz="1700" dirty="0"/>
           </a:p>
         </p:txBody>
       </p:sp>
@@ -7890,8 +7883,8 @@
         </p:nvSpPr>
         <p:spPr>
           <a:xfrm>
-            <a:off x="1417320" y="274320"/>
-            <a:ext cx="10271455" cy="603504"/>
+            <a:off x="1417320" y="265176"/>
+            <a:ext cx="10271455" cy="237744"/>
           </a:xfrm>
           <a:prstGeom prst="rect">
             <a:avLst/>
@@ -7907,7 +7900,46 @@
               <a:buNone/>
             </a:pPr>
             <a:r>
-              <a:rPr lang="en-US" sz="3100" b="1" dirty="0">
+              <a:rPr lang="en-US" sz="1250" b="1" spc="140" kern="0" dirty="0">
+                <a:solidFill>
+                  <a:srgbClr val="1D9E9A"/>
+                </a:solidFill>
+                <a:latin typeface="Arial" pitchFamily="34" charset="0"/>
+                <a:ea typeface="Arial" pitchFamily="34" charset="-122"/>
+                <a:cs typeface="Arial" pitchFamily="34" charset="-120"/>
+              </a:rPr>
+              <a:t>שיטת המחקר</a:t>
+            </a:r>
+            <a:endParaRPr lang="en-US" sz="1250" dirty="0"/>
+          </a:p>
+        </p:txBody>
+      </p:sp>
+      <p:sp>
+        <p:nvSpPr>
+          <p:cNvPr id="3" name="Text 1"/>
+          <p:cNvSpPr txBox="1"/>
+          <p:nvPr/>
+        </p:nvSpPr>
+        <p:spPr>
+          <a:xfrm>
+            <a:off x="1417320" y="484632"/>
+            <a:ext cx="10271455" cy="530352"/>
+          </a:xfrm>
+          <a:prstGeom prst="rect">
+            <a:avLst/>
+          </a:prstGeom>
+          <a:noFill/>
+          <a:ln/>
+        </p:spPr>
+        <p:txBody>
+          <a:bodyPr wrap="square" lIns="0" tIns="0" rIns="0" bIns="0" rtlCol="0" anchor="ctr"/>
+          <a:lstStyle/>
+          <a:p>
+            <a:pPr rtl="1" algn="r" indent="0" marL="0">
+              <a:buNone/>
+            </a:pPr>
+            <a:r>
+              <a:rPr lang="en-US" sz="3000" b="1" dirty="0">
                 <a:solidFill>
                   <a:srgbClr val="0C3B44"/>
                 </a:solidFill>
@@ -7917,24 +7949,24 @@
               </a:rPr>
               <a:t>מתודולוגיה</a:t>
             </a:r>
-            <a:endParaRPr lang="en-US" sz="3100" dirty="0"/>
-          </a:p>
-        </p:txBody>
-      </p:sp>
-      <p:sp>
-        <p:nvSpPr>
-          <p:cNvPr id="3" name="Shape 1"/>
+            <a:endParaRPr lang="en-US" sz="3000" dirty="0"/>
+          </a:p>
+        </p:txBody>
+      </p:sp>
+      <p:sp>
+        <p:nvSpPr>
+          <p:cNvPr id="4" name="Shape 2"/>
           <p:cNvSpPr/>
           <p:nvPr/>
         </p:nvSpPr>
         <p:spPr>
           <a:xfrm>
-            <a:off x="502920" y="1133856"/>
-            <a:ext cx="11185855" cy="5065776"/>
+            <a:off x="502920" y="1088136"/>
+            <a:ext cx="11185855" cy="5129784"/>
           </a:xfrm>
           <a:prstGeom prst="roundRect">
             <a:avLst>
-              <a:gd name="adj" fmla="val 1805"/>
+              <a:gd name="adj" fmla="val 2139"/>
             </a:avLst>
           </a:prstGeom>
           <a:solidFill>
@@ -7942,7 +7974,7 @@
           </a:solidFill>
           <a:ln w="12700">
             <a:solidFill>
-              <a:srgbClr val="F2F8F9"/>
+              <a:srgbClr val="D5E7E9"/>
             </a:solidFill>
             <a:prstDash val="solid"/>
           </a:ln>
@@ -7950,14 +7982,14 @@
       </p:sp>
       <p:sp>
         <p:nvSpPr>
-          <p:cNvPr id="4" name="Text 2"/>
+          <p:cNvPr id="5" name="Text 3"/>
           <p:cNvSpPr txBox="1"/>
           <p:nvPr/>
         </p:nvSpPr>
         <p:spPr>
           <a:xfrm>
-            <a:off x="886968" y="1408176"/>
-            <a:ext cx="10417759" cy="4791456"/>
+            <a:off x="923544" y="1325880"/>
+            <a:ext cx="10344607" cy="5001768"/>
           </a:xfrm>
           <a:prstGeom prst="rect">
             <a:avLst/>
@@ -7971,12 +8003,12 @@
           <a:p>
             <a:pPr algn="r" indent="0" marL="0">
               <a:lnSpc>
-                <a:spcPts val="2500"/>
+                <a:spcPts val="2600"/>
               </a:lnSpc>
               <a:buNone/>
             </a:pPr>
             <a:r>
-              <a:rPr lang="en-US" sz="1550" dirty="0">
+              <a:rPr lang="en-US" sz="1700" dirty="0">
                 <a:solidFill>
                   <a:srgbClr val="0C3B44"/>
                 </a:solidFill>
@@ -7986,12 +8018,12 @@
               </a:rPr>
               <a:t>‏המחקר נערך בגישה איכותנית, ובתוכה בגישה הפנומנולוגית, המתמקדת בחקר משמעותה של חוויה אנושית כפי שהיא נתפסת על ידי החווים אותה ‏(צבר בן-יהושע, 2016)‏. בחירה זו נגזרת משאלת המחקר עצמה: הקשר הסטטיסטי בין תזונה ופעילות גופנית לבין תחלואה כרונית נחקר בהרחבה במחקרים כמותיים, ואילו השאלה מדוע אנשים המכירים את ההמלצות אינם מיישמים אותן מחייבת גישה המאפשרת לרדת לרזולוציה של חיי היומיום ‏(שקדי, 2003)‏.‏</a:t>
             </a:r>
-            <a:endParaRPr lang="en-US" sz="1550" dirty="0"/>
+            <a:endParaRPr lang="en-US" sz="1700" dirty="0"/>
           </a:p>
           <a:p>
             <a:pPr algn="r" indent="0" marL="0">
               <a:lnSpc>
-                <a:spcPts val="2500"/>
+                <a:spcPts val="2600"/>
               </a:lnSpc>
               <a:spcBef>
                 <a:spcPts val="700"/>
@@ -7999,7 +8031,7 @@
               <a:buNone/>
             </a:pPr>
             <a:r>
-              <a:rPr lang="en-US" sz="1550" dirty="0">
+              <a:rPr lang="en-US" sz="1700" dirty="0">
                 <a:solidFill>
                   <a:srgbClr val="0C3B44"/>
                 </a:solidFill>
@@ -8009,12 +8041,12 @@
               </a:rPr>
               <a:t>‏כלי המחקר היה ריאיון עומק חצי מובנה בן חמש עשרה שאלות פתוחות, ובהן שאלת פתיחה כללית. מבנה זה נבחר משום שהוא משלב אחידות, המאפשרת השוואה בין המרואיינים, עם גמישות המאפשרת העמקה בנושאים העולים מן המרואיין עצמו. השאלות אורגנו בארבעה אשכולות, שעסקו בתפיסות בריאות, בהתנהגות בפועל, בהקשר המשפחתי והקהילתי, ובמערכת הבריאות ובמקורות המידע. הראיונות נערכו פנים אל פנים במקום שבחר המרואיין, נמשכו בין שלושים לארבעים וחמש דקות, הוקלטו באישור המשתתפים ותומללו במלואם.‏</a:t>
             </a:r>
-            <a:endParaRPr lang="en-US" sz="1550" dirty="0"/>
+            <a:endParaRPr lang="en-US" sz="1700" dirty="0"/>
           </a:p>
           <a:p>
             <a:pPr algn="r" indent="0" marL="0">
               <a:lnSpc>
-                <a:spcPts val="2500"/>
+                <a:spcPts val="2600"/>
               </a:lnSpc>
               <a:spcBef>
                 <a:spcPts val="700"/>
@@ -8022,7 +8054,7 @@
               <a:buNone/>
             </a:pPr>
             <a:r>
-              <a:rPr lang="en-US" sz="1550" dirty="0">
+              <a:rPr lang="en-US" sz="1700" dirty="0">
                 <a:solidFill>
                   <a:srgbClr val="0C3B44"/>
                 </a:solidFill>
@@ -8032,7 +8064,7 @@
               </a:rPr>
               <a:t>‏ניתוח הנתונים נעשה בשיטת הניתוח התמטי בשישה שלבים, מקידוד פתוח ועד גיבוש התמות הסופיות ובחירת הציטוטים המייצגים ‏(Braun &amp; Clarke, 2006)‏. כל אחד משלושת החוקרים ניתח את החומר בנפרד, וההשוואה בין הניתוחים סייעה לזהות פרשנויות שאינן נשענות על הנתונים ולחזק את אמינות הממצאים ‏(Lincoln &amp; Guba, 1985)‏.‏</a:t>
             </a:r>
-            <a:endParaRPr lang="en-US" sz="1550" dirty="0"/>
+            <a:endParaRPr lang="en-US" sz="1700" dirty="0"/>
           </a:p>
         </p:txBody>
       </p:sp>
@@ -8117,8 +8149,8 @@
         </p:nvSpPr>
         <p:spPr>
           <a:xfrm>
-            <a:off x="1417320" y="274320"/>
-            <a:ext cx="10271455" cy="603504"/>
+            <a:off x="1417320" y="265176"/>
+            <a:ext cx="10271455" cy="237744"/>
           </a:xfrm>
           <a:prstGeom prst="rect">
             <a:avLst/>
@@ -8134,7 +8166,46 @@
               <a:buNone/>
             </a:pPr>
             <a:r>
-              <a:rPr lang="en-US" sz="3100" b="1" dirty="0">
+              <a:rPr lang="en-US" sz="1250" b="1" spc="140" kern="0" dirty="0">
+                <a:solidFill>
+                  <a:srgbClr val="1D9E9A"/>
+                </a:solidFill>
+                <a:latin typeface="Arial" pitchFamily="34" charset="0"/>
+                <a:ea typeface="Arial" pitchFamily="34" charset="-122"/>
+                <a:cs typeface="Arial" pitchFamily="34" charset="-120"/>
+              </a:rPr>
+              <a:t>שיטת המחקר</a:t>
+            </a:r>
+            <a:endParaRPr lang="en-US" sz="1250" dirty="0"/>
+          </a:p>
+        </p:txBody>
+      </p:sp>
+      <p:sp>
+        <p:nvSpPr>
+          <p:cNvPr id="3" name="Text 1"/>
+          <p:cNvSpPr txBox="1"/>
+          <p:nvPr/>
+        </p:nvSpPr>
+        <p:spPr>
+          <a:xfrm>
+            <a:off x="1417320" y="484632"/>
+            <a:ext cx="10271455" cy="530352"/>
+          </a:xfrm>
+          <a:prstGeom prst="rect">
+            <a:avLst/>
+          </a:prstGeom>
+          <a:noFill/>
+          <a:ln/>
+        </p:spPr>
+        <p:txBody>
+          <a:bodyPr wrap="square" lIns="0" tIns="0" rIns="0" bIns="0" rtlCol="0" anchor="ctr"/>
+          <a:lstStyle/>
+          <a:p>
+            <a:pPr rtl="1" algn="r" indent="0" marL="0">
+              <a:buNone/>
+            </a:pPr>
+            <a:r>
+              <a:rPr lang="en-US" sz="3000" b="1" dirty="0">
                 <a:solidFill>
                   <a:srgbClr val="0C3B44"/>
                 </a:solidFill>
@@ -8144,24 +8215,24 @@
               </a:rPr>
               <a:t>אוכלוסיית המחקר ושיקולים אתיים</a:t>
             </a:r>
-            <a:endParaRPr lang="en-US" sz="3100" dirty="0"/>
-          </a:p>
-        </p:txBody>
-      </p:sp>
-      <p:sp>
-        <p:nvSpPr>
-          <p:cNvPr id="3" name="Shape 1"/>
+            <a:endParaRPr lang="en-US" sz="3000" dirty="0"/>
+          </a:p>
+        </p:txBody>
+      </p:sp>
+      <p:sp>
+        <p:nvSpPr>
+          <p:cNvPr id="4" name="Shape 2"/>
           <p:cNvSpPr/>
           <p:nvPr/>
         </p:nvSpPr>
         <p:spPr>
           <a:xfrm>
-            <a:off x="502920" y="1133856"/>
-            <a:ext cx="11185855" cy="5065776"/>
+            <a:off x="502920" y="1088136"/>
+            <a:ext cx="11185855" cy="5129784"/>
           </a:xfrm>
           <a:prstGeom prst="roundRect">
             <a:avLst>
-              <a:gd name="adj" fmla="val 1805"/>
+              <a:gd name="adj" fmla="val 2139"/>
             </a:avLst>
           </a:prstGeom>
           <a:solidFill>
@@ -8169,7 +8240,7 @@
           </a:solidFill>
           <a:ln w="12700">
             <a:solidFill>
-              <a:srgbClr val="F2F8F9"/>
+              <a:srgbClr val="D5E7E9"/>
             </a:solidFill>
             <a:prstDash val="solid"/>
           </a:ln>
@@ -8177,14 +8248,14 @@
       </p:sp>
       <p:sp>
         <p:nvSpPr>
-          <p:cNvPr id="4" name="Text 2"/>
+          <p:cNvPr id="5" name="Text 3"/>
           <p:cNvSpPr txBox="1"/>
           <p:nvPr/>
         </p:nvSpPr>
         <p:spPr>
           <a:xfrm>
-            <a:off x="886968" y="1408176"/>
-            <a:ext cx="10417759" cy="4791456"/>
+            <a:off x="923544" y="1325880"/>
+            <a:ext cx="10344607" cy="5001768"/>
           </a:xfrm>
           <a:prstGeom prst="rect">
             <a:avLst/>
@@ -8198,12 +8269,12 @@
           <a:p>
             <a:pPr algn="r" indent="0" marL="0">
               <a:lnSpc>
-                <a:spcPts val="2500"/>
+                <a:spcPts val="2600"/>
               </a:lnSpc>
               <a:buNone/>
             </a:pPr>
             <a:r>
-              <a:rPr lang="en-US" sz="1550" dirty="0">
+              <a:rPr lang="en-US" sz="1700" dirty="0">
                 <a:solidFill>
                   <a:srgbClr val="0C3B44"/>
                 </a:solidFill>
@@ -8213,12 +8284,12 @@
               </a:rPr>
               <a:t>‏אוכלוסיית המחקר כללה שנים עשר משתתפים, שישה גברים ושש נשים, בגילאי ארבעים וארבע עד שבעים ואחת, תושבי שלושה יישובים במחוז הדרום: כסייפה, ערד וחורה. הדגימה הייתה מכוונת ומגוונת, ונשמרה בה שונות מרבית בארבעה ממדים: מצב בריאותי, מגדר, רקע חברתי-תרבותי ורמת הפעילות הגופנית. כך נכללו במדגם חולים כרוניים ותיקים, אנשים במצב טרום-סוכרתי, מחלים מאירוע לב ואנשים ללא אבחנה מוכרת, לצד מי שמקיימים שגרת פעילות מבוססת ומי שאינם עוסקים בפעילות גופנית כלל.‏</a:t>
             </a:r>
-            <a:endParaRPr lang="en-US" sz="1550" dirty="0"/>
+            <a:endParaRPr lang="en-US" sz="1700" dirty="0"/>
           </a:p>
           <a:p>
             <a:pPr algn="r" indent="0" marL="0">
               <a:lnSpc>
-                <a:spcPts val="2500"/>
+                <a:spcPts val="2600"/>
               </a:lnSpc>
               <a:spcBef>
                 <a:spcPts val="700"/>
@@ -8226,7 +8297,7 @@
               <a:buNone/>
             </a:pPr>
             <a:r>
-              <a:rPr lang="en-US" sz="1550" dirty="0">
+              <a:rPr lang="en-US" sz="1700" dirty="0">
                 <a:solidFill>
                   <a:srgbClr val="0C3B44"/>
                 </a:solidFill>
@@ -8236,12 +8307,12 @@
               </a:rPr>
               <a:t>‏שמונה ראיונות נערכו בעברית וארבעה בערבית לפי בחירת המרואיין, ותורגמו לעברית על ידי החוקרים תוך שמירה על סגנון הדיבור ועל הביטויים האופייניים, כדי לשמר את הקול האותנטי של המרואיינים.‏</a:t>
             </a:r>
-            <a:endParaRPr lang="en-US" sz="1550" dirty="0"/>
+            <a:endParaRPr lang="en-US" sz="1700" dirty="0"/>
           </a:p>
           <a:p>
             <a:pPr algn="r" indent="0" marL="0">
               <a:lnSpc>
-                <a:spcPts val="2500"/>
+                <a:spcPts val="2600"/>
               </a:lnSpc>
               <a:spcBef>
                 <a:spcPts val="700"/>
@@ -8249,7 +8320,7 @@
               <a:buNone/>
             </a:pPr>
             <a:r>
-              <a:rPr lang="en-US" sz="1550" dirty="0">
+              <a:rPr lang="en-US" sz="1700" dirty="0">
                 <a:solidFill>
                   <a:srgbClr val="0C3B44"/>
                 </a:solidFill>
@@ -8259,7 +8330,7 @@
               </a:rPr>
               <a:t>‏המחקר נערך תוך הקפדה על עקרונות אתיקה מקובלים. כל המשתתפים נתנו הסכמה מדעת, ההשתתפות הייתה וולונטרית וללא תמורה, וכל הפרטים המזהים הושמטו מן התמלילים כך שכל משתתף מסומן במספר בלבד. היבט אתי נוסף נוגע לכך ששלושת החוקרים הם בני החברה הנחקרת, מצב שיצר יתרון של אמון ופתיחות לצד סיכון להטיה, אשר צומצם בהבהרה למרואיינים כי אין תשובות נכונות או שגויות וכי המחקר אינו בוחן אותם.‏</a:t>
             </a:r>
-            <a:endParaRPr lang="en-US" sz="1550" dirty="0"/>
+            <a:endParaRPr lang="en-US" sz="1700" dirty="0"/>
           </a:p>
         </p:txBody>
       </p:sp>
@@ -8344,8 +8415,8 @@
         </p:nvSpPr>
         <p:spPr>
           <a:xfrm>
-            <a:off x="1417320" y="274320"/>
-            <a:ext cx="10271455" cy="603504"/>
+            <a:off x="1417320" y="265176"/>
+            <a:ext cx="10271455" cy="237744"/>
           </a:xfrm>
           <a:prstGeom prst="rect">
             <a:avLst/>
@@ -8361,9 +8432,9 @@
               <a:buNone/>
             </a:pPr>
             <a:r>
-              <a:rPr lang="en-US" sz="3100" b="1" dirty="0">
-                <a:solidFill>
-                  <a:srgbClr val="0C3B44"/>
+              <a:rPr lang="en-US" sz="1250" b="1" spc="140" kern="0" dirty="0">
+                <a:solidFill>
+                  <a:srgbClr val="1D9E9A"/>
                 </a:solidFill>
                 <a:latin typeface="Arial" pitchFamily="34" charset="0"/>
                 <a:ea typeface="Arial" pitchFamily="34" charset="-122"/>
@@ -8371,7 +8442,7 @@
               </a:rPr>
               <a:t>ממצאים</a:t>
             </a:r>
-            <a:endParaRPr lang="en-US" sz="3100" dirty="0"/>
+            <a:endParaRPr lang="en-US" sz="1250" dirty="0"/>
           </a:p>
         </p:txBody>
       </p:sp>
@@ -8383,8 +8454,8 @@
         </p:nvSpPr>
         <p:spPr>
           <a:xfrm>
-            <a:off x="1417320" y="877824"/>
-            <a:ext cx="10271455" cy="310896"/>
+            <a:off x="1417320" y="484632"/>
+            <a:ext cx="10271455" cy="530352"/>
           </a:xfrm>
           <a:prstGeom prst="rect">
             <a:avLst/>
@@ -8400,9 +8471,48 @@
               <a:buNone/>
             </a:pPr>
             <a:r>
+              <a:rPr lang="en-US" sz="3000" b="1" dirty="0">
+                <a:solidFill>
+                  <a:srgbClr val="0C3B44"/>
+                </a:solidFill>
+                <a:latin typeface="Arial" pitchFamily="34" charset="0"/>
+                <a:ea typeface="Arial" pitchFamily="34" charset="-122"/>
+                <a:cs typeface="Arial" pitchFamily="34" charset="-120"/>
+              </a:rPr>
+              <a:t>ממצאים</a:t>
+            </a:r>
+            <a:endParaRPr lang="en-US" sz="3000" dirty="0"/>
+          </a:p>
+        </p:txBody>
+      </p:sp>
+      <p:sp>
+        <p:nvSpPr>
+          <p:cNvPr id="4" name="Text 2"/>
+          <p:cNvSpPr txBox="1"/>
+          <p:nvPr/>
+        </p:nvSpPr>
+        <p:spPr>
+          <a:xfrm>
+            <a:off x="1417320" y="996696"/>
+            <a:ext cx="10271455" cy="274320"/>
+          </a:xfrm>
+          <a:prstGeom prst="rect">
+            <a:avLst/>
+          </a:prstGeom>
+          <a:noFill/>
+          <a:ln/>
+        </p:spPr>
+        <p:txBody>
+          <a:bodyPr wrap="square" lIns="0" tIns="0" rIns="0" bIns="0" rtlCol="0" anchor="ctr"/>
+          <a:lstStyle/>
+          <a:p>
+            <a:pPr rtl="1" algn="r" indent="0" marL="0">
+              <a:buNone/>
+            </a:pPr>
+            <a:r>
               <a:rPr lang="en-US" sz="1500" b="1" dirty="0">
                 <a:solidFill>
-                  <a:srgbClr val="1D9E9A"/>
+                  <a:srgbClr val="0E6E7E"/>
                 </a:solidFill>
                 <a:latin typeface="Arial" pitchFamily="34" charset="0"/>
                 <a:ea typeface="Arial" pitchFamily="34" charset="-122"/>
@@ -8416,18 +8526,18 @@
       </p:sp>
       <p:sp>
         <p:nvSpPr>
-          <p:cNvPr id="4" name="Shape 2"/>
+          <p:cNvPr id="5" name="Shape 3"/>
           <p:cNvSpPr/>
           <p:nvPr/>
         </p:nvSpPr>
         <p:spPr>
           <a:xfrm>
-            <a:off x="502920" y="1316736"/>
-            <a:ext cx="11185855" cy="4882896"/>
+            <a:off x="502920" y="1307592"/>
+            <a:ext cx="11185855" cy="4910328"/>
           </a:xfrm>
           <a:prstGeom prst="roundRect">
             <a:avLst>
-              <a:gd name="adj" fmla="val 1873"/>
+              <a:gd name="adj" fmla="val 2235"/>
             </a:avLst>
           </a:prstGeom>
           <a:solidFill>
@@ -8435,7 +8545,7 @@
           </a:solidFill>
           <a:ln w="12700">
             <a:solidFill>
-              <a:srgbClr val="F2F8F9"/>
+              <a:srgbClr val="D5E7E9"/>
             </a:solidFill>
             <a:prstDash val="solid"/>
           </a:ln>
@@ -8443,14 +8553,14 @@
       </p:sp>
       <p:sp>
         <p:nvSpPr>
-          <p:cNvPr id="5" name="Text 3"/>
+          <p:cNvPr id="6" name="Text 4"/>
           <p:cNvSpPr txBox="1"/>
           <p:nvPr/>
         </p:nvSpPr>
         <p:spPr>
           <a:xfrm>
-            <a:off x="886968" y="1591056"/>
-            <a:ext cx="10417759" cy="4608576"/>
+            <a:off x="923544" y="1545336"/>
+            <a:ext cx="10344607" cy="4782312"/>
           </a:xfrm>
           <a:prstGeom prst="rect">
             <a:avLst/>
@@ -8464,12 +8574,12 @@
           <a:p>
             <a:pPr algn="r" indent="0" marL="0">
               <a:lnSpc>
-                <a:spcPts val="2500"/>
+                <a:spcPts val="2600"/>
               </a:lnSpc>
               <a:buNone/>
             </a:pPr>
             <a:r>
-              <a:rPr lang="en-US" sz="1550" dirty="0">
+              <a:rPr lang="en-US" sz="1700" dirty="0">
                 <a:solidFill>
                   <a:srgbClr val="0C3B44"/>
                 </a:solidFill>
@@ -8479,12 +8589,12 @@
               </a:rPr>
               <a:t>‏מניתוח שנים עשר הראיונות עלו שש תמות מרכזיות, המצטרפות יחד לתמונה אחת. התמה הראשונה, שעלתה בכל הראיונות, היא הפער בין הידע לבין היישום, ולצידה התמה השנייה, שעניינה תפקידה הכפול של המשפחה כמנוע וכבלם בו זמנית. התמה השלישית עוסקת בתשתית הפיזית והמגדרית כתנאי מקדים לפעילות, והרביעית בנקודת המפנה, כלומר באירוע הבריאותי שהוא הטריגר השכיח ביותר לשינוי בפועל.‏</a:t>
             </a:r>
-            <a:endParaRPr lang="en-US" sz="1550" dirty="0"/>
+            <a:endParaRPr lang="en-US" sz="1700" dirty="0"/>
           </a:p>
           <a:p>
             <a:pPr algn="r" indent="0" marL="0">
               <a:lnSpc>
-                <a:spcPts val="2500"/>
+                <a:spcPts val="2600"/>
               </a:lnSpc>
               <a:spcBef>
                 <a:spcPts val="700"/>
@@ -8492,7 +8602,7 @@
               <a:buNone/>
             </a:pPr>
             <a:r>
-              <a:rPr lang="en-US" sz="1550" dirty="0">
+              <a:rPr lang="en-US" sz="1700" dirty="0">
                 <a:solidFill>
                   <a:srgbClr val="0C3B44"/>
                 </a:solidFill>
@@ -8502,12 +8612,12 @@
               </a:rPr>
               <a:t>‏התמה החמישית עוסקת בתפיסת מערכת הבריאות כמצוינת בטיפול וחלשה במניעה יזומה, והשישית בסביבת מידע רוויה שבה האמון נבנה על היכרות אישית ועל שפה משותפת יותר מאשר על סמכות מקצועית פורמלית.‏</a:t>
             </a:r>
-            <a:endParaRPr lang="en-US" sz="1550" dirty="0"/>
+            <a:endParaRPr lang="en-US" sz="1700" dirty="0"/>
           </a:p>
           <a:p>
             <a:pPr algn="r" indent="0" marL="0">
               <a:lnSpc>
-                <a:spcPts val="2500"/>
+                <a:spcPts val="2600"/>
               </a:lnSpc>
               <a:spcBef>
                 <a:spcPts val="700"/>
@@ -8515,7 +8625,7 @@
               <a:buNone/>
             </a:pPr>
             <a:r>
-              <a:rPr lang="en-US" sz="1550" dirty="0">
+              <a:rPr lang="en-US" sz="1700" dirty="0">
                 <a:solidFill>
                   <a:srgbClr val="0C3B44"/>
                 </a:solidFill>
@@ -8525,7 +8635,7 @@
               </a:rPr>
               <a:t>‏הקו המחבר בין שש התמות הוא שהחסם המרכזי אינו מצוי בידע. כל המשתתפים, לרבות מרואיין שאינו יודע קרוא וכתוב, ידעו לנסח את עקרונות אורח החיים הבריא, והקושי שדווח היה בהתמדה וביישום ולא בהבנה. הציטוטים המובאים בשקופיות הבאות הם דברי משתתפי המחקר כלשונם, ומספר המרואיין מצוין בסוגריים.‏</a:t>
             </a:r>
-            <a:endParaRPr lang="en-US" sz="1550" dirty="0"/>
+            <a:endParaRPr lang="en-US" sz="1700" dirty="0"/>
           </a:p>
         </p:txBody>
       </p:sp>

--- a/מצגת פרויקט גמר - פעילות גופנית ותזונה ומחלות כרוניות.pptx
+++ b/מצגת פרויקט גמר - פעילות גופנית ותזונה ומחלות כרוניות.pptx
@@ -4687,18 +4687,57 @@
       </p:sp>
       <p:sp>
         <p:nvSpPr>
-          <p:cNvPr id="4" name="Shape 2"/>
+          <p:cNvPr id="4" name="Text 2"/>
+          <p:cNvSpPr txBox="1"/>
+          <p:nvPr/>
+        </p:nvSpPr>
+        <p:spPr>
+          <a:xfrm>
+            <a:off x="1417320" y="996696"/>
+            <a:ext cx="10271455" cy="274320"/>
+          </a:xfrm>
+          <a:prstGeom prst="rect">
+            <a:avLst/>
+          </a:prstGeom>
+          <a:noFill/>
+          <a:ln/>
+        </p:spPr>
+        <p:txBody>
+          <a:bodyPr wrap="square" lIns="0" tIns="0" rIns="0" bIns="0" rtlCol="0" anchor="ctr"/>
+          <a:lstStyle/>
+          <a:p>
+            <a:pPr rtl="1" algn="r" indent="0" marL="0">
+              <a:buNone/>
+            </a:pPr>
+            <a:r>
+              <a:rPr lang="en-US" sz="1500" b="1" dirty="0">
+                <a:solidFill>
+                  <a:srgbClr val="0E6E7E"/>
+                </a:solidFill>
+                <a:latin typeface="Arial" pitchFamily="34" charset="0"/>
+                <a:ea typeface="Arial" pitchFamily="34" charset="-122"/>
+                <a:cs typeface="Arial" pitchFamily="34" charset="-120"/>
+              </a:rPr>
+              <a:t>שבע המלצות לקופות החולים, לרשויות המקומיות ולמשרד הבריאות</a:t>
+            </a:r>
+            <a:endParaRPr lang="en-US" sz="1500" dirty="0"/>
+          </a:p>
+        </p:txBody>
+      </p:sp>
+      <p:sp>
+        <p:nvSpPr>
+          <p:cNvPr id="5" name="Shape 3"/>
           <p:cNvSpPr/>
           <p:nvPr/>
         </p:nvSpPr>
         <p:spPr>
           <a:xfrm>
-            <a:off x="502920" y="1088136"/>
-            <a:ext cx="11185855" cy="5129784"/>
+            <a:off x="502920" y="1371600"/>
+            <a:ext cx="11185855" cy="585216"/>
           </a:xfrm>
           <a:prstGeom prst="roundRect">
             <a:avLst>
-              <a:gd name="adj" fmla="val 2139"/>
+              <a:gd name="adj" fmla="val 12500"/>
             </a:avLst>
           </a:prstGeom>
           <a:solidFill>
@@ -4714,14 +4753,55 @@
       </p:sp>
       <p:sp>
         <p:nvSpPr>
-          <p:cNvPr id="5" name="Text 3"/>
+          <p:cNvPr id="6" name="Text 4"/>
           <p:cNvSpPr txBox="1"/>
           <p:nvPr/>
         </p:nvSpPr>
         <p:spPr>
           <a:xfrm>
-            <a:off x="923544" y="1325880"/>
-            <a:ext cx="10344607" cy="5001768"/>
+            <a:off x="11085271" y="1453896"/>
+            <a:ext cx="420624" cy="420624"/>
+          </a:xfrm>
+          <a:prstGeom prst="ellipse">
+            <a:avLst/>
+          </a:prstGeom>
+          <a:solidFill>
+            <a:srgbClr val="0E6E7E"/>
+          </a:solidFill>
+          <a:ln/>
+        </p:spPr>
+        <p:txBody>
+          <a:bodyPr wrap="square" lIns="0" tIns="0" rIns="0" bIns="0" rtlCol="0" anchor="ctr"/>
+          <a:lstStyle/>
+          <a:p>
+            <a:pPr algn="ctr" indent="0" marL="0">
+              <a:buNone/>
+            </a:pPr>
+            <a:r>
+              <a:rPr lang="en-US" sz="1500" b="1" dirty="0">
+                <a:solidFill>
+                  <a:srgbClr val="FFFFFF"/>
+                </a:solidFill>
+                <a:latin typeface="Arial" pitchFamily="34" charset="0"/>
+                <a:ea typeface="Arial" pitchFamily="34" charset="-122"/>
+                <a:cs typeface="Arial" pitchFamily="34" charset="-120"/>
+              </a:rPr>
+              <a:t>1</a:t>
+            </a:r>
+            <a:endParaRPr lang="en-US" sz="1500" dirty="0"/>
+          </a:p>
+        </p:txBody>
+      </p:sp>
+      <p:sp>
+        <p:nvSpPr>
+          <p:cNvPr id="7" name="Text 5"/>
+          <p:cNvSpPr txBox="1"/>
+          <p:nvPr/>
+        </p:nvSpPr>
+        <p:spPr>
+          <a:xfrm>
+            <a:off x="7765999" y="1371600"/>
+            <a:ext cx="3154680" cy="585216"/>
           </a:xfrm>
           <a:prstGeom prst="rect">
             <a:avLst/>
@@ -4730,17 +4810,14 @@
           <a:ln/>
         </p:spPr>
         <p:txBody>
-          <a:bodyPr wrap="square" lIns="0" tIns="0" rIns="0" bIns="0" rtlCol="0" anchor="t"/>
-          <a:lstStyle/>
-          <a:p>
-            <a:pPr algn="r" indent="0" marL="0">
-              <a:lnSpc>
-                <a:spcPts val="2600"/>
-              </a:lnSpc>
-              <a:buNone/>
-            </a:pPr>
-            <a:r>
-              <a:rPr lang="en-US" sz="1700" dirty="0">
+          <a:bodyPr wrap="square" lIns="0" tIns="0" rIns="0" bIns="0" rtlCol="0" anchor="ctr"/>
+          <a:lstStyle/>
+          <a:p>
+            <a:pPr rtl="1" algn="r" indent="0" marL="0">
+              <a:buNone/>
+            </a:pPr>
+            <a:r>
+              <a:rPr lang="en-US" sz="1500" b="1" dirty="0">
                 <a:solidFill>
                   <a:srgbClr val="0C3B44"/>
                 </a:solidFill>
@@ -4748,22 +4825,145 @@
                 <a:ea typeface="Arial" pitchFamily="34" charset="-122"/>
                 <a:cs typeface="Arial" pitchFamily="34" charset="-120"/>
               </a:rPr>
-              <a:t>‏מן הממצאים נגזרות שבע המלצות מעשיות. ראשית, מומלץ להנהיג מרשם לפעילות גופנית, שבו הצוות הרפואי רושם בכתב מסגרת קונקרטית הכוללת שם קבוצה, מקום, יום ושעה, שכן מן הראיונות עולה כי מטופלים מבצעים מרשמים ומתעלמים מהמלצות כלליות. שנית, מומלץ להקים קבוצות הליכה שכונתיות מונחות, מודל הדורש מדריך אחד ומסלול קיים בלבד, בתוספת מנגנון מעקב פשוט הכולל שיחת טלפון למי שנעדר.‏</a:t>
-            </a:r>
-            <a:endParaRPr lang="en-US" sz="1700" dirty="0"/>
-          </a:p>
-          <a:p>
-            <a:pPr algn="r" indent="0" marL="0">
-              <a:lnSpc>
-                <a:spcPts val="2600"/>
-              </a:lnSpc>
-              <a:spcBef>
-                <a:spcPts val="700"/>
-              </a:spcBef>
-              <a:buNone/>
-            </a:pPr>
-            <a:r>
-              <a:rPr lang="en-US" sz="1700" dirty="0">
+              <a:t>‏מרשם לפעילות גופנית‏</a:t>
+            </a:r>
+            <a:endParaRPr lang="en-US" sz="1500" dirty="0"/>
+          </a:p>
+        </p:txBody>
+      </p:sp>
+      <p:sp>
+        <p:nvSpPr>
+          <p:cNvPr id="8" name="Text 6"/>
+          <p:cNvSpPr txBox="1"/>
+          <p:nvPr/>
+        </p:nvSpPr>
+        <p:spPr>
+          <a:xfrm>
+            <a:off x="704088" y="1371600"/>
+            <a:ext cx="6897319" cy="585216"/>
+          </a:xfrm>
+          <a:prstGeom prst="rect">
+            <a:avLst/>
+          </a:prstGeom>
+          <a:noFill/>
+          <a:ln/>
+        </p:spPr>
+        <p:txBody>
+          <a:bodyPr wrap="square" lIns="0" tIns="0" rIns="0" bIns="0" rtlCol="0" anchor="ctr"/>
+          <a:lstStyle/>
+          <a:p>
+            <a:pPr rtl="1" algn="r" indent="0" marL="0">
+              <a:buNone/>
+            </a:pPr>
+            <a:r>
+              <a:rPr lang="en-US" sz="1300" dirty="0">
+                <a:solidFill>
+                  <a:srgbClr val="56686D"/>
+                </a:solidFill>
+                <a:latin typeface="Arial" pitchFamily="34" charset="0"/>
+                <a:ea typeface="Arial" pitchFamily="34" charset="-122"/>
+                <a:cs typeface="Arial" pitchFamily="34" charset="-120"/>
+              </a:rPr>
+              <a:t>‏הפניה בכתב עם שם קבוצה, מקום, יום ושעה, ולא המלצה כללית‏</a:t>
+            </a:r>
+            <a:endParaRPr lang="en-US" sz="1300" dirty="0"/>
+          </a:p>
+        </p:txBody>
+      </p:sp>
+      <p:sp>
+        <p:nvSpPr>
+          <p:cNvPr id="9" name="Shape 7"/>
+          <p:cNvSpPr/>
+          <p:nvPr/>
+        </p:nvSpPr>
+        <p:spPr>
+          <a:xfrm>
+            <a:off x="502920" y="2039112"/>
+            <a:ext cx="11185855" cy="585216"/>
+          </a:xfrm>
+          <a:prstGeom prst="roundRect">
+            <a:avLst>
+              <a:gd name="adj" fmla="val 12500"/>
+            </a:avLst>
+          </a:prstGeom>
+          <a:solidFill>
+            <a:srgbClr val="F2F8F9"/>
+          </a:solidFill>
+          <a:ln w="12700">
+            <a:solidFill>
+              <a:srgbClr val="D5E7E9"/>
+            </a:solidFill>
+            <a:prstDash val="solid"/>
+          </a:ln>
+        </p:spPr>
+      </p:sp>
+      <p:sp>
+        <p:nvSpPr>
+          <p:cNvPr id="10" name="Text 8"/>
+          <p:cNvSpPr txBox="1"/>
+          <p:nvPr/>
+        </p:nvSpPr>
+        <p:spPr>
+          <a:xfrm>
+            <a:off x="11085271" y="2121408"/>
+            <a:ext cx="420624" cy="420624"/>
+          </a:xfrm>
+          <a:prstGeom prst="ellipse">
+            <a:avLst/>
+          </a:prstGeom>
+          <a:solidFill>
+            <a:srgbClr val="1D9E9A"/>
+          </a:solidFill>
+          <a:ln/>
+        </p:spPr>
+        <p:txBody>
+          <a:bodyPr wrap="square" lIns="0" tIns="0" rIns="0" bIns="0" rtlCol="0" anchor="ctr"/>
+          <a:lstStyle/>
+          <a:p>
+            <a:pPr algn="ctr" indent="0" marL="0">
+              <a:buNone/>
+            </a:pPr>
+            <a:r>
+              <a:rPr lang="en-US" sz="1500" b="1" dirty="0">
+                <a:solidFill>
+                  <a:srgbClr val="FFFFFF"/>
+                </a:solidFill>
+                <a:latin typeface="Arial" pitchFamily="34" charset="0"/>
+                <a:ea typeface="Arial" pitchFamily="34" charset="-122"/>
+                <a:cs typeface="Arial" pitchFamily="34" charset="-120"/>
+              </a:rPr>
+              <a:t>2</a:t>
+            </a:r>
+            <a:endParaRPr lang="en-US" sz="1500" dirty="0"/>
+          </a:p>
+        </p:txBody>
+      </p:sp>
+      <p:sp>
+        <p:nvSpPr>
+          <p:cNvPr id="11" name="Text 9"/>
+          <p:cNvSpPr txBox="1"/>
+          <p:nvPr/>
+        </p:nvSpPr>
+        <p:spPr>
+          <a:xfrm>
+            <a:off x="7765999" y="2039112"/>
+            <a:ext cx="3154680" cy="585216"/>
+          </a:xfrm>
+          <a:prstGeom prst="rect">
+            <a:avLst/>
+          </a:prstGeom>
+          <a:noFill/>
+          <a:ln/>
+        </p:spPr>
+        <p:txBody>
+          <a:bodyPr wrap="square" lIns="0" tIns="0" rIns="0" bIns="0" rtlCol="0" anchor="ctr"/>
+          <a:lstStyle/>
+          <a:p>
+            <a:pPr rtl="1" algn="r" indent="0" marL="0">
+              <a:buNone/>
+            </a:pPr>
+            <a:r>
+              <a:rPr lang="en-US" sz="1500" b="1" dirty="0">
                 <a:solidFill>
                   <a:srgbClr val="0C3B44"/>
                 </a:solidFill>
@@ -4771,22 +4971,145 @@
                 <a:ea typeface="Arial" pitchFamily="34" charset="-122"/>
                 <a:cs typeface="Arial" pitchFamily="34" charset="-120"/>
               </a:rPr>
-              <a:t>‏שלישית, ובאופן דחוף, מומלץ להשקיע בתשתית הליכה ביישובי הבדואים בנגב: מדרכה רציפה, תאורה וספסלים לאורך מסלול אחד לפחות בכל שכונה. זוהי ההשקעה בעלת התשואה הבריאותית הגבוהה ביותר ביחס לעלותה. רביעית, מומלץ להקים מסגרות ספורט נפרדות לנשים בתוך היישובים, בהפעלת מדריכות ובשעות אחר הצהריים, שכן היעדרן מהווה חסם מוחלט בפני מחצית האוכלוסייה.‏</a:t>
-            </a:r>
-            <a:endParaRPr lang="en-US" sz="1700" dirty="0"/>
-          </a:p>
-          <a:p>
-            <a:pPr algn="r" indent="0" marL="0">
-              <a:lnSpc>
-                <a:spcPts val="2600"/>
-              </a:lnSpc>
-              <a:spcBef>
-                <a:spcPts val="700"/>
-              </a:spcBef>
-              <a:buNone/>
-            </a:pPr>
-            <a:r>
-              <a:rPr lang="en-US" sz="1700" dirty="0">
+              <a:t>‏קבוצות הליכה שכונתיות‏</a:t>
+            </a:r>
+            <a:endParaRPr lang="en-US" sz="1500" dirty="0"/>
+          </a:p>
+        </p:txBody>
+      </p:sp>
+      <p:sp>
+        <p:nvSpPr>
+          <p:cNvPr id="12" name="Text 10"/>
+          <p:cNvSpPr txBox="1"/>
+          <p:nvPr/>
+        </p:nvSpPr>
+        <p:spPr>
+          <a:xfrm>
+            <a:off x="704088" y="2039112"/>
+            <a:ext cx="6897319" cy="585216"/>
+          </a:xfrm>
+          <a:prstGeom prst="rect">
+            <a:avLst/>
+          </a:prstGeom>
+          <a:noFill/>
+          <a:ln/>
+        </p:spPr>
+        <p:txBody>
+          <a:bodyPr wrap="square" lIns="0" tIns="0" rIns="0" bIns="0" rtlCol="0" anchor="ctr"/>
+          <a:lstStyle/>
+          <a:p>
+            <a:pPr rtl="1" algn="r" indent="0" marL="0">
+              <a:buNone/>
+            </a:pPr>
+            <a:r>
+              <a:rPr lang="en-US" sz="1300" dirty="0">
+                <a:solidFill>
+                  <a:srgbClr val="56686D"/>
+                </a:solidFill>
+                <a:latin typeface="Arial" pitchFamily="34" charset="0"/>
+                <a:ea typeface="Arial" pitchFamily="34" charset="-122"/>
+                <a:cs typeface="Arial" pitchFamily="34" charset="-120"/>
+              </a:rPr>
+              <a:t>‏מדריך אחד ומסלול קיים, בתוספת שיחת טלפון למי שנעדר‏</a:t>
+            </a:r>
+            <a:endParaRPr lang="en-US" sz="1300" dirty="0"/>
+          </a:p>
+        </p:txBody>
+      </p:sp>
+      <p:sp>
+        <p:nvSpPr>
+          <p:cNvPr id="13" name="Shape 11"/>
+          <p:cNvSpPr/>
+          <p:nvPr/>
+        </p:nvSpPr>
+        <p:spPr>
+          <a:xfrm>
+            <a:off x="502920" y="2706624"/>
+            <a:ext cx="11185855" cy="585216"/>
+          </a:xfrm>
+          <a:prstGeom prst="roundRect">
+            <a:avLst>
+              <a:gd name="adj" fmla="val 12500"/>
+            </a:avLst>
+          </a:prstGeom>
+          <a:solidFill>
+            <a:srgbClr val="F2F8F9"/>
+          </a:solidFill>
+          <a:ln w="12700">
+            <a:solidFill>
+              <a:srgbClr val="D5E7E9"/>
+            </a:solidFill>
+            <a:prstDash val="solid"/>
+          </a:ln>
+        </p:spPr>
+      </p:sp>
+      <p:sp>
+        <p:nvSpPr>
+          <p:cNvPr id="14" name="Text 12"/>
+          <p:cNvSpPr txBox="1"/>
+          <p:nvPr/>
+        </p:nvSpPr>
+        <p:spPr>
+          <a:xfrm>
+            <a:off x="11085271" y="2788920"/>
+            <a:ext cx="420624" cy="420624"/>
+          </a:xfrm>
+          <a:prstGeom prst="ellipse">
+            <a:avLst/>
+          </a:prstGeom>
+          <a:solidFill>
+            <a:srgbClr val="0E6E7E"/>
+          </a:solidFill>
+          <a:ln/>
+        </p:spPr>
+        <p:txBody>
+          <a:bodyPr wrap="square" lIns="0" tIns="0" rIns="0" bIns="0" rtlCol="0" anchor="ctr"/>
+          <a:lstStyle/>
+          <a:p>
+            <a:pPr algn="ctr" indent="0" marL="0">
+              <a:buNone/>
+            </a:pPr>
+            <a:r>
+              <a:rPr lang="en-US" sz="1500" b="1" dirty="0">
+                <a:solidFill>
+                  <a:srgbClr val="FFFFFF"/>
+                </a:solidFill>
+                <a:latin typeface="Arial" pitchFamily="34" charset="0"/>
+                <a:ea typeface="Arial" pitchFamily="34" charset="-122"/>
+                <a:cs typeface="Arial" pitchFamily="34" charset="-120"/>
+              </a:rPr>
+              <a:t>3</a:t>
+            </a:r>
+            <a:endParaRPr lang="en-US" sz="1500" dirty="0"/>
+          </a:p>
+        </p:txBody>
+      </p:sp>
+      <p:sp>
+        <p:nvSpPr>
+          <p:cNvPr id="15" name="Text 13"/>
+          <p:cNvSpPr txBox="1"/>
+          <p:nvPr/>
+        </p:nvSpPr>
+        <p:spPr>
+          <a:xfrm>
+            <a:off x="7765999" y="2706624"/>
+            <a:ext cx="3154680" cy="585216"/>
+          </a:xfrm>
+          <a:prstGeom prst="rect">
+            <a:avLst/>
+          </a:prstGeom>
+          <a:noFill/>
+          <a:ln/>
+        </p:spPr>
+        <p:txBody>
+          <a:bodyPr wrap="square" lIns="0" tIns="0" rIns="0" bIns="0" rtlCol="0" anchor="ctr"/>
+          <a:lstStyle/>
+          <a:p>
+            <a:pPr rtl="1" algn="r" indent="0" marL="0">
+              <a:buNone/>
+            </a:pPr>
+            <a:r>
+              <a:rPr lang="en-US" sz="1500" b="1" dirty="0">
                 <a:solidFill>
                   <a:srgbClr val="0C3B44"/>
                 </a:solidFill>
@@ -4794,9 +5117,632 @@
                 <a:ea typeface="Arial" pitchFamily="34" charset="-122"/>
                 <a:cs typeface="Arial" pitchFamily="34" charset="-120"/>
               </a:rPr>
-              <a:t>‏חמישית, מומלץ להנהיג פנייה יזומה טלפונית בשפה הערבית אל בעלי גורמי סיכון שאינם מגיעים לבדיקות, מאחר שדיוור אוטומטי ועלונים כתובים נמצאו בלתי אפקטיביים, ובפרט בקרב מבוגרים שאינם קוראים. שישית, מומלץ לשלב את מוסדות הקהילה, ובהם המסגד, בתי הספר וטיפות החלב, כערוצי הסברה המגיעים אל מי שאינו פוקד את המרפאה. שביעית, מומלץ לשלב אנשים מן הקהילה שעברו שינוי מוצלח כמעבירי מסר, שכן עדותו של אדם מוכר מן היישוב משכנעת יותר מהרצאה של גורם חיצוני.‏</a:t>
-            </a:r>
-            <a:endParaRPr lang="en-US" sz="1700" dirty="0"/>
+              <a:t>‏תשתית הליכה ביישובי הבדואים‏</a:t>
+            </a:r>
+            <a:endParaRPr lang="en-US" sz="1500" dirty="0"/>
+          </a:p>
+        </p:txBody>
+      </p:sp>
+      <p:sp>
+        <p:nvSpPr>
+          <p:cNvPr id="16" name="Text 14"/>
+          <p:cNvSpPr txBox="1"/>
+          <p:nvPr/>
+        </p:nvSpPr>
+        <p:spPr>
+          <a:xfrm>
+            <a:off x="704088" y="2706624"/>
+            <a:ext cx="6897319" cy="585216"/>
+          </a:xfrm>
+          <a:prstGeom prst="rect">
+            <a:avLst/>
+          </a:prstGeom>
+          <a:noFill/>
+          <a:ln/>
+        </p:spPr>
+        <p:txBody>
+          <a:bodyPr wrap="square" lIns="0" tIns="0" rIns="0" bIns="0" rtlCol="0" anchor="ctr"/>
+          <a:lstStyle/>
+          <a:p>
+            <a:pPr rtl="1" algn="r" indent="0" marL="0">
+              <a:buNone/>
+            </a:pPr>
+            <a:r>
+              <a:rPr lang="en-US" sz="1300" dirty="0">
+                <a:solidFill>
+                  <a:srgbClr val="56686D"/>
+                </a:solidFill>
+                <a:latin typeface="Arial" pitchFamily="34" charset="0"/>
+                <a:ea typeface="Arial" pitchFamily="34" charset="-122"/>
+                <a:cs typeface="Arial" pitchFamily="34" charset="-120"/>
+              </a:rPr>
+              <a:t>‏מדרכה רציפה, תאורה וספסלים במסלול אחד לפחות בכל שכונה‏</a:t>
+            </a:r>
+            <a:endParaRPr lang="en-US" sz="1300" dirty="0"/>
+          </a:p>
+        </p:txBody>
+      </p:sp>
+      <p:sp>
+        <p:nvSpPr>
+          <p:cNvPr id="17" name="Shape 15"/>
+          <p:cNvSpPr/>
+          <p:nvPr/>
+        </p:nvSpPr>
+        <p:spPr>
+          <a:xfrm>
+            <a:off x="502920" y="3374136"/>
+            <a:ext cx="11185855" cy="585216"/>
+          </a:xfrm>
+          <a:prstGeom prst="roundRect">
+            <a:avLst>
+              <a:gd name="adj" fmla="val 12500"/>
+            </a:avLst>
+          </a:prstGeom>
+          <a:solidFill>
+            <a:srgbClr val="F2F8F9"/>
+          </a:solidFill>
+          <a:ln w="12700">
+            <a:solidFill>
+              <a:srgbClr val="D5E7E9"/>
+            </a:solidFill>
+            <a:prstDash val="solid"/>
+          </a:ln>
+        </p:spPr>
+      </p:sp>
+      <p:sp>
+        <p:nvSpPr>
+          <p:cNvPr id="18" name="Text 16"/>
+          <p:cNvSpPr txBox="1"/>
+          <p:nvPr/>
+        </p:nvSpPr>
+        <p:spPr>
+          <a:xfrm>
+            <a:off x="11085271" y="3456432"/>
+            <a:ext cx="420624" cy="420624"/>
+          </a:xfrm>
+          <a:prstGeom prst="ellipse">
+            <a:avLst/>
+          </a:prstGeom>
+          <a:solidFill>
+            <a:srgbClr val="1D9E9A"/>
+          </a:solidFill>
+          <a:ln/>
+        </p:spPr>
+        <p:txBody>
+          <a:bodyPr wrap="square" lIns="0" tIns="0" rIns="0" bIns="0" rtlCol="0" anchor="ctr"/>
+          <a:lstStyle/>
+          <a:p>
+            <a:pPr algn="ctr" indent="0" marL="0">
+              <a:buNone/>
+            </a:pPr>
+            <a:r>
+              <a:rPr lang="en-US" sz="1500" b="1" dirty="0">
+                <a:solidFill>
+                  <a:srgbClr val="FFFFFF"/>
+                </a:solidFill>
+                <a:latin typeface="Arial" pitchFamily="34" charset="0"/>
+                <a:ea typeface="Arial" pitchFamily="34" charset="-122"/>
+                <a:cs typeface="Arial" pitchFamily="34" charset="-120"/>
+              </a:rPr>
+              <a:t>4</a:t>
+            </a:r>
+            <a:endParaRPr lang="en-US" sz="1500" dirty="0"/>
+          </a:p>
+        </p:txBody>
+      </p:sp>
+      <p:sp>
+        <p:nvSpPr>
+          <p:cNvPr id="19" name="Text 17"/>
+          <p:cNvSpPr txBox="1"/>
+          <p:nvPr/>
+        </p:nvSpPr>
+        <p:spPr>
+          <a:xfrm>
+            <a:off x="7765999" y="3374136"/>
+            <a:ext cx="3154680" cy="585216"/>
+          </a:xfrm>
+          <a:prstGeom prst="rect">
+            <a:avLst/>
+          </a:prstGeom>
+          <a:noFill/>
+          <a:ln/>
+        </p:spPr>
+        <p:txBody>
+          <a:bodyPr wrap="square" lIns="0" tIns="0" rIns="0" bIns="0" rtlCol="0" anchor="ctr"/>
+          <a:lstStyle/>
+          <a:p>
+            <a:pPr rtl="1" algn="r" indent="0" marL="0">
+              <a:buNone/>
+            </a:pPr>
+            <a:r>
+              <a:rPr lang="en-US" sz="1500" b="1" dirty="0">
+                <a:solidFill>
+                  <a:srgbClr val="0C3B44"/>
+                </a:solidFill>
+                <a:latin typeface="Arial" pitchFamily="34" charset="0"/>
+                <a:ea typeface="Arial" pitchFamily="34" charset="-122"/>
+                <a:cs typeface="Arial" pitchFamily="34" charset="-120"/>
+              </a:rPr>
+              <a:t>‏מסגרות ספורט נפרדות לנשים‏</a:t>
+            </a:r>
+            <a:endParaRPr lang="en-US" sz="1500" dirty="0"/>
+          </a:p>
+        </p:txBody>
+      </p:sp>
+      <p:sp>
+        <p:nvSpPr>
+          <p:cNvPr id="20" name="Text 18"/>
+          <p:cNvSpPr txBox="1"/>
+          <p:nvPr/>
+        </p:nvSpPr>
+        <p:spPr>
+          <a:xfrm>
+            <a:off x="704088" y="3374136"/>
+            <a:ext cx="6897319" cy="585216"/>
+          </a:xfrm>
+          <a:prstGeom prst="rect">
+            <a:avLst/>
+          </a:prstGeom>
+          <a:noFill/>
+          <a:ln/>
+        </p:spPr>
+        <p:txBody>
+          <a:bodyPr wrap="square" lIns="0" tIns="0" rIns="0" bIns="0" rtlCol="0" anchor="ctr"/>
+          <a:lstStyle/>
+          <a:p>
+            <a:pPr rtl="1" algn="r" indent="0" marL="0">
+              <a:buNone/>
+            </a:pPr>
+            <a:r>
+              <a:rPr lang="en-US" sz="1300" dirty="0">
+                <a:solidFill>
+                  <a:srgbClr val="56686D"/>
+                </a:solidFill>
+                <a:latin typeface="Arial" pitchFamily="34" charset="0"/>
+                <a:ea typeface="Arial" pitchFamily="34" charset="-122"/>
+                <a:cs typeface="Arial" pitchFamily="34" charset="-120"/>
+              </a:rPr>
+              <a:t>‏בהפעלת מדריכות, בשעות אחר הצהריים, בתוך היישוב עצמו‏</a:t>
+            </a:r>
+            <a:endParaRPr lang="en-US" sz="1300" dirty="0"/>
+          </a:p>
+        </p:txBody>
+      </p:sp>
+      <p:sp>
+        <p:nvSpPr>
+          <p:cNvPr id="21" name="Shape 19"/>
+          <p:cNvSpPr/>
+          <p:nvPr/>
+        </p:nvSpPr>
+        <p:spPr>
+          <a:xfrm>
+            <a:off x="502920" y="4041648"/>
+            <a:ext cx="11185855" cy="585216"/>
+          </a:xfrm>
+          <a:prstGeom prst="roundRect">
+            <a:avLst>
+              <a:gd name="adj" fmla="val 12500"/>
+            </a:avLst>
+          </a:prstGeom>
+          <a:solidFill>
+            <a:srgbClr val="F2F8F9"/>
+          </a:solidFill>
+          <a:ln w="12700">
+            <a:solidFill>
+              <a:srgbClr val="D5E7E9"/>
+            </a:solidFill>
+            <a:prstDash val="solid"/>
+          </a:ln>
+        </p:spPr>
+      </p:sp>
+      <p:sp>
+        <p:nvSpPr>
+          <p:cNvPr id="22" name="Text 20"/>
+          <p:cNvSpPr txBox="1"/>
+          <p:nvPr/>
+        </p:nvSpPr>
+        <p:spPr>
+          <a:xfrm>
+            <a:off x="11085271" y="4123944"/>
+            <a:ext cx="420624" cy="420624"/>
+          </a:xfrm>
+          <a:prstGeom prst="ellipse">
+            <a:avLst/>
+          </a:prstGeom>
+          <a:solidFill>
+            <a:srgbClr val="0E6E7E"/>
+          </a:solidFill>
+          <a:ln/>
+        </p:spPr>
+        <p:txBody>
+          <a:bodyPr wrap="square" lIns="0" tIns="0" rIns="0" bIns="0" rtlCol="0" anchor="ctr"/>
+          <a:lstStyle/>
+          <a:p>
+            <a:pPr algn="ctr" indent="0" marL="0">
+              <a:buNone/>
+            </a:pPr>
+            <a:r>
+              <a:rPr lang="en-US" sz="1500" b="1" dirty="0">
+                <a:solidFill>
+                  <a:srgbClr val="FFFFFF"/>
+                </a:solidFill>
+                <a:latin typeface="Arial" pitchFamily="34" charset="0"/>
+                <a:ea typeface="Arial" pitchFamily="34" charset="-122"/>
+                <a:cs typeface="Arial" pitchFamily="34" charset="-120"/>
+              </a:rPr>
+              <a:t>5</a:t>
+            </a:r>
+            <a:endParaRPr lang="en-US" sz="1500" dirty="0"/>
+          </a:p>
+        </p:txBody>
+      </p:sp>
+      <p:sp>
+        <p:nvSpPr>
+          <p:cNvPr id="23" name="Text 21"/>
+          <p:cNvSpPr txBox="1"/>
+          <p:nvPr/>
+        </p:nvSpPr>
+        <p:spPr>
+          <a:xfrm>
+            <a:off x="7765999" y="4041648"/>
+            <a:ext cx="3154680" cy="585216"/>
+          </a:xfrm>
+          <a:prstGeom prst="rect">
+            <a:avLst/>
+          </a:prstGeom>
+          <a:noFill/>
+          <a:ln/>
+        </p:spPr>
+        <p:txBody>
+          <a:bodyPr wrap="square" lIns="0" tIns="0" rIns="0" bIns="0" rtlCol="0" anchor="ctr"/>
+          <a:lstStyle/>
+          <a:p>
+            <a:pPr rtl="1" algn="r" indent="0" marL="0">
+              <a:buNone/>
+            </a:pPr>
+            <a:r>
+              <a:rPr lang="en-US" sz="1500" b="1" dirty="0">
+                <a:solidFill>
+                  <a:srgbClr val="0C3B44"/>
+                </a:solidFill>
+                <a:latin typeface="Arial" pitchFamily="34" charset="0"/>
+                <a:ea typeface="Arial" pitchFamily="34" charset="-122"/>
+                <a:cs typeface="Arial" pitchFamily="34" charset="-120"/>
+              </a:rPr>
+              <a:t>‏פנייה יזומה בטלפון, בערבית‏</a:t>
+            </a:r>
+            <a:endParaRPr lang="en-US" sz="1500" dirty="0"/>
+          </a:p>
+        </p:txBody>
+      </p:sp>
+      <p:sp>
+        <p:nvSpPr>
+          <p:cNvPr id="24" name="Text 22"/>
+          <p:cNvSpPr txBox="1"/>
+          <p:nvPr/>
+        </p:nvSpPr>
+        <p:spPr>
+          <a:xfrm>
+            <a:off x="704088" y="4041648"/>
+            <a:ext cx="6897319" cy="585216"/>
+          </a:xfrm>
+          <a:prstGeom prst="rect">
+            <a:avLst/>
+          </a:prstGeom>
+          <a:noFill/>
+          <a:ln/>
+        </p:spPr>
+        <p:txBody>
+          <a:bodyPr wrap="square" lIns="0" tIns="0" rIns="0" bIns="0" rtlCol="0" anchor="ctr"/>
+          <a:lstStyle/>
+          <a:p>
+            <a:pPr rtl="1" algn="r" indent="0" marL="0">
+              <a:buNone/>
+            </a:pPr>
+            <a:r>
+              <a:rPr lang="en-US" sz="1300" dirty="0">
+                <a:solidFill>
+                  <a:srgbClr val="56686D"/>
+                </a:solidFill>
+                <a:latin typeface="Arial" pitchFamily="34" charset="0"/>
+                <a:ea typeface="Arial" pitchFamily="34" charset="-122"/>
+                <a:cs typeface="Arial" pitchFamily="34" charset="-120"/>
+              </a:rPr>
+              <a:t>‏אל בעלי גורמי סיכון שאינם מגיעים לבדיקות, במקום דיוור אוטומטי‏</a:t>
+            </a:r>
+            <a:endParaRPr lang="en-US" sz="1300" dirty="0"/>
+          </a:p>
+        </p:txBody>
+      </p:sp>
+      <p:sp>
+        <p:nvSpPr>
+          <p:cNvPr id="25" name="Shape 23"/>
+          <p:cNvSpPr/>
+          <p:nvPr/>
+        </p:nvSpPr>
+        <p:spPr>
+          <a:xfrm>
+            <a:off x="502920" y="4709160"/>
+            <a:ext cx="11185855" cy="585216"/>
+          </a:xfrm>
+          <a:prstGeom prst="roundRect">
+            <a:avLst>
+              <a:gd name="adj" fmla="val 12500"/>
+            </a:avLst>
+          </a:prstGeom>
+          <a:solidFill>
+            <a:srgbClr val="F2F8F9"/>
+          </a:solidFill>
+          <a:ln w="12700">
+            <a:solidFill>
+              <a:srgbClr val="D5E7E9"/>
+            </a:solidFill>
+            <a:prstDash val="solid"/>
+          </a:ln>
+        </p:spPr>
+      </p:sp>
+      <p:sp>
+        <p:nvSpPr>
+          <p:cNvPr id="26" name="Text 24"/>
+          <p:cNvSpPr txBox="1"/>
+          <p:nvPr/>
+        </p:nvSpPr>
+        <p:spPr>
+          <a:xfrm>
+            <a:off x="11085271" y="4791456"/>
+            <a:ext cx="420624" cy="420624"/>
+          </a:xfrm>
+          <a:prstGeom prst="ellipse">
+            <a:avLst/>
+          </a:prstGeom>
+          <a:solidFill>
+            <a:srgbClr val="1D9E9A"/>
+          </a:solidFill>
+          <a:ln/>
+        </p:spPr>
+        <p:txBody>
+          <a:bodyPr wrap="square" lIns="0" tIns="0" rIns="0" bIns="0" rtlCol="0" anchor="ctr"/>
+          <a:lstStyle/>
+          <a:p>
+            <a:pPr algn="ctr" indent="0" marL="0">
+              <a:buNone/>
+            </a:pPr>
+            <a:r>
+              <a:rPr lang="en-US" sz="1500" b="1" dirty="0">
+                <a:solidFill>
+                  <a:srgbClr val="FFFFFF"/>
+                </a:solidFill>
+                <a:latin typeface="Arial" pitchFamily="34" charset="0"/>
+                <a:ea typeface="Arial" pitchFamily="34" charset="-122"/>
+                <a:cs typeface="Arial" pitchFamily="34" charset="-120"/>
+              </a:rPr>
+              <a:t>6</a:t>
+            </a:r>
+            <a:endParaRPr lang="en-US" sz="1500" dirty="0"/>
+          </a:p>
+        </p:txBody>
+      </p:sp>
+      <p:sp>
+        <p:nvSpPr>
+          <p:cNvPr id="27" name="Text 25"/>
+          <p:cNvSpPr txBox="1"/>
+          <p:nvPr/>
+        </p:nvSpPr>
+        <p:spPr>
+          <a:xfrm>
+            <a:off x="7765999" y="4709160"/>
+            <a:ext cx="3154680" cy="585216"/>
+          </a:xfrm>
+          <a:prstGeom prst="rect">
+            <a:avLst/>
+          </a:prstGeom>
+          <a:noFill/>
+          <a:ln/>
+        </p:spPr>
+        <p:txBody>
+          <a:bodyPr wrap="square" lIns="0" tIns="0" rIns="0" bIns="0" rtlCol="0" anchor="ctr"/>
+          <a:lstStyle/>
+          <a:p>
+            <a:pPr rtl="1" algn="r" indent="0" marL="0">
+              <a:buNone/>
+            </a:pPr>
+            <a:r>
+              <a:rPr lang="en-US" sz="1500" b="1" dirty="0">
+                <a:solidFill>
+                  <a:srgbClr val="0C3B44"/>
+                </a:solidFill>
+                <a:latin typeface="Arial" pitchFamily="34" charset="0"/>
+                <a:ea typeface="Arial" pitchFamily="34" charset="-122"/>
+                <a:cs typeface="Arial" pitchFamily="34" charset="-120"/>
+              </a:rPr>
+              <a:t>‏מוסדות הקהילה כערוץ הסברה‏</a:t>
+            </a:r>
+            <a:endParaRPr lang="en-US" sz="1500" dirty="0"/>
+          </a:p>
+        </p:txBody>
+      </p:sp>
+      <p:sp>
+        <p:nvSpPr>
+          <p:cNvPr id="28" name="Text 26"/>
+          <p:cNvSpPr txBox="1"/>
+          <p:nvPr/>
+        </p:nvSpPr>
+        <p:spPr>
+          <a:xfrm>
+            <a:off x="704088" y="4709160"/>
+            <a:ext cx="6897319" cy="585216"/>
+          </a:xfrm>
+          <a:prstGeom prst="rect">
+            <a:avLst/>
+          </a:prstGeom>
+          <a:noFill/>
+          <a:ln/>
+        </p:spPr>
+        <p:txBody>
+          <a:bodyPr wrap="square" lIns="0" tIns="0" rIns="0" bIns="0" rtlCol="0" anchor="ctr"/>
+          <a:lstStyle/>
+          <a:p>
+            <a:pPr rtl="1" algn="r" indent="0" marL="0">
+              <a:buNone/>
+            </a:pPr>
+            <a:r>
+              <a:rPr lang="en-US" sz="1300" dirty="0">
+                <a:solidFill>
+                  <a:srgbClr val="56686D"/>
+                </a:solidFill>
+                <a:latin typeface="Arial" pitchFamily="34" charset="0"/>
+                <a:ea typeface="Arial" pitchFamily="34" charset="-122"/>
+                <a:cs typeface="Arial" pitchFamily="34" charset="-120"/>
+              </a:rPr>
+              <a:t>‏המסגד, בתי הספר וטיפות החלב מגיעים למי שאינו פוקד את המרפאה‏</a:t>
+            </a:r>
+            <a:endParaRPr lang="en-US" sz="1300" dirty="0"/>
+          </a:p>
+        </p:txBody>
+      </p:sp>
+      <p:sp>
+        <p:nvSpPr>
+          <p:cNvPr id="29" name="Shape 27"/>
+          <p:cNvSpPr/>
+          <p:nvPr/>
+        </p:nvSpPr>
+        <p:spPr>
+          <a:xfrm>
+            <a:off x="502920" y="5376672"/>
+            <a:ext cx="11185855" cy="585216"/>
+          </a:xfrm>
+          <a:prstGeom prst="roundRect">
+            <a:avLst>
+              <a:gd name="adj" fmla="val 12500"/>
+            </a:avLst>
+          </a:prstGeom>
+          <a:solidFill>
+            <a:srgbClr val="F2F8F9"/>
+          </a:solidFill>
+          <a:ln w="12700">
+            <a:solidFill>
+              <a:srgbClr val="D5E7E9"/>
+            </a:solidFill>
+            <a:prstDash val="solid"/>
+          </a:ln>
+        </p:spPr>
+      </p:sp>
+      <p:sp>
+        <p:nvSpPr>
+          <p:cNvPr id="30" name="Text 28"/>
+          <p:cNvSpPr txBox="1"/>
+          <p:nvPr/>
+        </p:nvSpPr>
+        <p:spPr>
+          <a:xfrm>
+            <a:off x="11085271" y="5458968"/>
+            <a:ext cx="420624" cy="420624"/>
+          </a:xfrm>
+          <a:prstGeom prst="ellipse">
+            <a:avLst/>
+          </a:prstGeom>
+          <a:solidFill>
+            <a:srgbClr val="0E6E7E"/>
+          </a:solidFill>
+          <a:ln/>
+        </p:spPr>
+        <p:txBody>
+          <a:bodyPr wrap="square" lIns="0" tIns="0" rIns="0" bIns="0" rtlCol="0" anchor="ctr"/>
+          <a:lstStyle/>
+          <a:p>
+            <a:pPr algn="ctr" indent="0" marL="0">
+              <a:buNone/>
+            </a:pPr>
+            <a:r>
+              <a:rPr lang="en-US" sz="1500" b="1" dirty="0">
+                <a:solidFill>
+                  <a:srgbClr val="FFFFFF"/>
+                </a:solidFill>
+                <a:latin typeface="Arial" pitchFamily="34" charset="0"/>
+                <a:ea typeface="Arial" pitchFamily="34" charset="-122"/>
+                <a:cs typeface="Arial" pitchFamily="34" charset="-120"/>
+              </a:rPr>
+              <a:t>7</a:t>
+            </a:r>
+            <a:endParaRPr lang="en-US" sz="1500" dirty="0"/>
+          </a:p>
+        </p:txBody>
+      </p:sp>
+      <p:sp>
+        <p:nvSpPr>
+          <p:cNvPr id="31" name="Text 29"/>
+          <p:cNvSpPr txBox="1"/>
+          <p:nvPr/>
+        </p:nvSpPr>
+        <p:spPr>
+          <a:xfrm>
+            <a:off x="7765999" y="5376672"/>
+            <a:ext cx="3154680" cy="585216"/>
+          </a:xfrm>
+          <a:prstGeom prst="rect">
+            <a:avLst/>
+          </a:prstGeom>
+          <a:noFill/>
+          <a:ln/>
+        </p:spPr>
+        <p:txBody>
+          <a:bodyPr wrap="square" lIns="0" tIns="0" rIns="0" bIns="0" rtlCol="0" anchor="ctr"/>
+          <a:lstStyle/>
+          <a:p>
+            <a:pPr rtl="1" algn="r" indent="0" marL="0">
+              <a:buNone/>
+            </a:pPr>
+            <a:r>
+              <a:rPr lang="en-US" sz="1500" b="1" dirty="0">
+                <a:solidFill>
+                  <a:srgbClr val="0C3B44"/>
+                </a:solidFill>
+                <a:latin typeface="Arial" pitchFamily="34" charset="0"/>
+                <a:ea typeface="Arial" pitchFamily="34" charset="-122"/>
+                <a:cs typeface="Arial" pitchFamily="34" charset="-120"/>
+              </a:rPr>
+              <a:t>‏אנשי קהילה כמעבירי מסר‏</a:t>
+            </a:r>
+            <a:endParaRPr lang="en-US" sz="1500" dirty="0"/>
+          </a:p>
+        </p:txBody>
+      </p:sp>
+      <p:sp>
+        <p:nvSpPr>
+          <p:cNvPr id="32" name="Text 30"/>
+          <p:cNvSpPr txBox="1"/>
+          <p:nvPr/>
+        </p:nvSpPr>
+        <p:spPr>
+          <a:xfrm>
+            <a:off x="704088" y="5376672"/>
+            <a:ext cx="6897319" cy="585216"/>
+          </a:xfrm>
+          <a:prstGeom prst="rect">
+            <a:avLst/>
+          </a:prstGeom>
+          <a:noFill/>
+          <a:ln/>
+        </p:spPr>
+        <p:txBody>
+          <a:bodyPr wrap="square" lIns="0" tIns="0" rIns="0" bIns="0" rtlCol="0" anchor="ctr"/>
+          <a:lstStyle/>
+          <a:p>
+            <a:pPr rtl="1" algn="r" indent="0" marL="0">
+              <a:buNone/>
+            </a:pPr>
+            <a:r>
+              <a:rPr lang="en-US" sz="1300" dirty="0">
+                <a:solidFill>
+                  <a:srgbClr val="56686D"/>
+                </a:solidFill>
+                <a:latin typeface="Arial" pitchFamily="34" charset="0"/>
+                <a:ea typeface="Arial" pitchFamily="34" charset="-122"/>
+                <a:cs typeface="Arial" pitchFamily="34" charset="-120"/>
+              </a:rPr>
+              <a:t>‏עדותו של מי שעבר שינוי משכנעת יותר מהרצאה של גורם חיצוני‏</a:t>
+            </a:r>
+            <a:endParaRPr lang="en-US" sz="1300" dirty="0"/>
           </a:p>
         </p:txBody>
       </p:sp>
@@ -4959,12 +5905,12 @@
         </p:nvSpPr>
         <p:spPr>
           <a:xfrm>
-            <a:off x="502920" y="1088136"/>
-            <a:ext cx="11185855" cy="5129784"/>
+            <a:off x="502920" y="1225296"/>
+            <a:ext cx="11185855" cy="585216"/>
           </a:xfrm>
           <a:prstGeom prst="roundRect">
             <a:avLst>
-              <a:gd name="adj" fmla="val 2139"/>
+              <a:gd name="adj" fmla="val 12500"/>
             </a:avLst>
           </a:prstGeom>
           <a:solidFill>
@@ -4986,8 +5932,49 @@
         </p:nvSpPr>
         <p:spPr>
           <a:xfrm>
-            <a:off x="923544" y="1325880"/>
-            <a:ext cx="10344607" cy="5001768"/>
+            <a:off x="11085271" y="1307592"/>
+            <a:ext cx="420624" cy="420624"/>
+          </a:xfrm>
+          <a:prstGeom prst="ellipse">
+            <a:avLst/>
+          </a:prstGeom>
+          <a:solidFill>
+            <a:srgbClr val="0E6E7E"/>
+          </a:solidFill>
+          <a:ln/>
+        </p:spPr>
+        <p:txBody>
+          <a:bodyPr wrap="square" lIns="0" tIns="0" rIns="0" bIns="0" rtlCol="0" anchor="ctr"/>
+          <a:lstStyle/>
+          <a:p>
+            <a:pPr algn="ctr" indent="0" marL="0">
+              <a:buNone/>
+            </a:pPr>
+            <a:r>
+              <a:rPr lang="en-US" sz="1500" b="1" dirty="0">
+                <a:solidFill>
+                  <a:srgbClr val="FFFFFF"/>
+                </a:solidFill>
+                <a:latin typeface="Arial" pitchFamily="34" charset="0"/>
+                <a:ea typeface="Arial" pitchFamily="34" charset="-122"/>
+                <a:cs typeface="Arial" pitchFamily="34" charset="-120"/>
+              </a:rPr>
+              <a:t>1</a:t>
+            </a:r>
+            <a:endParaRPr lang="en-US" sz="1500" dirty="0"/>
+          </a:p>
+        </p:txBody>
+      </p:sp>
+      <p:sp>
+        <p:nvSpPr>
+          <p:cNvPr id="6" name="Text 4"/>
+          <p:cNvSpPr txBox="1"/>
+          <p:nvPr/>
+        </p:nvSpPr>
+        <p:spPr>
+          <a:xfrm>
+            <a:off x="7765999" y="1225296"/>
+            <a:ext cx="3154680" cy="585216"/>
           </a:xfrm>
           <a:prstGeom prst="rect">
             <a:avLst/>
@@ -4996,17 +5983,706 @@
           <a:ln/>
         </p:spPr>
         <p:txBody>
+          <a:bodyPr wrap="square" lIns="0" tIns="0" rIns="0" bIns="0" rtlCol="0" anchor="ctr"/>
+          <a:lstStyle/>
+          <a:p>
+            <a:pPr rtl="1" algn="r" indent="0" marL="0">
+              <a:buNone/>
+            </a:pPr>
+            <a:r>
+              <a:rPr lang="en-US" sz="1500" b="1" dirty="0">
+                <a:solidFill>
+                  <a:srgbClr val="0C3B44"/>
+                </a:solidFill>
+                <a:latin typeface="Arial" pitchFamily="34" charset="0"/>
+                <a:ea typeface="Arial" pitchFamily="34" charset="-122"/>
+                <a:cs typeface="Arial" pitchFamily="34" charset="-120"/>
+              </a:rPr>
+              <a:t>‏מדגם מצומצם‏</a:t>
+            </a:r>
+            <a:endParaRPr lang="en-US" sz="1500" dirty="0"/>
+          </a:p>
+        </p:txBody>
+      </p:sp>
+      <p:sp>
+        <p:nvSpPr>
+          <p:cNvPr id="7" name="Text 5"/>
+          <p:cNvSpPr txBox="1"/>
+          <p:nvPr/>
+        </p:nvSpPr>
+        <p:spPr>
+          <a:xfrm>
+            <a:off x="704088" y="1225296"/>
+            <a:ext cx="6897319" cy="585216"/>
+          </a:xfrm>
+          <a:prstGeom prst="rect">
+            <a:avLst/>
+          </a:prstGeom>
+          <a:noFill/>
+          <a:ln/>
+        </p:spPr>
+        <p:txBody>
+          <a:bodyPr wrap="square" lIns="0" tIns="0" rIns="0" bIns="0" rtlCol="0" anchor="ctr"/>
+          <a:lstStyle/>
+          <a:p>
+            <a:pPr rtl="1" algn="r" indent="0" marL="0">
+              <a:buNone/>
+            </a:pPr>
+            <a:r>
+              <a:rPr lang="en-US" sz="1300" dirty="0">
+                <a:solidFill>
+                  <a:srgbClr val="56686D"/>
+                </a:solidFill>
+                <a:latin typeface="Arial" pitchFamily="34" charset="0"/>
+                <a:ea typeface="Arial" pitchFamily="34" charset="-122"/>
+                <a:cs typeface="Arial" pitchFamily="34" charset="-120"/>
+              </a:rPr>
+              <a:t>‏שנים עשר משתתפים, ולפיכך אין בממצאים כדי להכליל סטטיסטית לאוכלוסייה‏</a:t>
+            </a:r>
+            <a:endParaRPr lang="en-US" sz="1300" dirty="0"/>
+          </a:p>
+        </p:txBody>
+      </p:sp>
+      <p:sp>
+        <p:nvSpPr>
+          <p:cNvPr id="8" name="Shape 6"/>
+          <p:cNvSpPr/>
+          <p:nvPr/>
+        </p:nvSpPr>
+        <p:spPr>
+          <a:xfrm>
+            <a:off x="502920" y="1892808"/>
+            <a:ext cx="11185855" cy="585216"/>
+          </a:xfrm>
+          <a:prstGeom prst="roundRect">
+            <a:avLst>
+              <a:gd name="adj" fmla="val 12500"/>
+            </a:avLst>
+          </a:prstGeom>
+          <a:solidFill>
+            <a:srgbClr val="F2F8F9"/>
+          </a:solidFill>
+          <a:ln w="12700">
+            <a:solidFill>
+              <a:srgbClr val="D5E7E9"/>
+            </a:solidFill>
+            <a:prstDash val="solid"/>
+          </a:ln>
+        </p:spPr>
+      </p:sp>
+      <p:sp>
+        <p:nvSpPr>
+          <p:cNvPr id="9" name="Text 7"/>
+          <p:cNvSpPr txBox="1"/>
+          <p:nvPr/>
+        </p:nvSpPr>
+        <p:spPr>
+          <a:xfrm>
+            <a:off x="11085271" y="1975104"/>
+            <a:ext cx="420624" cy="420624"/>
+          </a:xfrm>
+          <a:prstGeom prst="ellipse">
+            <a:avLst/>
+          </a:prstGeom>
+          <a:solidFill>
+            <a:srgbClr val="1D9E9A"/>
+          </a:solidFill>
+          <a:ln/>
+        </p:spPr>
+        <p:txBody>
+          <a:bodyPr wrap="square" lIns="0" tIns="0" rIns="0" bIns="0" rtlCol="0" anchor="ctr"/>
+          <a:lstStyle/>
+          <a:p>
+            <a:pPr algn="ctr" indent="0" marL="0">
+              <a:buNone/>
+            </a:pPr>
+            <a:r>
+              <a:rPr lang="en-US" sz="1500" b="1" dirty="0">
+                <a:solidFill>
+                  <a:srgbClr val="FFFFFF"/>
+                </a:solidFill>
+                <a:latin typeface="Arial" pitchFamily="34" charset="0"/>
+                <a:ea typeface="Arial" pitchFamily="34" charset="-122"/>
+                <a:cs typeface="Arial" pitchFamily="34" charset="-120"/>
+              </a:rPr>
+              <a:t>2</a:t>
+            </a:r>
+            <a:endParaRPr lang="en-US" sz="1500" dirty="0"/>
+          </a:p>
+        </p:txBody>
+      </p:sp>
+      <p:sp>
+        <p:nvSpPr>
+          <p:cNvPr id="10" name="Text 8"/>
+          <p:cNvSpPr txBox="1"/>
+          <p:nvPr/>
+        </p:nvSpPr>
+        <p:spPr>
+          <a:xfrm>
+            <a:off x="7765999" y="1892808"/>
+            <a:ext cx="3154680" cy="585216"/>
+          </a:xfrm>
+          <a:prstGeom prst="rect">
+            <a:avLst/>
+          </a:prstGeom>
+          <a:noFill/>
+          <a:ln/>
+        </p:spPr>
+        <p:txBody>
+          <a:bodyPr wrap="square" lIns="0" tIns="0" rIns="0" bIns="0" rtlCol="0" anchor="ctr"/>
+          <a:lstStyle/>
+          <a:p>
+            <a:pPr rtl="1" algn="r" indent="0" marL="0">
+              <a:buNone/>
+            </a:pPr>
+            <a:r>
+              <a:rPr lang="en-US" sz="1500" b="1" dirty="0">
+                <a:solidFill>
+                  <a:srgbClr val="0C3B44"/>
+                </a:solidFill>
+                <a:latin typeface="Arial" pitchFamily="34" charset="0"/>
+                <a:ea typeface="Arial" pitchFamily="34" charset="-122"/>
+                <a:cs typeface="Arial" pitchFamily="34" charset="-120"/>
+              </a:rPr>
+              <a:t>‏דגימה מכוונת‏</a:t>
+            </a:r>
+            <a:endParaRPr lang="en-US" sz="1500" dirty="0"/>
+          </a:p>
+        </p:txBody>
+      </p:sp>
+      <p:sp>
+        <p:nvSpPr>
+          <p:cNvPr id="11" name="Text 9"/>
+          <p:cNvSpPr txBox="1"/>
+          <p:nvPr/>
+        </p:nvSpPr>
+        <p:spPr>
+          <a:xfrm>
+            <a:off x="704088" y="1892808"/>
+            <a:ext cx="6897319" cy="585216"/>
+          </a:xfrm>
+          <a:prstGeom prst="rect">
+            <a:avLst/>
+          </a:prstGeom>
+          <a:noFill/>
+          <a:ln/>
+        </p:spPr>
+        <p:txBody>
+          <a:bodyPr wrap="square" lIns="0" tIns="0" rIns="0" bIns="0" rtlCol="0" anchor="ctr"/>
+          <a:lstStyle/>
+          <a:p>
+            <a:pPr rtl="1" algn="r" indent="0" marL="0">
+              <a:buNone/>
+            </a:pPr>
+            <a:r>
+              <a:rPr lang="en-US" sz="1300" dirty="0">
+                <a:solidFill>
+                  <a:srgbClr val="56686D"/>
+                </a:solidFill>
+                <a:latin typeface="Arial" pitchFamily="34" charset="0"/>
+                <a:ea typeface="Arial" pitchFamily="34" charset="-122"/>
+                <a:cs typeface="Arial" pitchFamily="34" charset="-120"/>
+              </a:rPr>
+              <a:t>‏שיטת כדור השלג עלולה להטות לטובת הנכונים לשוחח על בריאותם‏</a:t>
+            </a:r>
+            <a:endParaRPr lang="en-US" sz="1300" dirty="0"/>
+          </a:p>
+        </p:txBody>
+      </p:sp>
+      <p:sp>
+        <p:nvSpPr>
+          <p:cNvPr id="12" name="Shape 10"/>
+          <p:cNvSpPr/>
+          <p:nvPr/>
+        </p:nvSpPr>
+        <p:spPr>
+          <a:xfrm>
+            <a:off x="502920" y="2560320"/>
+            <a:ext cx="11185855" cy="585216"/>
+          </a:xfrm>
+          <a:prstGeom prst="roundRect">
+            <a:avLst>
+              <a:gd name="adj" fmla="val 12500"/>
+            </a:avLst>
+          </a:prstGeom>
+          <a:solidFill>
+            <a:srgbClr val="F2F8F9"/>
+          </a:solidFill>
+          <a:ln w="12700">
+            <a:solidFill>
+              <a:srgbClr val="D5E7E9"/>
+            </a:solidFill>
+            <a:prstDash val="solid"/>
+          </a:ln>
+        </p:spPr>
+      </p:sp>
+      <p:sp>
+        <p:nvSpPr>
+          <p:cNvPr id="13" name="Text 11"/>
+          <p:cNvSpPr txBox="1"/>
+          <p:nvPr/>
+        </p:nvSpPr>
+        <p:spPr>
+          <a:xfrm>
+            <a:off x="11085271" y="2642616"/>
+            <a:ext cx="420624" cy="420624"/>
+          </a:xfrm>
+          <a:prstGeom prst="ellipse">
+            <a:avLst/>
+          </a:prstGeom>
+          <a:solidFill>
+            <a:srgbClr val="0E6E7E"/>
+          </a:solidFill>
+          <a:ln/>
+        </p:spPr>
+        <p:txBody>
+          <a:bodyPr wrap="square" lIns="0" tIns="0" rIns="0" bIns="0" rtlCol="0" anchor="ctr"/>
+          <a:lstStyle/>
+          <a:p>
+            <a:pPr algn="ctr" indent="0" marL="0">
+              <a:buNone/>
+            </a:pPr>
+            <a:r>
+              <a:rPr lang="en-US" sz="1500" b="1" dirty="0">
+                <a:solidFill>
+                  <a:srgbClr val="FFFFFF"/>
+                </a:solidFill>
+                <a:latin typeface="Arial" pitchFamily="34" charset="0"/>
+                <a:ea typeface="Arial" pitchFamily="34" charset="-122"/>
+                <a:cs typeface="Arial" pitchFamily="34" charset="-120"/>
+              </a:rPr>
+              <a:t>3</a:t>
+            </a:r>
+            <a:endParaRPr lang="en-US" sz="1500" dirty="0"/>
+          </a:p>
+        </p:txBody>
+      </p:sp>
+      <p:sp>
+        <p:nvSpPr>
+          <p:cNvPr id="14" name="Text 12"/>
+          <p:cNvSpPr txBox="1"/>
+          <p:nvPr/>
+        </p:nvSpPr>
+        <p:spPr>
+          <a:xfrm>
+            <a:off x="7765999" y="2560320"/>
+            <a:ext cx="3154680" cy="585216"/>
+          </a:xfrm>
+          <a:prstGeom prst="rect">
+            <a:avLst/>
+          </a:prstGeom>
+          <a:noFill/>
+          <a:ln/>
+        </p:spPr>
+        <p:txBody>
+          <a:bodyPr wrap="square" lIns="0" tIns="0" rIns="0" bIns="0" rtlCol="0" anchor="ctr"/>
+          <a:lstStyle/>
+          <a:p>
+            <a:pPr rtl="1" algn="r" indent="0" marL="0">
+              <a:buNone/>
+            </a:pPr>
+            <a:r>
+              <a:rPr lang="en-US" sz="1500" b="1" dirty="0">
+                <a:solidFill>
+                  <a:srgbClr val="0C3B44"/>
+                </a:solidFill>
+                <a:latin typeface="Arial" pitchFamily="34" charset="0"/>
+                <a:ea typeface="Arial" pitchFamily="34" charset="-122"/>
+                <a:cs typeface="Arial" pitchFamily="34" charset="-120"/>
+              </a:rPr>
+              <a:t>‏דיווח עצמי‏</a:t>
+            </a:r>
+            <a:endParaRPr lang="en-US" sz="1500" dirty="0"/>
+          </a:p>
+        </p:txBody>
+      </p:sp>
+      <p:sp>
+        <p:nvSpPr>
+          <p:cNvPr id="15" name="Text 13"/>
+          <p:cNvSpPr txBox="1"/>
+          <p:nvPr/>
+        </p:nvSpPr>
+        <p:spPr>
+          <a:xfrm>
+            <a:off x="704088" y="2560320"/>
+            <a:ext cx="6897319" cy="585216"/>
+          </a:xfrm>
+          <a:prstGeom prst="rect">
+            <a:avLst/>
+          </a:prstGeom>
+          <a:noFill/>
+          <a:ln/>
+        </p:spPr>
+        <p:txBody>
+          <a:bodyPr wrap="square" lIns="0" tIns="0" rIns="0" bIns="0" rtlCol="0" anchor="ctr"/>
+          <a:lstStyle/>
+          <a:p>
+            <a:pPr rtl="1" algn="r" indent="0" marL="0">
+              <a:buNone/>
+            </a:pPr>
+            <a:r>
+              <a:rPr lang="en-US" sz="1300" dirty="0">
+                <a:solidFill>
+                  <a:srgbClr val="56686D"/>
+                </a:solidFill>
+                <a:latin typeface="Arial" pitchFamily="34" charset="0"/>
+                <a:ea typeface="Arial" pitchFamily="34" charset="-122"/>
+                <a:cs typeface="Arial" pitchFamily="34" charset="-120"/>
+              </a:rPr>
+              <a:t>‏הנתונים חשופים להטיית רצייה חברתית, ובפרט בשל היכרות מוקדמת‏</a:t>
+            </a:r>
+            <a:endParaRPr lang="en-US" sz="1300" dirty="0"/>
+          </a:p>
+        </p:txBody>
+      </p:sp>
+      <p:sp>
+        <p:nvSpPr>
+          <p:cNvPr id="16" name="Shape 14"/>
+          <p:cNvSpPr/>
+          <p:nvPr/>
+        </p:nvSpPr>
+        <p:spPr>
+          <a:xfrm>
+            <a:off x="502920" y="3227832"/>
+            <a:ext cx="11185855" cy="585216"/>
+          </a:xfrm>
+          <a:prstGeom prst="roundRect">
+            <a:avLst>
+              <a:gd name="adj" fmla="val 12500"/>
+            </a:avLst>
+          </a:prstGeom>
+          <a:solidFill>
+            <a:srgbClr val="F2F8F9"/>
+          </a:solidFill>
+          <a:ln w="12700">
+            <a:solidFill>
+              <a:srgbClr val="D5E7E9"/>
+            </a:solidFill>
+            <a:prstDash val="solid"/>
+          </a:ln>
+        </p:spPr>
+      </p:sp>
+      <p:sp>
+        <p:nvSpPr>
+          <p:cNvPr id="17" name="Text 15"/>
+          <p:cNvSpPr txBox="1"/>
+          <p:nvPr/>
+        </p:nvSpPr>
+        <p:spPr>
+          <a:xfrm>
+            <a:off x="11085271" y="3310128"/>
+            <a:ext cx="420624" cy="420624"/>
+          </a:xfrm>
+          <a:prstGeom prst="ellipse">
+            <a:avLst/>
+          </a:prstGeom>
+          <a:solidFill>
+            <a:srgbClr val="1D9E9A"/>
+          </a:solidFill>
+          <a:ln/>
+        </p:spPr>
+        <p:txBody>
+          <a:bodyPr wrap="square" lIns="0" tIns="0" rIns="0" bIns="0" rtlCol="0" anchor="ctr"/>
+          <a:lstStyle/>
+          <a:p>
+            <a:pPr algn="ctr" indent="0" marL="0">
+              <a:buNone/>
+            </a:pPr>
+            <a:r>
+              <a:rPr lang="en-US" sz="1500" b="1" dirty="0">
+                <a:solidFill>
+                  <a:srgbClr val="FFFFFF"/>
+                </a:solidFill>
+                <a:latin typeface="Arial" pitchFamily="34" charset="0"/>
+                <a:ea typeface="Arial" pitchFamily="34" charset="-122"/>
+                <a:cs typeface="Arial" pitchFamily="34" charset="-120"/>
+              </a:rPr>
+              <a:t>4</a:t>
+            </a:r>
+            <a:endParaRPr lang="en-US" sz="1500" dirty="0"/>
+          </a:p>
+        </p:txBody>
+      </p:sp>
+      <p:sp>
+        <p:nvSpPr>
+          <p:cNvPr id="18" name="Text 16"/>
+          <p:cNvSpPr txBox="1"/>
+          <p:nvPr/>
+        </p:nvSpPr>
+        <p:spPr>
+          <a:xfrm>
+            <a:off x="7765999" y="3227832"/>
+            <a:ext cx="3154680" cy="585216"/>
+          </a:xfrm>
+          <a:prstGeom prst="rect">
+            <a:avLst/>
+          </a:prstGeom>
+          <a:noFill/>
+          <a:ln/>
+        </p:spPr>
+        <p:txBody>
+          <a:bodyPr wrap="square" lIns="0" tIns="0" rIns="0" bIns="0" rtlCol="0" anchor="ctr"/>
+          <a:lstStyle/>
+          <a:p>
+            <a:pPr rtl="1" algn="r" indent="0" marL="0">
+              <a:buNone/>
+            </a:pPr>
+            <a:r>
+              <a:rPr lang="en-US" sz="1500" b="1" dirty="0">
+                <a:solidFill>
+                  <a:srgbClr val="0C3B44"/>
+                </a:solidFill>
+                <a:latin typeface="Arial" pitchFamily="34" charset="0"/>
+                <a:ea typeface="Arial" pitchFamily="34" charset="-122"/>
+                <a:cs typeface="Arial" pitchFamily="34" charset="-120"/>
+              </a:rPr>
+              <a:t>‏תרגום מערבית‏</a:t>
+            </a:r>
+            <a:endParaRPr lang="en-US" sz="1500" dirty="0"/>
+          </a:p>
+        </p:txBody>
+      </p:sp>
+      <p:sp>
+        <p:nvSpPr>
+          <p:cNvPr id="19" name="Text 17"/>
+          <p:cNvSpPr txBox="1"/>
+          <p:nvPr/>
+        </p:nvSpPr>
+        <p:spPr>
+          <a:xfrm>
+            <a:off x="704088" y="3227832"/>
+            <a:ext cx="6897319" cy="585216"/>
+          </a:xfrm>
+          <a:prstGeom prst="rect">
+            <a:avLst/>
+          </a:prstGeom>
+          <a:noFill/>
+          <a:ln/>
+        </p:spPr>
+        <p:txBody>
+          <a:bodyPr wrap="square" lIns="0" tIns="0" rIns="0" bIns="0" rtlCol="0" anchor="ctr"/>
+          <a:lstStyle/>
+          <a:p>
+            <a:pPr rtl="1" algn="r" indent="0" marL="0">
+              <a:buNone/>
+            </a:pPr>
+            <a:r>
+              <a:rPr lang="en-US" sz="1300" dirty="0">
+                <a:solidFill>
+                  <a:srgbClr val="56686D"/>
+                </a:solidFill>
+                <a:latin typeface="Arial" pitchFamily="34" charset="0"/>
+                <a:ea typeface="Arial" pitchFamily="34" charset="-122"/>
+                <a:cs typeface="Arial" pitchFamily="34" charset="-120"/>
+              </a:rPr>
+              <a:t>‏ארבעה ראיונות תורגמו לעברית, וכל תרגום כרוך באובדן ניואנסים‏</a:t>
+            </a:r>
+            <a:endParaRPr lang="en-US" sz="1300" dirty="0"/>
+          </a:p>
+        </p:txBody>
+      </p:sp>
+      <p:sp>
+        <p:nvSpPr>
+          <p:cNvPr id="20" name="Shape 18"/>
+          <p:cNvSpPr/>
+          <p:nvPr/>
+        </p:nvSpPr>
+        <p:spPr>
+          <a:xfrm>
+            <a:off x="502920" y="3895344"/>
+            <a:ext cx="11185855" cy="585216"/>
+          </a:xfrm>
+          <a:prstGeom prst="roundRect">
+            <a:avLst>
+              <a:gd name="adj" fmla="val 12500"/>
+            </a:avLst>
+          </a:prstGeom>
+          <a:solidFill>
+            <a:srgbClr val="F2F8F9"/>
+          </a:solidFill>
+          <a:ln w="12700">
+            <a:solidFill>
+              <a:srgbClr val="D5E7E9"/>
+            </a:solidFill>
+            <a:prstDash val="solid"/>
+          </a:ln>
+        </p:spPr>
+      </p:sp>
+      <p:sp>
+        <p:nvSpPr>
+          <p:cNvPr id="21" name="Text 19"/>
+          <p:cNvSpPr txBox="1"/>
+          <p:nvPr/>
+        </p:nvSpPr>
+        <p:spPr>
+          <a:xfrm>
+            <a:off x="11085271" y="3977640"/>
+            <a:ext cx="420624" cy="420624"/>
+          </a:xfrm>
+          <a:prstGeom prst="ellipse">
+            <a:avLst/>
+          </a:prstGeom>
+          <a:solidFill>
+            <a:srgbClr val="0E6E7E"/>
+          </a:solidFill>
+          <a:ln/>
+        </p:spPr>
+        <p:txBody>
+          <a:bodyPr wrap="square" lIns="0" tIns="0" rIns="0" bIns="0" rtlCol="0" anchor="ctr"/>
+          <a:lstStyle/>
+          <a:p>
+            <a:pPr algn="ctr" indent="0" marL="0">
+              <a:buNone/>
+            </a:pPr>
+            <a:r>
+              <a:rPr lang="en-US" sz="1500" b="1" dirty="0">
+                <a:solidFill>
+                  <a:srgbClr val="FFFFFF"/>
+                </a:solidFill>
+                <a:latin typeface="Arial" pitchFamily="34" charset="0"/>
+                <a:ea typeface="Arial" pitchFamily="34" charset="-122"/>
+                <a:cs typeface="Arial" pitchFamily="34" charset="-120"/>
+              </a:rPr>
+              <a:t>5</a:t>
+            </a:r>
+            <a:endParaRPr lang="en-US" sz="1500" dirty="0"/>
+          </a:p>
+        </p:txBody>
+      </p:sp>
+      <p:sp>
+        <p:nvSpPr>
+          <p:cNvPr id="22" name="Text 20"/>
+          <p:cNvSpPr txBox="1"/>
+          <p:nvPr/>
+        </p:nvSpPr>
+        <p:spPr>
+          <a:xfrm>
+            <a:off x="7765999" y="3895344"/>
+            <a:ext cx="3154680" cy="585216"/>
+          </a:xfrm>
+          <a:prstGeom prst="rect">
+            <a:avLst/>
+          </a:prstGeom>
+          <a:noFill/>
+          <a:ln/>
+        </p:spPr>
+        <p:txBody>
+          <a:bodyPr wrap="square" lIns="0" tIns="0" rIns="0" bIns="0" rtlCol="0" anchor="ctr"/>
+          <a:lstStyle/>
+          <a:p>
+            <a:pPr rtl="1" algn="r" indent="0" marL="0">
+              <a:buNone/>
+            </a:pPr>
+            <a:r>
+              <a:rPr lang="en-US" sz="1500" b="1" dirty="0">
+                <a:solidFill>
+                  <a:srgbClr val="0C3B44"/>
+                </a:solidFill>
+                <a:latin typeface="Arial" pitchFamily="34" charset="0"/>
+                <a:ea typeface="Arial" pitchFamily="34" charset="-122"/>
+                <a:cs typeface="Arial" pitchFamily="34" charset="-120"/>
+              </a:rPr>
+              <a:t>‏הקשר מקומי‏</a:t>
+            </a:r>
+            <a:endParaRPr lang="en-US" sz="1500" dirty="0"/>
+          </a:p>
+        </p:txBody>
+      </p:sp>
+      <p:sp>
+        <p:nvSpPr>
+          <p:cNvPr id="23" name="Text 21"/>
+          <p:cNvSpPr txBox="1"/>
+          <p:nvPr/>
+        </p:nvSpPr>
+        <p:spPr>
+          <a:xfrm>
+            <a:off x="704088" y="3895344"/>
+            <a:ext cx="6897319" cy="585216"/>
+          </a:xfrm>
+          <a:prstGeom prst="rect">
+            <a:avLst/>
+          </a:prstGeom>
+          <a:noFill/>
+          <a:ln/>
+        </p:spPr>
+        <p:txBody>
+          <a:bodyPr wrap="square" lIns="0" tIns="0" rIns="0" bIns="0" rtlCol="0" anchor="ctr"/>
+          <a:lstStyle/>
+          <a:p>
+            <a:pPr rtl="1" algn="r" indent="0" marL="0">
+              <a:buNone/>
+            </a:pPr>
+            <a:r>
+              <a:rPr lang="en-US" sz="1300" dirty="0">
+                <a:solidFill>
+                  <a:srgbClr val="56686D"/>
+                </a:solidFill>
+                <a:latin typeface="Arial" pitchFamily="34" charset="0"/>
+                <a:ea typeface="Arial" pitchFamily="34" charset="-122"/>
+                <a:cs typeface="Arial" pitchFamily="34" charset="-120"/>
+              </a:rPr>
+              <a:t>‏שלושה יישובים בדרום בלבד, שהוא יתרון של עומק ומגבלה של השלכה‏</a:t>
+            </a:r>
+            <a:endParaRPr lang="en-US" sz="1300" dirty="0"/>
+          </a:p>
+        </p:txBody>
+      </p:sp>
+      <p:sp>
+        <p:nvSpPr>
+          <p:cNvPr id="24" name="Shape 22"/>
+          <p:cNvSpPr/>
+          <p:nvPr/>
+        </p:nvSpPr>
+        <p:spPr>
+          <a:xfrm>
+            <a:off x="502920" y="4690872"/>
+            <a:ext cx="11185855" cy="1527048"/>
+          </a:xfrm>
+          <a:prstGeom prst="roundRect">
+            <a:avLst>
+              <a:gd name="adj" fmla="val 5988"/>
+            </a:avLst>
+          </a:prstGeom>
+          <a:solidFill>
+            <a:srgbClr val="BFE3DD"/>
+          </a:solidFill>
+          <a:ln w="12700">
+            <a:solidFill>
+              <a:srgbClr val="BFE3DD"/>
+            </a:solidFill>
+            <a:prstDash val="solid"/>
+          </a:ln>
+        </p:spPr>
+      </p:sp>
+      <p:sp>
+        <p:nvSpPr>
+          <p:cNvPr id="25" name="Text 23"/>
+          <p:cNvSpPr txBox="1"/>
+          <p:nvPr/>
+        </p:nvSpPr>
+        <p:spPr>
+          <a:xfrm>
+            <a:off x="850392" y="4837176"/>
+            <a:ext cx="10490911" cy="1234440"/>
+          </a:xfrm>
+          <a:prstGeom prst="rect">
+            <a:avLst/>
+          </a:prstGeom>
+          <a:noFill/>
+          <a:ln/>
+        </p:spPr>
+        <p:txBody>
           <a:bodyPr wrap="square" lIns="0" tIns="0" rIns="0" bIns="0" rtlCol="0" anchor="t"/>
           <a:lstStyle/>
           <a:p>
-            <a:pPr algn="r" indent="0" marL="0">
+            <a:pPr rtl="1" algn="r" indent="0" marL="0">
               <a:lnSpc>
-                <a:spcPts val="2600"/>
+                <a:spcPts val="2300"/>
               </a:lnSpc>
               <a:buNone/>
             </a:pPr>
             <a:r>
-              <a:rPr lang="en-US" sz="1700" dirty="0">
+              <a:rPr lang="en-US" sz="1500" dirty="0">
                 <a:solidFill>
                   <a:srgbClr val="0C3B44"/>
                 </a:solidFill>
@@ -5014,55 +6690,9 @@
                 <a:ea typeface="Arial" pitchFamily="34" charset="-122"/>
                 <a:cs typeface="Arial" pitchFamily="34" charset="-120"/>
               </a:rPr>
-              <a:t>‏למחקר זה מספר מגבלות שיש להביאן בחשבון בפרשנות הממצאים. ראשית, מדובר במחקר איכותני בהיקף מצומצם של שנים עשר משתתפים, ולפיכך אין בו כדי לקבוע שיעורים או להכליל סטטיסטית לאוכלוסייה. מטרתו היא הבנת משמעות ולא מדידת שכיחות, ויש לקרוא את ממצאיו באופן זה.‏</a:t>
-            </a:r>
-            <a:endParaRPr lang="en-US" sz="1700" dirty="0"/>
-          </a:p>
-          <a:p>
-            <a:pPr algn="r" indent="0" marL="0">
-              <a:lnSpc>
-                <a:spcPts val="2600"/>
-              </a:lnSpc>
-              <a:spcBef>
-                <a:spcPts val="700"/>
-              </a:spcBef>
-              <a:buNone/>
-            </a:pPr>
-            <a:r>
-              <a:rPr lang="en-US" sz="1700" dirty="0">
-                <a:solidFill>
-                  <a:srgbClr val="0C3B44"/>
-                </a:solidFill>
-                <a:latin typeface="Arial" pitchFamily="34" charset="0"/>
-                <a:ea typeface="Arial" pitchFamily="34" charset="-122"/>
-                <a:cs typeface="Arial" pitchFamily="34" charset="-120"/>
-              </a:rPr>
-              <a:t>‏שנית, הדגימה הייתה מכוונת ונעשתה בשיטת כדור השלג דרך מעגלי היכרות של החוקרים, שיטה העלולה ליצור הטיה לטובת אנשים הנכונים לשוחח על בריאותם. שלישית, הנתונים מבוססים על דיווח עצמי ולפיכך חשופים להטיית רצייה חברתית, מגבלה המתחדדת בשל ההיכרות המוקדמת בין החוקרים לבין חלק מן המרואיינים, אף שהיכרות זו תרמה גם לפתיחות ולאמון.‏</a:t>
-            </a:r>
-            <a:endParaRPr lang="en-US" sz="1700" dirty="0"/>
-          </a:p>
-          <a:p>
-            <a:pPr algn="r" indent="0" marL="0">
-              <a:lnSpc>
-                <a:spcPts val="2600"/>
-              </a:lnSpc>
-              <a:spcBef>
-                <a:spcPts val="700"/>
-              </a:spcBef>
-              <a:buNone/>
-            </a:pPr>
-            <a:r>
-              <a:rPr lang="en-US" sz="1700" dirty="0">
-                <a:solidFill>
-                  <a:srgbClr val="0C3B44"/>
-                </a:solidFill>
-                <a:latin typeface="Arial" pitchFamily="34" charset="0"/>
-                <a:ea typeface="Arial" pitchFamily="34" charset="-122"/>
-                <a:cs typeface="Arial" pitchFamily="34" charset="-120"/>
-              </a:rPr>
-              <a:t>‏רביעית, ארבעה ראיונות נערכו בערבית ותורגמו לעברית, וכל תרגום כרוך באובדן ניואנסים ובפרט בביטויים תרבותיים. חמישית, המחקר נערך בשלושה יישובים במחוז הדרום, ולפיכך ממצאיו משקפים הקשר מקומי ספציפי. ייחודו של הקשר זה הוא בעת ובעונה אחת יתרון של המחקר, המאפשר העמקה בהקשר שנחקר מעט, ומגבלה המצמצמת את יכולת ההשלכה על אוכלוסיות אחרות בישראל.‏</a:t>
-            </a:r>
-            <a:endParaRPr lang="en-US" sz="1700" dirty="0"/>
+              <a:t>‏הכרה במגבלות אלו אינה גורעת מתוקף התמונה הכוללת, אך היא מחדדת את הצורך בזהירות בהכללת המסקנות ואת חשיבותם של מחקרי המשך, ובפרט מחקר משולב שיאמוד את שכיחותם של החסמים שזוהו במדגם מייצג של אוכלוסיית הנגב.‏</a:t>
+            </a:r>
+            <a:endParaRPr lang="en-US" sz="1500" dirty="0"/>
           </a:p>
         </p:txBody>
       </p:sp>

--- a/מצגת פרויקט גמר - פעילות גופנית ותזונה ומחלות כרוניות.pptx
+++ b/מצגת פרויקט גמר - פעילות גופנית ותזונה ומחלות כרוניות.pptx
@@ -2740,7 +2740,7 @@
                 <a:ea typeface="Arial" pitchFamily="34" charset="-122"/>
                 <a:cs typeface="Arial" pitchFamily="34" charset="-120"/>
               </a:rPr>
-              <a:t>המרכז האקדמי פרס  |  החוג למנהל מערכות בריאות</a:t>
+              <a:t>המרכז האקדמי פרס, החוג למנהל מערכות בריאות</a:t>
             </a:r>
             <a:endParaRPr lang="en-US" sz="1500" dirty="0"/>
           </a:p>
@@ -2841,7 +2841,7 @@
                 <a:ea typeface="Arial" pitchFamily="34" charset="-122"/>
                 <a:cs typeface="Arial" pitchFamily="34" charset="-120"/>
               </a:rPr>
-              <a:t>פרויקט גמר  |  מחקר איכותני בקרב מבוגרים ביישובי הנגב</a:t>
+              <a:t>פרויקט גמר, מחקר איכותני בקרב מבוגרים ביישובי הנגב</a:t>
             </a:r>
             <a:endParaRPr lang="en-US" sz="1800" dirty="0"/>
           </a:p>
@@ -7873,7 +7873,7 @@
                 <a:ea typeface="Arial" pitchFamily="34" charset="-122"/>
                 <a:cs typeface="Arial" pitchFamily="34" charset="-120"/>
               </a:rPr>
-              <a:t>המרכז האקדמי פרס  |  החוג למנהל מערכות בריאות</a:t>
+              <a:t>המרכז האקדמי פרס, החוג למנהל מערכות בריאות</a:t>
             </a:r>
             <a:endParaRPr lang="en-US" sz="1700" dirty="0"/>
           </a:p>
@@ -7912,7 +7912,7 @@
                 <a:ea typeface="Arial" pitchFamily="34" charset="-122"/>
                 <a:cs typeface="Arial" pitchFamily="34" charset="-120"/>
               </a:rPr>
-              <a:t>מוחמד אבו גודה  |  ראמי אבו גאמע  |  מוחמד אלדואיקה</a:t>
+              <a:t>מוחמד אבו גודה, ראמי אבו גאמע, מוחמד אלדואיקה</a:t>
             </a:r>
             <a:endParaRPr lang="en-US" sz="1500" dirty="0"/>
           </a:p>
@@ -7951,7 +7951,7 @@
                 <a:ea typeface="Arial" pitchFamily="34" charset="-122"/>
                 <a:cs typeface="Arial" pitchFamily="34" charset="-120"/>
               </a:rPr>
-              <a:t>‏בהנחיית ד"ר אסנת בשקין  |  שנה"ל תשפ"ו, 2026‏</a:t>
+              <a:t>‏בהנחיית ד"ר אסנת בשקין, שנה"ל תשפ"ו 2026‏</a:t>
             </a:r>
             <a:endParaRPr lang="en-US" sz="1400" dirty="0"/>
           </a:p>

--- a/מצגת פרויקט גמר - פעילות גופנית ותזונה ומחלות כרוניות.pptx
+++ b/מצגת פרויקט גמר - פעילות גופנית ותזונה ומחלות כרוניות.pptx
@@ -5905,12 +5905,12 @@
         </p:nvSpPr>
         <p:spPr>
           <a:xfrm>
-            <a:off x="502920" y="1225296"/>
-            <a:ext cx="11185855" cy="585216"/>
+            <a:off x="502920" y="1088136"/>
+            <a:ext cx="11185855" cy="5129784"/>
           </a:xfrm>
           <a:prstGeom prst="roundRect">
             <a:avLst>
-              <a:gd name="adj" fmla="val 12500"/>
+              <a:gd name="adj" fmla="val 2139"/>
             </a:avLst>
           </a:prstGeom>
           <a:solidFill>
@@ -5932,49 +5932,8 @@
         </p:nvSpPr>
         <p:spPr>
           <a:xfrm>
-            <a:off x="11085271" y="1307592"/>
-            <a:ext cx="420624" cy="420624"/>
-          </a:xfrm>
-          <a:prstGeom prst="ellipse">
-            <a:avLst/>
-          </a:prstGeom>
-          <a:solidFill>
-            <a:srgbClr val="0E6E7E"/>
-          </a:solidFill>
-          <a:ln/>
-        </p:spPr>
-        <p:txBody>
-          <a:bodyPr wrap="square" lIns="0" tIns="0" rIns="0" bIns="0" rtlCol="0" anchor="ctr"/>
-          <a:lstStyle/>
-          <a:p>
-            <a:pPr algn="ctr" indent="0" marL="0">
-              <a:buNone/>
-            </a:pPr>
-            <a:r>
-              <a:rPr lang="en-US" sz="1500" b="1" dirty="0">
-                <a:solidFill>
-                  <a:srgbClr val="FFFFFF"/>
-                </a:solidFill>
-                <a:latin typeface="Arial" pitchFamily="34" charset="0"/>
-                <a:ea typeface="Arial" pitchFamily="34" charset="-122"/>
-                <a:cs typeface="Arial" pitchFamily="34" charset="-120"/>
-              </a:rPr>
-              <a:t>1</a:t>
-            </a:r>
-            <a:endParaRPr lang="en-US" sz="1500" dirty="0"/>
-          </a:p>
-        </p:txBody>
-      </p:sp>
-      <p:sp>
-        <p:nvSpPr>
-          <p:cNvPr id="6" name="Text 4"/>
-          <p:cNvSpPr txBox="1"/>
-          <p:nvPr/>
-        </p:nvSpPr>
-        <p:spPr>
-          <a:xfrm>
-            <a:off x="7765999" y="1225296"/>
-            <a:ext cx="3154680" cy="585216"/>
+            <a:off x="923544" y="1325880"/>
+            <a:ext cx="10344607" cy="5001768"/>
           </a:xfrm>
           <a:prstGeom prst="rect">
             <a:avLst/>
@@ -5983,14 +5942,17 @@
           <a:ln/>
         </p:spPr>
         <p:txBody>
-          <a:bodyPr wrap="square" lIns="0" tIns="0" rIns="0" bIns="0" rtlCol="0" anchor="ctr"/>
-          <a:lstStyle/>
-          <a:p>
-            <a:pPr rtl="1" algn="r" indent="0" marL="0">
-              <a:buNone/>
-            </a:pPr>
-            <a:r>
-              <a:rPr lang="en-US" sz="1500" b="1" dirty="0">
+          <a:bodyPr wrap="square" lIns="0" tIns="0" rIns="0" bIns="0" rtlCol="0" anchor="t"/>
+          <a:lstStyle/>
+          <a:p>
+            <a:pPr algn="r" indent="0" marL="0">
+              <a:lnSpc>
+                <a:spcPts val="2600"/>
+              </a:lnSpc>
+              <a:buNone/>
+            </a:pPr>
+            <a:r>
+              <a:rPr lang="en-US" sz="1700" dirty="0">
                 <a:solidFill>
                   <a:srgbClr val="0C3B44"/>
                 </a:solidFill>
@@ -5998,145 +5960,22 @@
                 <a:ea typeface="Arial" pitchFamily="34" charset="-122"/>
                 <a:cs typeface="Arial" pitchFamily="34" charset="-120"/>
               </a:rPr>
-              <a:t>‏מדגם מצומצם‏</a:t>
-            </a:r>
-            <a:endParaRPr lang="en-US" sz="1500" dirty="0"/>
-          </a:p>
-        </p:txBody>
-      </p:sp>
-      <p:sp>
-        <p:nvSpPr>
-          <p:cNvPr id="7" name="Text 5"/>
-          <p:cNvSpPr txBox="1"/>
-          <p:nvPr/>
-        </p:nvSpPr>
-        <p:spPr>
-          <a:xfrm>
-            <a:off x="704088" y="1225296"/>
-            <a:ext cx="6897319" cy="585216"/>
-          </a:xfrm>
-          <a:prstGeom prst="rect">
-            <a:avLst/>
-          </a:prstGeom>
-          <a:noFill/>
-          <a:ln/>
-        </p:spPr>
-        <p:txBody>
-          <a:bodyPr wrap="square" lIns="0" tIns="0" rIns="0" bIns="0" rtlCol="0" anchor="ctr"/>
-          <a:lstStyle/>
-          <a:p>
-            <a:pPr rtl="1" algn="r" indent="0" marL="0">
-              <a:buNone/>
-            </a:pPr>
-            <a:r>
-              <a:rPr lang="en-US" sz="1300" dirty="0">
-                <a:solidFill>
-                  <a:srgbClr val="56686D"/>
-                </a:solidFill>
-                <a:latin typeface="Arial" pitchFamily="34" charset="0"/>
-                <a:ea typeface="Arial" pitchFamily="34" charset="-122"/>
-                <a:cs typeface="Arial" pitchFamily="34" charset="-120"/>
-              </a:rPr>
-              <a:t>‏שנים עשר משתתפים, ולפיכך אין בממצאים כדי להכליל סטטיסטית לאוכלוסייה‏</a:t>
-            </a:r>
-            <a:endParaRPr lang="en-US" sz="1300" dirty="0"/>
-          </a:p>
-        </p:txBody>
-      </p:sp>
-      <p:sp>
-        <p:nvSpPr>
-          <p:cNvPr id="8" name="Shape 6"/>
-          <p:cNvSpPr/>
-          <p:nvPr/>
-        </p:nvSpPr>
-        <p:spPr>
-          <a:xfrm>
-            <a:off x="502920" y="1892808"/>
-            <a:ext cx="11185855" cy="585216"/>
-          </a:xfrm>
-          <a:prstGeom prst="roundRect">
-            <a:avLst>
-              <a:gd name="adj" fmla="val 12500"/>
-            </a:avLst>
-          </a:prstGeom>
-          <a:solidFill>
-            <a:srgbClr val="F2F8F9"/>
-          </a:solidFill>
-          <a:ln w="12700">
-            <a:solidFill>
-              <a:srgbClr val="D5E7E9"/>
-            </a:solidFill>
-            <a:prstDash val="solid"/>
-          </a:ln>
-        </p:spPr>
-      </p:sp>
-      <p:sp>
-        <p:nvSpPr>
-          <p:cNvPr id="9" name="Text 7"/>
-          <p:cNvSpPr txBox="1"/>
-          <p:nvPr/>
-        </p:nvSpPr>
-        <p:spPr>
-          <a:xfrm>
-            <a:off x="11085271" y="1975104"/>
-            <a:ext cx="420624" cy="420624"/>
-          </a:xfrm>
-          <a:prstGeom prst="ellipse">
-            <a:avLst/>
-          </a:prstGeom>
-          <a:solidFill>
-            <a:srgbClr val="1D9E9A"/>
-          </a:solidFill>
-          <a:ln/>
-        </p:spPr>
-        <p:txBody>
-          <a:bodyPr wrap="square" lIns="0" tIns="0" rIns="0" bIns="0" rtlCol="0" anchor="ctr"/>
-          <a:lstStyle/>
-          <a:p>
-            <a:pPr algn="ctr" indent="0" marL="0">
-              <a:buNone/>
-            </a:pPr>
-            <a:r>
-              <a:rPr lang="en-US" sz="1500" b="1" dirty="0">
-                <a:solidFill>
-                  <a:srgbClr val="FFFFFF"/>
-                </a:solidFill>
-                <a:latin typeface="Arial" pitchFamily="34" charset="0"/>
-                <a:ea typeface="Arial" pitchFamily="34" charset="-122"/>
-                <a:cs typeface="Arial" pitchFamily="34" charset="-120"/>
-              </a:rPr>
-              <a:t>2</a:t>
-            </a:r>
-            <a:endParaRPr lang="en-US" sz="1500" dirty="0"/>
-          </a:p>
-        </p:txBody>
-      </p:sp>
-      <p:sp>
-        <p:nvSpPr>
-          <p:cNvPr id="10" name="Text 8"/>
-          <p:cNvSpPr txBox="1"/>
-          <p:nvPr/>
-        </p:nvSpPr>
-        <p:spPr>
-          <a:xfrm>
-            <a:off x="7765999" y="1892808"/>
-            <a:ext cx="3154680" cy="585216"/>
-          </a:xfrm>
-          <a:prstGeom prst="rect">
-            <a:avLst/>
-          </a:prstGeom>
-          <a:noFill/>
-          <a:ln/>
-        </p:spPr>
-        <p:txBody>
-          <a:bodyPr wrap="square" lIns="0" tIns="0" rIns="0" bIns="0" rtlCol="0" anchor="ctr"/>
-          <a:lstStyle/>
-          <a:p>
-            <a:pPr rtl="1" algn="r" indent="0" marL="0">
-              <a:buNone/>
-            </a:pPr>
-            <a:r>
-              <a:rPr lang="en-US" sz="1500" b="1" dirty="0">
+              <a:t>‏למחקר זה מספר מגבלות שיש להביאן בחשבון בפרשנות הממצאים. ראשית, מדובר במחקר איכותני בהיקף מצומצם של שנים עשר משתתפים, ולפיכך אין בו כדי לקבוע שיעורים או להכליל סטטיסטית. מטרתו היא הבנת משמעות ולא מדידת שכיחות.‏</a:t>
+            </a:r>
+            <a:endParaRPr lang="en-US" sz="1700" dirty="0"/>
+          </a:p>
+          <a:p>
+            <a:pPr algn="r" indent="0" marL="0">
+              <a:lnSpc>
+                <a:spcPts val="2600"/>
+              </a:lnSpc>
+              <a:spcBef>
+                <a:spcPts val="700"/>
+              </a:spcBef>
+              <a:buNone/>
+            </a:pPr>
+            <a:r>
+              <a:rPr lang="en-US" sz="1700" dirty="0">
                 <a:solidFill>
                   <a:srgbClr val="0C3B44"/>
                 </a:solidFill>
@@ -6144,145 +5983,22 @@
                 <a:ea typeface="Arial" pitchFamily="34" charset="-122"/>
                 <a:cs typeface="Arial" pitchFamily="34" charset="-120"/>
               </a:rPr>
-              <a:t>‏דגימה מכוונת‏</a:t>
-            </a:r>
-            <a:endParaRPr lang="en-US" sz="1500" dirty="0"/>
-          </a:p>
-        </p:txBody>
-      </p:sp>
-      <p:sp>
-        <p:nvSpPr>
-          <p:cNvPr id="11" name="Text 9"/>
-          <p:cNvSpPr txBox="1"/>
-          <p:nvPr/>
-        </p:nvSpPr>
-        <p:spPr>
-          <a:xfrm>
-            <a:off x="704088" y="1892808"/>
-            <a:ext cx="6897319" cy="585216"/>
-          </a:xfrm>
-          <a:prstGeom prst="rect">
-            <a:avLst/>
-          </a:prstGeom>
-          <a:noFill/>
-          <a:ln/>
-        </p:spPr>
-        <p:txBody>
-          <a:bodyPr wrap="square" lIns="0" tIns="0" rIns="0" bIns="0" rtlCol="0" anchor="ctr"/>
-          <a:lstStyle/>
-          <a:p>
-            <a:pPr rtl="1" algn="r" indent="0" marL="0">
-              <a:buNone/>
-            </a:pPr>
-            <a:r>
-              <a:rPr lang="en-US" sz="1300" dirty="0">
-                <a:solidFill>
-                  <a:srgbClr val="56686D"/>
-                </a:solidFill>
-                <a:latin typeface="Arial" pitchFamily="34" charset="0"/>
-                <a:ea typeface="Arial" pitchFamily="34" charset="-122"/>
-                <a:cs typeface="Arial" pitchFamily="34" charset="-120"/>
-              </a:rPr>
-              <a:t>‏שיטת כדור השלג עלולה להטות לטובת הנכונים לשוחח על בריאותם‏</a:t>
-            </a:r>
-            <a:endParaRPr lang="en-US" sz="1300" dirty="0"/>
-          </a:p>
-        </p:txBody>
-      </p:sp>
-      <p:sp>
-        <p:nvSpPr>
-          <p:cNvPr id="12" name="Shape 10"/>
-          <p:cNvSpPr/>
-          <p:nvPr/>
-        </p:nvSpPr>
-        <p:spPr>
-          <a:xfrm>
-            <a:off x="502920" y="2560320"/>
-            <a:ext cx="11185855" cy="585216"/>
-          </a:xfrm>
-          <a:prstGeom prst="roundRect">
-            <a:avLst>
-              <a:gd name="adj" fmla="val 12500"/>
-            </a:avLst>
-          </a:prstGeom>
-          <a:solidFill>
-            <a:srgbClr val="F2F8F9"/>
-          </a:solidFill>
-          <a:ln w="12700">
-            <a:solidFill>
-              <a:srgbClr val="D5E7E9"/>
-            </a:solidFill>
-            <a:prstDash val="solid"/>
-          </a:ln>
-        </p:spPr>
-      </p:sp>
-      <p:sp>
-        <p:nvSpPr>
-          <p:cNvPr id="13" name="Text 11"/>
-          <p:cNvSpPr txBox="1"/>
-          <p:nvPr/>
-        </p:nvSpPr>
-        <p:spPr>
-          <a:xfrm>
-            <a:off x="11085271" y="2642616"/>
-            <a:ext cx="420624" cy="420624"/>
-          </a:xfrm>
-          <a:prstGeom prst="ellipse">
-            <a:avLst/>
-          </a:prstGeom>
-          <a:solidFill>
-            <a:srgbClr val="0E6E7E"/>
-          </a:solidFill>
-          <a:ln/>
-        </p:spPr>
-        <p:txBody>
-          <a:bodyPr wrap="square" lIns="0" tIns="0" rIns="0" bIns="0" rtlCol="0" anchor="ctr"/>
-          <a:lstStyle/>
-          <a:p>
-            <a:pPr algn="ctr" indent="0" marL="0">
-              <a:buNone/>
-            </a:pPr>
-            <a:r>
-              <a:rPr lang="en-US" sz="1500" b="1" dirty="0">
-                <a:solidFill>
-                  <a:srgbClr val="FFFFFF"/>
-                </a:solidFill>
-                <a:latin typeface="Arial" pitchFamily="34" charset="0"/>
-                <a:ea typeface="Arial" pitchFamily="34" charset="-122"/>
-                <a:cs typeface="Arial" pitchFamily="34" charset="-120"/>
-              </a:rPr>
-              <a:t>3</a:t>
-            </a:r>
-            <a:endParaRPr lang="en-US" sz="1500" dirty="0"/>
-          </a:p>
-        </p:txBody>
-      </p:sp>
-      <p:sp>
-        <p:nvSpPr>
-          <p:cNvPr id="14" name="Text 12"/>
-          <p:cNvSpPr txBox="1"/>
-          <p:nvPr/>
-        </p:nvSpPr>
-        <p:spPr>
-          <a:xfrm>
-            <a:off x="7765999" y="2560320"/>
-            <a:ext cx="3154680" cy="585216"/>
-          </a:xfrm>
-          <a:prstGeom prst="rect">
-            <a:avLst/>
-          </a:prstGeom>
-          <a:noFill/>
-          <a:ln/>
-        </p:spPr>
-        <p:txBody>
-          <a:bodyPr wrap="square" lIns="0" tIns="0" rIns="0" bIns="0" rtlCol="0" anchor="ctr"/>
-          <a:lstStyle/>
-          <a:p>
-            <a:pPr rtl="1" algn="r" indent="0" marL="0">
-              <a:buNone/>
-            </a:pPr>
-            <a:r>
-              <a:rPr lang="en-US" sz="1500" b="1" dirty="0">
+              <a:t>‏שנית, הדגימה הייתה מכוונת ונעשתה בשיטת כדור השלג דרך מעגלי היכרות של החוקרים, שיטה העלולה ליצור הטיה לטובת אנשים הנכונים לשוחח על בריאותם. שלישית, הנתונים מבוססים על דיווח עצמי ולפיכך חשופים להטיית רצייה חברתית, מגבלה המתחדדת בשל ההיכרות המוקדמת בין החוקרים לבין חלק מן המרואיינים, אף שהיכרות זו תרמה גם לפתיחות ולאמון.‏</a:t>
+            </a:r>
+            <a:endParaRPr lang="en-US" sz="1700" dirty="0"/>
+          </a:p>
+          <a:p>
+            <a:pPr algn="r" indent="0" marL="0">
+              <a:lnSpc>
+                <a:spcPts val="2600"/>
+              </a:lnSpc>
+              <a:spcBef>
+                <a:spcPts val="700"/>
+              </a:spcBef>
+              <a:buNone/>
+            </a:pPr>
+            <a:r>
+              <a:rPr lang="en-US" sz="1700" dirty="0">
                 <a:solidFill>
                   <a:srgbClr val="0C3B44"/>
                 </a:solidFill>
@@ -6290,145 +6006,22 @@
                 <a:ea typeface="Arial" pitchFamily="34" charset="-122"/>
                 <a:cs typeface="Arial" pitchFamily="34" charset="-120"/>
               </a:rPr>
-              <a:t>‏דיווח עצמי‏</a:t>
-            </a:r>
-            <a:endParaRPr lang="en-US" sz="1500" dirty="0"/>
-          </a:p>
-        </p:txBody>
-      </p:sp>
-      <p:sp>
-        <p:nvSpPr>
-          <p:cNvPr id="15" name="Text 13"/>
-          <p:cNvSpPr txBox="1"/>
-          <p:nvPr/>
-        </p:nvSpPr>
-        <p:spPr>
-          <a:xfrm>
-            <a:off x="704088" y="2560320"/>
-            <a:ext cx="6897319" cy="585216"/>
-          </a:xfrm>
-          <a:prstGeom prst="rect">
-            <a:avLst/>
-          </a:prstGeom>
-          <a:noFill/>
-          <a:ln/>
-        </p:spPr>
-        <p:txBody>
-          <a:bodyPr wrap="square" lIns="0" tIns="0" rIns="0" bIns="0" rtlCol="0" anchor="ctr"/>
-          <a:lstStyle/>
-          <a:p>
-            <a:pPr rtl="1" algn="r" indent="0" marL="0">
-              <a:buNone/>
-            </a:pPr>
-            <a:r>
-              <a:rPr lang="en-US" sz="1300" dirty="0">
-                <a:solidFill>
-                  <a:srgbClr val="56686D"/>
-                </a:solidFill>
-                <a:latin typeface="Arial" pitchFamily="34" charset="0"/>
-                <a:ea typeface="Arial" pitchFamily="34" charset="-122"/>
-                <a:cs typeface="Arial" pitchFamily="34" charset="-120"/>
-              </a:rPr>
-              <a:t>‏הנתונים חשופים להטיית רצייה חברתית, ובפרט בשל היכרות מוקדמת‏</a:t>
-            </a:r>
-            <a:endParaRPr lang="en-US" sz="1300" dirty="0"/>
-          </a:p>
-        </p:txBody>
-      </p:sp>
-      <p:sp>
-        <p:nvSpPr>
-          <p:cNvPr id="16" name="Shape 14"/>
-          <p:cNvSpPr/>
-          <p:nvPr/>
-        </p:nvSpPr>
-        <p:spPr>
-          <a:xfrm>
-            <a:off x="502920" y="3227832"/>
-            <a:ext cx="11185855" cy="585216"/>
-          </a:xfrm>
-          <a:prstGeom prst="roundRect">
-            <a:avLst>
-              <a:gd name="adj" fmla="val 12500"/>
-            </a:avLst>
-          </a:prstGeom>
-          <a:solidFill>
-            <a:srgbClr val="F2F8F9"/>
-          </a:solidFill>
-          <a:ln w="12700">
-            <a:solidFill>
-              <a:srgbClr val="D5E7E9"/>
-            </a:solidFill>
-            <a:prstDash val="solid"/>
-          </a:ln>
-        </p:spPr>
-      </p:sp>
-      <p:sp>
-        <p:nvSpPr>
-          <p:cNvPr id="17" name="Text 15"/>
-          <p:cNvSpPr txBox="1"/>
-          <p:nvPr/>
-        </p:nvSpPr>
-        <p:spPr>
-          <a:xfrm>
-            <a:off x="11085271" y="3310128"/>
-            <a:ext cx="420624" cy="420624"/>
-          </a:xfrm>
-          <a:prstGeom prst="ellipse">
-            <a:avLst/>
-          </a:prstGeom>
-          <a:solidFill>
-            <a:srgbClr val="1D9E9A"/>
-          </a:solidFill>
-          <a:ln/>
-        </p:spPr>
-        <p:txBody>
-          <a:bodyPr wrap="square" lIns="0" tIns="0" rIns="0" bIns="0" rtlCol="0" anchor="ctr"/>
-          <a:lstStyle/>
-          <a:p>
-            <a:pPr algn="ctr" indent="0" marL="0">
-              <a:buNone/>
-            </a:pPr>
-            <a:r>
-              <a:rPr lang="en-US" sz="1500" b="1" dirty="0">
-                <a:solidFill>
-                  <a:srgbClr val="FFFFFF"/>
-                </a:solidFill>
-                <a:latin typeface="Arial" pitchFamily="34" charset="0"/>
-                <a:ea typeface="Arial" pitchFamily="34" charset="-122"/>
-                <a:cs typeface="Arial" pitchFamily="34" charset="-120"/>
-              </a:rPr>
-              <a:t>4</a:t>
-            </a:r>
-            <a:endParaRPr lang="en-US" sz="1500" dirty="0"/>
-          </a:p>
-        </p:txBody>
-      </p:sp>
-      <p:sp>
-        <p:nvSpPr>
-          <p:cNvPr id="18" name="Text 16"/>
-          <p:cNvSpPr txBox="1"/>
-          <p:nvPr/>
-        </p:nvSpPr>
-        <p:spPr>
-          <a:xfrm>
-            <a:off x="7765999" y="3227832"/>
-            <a:ext cx="3154680" cy="585216"/>
-          </a:xfrm>
-          <a:prstGeom prst="rect">
-            <a:avLst/>
-          </a:prstGeom>
-          <a:noFill/>
-          <a:ln/>
-        </p:spPr>
-        <p:txBody>
-          <a:bodyPr wrap="square" lIns="0" tIns="0" rIns="0" bIns="0" rtlCol="0" anchor="ctr"/>
-          <a:lstStyle/>
-          <a:p>
-            <a:pPr rtl="1" algn="r" indent="0" marL="0">
-              <a:buNone/>
-            </a:pPr>
-            <a:r>
-              <a:rPr lang="en-US" sz="1500" b="1" dirty="0">
+              <a:t>‏רביעית, ארבעה ראיונות תורגמו מערבית, וכל תרגום כרוך באובדן ניואנסים תרבותיים. חמישית, המחקר נערך בשלושה יישובים במחוז הדרום, ולפיכך ממצאיו משקפים הקשר מקומי ספציפי, שהוא בעת ובעונה אחת יתרון של המחקר, המאפשר העמקה בהקשר שנחקר מעט, ומגבלה המצמצמת את יכולת ההשלכה על אוכלוסיות אחרות.‏</a:t>
+            </a:r>
+            <a:endParaRPr lang="en-US" sz="1700" dirty="0"/>
+          </a:p>
+          <a:p>
+            <a:pPr algn="r" indent="0" marL="0">
+              <a:lnSpc>
+                <a:spcPts val="2600"/>
+              </a:lnSpc>
+              <a:spcBef>
+                <a:spcPts val="700"/>
+              </a:spcBef>
+              <a:buNone/>
+            </a:pPr>
+            <a:r>
+              <a:rPr lang="en-US" sz="1700" dirty="0">
                 <a:solidFill>
                   <a:srgbClr val="0C3B44"/>
                 </a:solidFill>
@@ -6436,263 +6029,9 @@
                 <a:ea typeface="Arial" pitchFamily="34" charset="-122"/>
                 <a:cs typeface="Arial" pitchFamily="34" charset="-120"/>
               </a:rPr>
-              <a:t>‏תרגום מערבית‏</a:t>
-            </a:r>
-            <a:endParaRPr lang="en-US" sz="1500" dirty="0"/>
-          </a:p>
-        </p:txBody>
-      </p:sp>
-      <p:sp>
-        <p:nvSpPr>
-          <p:cNvPr id="19" name="Text 17"/>
-          <p:cNvSpPr txBox="1"/>
-          <p:nvPr/>
-        </p:nvSpPr>
-        <p:spPr>
-          <a:xfrm>
-            <a:off x="704088" y="3227832"/>
-            <a:ext cx="6897319" cy="585216"/>
-          </a:xfrm>
-          <a:prstGeom prst="rect">
-            <a:avLst/>
-          </a:prstGeom>
-          <a:noFill/>
-          <a:ln/>
-        </p:spPr>
-        <p:txBody>
-          <a:bodyPr wrap="square" lIns="0" tIns="0" rIns="0" bIns="0" rtlCol="0" anchor="ctr"/>
-          <a:lstStyle/>
-          <a:p>
-            <a:pPr rtl="1" algn="r" indent="0" marL="0">
-              <a:buNone/>
-            </a:pPr>
-            <a:r>
-              <a:rPr lang="en-US" sz="1300" dirty="0">
-                <a:solidFill>
-                  <a:srgbClr val="56686D"/>
-                </a:solidFill>
-                <a:latin typeface="Arial" pitchFamily="34" charset="0"/>
-                <a:ea typeface="Arial" pitchFamily="34" charset="-122"/>
-                <a:cs typeface="Arial" pitchFamily="34" charset="-120"/>
-              </a:rPr>
-              <a:t>‏ארבעה ראיונות תורגמו לעברית, וכל תרגום כרוך באובדן ניואנסים‏</a:t>
-            </a:r>
-            <a:endParaRPr lang="en-US" sz="1300" dirty="0"/>
-          </a:p>
-        </p:txBody>
-      </p:sp>
-      <p:sp>
-        <p:nvSpPr>
-          <p:cNvPr id="20" name="Shape 18"/>
-          <p:cNvSpPr/>
-          <p:nvPr/>
-        </p:nvSpPr>
-        <p:spPr>
-          <a:xfrm>
-            <a:off x="502920" y="3895344"/>
-            <a:ext cx="11185855" cy="585216"/>
-          </a:xfrm>
-          <a:prstGeom prst="roundRect">
-            <a:avLst>
-              <a:gd name="adj" fmla="val 12500"/>
-            </a:avLst>
-          </a:prstGeom>
-          <a:solidFill>
-            <a:srgbClr val="F2F8F9"/>
-          </a:solidFill>
-          <a:ln w="12700">
-            <a:solidFill>
-              <a:srgbClr val="D5E7E9"/>
-            </a:solidFill>
-            <a:prstDash val="solid"/>
-          </a:ln>
-        </p:spPr>
-      </p:sp>
-      <p:sp>
-        <p:nvSpPr>
-          <p:cNvPr id="21" name="Text 19"/>
-          <p:cNvSpPr txBox="1"/>
-          <p:nvPr/>
-        </p:nvSpPr>
-        <p:spPr>
-          <a:xfrm>
-            <a:off x="11085271" y="3977640"/>
-            <a:ext cx="420624" cy="420624"/>
-          </a:xfrm>
-          <a:prstGeom prst="ellipse">
-            <a:avLst/>
-          </a:prstGeom>
-          <a:solidFill>
-            <a:srgbClr val="0E6E7E"/>
-          </a:solidFill>
-          <a:ln/>
-        </p:spPr>
-        <p:txBody>
-          <a:bodyPr wrap="square" lIns="0" tIns="0" rIns="0" bIns="0" rtlCol="0" anchor="ctr"/>
-          <a:lstStyle/>
-          <a:p>
-            <a:pPr algn="ctr" indent="0" marL="0">
-              <a:buNone/>
-            </a:pPr>
-            <a:r>
-              <a:rPr lang="en-US" sz="1500" b="1" dirty="0">
-                <a:solidFill>
-                  <a:srgbClr val="FFFFFF"/>
-                </a:solidFill>
-                <a:latin typeface="Arial" pitchFamily="34" charset="0"/>
-                <a:ea typeface="Arial" pitchFamily="34" charset="-122"/>
-                <a:cs typeface="Arial" pitchFamily="34" charset="-120"/>
-              </a:rPr>
-              <a:t>5</a:t>
-            </a:r>
-            <a:endParaRPr lang="en-US" sz="1500" dirty="0"/>
-          </a:p>
-        </p:txBody>
-      </p:sp>
-      <p:sp>
-        <p:nvSpPr>
-          <p:cNvPr id="22" name="Text 20"/>
-          <p:cNvSpPr txBox="1"/>
-          <p:nvPr/>
-        </p:nvSpPr>
-        <p:spPr>
-          <a:xfrm>
-            <a:off x="7765999" y="3895344"/>
-            <a:ext cx="3154680" cy="585216"/>
-          </a:xfrm>
-          <a:prstGeom prst="rect">
-            <a:avLst/>
-          </a:prstGeom>
-          <a:noFill/>
-          <a:ln/>
-        </p:spPr>
-        <p:txBody>
-          <a:bodyPr wrap="square" lIns="0" tIns="0" rIns="0" bIns="0" rtlCol="0" anchor="ctr"/>
-          <a:lstStyle/>
-          <a:p>
-            <a:pPr rtl="1" algn="r" indent="0" marL="0">
-              <a:buNone/>
-            </a:pPr>
-            <a:r>
-              <a:rPr lang="en-US" sz="1500" b="1" dirty="0">
-                <a:solidFill>
-                  <a:srgbClr val="0C3B44"/>
-                </a:solidFill>
-                <a:latin typeface="Arial" pitchFamily="34" charset="0"/>
-                <a:ea typeface="Arial" pitchFamily="34" charset="-122"/>
-                <a:cs typeface="Arial" pitchFamily="34" charset="-120"/>
-              </a:rPr>
-              <a:t>‏הקשר מקומי‏</a:t>
-            </a:r>
-            <a:endParaRPr lang="en-US" sz="1500" dirty="0"/>
-          </a:p>
-        </p:txBody>
-      </p:sp>
-      <p:sp>
-        <p:nvSpPr>
-          <p:cNvPr id="23" name="Text 21"/>
-          <p:cNvSpPr txBox="1"/>
-          <p:nvPr/>
-        </p:nvSpPr>
-        <p:spPr>
-          <a:xfrm>
-            <a:off x="704088" y="3895344"/>
-            <a:ext cx="6897319" cy="585216"/>
-          </a:xfrm>
-          <a:prstGeom prst="rect">
-            <a:avLst/>
-          </a:prstGeom>
-          <a:noFill/>
-          <a:ln/>
-        </p:spPr>
-        <p:txBody>
-          <a:bodyPr wrap="square" lIns="0" tIns="0" rIns="0" bIns="0" rtlCol="0" anchor="ctr"/>
-          <a:lstStyle/>
-          <a:p>
-            <a:pPr rtl="1" algn="r" indent="0" marL="0">
-              <a:buNone/>
-            </a:pPr>
-            <a:r>
-              <a:rPr lang="en-US" sz="1300" dirty="0">
-                <a:solidFill>
-                  <a:srgbClr val="56686D"/>
-                </a:solidFill>
-                <a:latin typeface="Arial" pitchFamily="34" charset="0"/>
-                <a:ea typeface="Arial" pitchFamily="34" charset="-122"/>
-                <a:cs typeface="Arial" pitchFamily="34" charset="-120"/>
-              </a:rPr>
-              <a:t>‏שלושה יישובים בדרום בלבד, שהוא יתרון של עומק ומגבלה של השלכה‏</a:t>
-            </a:r>
-            <a:endParaRPr lang="en-US" sz="1300" dirty="0"/>
-          </a:p>
-        </p:txBody>
-      </p:sp>
-      <p:sp>
-        <p:nvSpPr>
-          <p:cNvPr id="24" name="Shape 22"/>
-          <p:cNvSpPr/>
-          <p:nvPr/>
-        </p:nvSpPr>
-        <p:spPr>
-          <a:xfrm>
-            <a:off x="502920" y="4690872"/>
-            <a:ext cx="11185855" cy="1527048"/>
-          </a:xfrm>
-          <a:prstGeom prst="roundRect">
-            <a:avLst>
-              <a:gd name="adj" fmla="val 5988"/>
-            </a:avLst>
-          </a:prstGeom>
-          <a:solidFill>
-            <a:srgbClr val="BFE3DD"/>
-          </a:solidFill>
-          <a:ln w="12700">
-            <a:solidFill>
-              <a:srgbClr val="BFE3DD"/>
-            </a:solidFill>
-            <a:prstDash val="solid"/>
-          </a:ln>
-        </p:spPr>
-      </p:sp>
-      <p:sp>
-        <p:nvSpPr>
-          <p:cNvPr id="25" name="Text 23"/>
-          <p:cNvSpPr txBox="1"/>
-          <p:nvPr/>
-        </p:nvSpPr>
-        <p:spPr>
-          <a:xfrm>
-            <a:off x="850392" y="4837176"/>
-            <a:ext cx="10490911" cy="1234440"/>
-          </a:xfrm>
-          <a:prstGeom prst="rect">
-            <a:avLst/>
-          </a:prstGeom>
-          <a:noFill/>
-          <a:ln/>
-        </p:spPr>
-        <p:txBody>
-          <a:bodyPr wrap="square" lIns="0" tIns="0" rIns="0" bIns="0" rtlCol="0" anchor="t"/>
-          <a:lstStyle/>
-          <a:p>
-            <a:pPr rtl="1" algn="r" indent="0" marL="0">
-              <a:lnSpc>
-                <a:spcPts val="2300"/>
-              </a:lnSpc>
-              <a:buNone/>
-            </a:pPr>
-            <a:r>
-              <a:rPr lang="en-US" sz="1500" dirty="0">
-                <a:solidFill>
-                  <a:srgbClr val="0C3B44"/>
-                </a:solidFill>
-                <a:latin typeface="Arial" pitchFamily="34" charset="0"/>
-                <a:ea typeface="Arial" pitchFamily="34" charset="-122"/>
-                <a:cs typeface="Arial" pitchFamily="34" charset="-120"/>
-              </a:rPr>
-              <a:t>‏הכרה במגבלות אלו אינה גורעת מתוקף התמונה הכוללת, אך היא מחדדת את הצורך בזהירות בהכללת המסקנות ואת חשיבותם של מחקרי המשך, ובפרט מחקר משולב שיאמוד את שכיחותם של החסמים שזוהו במדגם מייצג של אוכלוסיית הנגב.‏</a:t>
-            </a:r>
-            <a:endParaRPr lang="en-US" sz="1500" dirty="0"/>
+              <a:t>‏הכרה במגבלות אלו אינה גורעת מתוקף התמונה הכוללת, אך היא מחדדת את חשיבותם של מחקרי המשך, ובפרט מחקר משולב שיאמוד את שכיחות החסמים שזוהו במדגם מייצג של אוכלוסיית הנגב.‏</a:t>
+            </a:r>
+            <a:endParaRPr lang="en-US" sz="1700" dirty="0"/>
           </a:p>
         </p:txBody>
       </p:sp>

--- a/מצגת פרויקט גמר - פעילות גופנית ותזונה ומחלות כרוניות.pptx
+++ b/מצגת פרויקט גמר - פעילות גופנית ותזונה ומחלות כרוניות.pptx
@@ -3355,7 +3355,7 @@
       </p:sp>
       <p:sp>
         <p:nvSpPr>
-          <p:cNvPr id="25" name="Slide Number Placeholder 0"/>
+          <p:cNvPr id="7" name="Slide Number Placeholder 0"/>
           <p:cNvSpPr>
             <a:spLocks noGrp="1"/>
           </p:cNvSpPr>
@@ -3660,7 +3660,7 @@
       </p:sp>
       <p:sp>
         <p:nvSpPr>
-          <p:cNvPr id="25" name="Slide Number Placeholder 0"/>
+          <p:cNvPr id="7" name="Slide Number Placeholder 0"/>
           <p:cNvSpPr>
             <a:spLocks noGrp="1"/>
           </p:cNvSpPr>
@@ -3965,7 +3965,7 @@
       </p:sp>
       <p:sp>
         <p:nvSpPr>
-          <p:cNvPr id="25" name="Slide Number Placeholder 0"/>
+          <p:cNvPr id="7" name="Slide Number Placeholder 0"/>
           <p:cNvSpPr>
             <a:spLocks noGrp="1"/>
           </p:cNvSpPr>
@@ -4270,7 +4270,7 @@
       </p:sp>
       <p:sp>
         <p:nvSpPr>
-          <p:cNvPr id="25" name="Slide Number Placeholder 0"/>
+          <p:cNvPr id="7" name="Slide Number Placeholder 0"/>
           <p:cNvSpPr>
             <a:spLocks noGrp="1"/>
           </p:cNvSpPr>
@@ -4536,7 +4536,7 @@
       </p:sp>
       <p:sp>
         <p:nvSpPr>
-          <p:cNvPr id="25" name="Slide Number Placeholder 0"/>
+          <p:cNvPr id="6" name="Slide Number Placeholder 0"/>
           <p:cNvSpPr>
             <a:spLocks noGrp="1"/>
           </p:cNvSpPr>
@@ -5748,7 +5748,7 @@
       </p:sp>
       <p:sp>
         <p:nvSpPr>
-          <p:cNvPr id="25" name="Slide Number Placeholder 0"/>
+          <p:cNvPr id="33" name="Slide Number Placeholder 0"/>
           <p:cNvSpPr>
             <a:spLocks noGrp="1"/>
           </p:cNvSpPr>
@@ -6037,7 +6037,7 @@
       </p:sp>
       <p:sp>
         <p:nvSpPr>
-          <p:cNvPr id="25" name="Slide Number Placeholder 0"/>
+          <p:cNvPr id="6" name="Slide Number Placeholder 0"/>
           <p:cNvSpPr>
             <a:spLocks noGrp="1"/>
           </p:cNvSpPr>
@@ -6303,7 +6303,7 @@
       </p:sp>
       <p:sp>
         <p:nvSpPr>
-          <p:cNvPr id="25" name="Slide Number Placeholder 0"/>
+          <p:cNvPr id="6" name="Slide Number Placeholder 0"/>
           <p:cNvSpPr>
             <a:spLocks noGrp="1"/>
           </p:cNvSpPr>
@@ -7018,7 +7018,7 @@
       </p:sp>
       <p:sp>
         <p:nvSpPr>
-          <p:cNvPr id="25" name="Slide Number Placeholder 0"/>
+          <p:cNvPr id="8" name="Slide Number Placeholder 0"/>
           <p:cNvSpPr>
             <a:spLocks noGrp="1"/>
           </p:cNvSpPr>
@@ -7516,7 +7516,7 @@
       </p:sp>
       <p:sp>
         <p:nvSpPr>
-          <p:cNvPr id="25" name="Slide Number Placeholder 0"/>
+          <p:cNvPr id="6" name="Slide Number Placeholder 0"/>
           <p:cNvSpPr>
             <a:spLocks noGrp="1"/>
           </p:cNvSpPr>
@@ -7805,7 +7805,7 @@
       </p:sp>
       <p:sp>
         <p:nvSpPr>
-          <p:cNvPr id="25" name="Slide Number Placeholder 0"/>
+          <p:cNvPr id="6" name="Slide Number Placeholder 0"/>
           <p:cNvSpPr>
             <a:spLocks noGrp="1"/>
           </p:cNvSpPr>
@@ -8156,7 +8156,7 @@
       </p:sp>
       <p:sp>
         <p:nvSpPr>
-          <p:cNvPr id="25" name="Slide Number Placeholder 0"/>
+          <p:cNvPr id="7" name="Slide Number Placeholder 0"/>
           <p:cNvSpPr>
             <a:spLocks noGrp="1"/>
           </p:cNvSpPr>
@@ -8507,7 +8507,7 @@
       </p:sp>
       <p:sp>
         <p:nvSpPr>
-          <p:cNvPr id="25" name="Slide Number Placeholder 0"/>
+          <p:cNvPr id="7" name="Slide Number Placeholder 0"/>
           <p:cNvSpPr>
             <a:spLocks noGrp="1"/>
           </p:cNvSpPr>
@@ -8773,7 +8773,7 @@
       </p:sp>
       <p:sp>
         <p:nvSpPr>
-          <p:cNvPr id="25" name="Slide Number Placeholder 0"/>
+          <p:cNvPr id="6" name="Slide Number Placeholder 0"/>
           <p:cNvSpPr>
             <a:spLocks noGrp="1"/>
           </p:cNvSpPr>
@@ -9039,7 +9039,7 @@
       </p:sp>
       <p:sp>
         <p:nvSpPr>
-          <p:cNvPr id="25" name="Slide Number Placeholder 0"/>
+          <p:cNvPr id="6" name="Slide Number Placeholder 0"/>
           <p:cNvSpPr>
             <a:spLocks noGrp="1"/>
           </p:cNvSpPr>
@@ -9305,7 +9305,7 @@
       </p:sp>
       <p:sp>
         <p:nvSpPr>
-          <p:cNvPr id="25" name="Slide Number Placeholder 0"/>
+          <p:cNvPr id="6" name="Slide Number Placeholder 0"/>
           <p:cNvSpPr>
             <a:spLocks noGrp="1"/>
           </p:cNvSpPr>
@@ -9610,7 +9610,7 @@
       </p:sp>
       <p:sp>
         <p:nvSpPr>
-          <p:cNvPr id="25" name="Slide Number Placeholder 0"/>
+          <p:cNvPr id="7" name="Slide Number Placeholder 0"/>
           <p:cNvSpPr>
             <a:spLocks noGrp="1"/>
           </p:cNvSpPr>

--- a/מצגת פרויקט גמר - פעילות גופנית ותזונה ומחלות כרוניות.pptx
+++ b/מצגת פרויקט גמר - פעילות גופנית ותזונה ומחלות כרוניות.pptx
@@ -3273,8 +3273,8 @@
         </p:nvSpPr>
         <p:spPr>
           <a:xfrm>
-            <a:off x="923544" y="1545336"/>
-            <a:ext cx="10344607" cy="4782312"/>
+            <a:off x="923544" y="1508760"/>
+            <a:ext cx="10344607" cy="1669288"/>
           </a:xfrm>
           <a:prstGeom prst="rect">
             <a:avLst/>
@@ -3286,7 +3286,7 @@
           <a:bodyPr wrap="square" lIns="0" tIns="0" rIns="0" bIns="0" rtlCol="0" anchor="t"/>
           <a:lstStyle/>
           <a:p>
-            <a:pPr algn="r" indent="0" marL="0">
+            <a:pPr rtl="1" algn="r" indent="0" marL="0">
               <a:lnSpc>
                 <a:spcPts val="2600"/>
               </a:lnSpc>
@@ -3305,14 +3305,33 @@
             </a:r>
             <a:endParaRPr lang="en-US" sz="1700" dirty="0"/>
           </a:p>
-          <a:p>
-            <a:pPr algn="r" indent="0" marL="0">
+        </p:txBody>
+      </p:sp>
+      <p:sp>
+        <p:nvSpPr>
+          <p:cNvPr id="7" name="Text 5"/>
+          <p:cNvSpPr txBox="1"/>
+          <p:nvPr/>
+        </p:nvSpPr>
+        <p:spPr>
+          <a:xfrm>
+            <a:off x="923544" y="3266948"/>
+            <a:ext cx="10344607" cy="1339088"/>
+          </a:xfrm>
+          <a:prstGeom prst="rect">
+            <a:avLst/>
+          </a:prstGeom>
+          <a:noFill/>
+          <a:ln/>
+        </p:spPr>
+        <p:txBody>
+          <a:bodyPr wrap="square" lIns="0" tIns="0" rIns="0" bIns="0" rtlCol="0" anchor="t"/>
+          <a:lstStyle/>
+          <a:p>
+            <a:pPr rtl="1" algn="r" indent="0" marL="0">
               <a:lnSpc>
                 <a:spcPts val="2600"/>
               </a:lnSpc>
-              <a:spcBef>
-                <a:spcPts val="700"/>
-              </a:spcBef>
               <a:buNone/>
             </a:pPr>
             <a:r>
@@ -3328,14 +3347,33 @@
             </a:r>
             <a:endParaRPr lang="en-US" sz="1700" dirty="0"/>
           </a:p>
-          <a:p>
-            <a:pPr algn="r" indent="0" marL="0">
+        </p:txBody>
+      </p:sp>
+      <p:sp>
+        <p:nvSpPr>
+          <p:cNvPr id="8" name="Text 6"/>
+          <p:cNvSpPr txBox="1"/>
+          <p:nvPr/>
+        </p:nvSpPr>
+        <p:spPr>
+          <a:xfrm>
+            <a:off x="923544" y="4694936"/>
+            <a:ext cx="10344607" cy="1008888"/>
+          </a:xfrm>
+          <a:prstGeom prst="rect">
+            <a:avLst/>
+          </a:prstGeom>
+          <a:noFill/>
+          <a:ln/>
+        </p:spPr>
+        <p:txBody>
+          <a:bodyPr wrap="square" lIns="0" tIns="0" rIns="0" bIns="0" rtlCol="0" anchor="t"/>
+          <a:lstStyle/>
+          <a:p>
+            <a:pPr rtl="1" algn="r" indent="0" marL="0">
               <a:lnSpc>
                 <a:spcPts val="2600"/>
               </a:lnSpc>
-              <a:spcBef>
-                <a:spcPts val="700"/>
-              </a:spcBef>
               <a:buNone/>
             </a:pPr>
             <a:r>
@@ -3355,7 +3393,7 @@
       </p:sp>
       <p:sp>
         <p:nvSpPr>
-          <p:cNvPr id="7" name="Slide Number Placeholder 0"/>
+          <p:cNvPr id="9" name="Slide Number Placeholder 0"/>
           <p:cNvSpPr>
             <a:spLocks noGrp="1"/>
           </p:cNvSpPr>
@@ -3578,8 +3616,8 @@
         </p:nvSpPr>
         <p:spPr>
           <a:xfrm>
-            <a:off x="923544" y="1545336"/>
-            <a:ext cx="10344607" cy="4782312"/>
+            <a:off x="923544" y="1508760"/>
+            <a:ext cx="10344607" cy="1669288"/>
           </a:xfrm>
           <a:prstGeom prst="rect">
             <a:avLst/>
@@ -3591,7 +3629,7 @@
           <a:bodyPr wrap="square" lIns="0" tIns="0" rIns="0" bIns="0" rtlCol="0" anchor="t"/>
           <a:lstStyle/>
           <a:p>
-            <a:pPr algn="r" indent="0" marL="0">
+            <a:pPr rtl="1" algn="r" indent="0" marL="0">
               <a:lnSpc>
                 <a:spcPts val="2600"/>
               </a:lnSpc>
@@ -3610,14 +3648,33 @@
             </a:r>
             <a:endParaRPr lang="en-US" sz="1700" dirty="0"/>
           </a:p>
-          <a:p>
-            <a:pPr algn="r" indent="0" marL="0">
+        </p:txBody>
+      </p:sp>
+      <p:sp>
+        <p:nvSpPr>
+          <p:cNvPr id="7" name="Text 5"/>
+          <p:cNvSpPr txBox="1"/>
+          <p:nvPr/>
+        </p:nvSpPr>
+        <p:spPr>
+          <a:xfrm>
+            <a:off x="923544" y="3266948"/>
+            <a:ext cx="10344607" cy="1008888"/>
+          </a:xfrm>
+          <a:prstGeom prst="rect">
+            <a:avLst/>
+          </a:prstGeom>
+          <a:noFill/>
+          <a:ln/>
+        </p:spPr>
+        <p:txBody>
+          <a:bodyPr wrap="square" lIns="0" tIns="0" rIns="0" bIns="0" rtlCol="0" anchor="t"/>
+          <a:lstStyle/>
+          <a:p>
+            <a:pPr rtl="1" algn="r" indent="0" marL="0">
               <a:lnSpc>
                 <a:spcPts val="2600"/>
               </a:lnSpc>
-              <a:spcBef>
-                <a:spcPts val="700"/>
-              </a:spcBef>
               <a:buNone/>
             </a:pPr>
             <a:r>
@@ -3633,14 +3690,33 @@
             </a:r>
             <a:endParaRPr lang="en-US" sz="1700" dirty="0"/>
           </a:p>
-          <a:p>
-            <a:pPr algn="r" indent="0" marL="0">
+        </p:txBody>
+      </p:sp>
+      <p:sp>
+        <p:nvSpPr>
+          <p:cNvPr id="8" name="Text 6"/>
+          <p:cNvSpPr txBox="1"/>
+          <p:nvPr/>
+        </p:nvSpPr>
+        <p:spPr>
+          <a:xfrm>
+            <a:off x="923544" y="4364736"/>
+            <a:ext cx="10344607" cy="1339088"/>
+          </a:xfrm>
+          <a:prstGeom prst="rect">
+            <a:avLst/>
+          </a:prstGeom>
+          <a:noFill/>
+          <a:ln/>
+        </p:spPr>
+        <p:txBody>
+          <a:bodyPr wrap="square" lIns="0" tIns="0" rIns="0" bIns="0" rtlCol="0" anchor="t"/>
+          <a:lstStyle/>
+          <a:p>
+            <a:pPr rtl="1" algn="r" indent="0" marL="0">
               <a:lnSpc>
                 <a:spcPts val="2600"/>
               </a:lnSpc>
-              <a:spcBef>
-                <a:spcPts val="700"/>
-              </a:spcBef>
               <a:buNone/>
             </a:pPr>
             <a:r>
@@ -3660,7 +3736,7 @@
       </p:sp>
       <p:sp>
         <p:nvSpPr>
-          <p:cNvPr id="7" name="Slide Number Placeholder 0"/>
+          <p:cNvPr id="9" name="Slide Number Placeholder 0"/>
           <p:cNvSpPr>
             <a:spLocks noGrp="1"/>
           </p:cNvSpPr>
@@ -3883,8 +3959,8 @@
         </p:nvSpPr>
         <p:spPr>
           <a:xfrm>
-            <a:off x="923544" y="1545336"/>
-            <a:ext cx="10344607" cy="4782312"/>
+            <a:off x="923544" y="1508760"/>
+            <a:ext cx="10344607" cy="1339088"/>
           </a:xfrm>
           <a:prstGeom prst="rect">
             <a:avLst/>
@@ -3896,7 +3972,7 @@
           <a:bodyPr wrap="square" lIns="0" tIns="0" rIns="0" bIns="0" rtlCol="0" anchor="t"/>
           <a:lstStyle/>
           <a:p>
-            <a:pPr algn="r" indent="0" marL="0">
+            <a:pPr rtl="1" algn="r" indent="0" marL="0">
               <a:lnSpc>
                 <a:spcPts val="2600"/>
               </a:lnSpc>
@@ -3915,14 +3991,33 @@
             </a:r>
             <a:endParaRPr lang="en-US" sz="1700" dirty="0"/>
           </a:p>
-          <a:p>
-            <a:pPr algn="r" indent="0" marL="0">
+        </p:txBody>
+      </p:sp>
+      <p:sp>
+        <p:nvSpPr>
+          <p:cNvPr id="7" name="Text 5"/>
+          <p:cNvSpPr txBox="1"/>
+          <p:nvPr/>
+        </p:nvSpPr>
+        <p:spPr>
+          <a:xfrm>
+            <a:off x="923544" y="2936748"/>
+            <a:ext cx="10344607" cy="1008888"/>
+          </a:xfrm>
+          <a:prstGeom prst="rect">
+            <a:avLst/>
+          </a:prstGeom>
+          <a:noFill/>
+          <a:ln/>
+        </p:spPr>
+        <p:txBody>
+          <a:bodyPr wrap="square" lIns="0" tIns="0" rIns="0" bIns="0" rtlCol="0" anchor="t"/>
+          <a:lstStyle/>
+          <a:p>
+            <a:pPr rtl="1" algn="r" indent="0" marL="0">
               <a:lnSpc>
                 <a:spcPts val="2600"/>
               </a:lnSpc>
-              <a:spcBef>
-                <a:spcPts val="700"/>
-              </a:spcBef>
               <a:buNone/>
             </a:pPr>
             <a:r>
@@ -3938,14 +4033,33 @@
             </a:r>
             <a:endParaRPr lang="en-US" sz="1700" dirty="0"/>
           </a:p>
-          <a:p>
-            <a:pPr algn="r" indent="0" marL="0">
+        </p:txBody>
+      </p:sp>
+      <p:sp>
+        <p:nvSpPr>
+          <p:cNvPr id="8" name="Text 6"/>
+          <p:cNvSpPr txBox="1"/>
+          <p:nvPr/>
+        </p:nvSpPr>
+        <p:spPr>
+          <a:xfrm>
+            <a:off x="923544" y="4034536"/>
+            <a:ext cx="10344607" cy="1339088"/>
+          </a:xfrm>
+          <a:prstGeom prst="rect">
+            <a:avLst/>
+          </a:prstGeom>
+          <a:noFill/>
+          <a:ln/>
+        </p:spPr>
+        <p:txBody>
+          <a:bodyPr wrap="square" lIns="0" tIns="0" rIns="0" bIns="0" rtlCol="0" anchor="t"/>
+          <a:lstStyle/>
+          <a:p>
+            <a:pPr rtl="1" algn="r" indent="0" marL="0">
               <a:lnSpc>
                 <a:spcPts val="2600"/>
               </a:lnSpc>
-              <a:spcBef>
-                <a:spcPts val="700"/>
-              </a:spcBef>
               <a:buNone/>
             </a:pPr>
             <a:r>
@@ -3965,7 +4079,7 @@
       </p:sp>
       <p:sp>
         <p:nvSpPr>
-          <p:cNvPr id="7" name="Slide Number Placeholder 0"/>
+          <p:cNvPr id="9" name="Slide Number Placeholder 0"/>
           <p:cNvSpPr>
             <a:spLocks noGrp="1"/>
           </p:cNvSpPr>
@@ -4188,8 +4302,8 @@
         </p:nvSpPr>
         <p:spPr>
           <a:xfrm>
-            <a:off x="923544" y="1545336"/>
-            <a:ext cx="10344607" cy="4782312"/>
+            <a:off x="923544" y="1508760"/>
+            <a:ext cx="10344607" cy="1339088"/>
           </a:xfrm>
           <a:prstGeom prst="rect">
             <a:avLst/>
@@ -4201,7 +4315,7 @@
           <a:bodyPr wrap="square" lIns="0" tIns="0" rIns="0" bIns="0" rtlCol="0" anchor="t"/>
           <a:lstStyle/>
           <a:p>
-            <a:pPr algn="r" indent="0" marL="0">
+            <a:pPr rtl="1" algn="r" indent="0" marL="0">
               <a:lnSpc>
                 <a:spcPts val="2600"/>
               </a:lnSpc>
@@ -4220,14 +4334,33 @@
             </a:r>
             <a:endParaRPr lang="en-US" sz="1700" dirty="0"/>
           </a:p>
-          <a:p>
-            <a:pPr algn="r" indent="0" marL="0">
+        </p:txBody>
+      </p:sp>
+      <p:sp>
+        <p:nvSpPr>
+          <p:cNvPr id="7" name="Text 5"/>
+          <p:cNvSpPr txBox="1"/>
+          <p:nvPr/>
+        </p:nvSpPr>
+        <p:spPr>
+          <a:xfrm>
+            <a:off x="923544" y="2936748"/>
+            <a:ext cx="10344607" cy="1669288"/>
+          </a:xfrm>
+          <a:prstGeom prst="rect">
+            <a:avLst/>
+          </a:prstGeom>
+          <a:noFill/>
+          <a:ln/>
+        </p:spPr>
+        <p:txBody>
+          <a:bodyPr wrap="square" lIns="0" tIns="0" rIns="0" bIns="0" rtlCol="0" anchor="t"/>
+          <a:lstStyle/>
+          <a:p>
+            <a:pPr rtl="1" algn="r" indent="0" marL="0">
               <a:lnSpc>
                 <a:spcPts val="2600"/>
               </a:lnSpc>
-              <a:spcBef>
-                <a:spcPts val="700"/>
-              </a:spcBef>
               <a:buNone/>
             </a:pPr>
             <a:r>
@@ -4243,14 +4376,33 @@
             </a:r>
             <a:endParaRPr lang="en-US" sz="1700" dirty="0"/>
           </a:p>
-          <a:p>
-            <a:pPr algn="r" indent="0" marL="0">
+        </p:txBody>
+      </p:sp>
+      <p:sp>
+        <p:nvSpPr>
+          <p:cNvPr id="8" name="Text 6"/>
+          <p:cNvSpPr txBox="1"/>
+          <p:nvPr/>
+        </p:nvSpPr>
+        <p:spPr>
+          <a:xfrm>
+            <a:off x="923544" y="4694936"/>
+            <a:ext cx="10344607" cy="1008888"/>
+          </a:xfrm>
+          <a:prstGeom prst="rect">
+            <a:avLst/>
+          </a:prstGeom>
+          <a:noFill/>
+          <a:ln/>
+        </p:spPr>
+        <p:txBody>
+          <a:bodyPr wrap="square" lIns="0" tIns="0" rIns="0" bIns="0" rtlCol="0" anchor="t"/>
+          <a:lstStyle/>
+          <a:p>
+            <a:pPr rtl="1" algn="r" indent="0" marL="0">
               <a:lnSpc>
                 <a:spcPts val="2600"/>
               </a:lnSpc>
-              <a:spcBef>
-                <a:spcPts val="700"/>
-              </a:spcBef>
               <a:buNone/>
             </a:pPr>
             <a:r>
@@ -4270,7 +4422,7 @@
       </p:sp>
       <p:sp>
         <p:nvSpPr>
-          <p:cNvPr id="7" name="Slide Number Placeholder 0"/>
+          <p:cNvPr id="9" name="Slide Number Placeholder 0"/>
           <p:cNvSpPr>
             <a:spLocks noGrp="1"/>
           </p:cNvSpPr>
@@ -4454,8 +4606,8 @@
         </p:nvSpPr>
         <p:spPr>
           <a:xfrm>
-            <a:off x="923544" y="1325880"/>
-            <a:ext cx="10344607" cy="5001768"/>
+            <a:off x="923544" y="1289304"/>
+            <a:ext cx="10344607" cy="1339088"/>
           </a:xfrm>
           <a:prstGeom prst="rect">
             <a:avLst/>
@@ -4467,7 +4619,7 @@
           <a:bodyPr wrap="square" lIns="0" tIns="0" rIns="0" bIns="0" rtlCol="0" anchor="t"/>
           <a:lstStyle/>
           <a:p>
-            <a:pPr algn="r" indent="0" marL="0">
+            <a:pPr rtl="1" algn="r" indent="0" marL="0">
               <a:lnSpc>
                 <a:spcPts val="2600"/>
               </a:lnSpc>
@@ -4486,14 +4638,33 @@
             </a:r>
             <a:endParaRPr lang="en-US" sz="1700" dirty="0"/>
           </a:p>
-          <a:p>
-            <a:pPr algn="r" indent="0" marL="0">
+        </p:txBody>
+      </p:sp>
+      <p:sp>
+        <p:nvSpPr>
+          <p:cNvPr id="6" name="Text 4"/>
+          <p:cNvSpPr txBox="1"/>
+          <p:nvPr/>
+        </p:nvSpPr>
+        <p:spPr>
+          <a:xfrm>
+            <a:off x="923544" y="2717292"/>
+            <a:ext cx="10344607" cy="1669288"/>
+          </a:xfrm>
+          <a:prstGeom prst="rect">
+            <a:avLst/>
+          </a:prstGeom>
+          <a:noFill/>
+          <a:ln/>
+        </p:spPr>
+        <p:txBody>
+          <a:bodyPr wrap="square" lIns="0" tIns="0" rIns="0" bIns="0" rtlCol="0" anchor="t"/>
+          <a:lstStyle/>
+          <a:p>
+            <a:pPr rtl="1" algn="r" indent="0" marL="0">
               <a:lnSpc>
                 <a:spcPts val="2600"/>
               </a:lnSpc>
-              <a:spcBef>
-                <a:spcPts val="700"/>
-              </a:spcBef>
               <a:buNone/>
             </a:pPr>
             <a:r>
@@ -4509,14 +4680,33 @@
             </a:r>
             <a:endParaRPr lang="en-US" sz="1700" dirty="0"/>
           </a:p>
-          <a:p>
-            <a:pPr algn="r" indent="0" marL="0">
+        </p:txBody>
+      </p:sp>
+      <p:sp>
+        <p:nvSpPr>
+          <p:cNvPr id="7" name="Text 5"/>
+          <p:cNvSpPr txBox="1"/>
+          <p:nvPr/>
+        </p:nvSpPr>
+        <p:spPr>
+          <a:xfrm>
+            <a:off x="923544" y="4475480"/>
+            <a:ext cx="10344607" cy="1339088"/>
+          </a:xfrm>
+          <a:prstGeom prst="rect">
+            <a:avLst/>
+          </a:prstGeom>
+          <a:noFill/>
+          <a:ln/>
+        </p:spPr>
+        <p:txBody>
+          <a:bodyPr wrap="square" lIns="0" tIns="0" rIns="0" bIns="0" rtlCol="0" anchor="t"/>
+          <a:lstStyle/>
+          <a:p>
+            <a:pPr rtl="1" algn="r" indent="0" marL="0">
               <a:lnSpc>
                 <a:spcPts val="2600"/>
               </a:lnSpc>
-              <a:spcBef>
-                <a:spcPts val="700"/>
-              </a:spcBef>
               <a:buNone/>
             </a:pPr>
             <a:r>
@@ -4536,7 +4726,7 @@
       </p:sp>
       <p:sp>
         <p:nvSpPr>
-          <p:cNvPr id="6" name="Slide Number Placeholder 0"/>
+          <p:cNvPr id="8" name="Slide Number Placeholder 0"/>
           <p:cNvSpPr>
             <a:spLocks noGrp="1"/>
           </p:cNvSpPr>
@@ -5932,8 +6122,8 @@
         </p:nvSpPr>
         <p:spPr>
           <a:xfrm>
-            <a:off x="923544" y="1325880"/>
-            <a:ext cx="10344607" cy="5001768"/>
+            <a:off x="923544" y="1289304"/>
+            <a:ext cx="10344607" cy="1008888"/>
           </a:xfrm>
           <a:prstGeom prst="rect">
             <a:avLst/>
@@ -5945,7 +6135,7 @@
           <a:bodyPr wrap="square" lIns="0" tIns="0" rIns="0" bIns="0" rtlCol="0" anchor="t"/>
           <a:lstStyle/>
           <a:p>
-            <a:pPr algn="r" indent="0" marL="0">
+            <a:pPr rtl="1" algn="r" indent="0" marL="0">
               <a:lnSpc>
                 <a:spcPts val="2600"/>
               </a:lnSpc>
@@ -5964,14 +6154,33 @@
             </a:r>
             <a:endParaRPr lang="en-US" sz="1700" dirty="0"/>
           </a:p>
-          <a:p>
-            <a:pPr algn="r" indent="0" marL="0">
+        </p:txBody>
+      </p:sp>
+      <p:sp>
+        <p:nvSpPr>
+          <p:cNvPr id="6" name="Text 4"/>
+          <p:cNvSpPr txBox="1"/>
+          <p:nvPr/>
+        </p:nvSpPr>
+        <p:spPr>
+          <a:xfrm>
+            <a:off x="923544" y="2387092"/>
+            <a:ext cx="10344607" cy="1339088"/>
+          </a:xfrm>
+          <a:prstGeom prst="rect">
+            <a:avLst/>
+          </a:prstGeom>
+          <a:noFill/>
+          <a:ln/>
+        </p:spPr>
+        <p:txBody>
+          <a:bodyPr wrap="square" lIns="0" tIns="0" rIns="0" bIns="0" rtlCol="0" anchor="t"/>
+          <a:lstStyle/>
+          <a:p>
+            <a:pPr rtl="1" algn="r" indent="0" marL="0">
               <a:lnSpc>
                 <a:spcPts val="2600"/>
               </a:lnSpc>
-              <a:spcBef>
-                <a:spcPts val="700"/>
-              </a:spcBef>
               <a:buNone/>
             </a:pPr>
             <a:r>
@@ -5987,14 +6196,33 @@
             </a:r>
             <a:endParaRPr lang="en-US" sz="1700" dirty="0"/>
           </a:p>
-          <a:p>
-            <a:pPr algn="r" indent="0" marL="0">
+        </p:txBody>
+      </p:sp>
+      <p:sp>
+        <p:nvSpPr>
+          <p:cNvPr id="7" name="Text 5"/>
+          <p:cNvSpPr txBox="1"/>
+          <p:nvPr/>
+        </p:nvSpPr>
+        <p:spPr>
+          <a:xfrm>
+            <a:off x="923544" y="3815080"/>
+            <a:ext cx="10344607" cy="1008888"/>
+          </a:xfrm>
+          <a:prstGeom prst="rect">
+            <a:avLst/>
+          </a:prstGeom>
+          <a:noFill/>
+          <a:ln/>
+        </p:spPr>
+        <p:txBody>
+          <a:bodyPr wrap="square" lIns="0" tIns="0" rIns="0" bIns="0" rtlCol="0" anchor="t"/>
+          <a:lstStyle/>
+          <a:p>
+            <a:pPr rtl="1" algn="r" indent="0" marL="0">
               <a:lnSpc>
                 <a:spcPts val="2600"/>
               </a:lnSpc>
-              <a:spcBef>
-                <a:spcPts val="700"/>
-              </a:spcBef>
               <a:buNone/>
             </a:pPr>
             <a:r>
@@ -6010,14 +6238,33 @@
             </a:r>
             <a:endParaRPr lang="en-US" sz="1700" dirty="0"/>
           </a:p>
-          <a:p>
-            <a:pPr algn="r" indent="0" marL="0">
+        </p:txBody>
+      </p:sp>
+      <p:sp>
+        <p:nvSpPr>
+          <p:cNvPr id="8" name="Text 6"/>
+          <p:cNvSpPr txBox="1"/>
+          <p:nvPr/>
+        </p:nvSpPr>
+        <p:spPr>
+          <a:xfrm>
+            <a:off x="923544" y="4912868"/>
+            <a:ext cx="10344607" cy="678688"/>
+          </a:xfrm>
+          <a:prstGeom prst="rect">
+            <a:avLst/>
+          </a:prstGeom>
+          <a:noFill/>
+          <a:ln/>
+        </p:spPr>
+        <p:txBody>
+          <a:bodyPr wrap="square" lIns="0" tIns="0" rIns="0" bIns="0" rtlCol="0" anchor="t"/>
+          <a:lstStyle/>
+          <a:p>
+            <a:pPr rtl="1" algn="r" indent="0" marL="0">
               <a:lnSpc>
                 <a:spcPts val="2600"/>
               </a:lnSpc>
-              <a:spcBef>
-                <a:spcPts val="700"/>
-              </a:spcBef>
               <a:buNone/>
             </a:pPr>
             <a:r>
@@ -6037,7 +6284,7 @@
       </p:sp>
       <p:sp>
         <p:nvSpPr>
-          <p:cNvPr id="6" name="Slide Number Placeholder 0"/>
+          <p:cNvPr id="9" name="Slide Number Placeholder 0"/>
           <p:cNvSpPr>
             <a:spLocks noGrp="1"/>
           </p:cNvSpPr>
@@ -6221,8 +6468,8 @@
         </p:nvSpPr>
         <p:spPr>
           <a:xfrm>
-            <a:off x="923544" y="1325880"/>
-            <a:ext cx="10344607" cy="5001768"/>
+            <a:off x="923544" y="1289304"/>
+            <a:ext cx="10344607" cy="1339088"/>
           </a:xfrm>
           <a:prstGeom prst="rect">
             <a:avLst/>
@@ -6234,7 +6481,7 @@
           <a:bodyPr wrap="square" lIns="0" tIns="0" rIns="0" bIns="0" rtlCol="0" anchor="t"/>
           <a:lstStyle/>
           <a:p>
-            <a:pPr algn="r" indent="0" marL="0">
+            <a:pPr rtl="1" algn="r" indent="0" marL="0">
               <a:lnSpc>
                 <a:spcPts val="2600"/>
               </a:lnSpc>
@@ -6253,14 +6500,33 @@
             </a:r>
             <a:endParaRPr lang="en-US" sz="1700" dirty="0"/>
           </a:p>
-          <a:p>
-            <a:pPr algn="r" indent="0" marL="0">
+        </p:txBody>
+      </p:sp>
+      <p:sp>
+        <p:nvSpPr>
+          <p:cNvPr id="6" name="Text 4"/>
+          <p:cNvSpPr txBox="1"/>
+          <p:nvPr/>
+        </p:nvSpPr>
+        <p:spPr>
+          <a:xfrm>
+            <a:off x="923544" y="2717292"/>
+            <a:ext cx="10344607" cy="1339088"/>
+          </a:xfrm>
+          <a:prstGeom prst="rect">
+            <a:avLst/>
+          </a:prstGeom>
+          <a:noFill/>
+          <a:ln/>
+        </p:spPr>
+        <p:txBody>
+          <a:bodyPr wrap="square" lIns="0" tIns="0" rIns="0" bIns="0" rtlCol="0" anchor="t"/>
+          <a:lstStyle/>
+          <a:p>
+            <a:pPr rtl="1" algn="r" indent="0" marL="0">
               <a:lnSpc>
                 <a:spcPts val="2600"/>
               </a:lnSpc>
-              <a:spcBef>
-                <a:spcPts val="700"/>
-              </a:spcBef>
               <a:buNone/>
             </a:pPr>
             <a:r>
@@ -6276,14 +6542,33 @@
             </a:r>
             <a:endParaRPr lang="en-US" sz="1700" dirty="0"/>
           </a:p>
-          <a:p>
-            <a:pPr algn="r" indent="0" marL="0">
+        </p:txBody>
+      </p:sp>
+      <p:sp>
+        <p:nvSpPr>
+          <p:cNvPr id="7" name="Text 5"/>
+          <p:cNvSpPr txBox="1"/>
+          <p:nvPr/>
+        </p:nvSpPr>
+        <p:spPr>
+          <a:xfrm>
+            <a:off x="923544" y="4145280"/>
+            <a:ext cx="10344607" cy="1008888"/>
+          </a:xfrm>
+          <a:prstGeom prst="rect">
+            <a:avLst/>
+          </a:prstGeom>
+          <a:noFill/>
+          <a:ln/>
+        </p:spPr>
+        <p:txBody>
+          <a:bodyPr wrap="square" lIns="0" tIns="0" rIns="0" bIns="0" rtlCol="0" anchor="t"/>
+          <a:lstStyle/>
+          <a:p>
+            <a:pPr rtl="1" algn="r" indent="0" marL="0">
               <a:lnSpc>
                 <a:spcPts val="2600"/>
               </a:lnSpc>
-              <a:spcBef>
-                <a:spcPts val="700"/>
-              </a:spcBef>
               <a:buNone/>
             </a:pPr>
             <a:r>
@@ -6303,7 +6588,7 @@
       </p:sp>
       <p:sp>
         <p:nvSpPr>
-          <p:cNvPr id="6" name="Slide Number Placeholder 0"/>
+          <p:cNvPr id="8" name="Slide Number Placeholder 0"/>
           <p:cNvSpPr>
             <a:spLocks noGrp="1"/>
           </p:cNvSpPr>
@@ -6527,7 +6812,7 @@
         <p:spPr>
           <a:xfrm>
             <a:off x="6385255" y="1554480"/>
-            <a:ext cx="4882896" cy="4572000"/>
+            <a:ext cx="4882896" cy="450088"/>
           </a:xfrm>
           <a:prstGeom prst="rect">
             <a:avLst/>
@@ -6539,7 +6824,7 @@
           <a:bodyPr wrap="square" lIns="0" tIns="0" rIns="0" bIns="0" rtlCol="0" anchor="t"/>
           <a:lstStyle/>
           <a:p>
-            <a:pPr algn="r" indent="0" marL="0">
+            <a:pPr rtl="1" algn="r" indent="0" marL="0">
               <a:lnSpc>
                 <a:spcPts val="1700"/>
               </a:lnSpc>
@@ -6558,14 +6843,33 @@
             </a:r>
             <a:endParaRPr lang="en-US" sz="1250" dirty="0"/>
           </a:p>
-          <a:p>
-            <a:pPr algn="r" indent="0" marL="0">
+        </p:txBody>
+      </p:sp>
+      <p:sp>
+        <p:nvSpPr>
+          <p:cNvPr id="7" name="Text 5"/>
+          <p:cNvSpPr txBox="1"/>
+          <p:nvPr/>
+        </p:nvSpPr>
+        <p:spPr>
+          <a:xfrm>
+            <a:off x="6385255" y="2080768"/>
+            <a:ext cx="4882896" cy="450088"/>
+          </a:xfrm>
+          <a:prstGeom prst="rect">
+            <a:avLst/>
+          </a:prstGeom>
+          <a:noFill/>
+          <a:ln/>
+        </p:spPr>
+        <p:txBody>
+          <a:bodyPr wrap="square" lIns="0" tIns="0" rIns="0" bIns="0" rtlCol="0" anchor="t"/>
+          <a:lstStyle/>
+          <a:p>
+            <a:pPr rtl="1" algn="r" indent="0" marL="0">
               <a:lnSpc>
                 <a:spcPts val="1700"/>
               </a:lnSpc>
-              <a:spcBef>
-                <a:spcPts val="600"/>
-              </a:spcBef>
               <a:buNone/>
             </a:pPr>
             <a:r>
@@ -6581,14 +6885,33 @@
             </a:r>
             <a:endParaRPr lang="en-US" sz="1250" dirty="0"/>
           </a:p>
-          <a:p>
-            <a:pPr algn="r" indent="0" marL="0">
+        </p:txBody>
+      </p:sp>
+      <p:sp>
+        <p:nvSpPr>
+          <p:cNvPr id="8" name="Text 6"/>
+          <p:cNvSpPr txBox="1"/>
+          <p:nvPr/>
+        </p:nvSpPr>
+        <p:spPr>
+          <a:xfrm>
+            <a:off x="6385255" y="2607056"/>
+            <a:ext cx="4882896" cy="234188"/>
+          </a:xfrm>
+          <a:prstGeom prst="rect">
+            <a:avLst/>
+          </a:prstGeom>
+          <a:noFill/>
+          <a:ln/>
+        </p:spPr>
+        <p:txBody>
+          <a:bodyPr wrap="square" lIns="0" tIns="0" rIns="0" bIns="0" rtlCol="0" anchor="t"/>
+          <a:lstStyle/>
+          <a:p>
+            <a:pPr rtl="1" algn="r" indent="0" marL="0">
               <a:lnSpc>
                 <a:spcPts val="1700"/>
               </a:lnSpc>
-              <a:spcBef>
-                <a:spcPts val="600"/>
-              </a:spcBef>
               <a:buNone/>
             </a:pPr>
             <a:r>
@@ -6604,14 +6927,33 @@
             </a:r>
             <a:endParaRPr lang="en-US" sz="1250" dirty="0"/>
           </a:p>
-          <a:p>
-            <a:pPr algn="r" indent="0" marL="0">
+        </p:txBody>
+      </p:sp>
+      <p:sp>
+        <p:nvSpPr>
+          <p:cNvPr id="9" name="Text 7"/>
+          <p:cNvSpPr txBox="1"/>
+          <p:nvPr/>
+        </p:nvSpPr>
+        <p:spPr>
+          <a:xfrm>
+            <a:off x="6385255" y="2917444"/>
+            <a:ext cx="4882896" cy="234188"/>
+          </a:xfrm>
+          <a:prstGeom prst="rect">
+            <a:avLst/>
+          </a:prstGeom>
+          <a:noFill/>
+          <a:ln/>
+        </p:spPr>
+        <p:txBody>
+          <a:bodyPr wrap="square" lIns="0" tIns="0" rIns="0" bIns="0" rtlCol="0" anchor="t"/>
+          <a:lstStyle/>
+          <a:p>
+            <a:pPr rtl="1" algn="r" indent="0" marL="0">
               <a:lnSpc>
                 <a:spcPts val="1700"/>
               </a:lnSpc>
-              <a:spcBef>
-                <a:spcPts val="600"/>
-              </a:spcBef>
               <a:buNone/>
             </a:pPr>
             <a:r>
@@ -6627,14 +6969,33 @@
             </a:r>
             <a:endParaRPr lang="en-US" sz="1250" dirty="0"/>
           </a:p>
-          <a:p>
-            <a:pPr algn="r" indent="0" marL="0">
+        </p:txBody>
+      </p:sp>
+      <p:sp>
+        <p:nvSpPr>
+          <p:cNvPr id="10" name="Text 8"/>
+          <p:cNvSpPr txBox="1"/>
+          <p:nvPr/>
+        </p:nvSpPr>
+        <p:spPr>
+          <a:xfrm>
+            <a:off x="6385255" y="3227832"/>
+            <a:ext cx="4882896" cy="234188"/>
+          </a:xfrm>
+          <a:prstGeom prst="rect">
+            <a:avLst/>
+          </a:prstGeom>
+          <a:noFill/>
+          <a:ln/>
+        </p:spPr>
+        <p:txBody>
+          <a:bodyPr wrap="square" lIns="0" tIns="0" rIns="0" bIns="0" rtlCol="0" anchor="t"/>
+          <a:lstStyle/>
+          <a:p>
+            <a:pPr rtl="1" algn="r" indent="0" marL="0">
               <a:lnSpc>
                 <a:spcPts val="1700"/>
               </a:lnSpc>
-              <a:spcBef>
-                <a:spcPts val="600"/>
-              </a:spcBef>
               <a:buNone/>
             </a:pPr>
             <a:r>
@@ -6650,14 +7011,33 @@
             </a:r>
             <a:endParaRPr lang="en-US" sz="1250" dirty="0"/>
           </a:p>
-          <a:p>
-            <a:pPr algn="r" indent="0" marL="0">
+        </p:txBody>
+      </p:sp>
+      <p:sp>
+        <p:nvSpPr>
+          <p:cNvPr id="11" name="Text 9"/>
+          <p:cNvSpPr txBox="1"/>
+          <p:nvPr/>
+        </p:nvSpPr>
+        <p:spPr>
+          <a:xfrm>
+            <a:off x="6385255" y="3538220"/>
+            <a:ext cx="4882896" cy="450088"/>
+          </a:xfrm>
+          <a:prstGeom prst="rect">
+            <a:avLst/>
+          </a:prstGeom>
+          <a:noFill/>
+          <a:ln/>
+        </p:spPr>
+        <p:txBody>
+          <a:bodyPr wrap="square" lIns="0" tIns="0" rIns="0" bIns="0" rtlCol="0" anchor="t"/>
+          <a:lstStyle/>
+          <a:p>
+            <a:pPr rtl="1" algn="r" indent="0" marL="0">
               <a:lnSpc>
                 <a:spcPts val="1700"/>
               </a:lnSpc>
-              <a:spcBef>
-                <a:spcPts val="600"/>
-              </a:spcBef>
               <a:buNone/>
             </a:pPr>
             <a:r>
@@ -6673,14 +7053,33 @@
             </a:r>
             <a:endParaRPr lang="en-US" sz="1250" dirty="0"/>
           </a:p>
-          <a:p>
-            <a:pPr algn="r" indent="0" marL="0">
+        </p:txBody>
+      </p:sp>
+      <p:sp>
+        <p:nvSpPr>
+          <p:cNvPr id="12" name="Text 10"/>
+          <p:cNvSpPr txBox="1"/>
+          <p:nvPr/>
+        </p:nvSpPr>
+        <p:spPr>
+          <a:xfrm>
+            <a:off x="6385255" y="4064508"/>
+            <a:ext cx="4882896" cy="234188"/>
+          </a:xfrm>
+          <a:prstGeom prst="rect">
+            <a:avLst/>
+          </a:prstGeom>
+          <a:noFill/>
+          <a:ln/>
+        </p:spPr>
+        <p:txBody>
+          <a:bodyPr wrap="square" lIns="0" tIns="0" rIns="0" bIns="0" rtlCol="0" anchor="t"/>
+          <a:lstStyle/>
+          <a:p>
+            <a:pPr rtl="1" algn="r" indent="0" marL="0">
               <a:lnSpc>
                 <a:spcPts val="1700"/>
               </a:lnSpc>
-              <a:spcBef>
-                <a:spcPts val="600"/>
-              </a:spcBef>
               <a:buNone/>
             </a:pPr>
             <a:r>
@@ -6696,14 +7095,33 @@
             </a:r>
             <a:endParaRPr lang="en-US" sz="1250" dirty="0"/>
           </a:p>
-          <a:p>
-            <a:pPr algn="r" indent="0" marL="0">
+        </p:txBody>
+      </p:sp>
+      <p:sp>
+        <p:nvSpPr>
+          <p:cNvPr id="13" name="Text 11"/>
+          <p:cNvSpPr txBox="1"/>
+          <p:nvPr/>
+        </p:nvSpPr>
+        <p:spPr>
+          <a:xfrm>
+            <a:off x="6385255" y="4374896"/>
+            <a:ext cx="4882896" cy="450088"/>
+          </a:xfrm>
+          <a:prstGeom prst="rect">
+            <a:avLst/>
+          </a:prstGeom>
+          <a:noFill/>
+          <a:ln/>
+        </p:spPr>
+        <p:txBody>
+          <a:bodyPr wrap="square" lIns="0" tIns="0" rIns="0" bIns="0" rtlCol="0" anchor="t"/>
+          <a:lstStyle/>
+          <a:p>
+            <a:pPr rtl="1" algn="r" indent="0" marL="0">
               <a:lnSpc>
                 <a:spcPts val="1700"/>
               </a:lnSpc>
-              <a:spcBef>
-                <a:spcPts val="600"/>
-              </a:spcBef>
               <a:buNone/>
             </a:pPr>
             <a:r>
@@ -6719,14 +7137,33 @@
             </a:r>
             <a:endParaRPr lang="en-US" sz="1250" dirty="0"/>
           </a:p>
-          <a:p>
-            <a:pPr algn="r" indent="0" marL="0">
+        </p:txBody>
+      </p:sp>
+      <p:sp>
+        <p:nvSpPr>
+          <p:cNvPr id="14" name="Text 12"/>
+          <p:cNvSpPr txBox="1"/>
+          <p:nvPr/>
+        </p:nvSpPr>
+        <p:spPr>
+          <a:xfrm>
+            <a:off x="6385255" y="4901184"/>
+            <a:ext cx="4882896" cy="450088"/>
+          </a:xfrm>
+          <a:prstGeom prst="rect">
+            <a:avLst/>
+          </a:prstGeom>
+          <a:noFill/>
+          <a:ln/>
+        </p:spPr>
+        <p:txBody>
+          <a:bodyPr wrap="square" lIns="0" tIns="0" rIns="0" bIns="0" rtlCol="0" anchor="t"/>
+          <a:lstStyle/>
+          <a:p>
+            <a:pPr rtl="1" algn="r" indent="0" marL="0">
               <a:lnSpc>
                 <a:spcPts val="1700"/>
               </a:lnSpc>
-              <a:spcBef>
-                <a:spcPts val="600"/>
-              </a:spcBef>
               <a:buNone/>
             </a:pPr>
             <a:r>
@@ -6742,14 +7179,33 @@
             </a:r>
             <a:endParaRPr lang="en-US" sz="1250" dirty="0"/>
           </a:p>
-          <a:p>
-            <a:pPr algn="r" indent="0" marL="0">
+        </p:txBody>
+      </p:sp>
+      <p:sp>
+        <p:nvSpPr>
+          <p:cNvPr id="15" name="Text 13"/>
+          <p:cNvSpPr txBox="1"/>
+          <p:nvPr/>
+        </p:nvSpPr>
+        <p:spPr>
+          <a:xfrm>
+            <a:off x="6385255" y="5427472"/>
+            <a:ext cx="4882896" cy="234188"/>
+          </a:xfrm>
+          <a:prstGeom prst="rect">
+            <a:avLst/>
+          </a:prstGeom>
+          <a:noFill/>
+          <a:ln/>
+        </p:spPr>
+        <p:txBody>
+          <a:bodyPr wrap="square" lIns="0" tIns="0" rIns="0" bIns="0" rtlCol="0" anchor="t"/>
+          <a:lstStyle/>
+          <a:p>
+            <a:pPr rtl="1" algn="r" indent="0" marL="0">
               <a:lnSpc>
                 <a:spcPts val="1700"/>
               </a:lnSpc>
-              <a:spcBef>
-                <a:spcPts val="600"/>
-              </a:spcBef>
               <a:buNone/>
             </a:pPr>
             <a:r>
@@ -6769,14 +7225,14 @@
       </p:sp>
       <p:sp>
         <p:nvSpPr>
-          <p:cNvPr id="7" name="Text 5"/>
+          <p:cNvPr id="16" name="Text 14"/>
           <p:cNvSpPr txBox="1"/>
           <p:nvPr/>
         </p:nvSpPr>
         <p:spPr>
           <a:xfrm>
             <a:off x="923544" y="1554480"/>
-            <a:ext cx="4882896" cy="4572000"/>
+            <a:ext cx="4882896" cy="234188"/>
           </a:xfrm>
           <a:prstGeom prst="rect">
             <a:avLst/>
@@ -6788,7 +7244,7 @@
           <a:bodyPr wrap="square" lIns="0" tIns="0" rIns="0" bIns="0" rtlCol="0" anchor="t"/>
           <a:lstStyle/>
           <a:p>
-            <a:pPr algn="r" indent="0" marL="0">
+            <a:pPr rtl="1" algn="r" indent="0" marL="0">
               <a:lnSpc>
                 <a:spcPts val="1700"/>
               </a:lnSpc>
@@ -6807,14 +7263,33 @@
             </a:r>
             <a:endParaRPr lang="en-US" sz="1250" dirty="0"/>
           </a:p>
-          <a:p>
-            <a:pPr algn="r" indent="0" marL="0">
+        </p:txBody>
+      </p:sp>
+      <p:sp>
+        <p:nvSpPr>
+          <p:cNvPr id="17" name="Text 15"/>
+          <p:cNvSpPr txBox="1"/>
+          <p:nvPr/>
+        </p:nvSpPr>
+        <p:spPr>
+          <a:xfrm>
+            <a:off x="923544" y="1864868"/>
+            <a:ext cx="4882896" cy="234188"/>
+          </a:xfrm>
+          <a:prstGeom prst="rect">
+            <a:avLst/>
+          </a:prstGeom>
+          <a:noFill/>
+          <a:ln/>
+        </p:spPr>
+        <p:txBody>
+          <a:bodyPr wrap="square" lIns="0" tIns="0" rIns="0" bIns="0" rtlCol="0" anchor="t"/>
+          <a:lstStyle/>
+          <a:p>
+            <a:pPr rtl="1" algn="r" indent="0" marL="0">
               <a:lnSpc>
                 <a:spcPts val="1700"/>
               </a:lnSpc>
-              <a:spcBef>
-                <a:spcPts val="600"/>
-              </a:spcBef>
               <a:buNone/>
             </a:pPr>
             <a:r>
@@ -6830,14 +7305,33 @@
             </a:r>
             <a:endParaRPr lang="en-US" sz="1250" dirty="0"/>
           </a:p>
-          <a:p>
-            <a:pPr algn="r" indent="0" marL="0">
+        </p:txBody>
+      </p:sp>
+      <p:sp>
+        <p:nvSpPr>
+          <p:cNvPr id="18" name="Text 16"/>
+          <p:cNvSpPr txBox="1"/>
+          <p:nvPr/>
+        </p:nvSpPr>
+        <p:spPr>
+          <a:xfrm>
+            <a:off x="923544" y="2175256"/>
+            <a:ext cx="4882896" cy="450088"/>
+          </a:xfrm>
+          <a:prstGeom prst="rect">
+            <a:avLst/>
+          </a:prstGeom>
+          <a:noFill/>
+          <a:ln/>
+        </p:spPr>
+        <p:txBody>
+          <a:bodyPr wrap="square" lIns="0" tIns="0" rIns="0" bIns="0" rtlCol="0" anchor="t"/>
+          <a:lstStyle/>
+          <a:p>
+            <a:pPr rtl="1" algn="r" indent="0" marL="0">
               <a:lnSpc>
                 <a:spcPts val="1700"/>
               </a:lnSpc>
-              <a:spcBef>
-                <a:spcPts val="600"/>
-              </a:spcBef>
               <a:buNone/>
             </a:pPr>
             <a:r>
@@ -6853,14 +7347,33 @@
             </a:r>
             <a:endParaRPr lang="en-US" sz="1250" dirty="0"/>
           </a:p>
-          <a:p>
-            <a:pPr algn="r" indent="0" marL="0">
+        </p:txBody>
+      </p:sp>
+      <p:sp>
+        <p:nvSpPr>
+          <p:cNvPr id="19" name="Text 17"/>
+          <p:cNvSpPr txBox="1"/>
+          <p:nvPr/>
+        </p:nvSpPr>
+        <p:spPr>
+          <a:xfrm>
+            <a:off x="923544" y="2701544"/>
+            <a:ext cx="4882896" cy="450088"/>
+          </a:xfrm>
+          <a:prstGeom prst="rect">
+            <a:avLst/>
+          </a:prstGeom>
+          <a:noFill/>
+          <a:ln/>
+        </p:spPr>
+        <p:txBody>
+          <a:bodyPr wrap="square" lIns="0" tIns="0" rIns="0" bIns="0" rtlCol="0" anchor="t"/>
+          <a:lstStyle/>
+          <a:p>
+            <a:pPr rtl="1" algn="r" indent="0" marL="0">
               <a:lnSpc>
                 <a:spcPts val="1700"/>
               </a:lnSpc>
-              <a:spcBef>
-                <a:spcPts val="600"/>
-              </a:spcBef>
               <a:buNone/>
             </a:pPr>
             <a:r>
@@ -6876,14 +7389,33 @@
             </a:r>
             <a:endParaRPr lang="en-US" sz="1250" dirty="0"/>
           </a:p>
-          <a:p>
-            <a:pPr algn="r" indent="0" marL="0">
+        </p:txBody>
+      </p:sp>
+      <p:sp>
+        <p:nvSpPr>
+          <p:cNvPr id="20" name="Text 18"/>
+          <p:cNvSpPr txBox="1"/>
+          <p:nvPr/>
+        </p:nvSpPr>
+        <p:spPr>
+          <a:xfrm>
+            <a:off x="923544" y="3227832"/>
+            <a:ext cx="4882896" cy="234188"/>
+          </a:xfrm>
+          <a:prstGeom prst="rect">
+            <a:avLst/>
+          </a:prstGeom>
+          <a:noFill/>
+          <a:ln/>
+        </p:spPr>
+        <p:txBody>
+          <a:bodyPr wrap="square" lIns="0" tIns="0" rIns="0" bIns="0" rtlCol="0" anchor="t"/>
+          <a:lstStyle/>
+          <a:p>
+            <a:pPr rtl="1" algn="r" indent="0" marL="0">
               <a:lnSpc>
                 <a:spcPts val="1700"/>
               </a:lnSpc>
-              <a:spcBef>
-                <a:spcPts val="600"/>
-              </a:spcBef>
               <a:buNone/>
             </a:pPr>
             <a:r>
@@ -6899,14 +7431,33 @@
             </a:r>
             <a:endParaRPr lang="en-US" sz="1250" dirty="0"/>
           </a:p>
-          <a:p>
-            <a:pPr algn="r" indent="0" marL="0">
+        </p:txBody>
+      </p:sp>
+      <p:sp>
+        <p:nvSpPr>
+          <p:cNvPr id="21" name="Text 19"/>
+          <p:cNvSpPr txBox="1"/>
+          <p:nvPr/>
+        </p:nvSpPr>
+        <p:spPr>
+          <a:xfrm>
+            <a:off x="923544" y="3538220"/>
+            <a:ext cx="4882896" cy="450088"/>
+          </a:xfrm>
+          <a:prstGeom prst="rect">
+            <a:avLst/>
+          </a:prstGeom>
+          <a:noFill/>
+          <a:ln/>
+        </p:spPr>
+        <p:txBody>
+          <a:bodyPr wrap="square" lIns="0" tIns="0" rIns="0" bIns="0" rtlCol="0" anchor="t"/>
+          <a:lstStyle/>
+          <a:p>
+            <a:pPr rtl="1" algn="r" indent="0" marL="0">
               <a:lnSpc>
                 <a:spcPts val="1700"/>
               </a:lnSpc>
-              <a:spcBef>
-                <a:spcPts val="600"/>
-              </a:spcBef>
               <a:buNone/>
             </a:pPr>
             <a:r>
@@ -6922,14 +7473,33 @@
             </a:r>
             <a:endParaRPr lang="en-US" sz="1250" dirty="0"/>
           </a:p>
-          <a:p>
-            <a:pPr algn="r" indent="0" marL="0">
+        </p:txBody>
+      </p:sp>
+      <p:sp>
+        <p:nvSpPr>
+          <p:cNvPr id="22" name="Text 20"/>
+          <p:cNvSpPr txBox="1"/>
+          <p:nvPr/>
+        </p:nvSpPr>
+        <p:spPr>
+          <a:xfrm>
+            <a:off x="923544" y="4064508"/>
+            <a:ext cx="4882896" cy="450088"/>
+          </a:xfrm>
+          <a:prstGeom prst="rect">
+            <a:avLst/>
+          </a:prstGeom>
+          <a:noFill/>
+          <a:ln/>
+        </p:spPr>
+        <p:txBody>
+          <a:bodyPr wrap="square" lIns="0" tIns="0" rIns="0" bIns="0" rtlCol="0" anchor="t"/>
+          <a:lstStyle/>
+          <a:p>
+            <a:pPr rtl="1" algn="r" indent="0" marL="0">
               <a:lnSpc>
                 <a:spcPts val="1700"/>
               </a:lnSpc>
-              <a:spcBef>
-                <a:spcPts val="600"/>
-              </a:spcBef>
               <a:buNone/>
             </a:pPr>
             <a:r>
@@ -6945,14 +7515,33 @@
             </a:r>
             <a:endParaRPr lang="en-US" sz="1250" dirty="0"/>
           </a:p>
-          <a:p>
-            <a:pPr algn="r" indent="0" marL="0">
+        </p:txBody>
+      </p:sp>
+      <p:sp>
+        <p:nvSpPr>
+          <p:cNvPr id="23" name="Text 21"/>
+          <p:cNvSpPr txBox="1"/>
+          <p:nvPr/>
+        </p:nvSpPr>
+        <p:spPr>
+          <a:xfrm>
+            <a:off x="923544" y="4590796"/>
+            <a:ext cx="4882896" cy="450088"/>
+          </a:xfrm>
+          <a:prstGeom prst="rect">
+            <a:avLst/>
+          </a:prstGeom>
+          <a:noFill/>
+          <a:ln/>
+        </p:spPr>
+        <p:txBody>
+          <a:bodyPr wrap="square" lIns="0" tIns="0" rIns="0" bIns="0" rtlCol="0" anchor="t"/>
+          <a:lstStyle/>
+          <a:p>
+            <a:pPr rtl="1" algn="r" indent="0" marL="0">
               <a:lnSpc>
                 <a:spcPts val="1700"/>
               </a:lnSpc>
-              <a:spcBef>
-                <a:spcPts val="600"/>
-              </a:spcBef>
               <a:buNone/>
             </a:pPr>
             <a:r>
@@ -6968,14 +7557,33 @@
             </a:r>
             <a:endParaRPr lang="en-US" sz="1250" dirty="0"/>
           </a:p>
-          <a:p>
-            <a:pPr algn="r" indent="0" marL="0">
+        </p:txBody>
+      </p:sp>
+      <p:sp>
+        <p:nvSpPr>
+          <p:cNvPr id="24" name="Text 22"/>
+          <p:cNvSpPr txBox="1"/>
+          <p:nvPr/>
+        </p:nvSpPr>
+        <p:spPr>
+          <a:xfrm>
+            <a:off x="923544" y="5117084"/>
+            <a:ext cx="4882896" cy="450088"/>
+          </a:xfrm>
+          <a:prstGeom prst="rect">
+            <a:avLst/>
+          </a:prstGeom>
+          <a:noFill/>
+          <a:ln/>
+        </p:spPr>
+        <p:txBody>
+          <a:bodyPr wrap="square" lIns="0" tIns="0" rIns="0" bIns="0" rtlCol="0" anchor="t"/>
+          <a:lstStyle/>
+          <a:p>
+            <a:pPr rtl="1" algn="r" indent="0" marL="0">
               <a:lnSpc>
                 <a:spcPts val="1700"/>
               </a:lnSpc>
-              <a:spcBef>
-                <a:spcPts val="600"/>
-              </a:spcBef>
               <a:buNone/>
             </a:pPr>
             <a:r>
@@ -6991,14 +7599,33 @@
             </a:r>
             <a:endParaRPr lang="en-US" sz="1250" dirty="0"/>
           </a:p>
-          <a:p>
-            <a:pPr algn="r" indent="0" marL="0">
+        </p:txBody>
+      </p:sp>
+      <p:sp>
+        <p:nvSpPr>
+          <p:cNvPr id="25" name="Text 23"/>
+          <p:cNvSpPr txBox="1"/>
+          <p:nvPr/>
+        </p:nvSpPr>
+        <p:spPr>
+          <a:xfrm>
+            <a:off x="923544" y="5643372"/>
+            <a:ext cx="4882896" cy="234188"/>
+          </a:xfrm>
+          <a:prstGeom prst="rect">
+            <a:avLst/>
+          </a:prstGeom>
+          <a:noFill/>
+          <a:ln/>
+        </p:spPr>
+        <p:txBody>
+          <a:bodyPr wrap="square" lIns="0" tIns="0" rIns="0" bIns="0" rtlCol="0" anchor="t"/>
+          <a:lstStyle/>
+          <a:p>
+            <a:pPr rtl="1" algn="r" indent="0" marL="0">
               <a:lnSpc>
                 <a:spcPts val="1700"/>
               </a:lnSpc>
-              <a:spcBef>
-                <a:spcPts val="600"/>
-              </a:spcBef>
               <a:buNone/>
             </a:pPr>
             <a:r>
@@ -7018,7 +7645,7 @@
       </p:sp>
       <p:sp>
         <p:nvSpPr>
-          <p:cNvPr id="8" name="Slide Number Placeholder 0"/>
+          <p:cNvPr id="26" name="Slide Number Placeholder 0"/>
           <p:cNvSpPr>
             <a:spLocks noGrp="1"/>
           </p:cNvSpPr>
@@ -7434,8 +8061,8 @@
         </p:nvSpPr>
         <p:spPr>
           <a:xfrm>
-            <a:off x="923544" y="1325880"/>
-            <a:ext cx="10344607" cy="5001768"/>
+            <a:off x="923544" y="1289304"/>
+            <a:ext cx="10344607" cy="1339088"/>
           </a:xfrm>
           <a:prstGeom prst="rect">
             <a:avLst/>
@@ -7447,7 +8074,7 @@
           <a:bodyPr wrap="square" lIns="0" tIns="0" rIns="0" bIns="0" rtlCol="0" anchor="t"/>
           <a:lstStyle/>
           <a:p>
-            <a:pPr algn="r" indent="0" marL="0">
+            <a:pPr rtl="1" algn="r" indent="0" marL="0">
               <a:lnSpc>
                 <a:spcPts val="2600"/>
               </a:lnSpc>
@@ -7466,14 +8093,33 @@
             </a:r>
             <a:endParaRPr lang="en-US" sz="1700" dirty="0"/>
           </a:p>
-          <a:p>
-            <a:pPr algn="r" indent="0" marL="0">
+        </p:txBody>
+      </p:sp>
+      <p:sp>
+        <p:nvSpPr>
+          <p:cNvPr id="6" name="Text 4"/>
+          <p:cNvSpPr txBox="1"/>
+          <p:nvPr/>
+        </p:nvSpPr>
+        <p:spPr>
+          <a:xfrm>
+            <a:off x="923544" y="2717292"/>
+            <a:ext cx="10344607" cy="1339088"/>
+          </a:xfrm>
+          <a:prstGeom prst="rect">
+            <a:avLst/>
+          </a:prstGeom>
+          <a:noFill/>
+          <a:ln/>
+        </p:spPr>
+        <p:txBody>
+          <a:bodyPr wrap="square" lIns="0" tIns="0" rIns="0" bIns="0" rtlCol="0" anchor="t"/>
+          <a:lstStyle/>
+          <a:p>
+            <a:pPr rtl="1" algn="r" indent="0" marL="0">
               <a:lnSpc>
                 <a:spcPts val="2600"/>
               </a:lnSpc>
-              <a:spcBef>
-                <a:spcPts val="700"/>
-              </a:spcBef>
               <a:buNone/>
             </a:pPr>
             <a:r>
@@ -7489,14 +8135,33 @@
             </a:r>
             <a:endParaRPr lang="en-US" sz="1700" dirty="0"/>
           </a:p>
-          <a:p>
-            <a:pPr algn="r" indent="0" marL="0">
+        </p:txBody>
+      </p:sp>
+      <p:sp>
+        <p:nvSpPr>
+          <p:cNvPr id="7" name="Text 5"/>
+          <p:cNvSpPr txBox="1"/>
+          <p:nvPr/>
+        </p:nvSpPr>
+        <p:spPr>
+          <a:xfrm>
+            <a:off x="923544" y="4145280"/>
+            <a:ext cx="10344607" cy="1008888"/>
+          </a:xfrm>
+          <a:prstGeom prst="rect">
+            <a:avLst/>
+          </a:prstGeom>
+          <a:noFill/>
+          <a:ln/>
+        </p:spPr>
+        <p:txBody>
+          <a:bodyPr wrap="square" lIns="0" tIns="0" rIns="0" bIns="0" rtlCol="0" anchor="t"/>
+          <a:lstStyle/>
+          <a:p>
+            <a:pPr rtl="1" algn="r" indent="0" marL="0">
               <a:lnSpc>
                 <a:spcPts val="2600"/>
               </a:lnSpc>
-              <a:spcBef>
-                <a:spcPts val="700"/>
-              </a:spcBef>
               <a:buNone/>
             </a:pPr>
             <a:r>
@@ -7516,7 +8181,7 @@
       </p:sp>
       <p:sp>
         <p:nvSpPr>
-          <p:cNvPr id="6" name="Slide Number Placeholder 0"/>
+          <p:cNvPr id="8" name="Slide Number Placeholder 0"/>
           <p:cNvSpPr>
             <a:spLocks noGrp="1"/>
           </p:cNvSpPr>
@@ -7700,8 +8365,8 @@
         </p:nvSpPr>
         <p:spPr>
           <a:xfrm>
-            <a:off x="923544" y="1325880"/>
-            <a:ext cx="10344607" cy="5001768"/>
+            <a:off x="923544" y="1289304"/>
+            <a:ext cx="10344607" cy="361188"/>
           </a:xfrm>
           <a:prstGeom prst="rect">
             <a:avLst/>
@@ -7713,13 +8378,97 @@
           <a:bodyPr wrap="square" lIns="0" tIns="0" rIns="0" bIns="0" rtlCol="0" anchor="t"/>
           <a:lstStyle/>
           <a:p>
-            <a:pPr algn="r" indent="0" marL="0">
+            <a:pPr rtl="1" algn="r" indent="0" marL="0">
+              <a:lnSpc>
+                <a:spcPts val="2700"/>
+              </a:lnSpc>
+              <a:buNone/>
+            </a:pPr>
+            <a:r>
+              <a:rPr lang="en-US" sz="1800" b="1" dirty="0">
+                <a:solidFill>
+                  <a:srgbClr val="0E6E7E"/>
+                </a:solidFill>
+                <a:latin typeface="Arial" pitchFamily="34" charset="0"/>
+                <a:ea typeface="Arial" pitchFamily="34" charset="-122"/>
+                <a:cs typeface="Arial" pitchFamily="34" charset="-120"/>
+              </a:rPr>
+              <a:t>‏שאלת המחקר המרכזית‏</a:t>
+            </a:r>
+            <a:endParaRPr lang="en-US" sz="1800" dirty="0"/>
+          </a:p>
+        </p:txBody>
+      </p:sp>
+      <p:sp>
+        <p:nvSpPr>
+          <p:cNvPr id="6" name="Text 4"/>
+          <p:cNvSpPr txBox="1"/>
+          <p:nvPr/>
+        </p:nvSpPr>
+        <p:spPr>
+          <a:xfrm>
+            <a:off x="923544" y="1739392"/>
+            <a:ext cx="10344607" cy="1339088"/>
+          </a:xfrm>
+          <a:prstGeom prst="rect">
+            <a:avLst/>
+          </a:prstGeom>
+          <a:noFill/>
+          <a:ln/>
+        </p:spPr>
+        <p:txBody>
+          <a:bodyPr wrap="square" lIns="0" tIns="0" rIns="0" bIns="0" rtlCol="0" anchor="t"/>
+          <a:lstStyle/>
+          <a:p>
+            <a:pPr rtl="1" algn="r" indent="0" marL="0">
               <a:lnSpc>
                 <a:spcPts val="2600"/>
               </a:lnSpc>
               <a:buNone/>
             </a:pPr>
             <a:r>
+              <a:rPr lang="en-US" sz="1700" dirty="0">
+                <a:solidFill>
+                  <a:srgbClr val="0C3B44"/>
+                </a:solidFill>
+                <a:latin typeface="Arial" pitchFamily="34" charset="0"/>
+                <a:ea typeface="Arial" pitchFamily="34" charset="-122"/>
+                <a:cs typeface="Arial" pitchFamily="34" charset="-120"/>
+              </a:rPr>
+              <a:t>‏מהי ההשפעה של פעילות גופנית ותזונה מאוזנת על הסיכון להתפתחות מחלות כרוניות בקרב מבוגרים, כפי שהיא נתפסת ונחווית על ידי המבוגרים עצמם. לצד שאלה זו נבחנו שלוש שאלות משנה: כיצד תופסים מבוגרים את הקשר בין אורח חייהם לבין בריאותם, מהם הגורמים המסייעים והחוסמים אימוץ של פעילות גופנית ותזונה מאוזנת בחיי היומיום, ומהו תפקידה של מערכת הבריאות כפי שהוא נתפס בעיני המטופלים.‏</a:t>
+            </a:r>
+            <a:endParaRPr lang="en-US" sz="1700" dirty="0"/>
+          </a:p>
+        </p:txBody>
+      </p:sp>
+      <p:sp>
+        <p:nvSpPr>
+          <p:cNvPr id="7" name="Text 5"/>
+          <p:cNvSpPr txBox="1"/>
+          <p:nvPr/>
+        </p:nvSpPr>
+        <p:spPr>
+          <a:xfrm>
+            <a:off x="923544" y="3218180"/>
+            <a:ext cx="10344607" cy="361188"/>
+          </a:xfrm>
+          <a:prstGeom prst="rect">
+            <a:avLst/>
+          </a:prstGeom>
+          <a:noFill/>
+          <a:ln/>
+        </p:spPr>
+        <p:txBody>
+          <a:bodyPr wrap="square" lIns="0" tIns="0" rIns="0" bIns="0" rtlCol="0" anchor="t"/>
+          <a:lstStyle/>
+          <a:p>
+            <a:pPr rtl="1" algn="r" indent="0" marL="0">
+              <a:lnSpc>
+                <a:spcPts val="2700"/>
+              </a:lnSpc>
+              <a:buNone/>
+            </a:pPr>
+            <a:r>
               <a:rPr lang="en-US" sz="1800" b="1" dirty="0">
                 <a:solidFill>
                   <a:srgbClr val="0E6E7E"/>
@@ -7728,18 +8477,37 @@
                 <a:ea typeface="Arial" pitchFamily="34" charset="-122"/>
                 <a:cs typeface="Arial" pitchFamily="34" charset="-120"/>
               </a:rPr>
-              <a:t>‏שאלת המחקר המרכזית‏</a:t>
+              <a:t>‏מטרות המחקר‏</a:t>
             </a:r>
             <a:endParaRPr lang="en-US" sz="1800" dirty="0"/>
           </a:p>
-          <a:p>
-            <a:pPr algn="r" indent="0" marL="0">
+        </p:txBody>
+      </p:sp>
+      <p:sp>
+        <p:nvSpPr>
+          <p:cNvPr id="8" name="Text 6"/>
+          <p:cNvSpPr txBox="1"/>
+          <p:nvPr/>
+        </p:nvSpPr>
+        <p:spPr>
+          <a:xfrm>
+            <a:off x="923544" y="3668268"/>
+            <a:ext cx="10344607" cy="1669288"/>
+          </a:xfrm>
+          <a:prstGeom prst="rect">
+            <a:avLst/>
+          </a:prstGeom>
+          <a:noFill/>
+          <a:ln/>
+        </p:spPr>
+        <p:txBody>
+          <a:bodyPr wrap="square" lIns="0" tIns="0" rIns="0" bIns="0" rtlCol="0" anchor="t"/>
+          <a:lstStyle/>
+          <a:p>
+            <a:pPr rtl="1" algn="r" indent="0" marL="0">
               <a:lnSpc>
                 <a:spcPts val="2600"/>
               </a:lnSpc>
-              <a:spcBef>
-                <a:spcPts val="700"/>
-              </a:spcBef>
               <a:buNone/>
             </a:pPr>
             <a:r>
@@ -7751,61 +8519,15 @@
                 <a:ea typeface="Arial" pitchFamily="34" charset="-122"/>
                 <a:cs typeface="Arial" pitchFamily="34" charset="-120"/>
               </a:rPr>
-              <a:t>‏מהי ההשפעה של פעילות גופנית ותזונה מאוזנת על הסיכון להתפתחות מחלות כרוניות בקרב מבוגרים, כפי שהיא נתפסת ונחווית על ידי המבוגרים עצמם. לצד שאלה זו נבחנו שלוש שאלות משנה: כיצד תופסים מבוגרים את הקשר בין אורח חייהם לבין בריאותם, מהם הגורמים המסייעים והחוסמים אימוץ של פעילות גופנית ותזונה מאוזנת בחיי היומיום, ומהו תפקידה של מערכת הבריאות כפי שהוא נתפס בעיני המטופלים.‏</a:t>
-            </a:r>
-            <a:endParaRPr lang="en-US" sz="1800" dirty="0"/>
-          </a:p>
-          <a:p>
-            <a:pPr algn="r" indent="0" marL="0">
-              <a:lnSpc>
-                <a:spcPts val="2600"/>
-              </a:lnSpc>
-              <a:spcBef>
-                <a:spcPts val="1100"/>
-              </a:spcBef>
-              <a:buNone/>
-            </a:pPr>
-            <a:r>
-              <a:rPr lang="en-US" sz="1800" b="1" dirty="0">
-                <a:solidFill>
-                  <a:srgbClr val="0E6E7E"/>
-                </a:solidFill>
-                <a:latin typeface="Arial" pitchFamily="34" charset="0"/>
-                <a:ea typeface="Arial" pitchFamily="34" charset="-122"/>
-                <a:cs typeface="Arial" pitchFamily="34" charset="-120"/>
-              </a:rPr>
-              <a:t>‏מטרות המחקר‏</a:t>
-            </a:r>
-            <a:endParaRPr lang="en-US" sz="1800" dirty="0"/>
-          </a:p>
-          <a:p>
-            <a:pPr algn="r" indent="0" marL="0">
-              <a:lnSpc>
-                <a:spcPts val="2600"/>
-              </a:lnSpc>
-              <a:spcBef>
-                <a:spcPts val="700"/>
-              </a:spcBef>
-              <a:buNone/>
-            </a:pPr>
-            <a:r>
-              <a:rPr lang="en-US" sz="1700" dirty="0">
-                <a:solidFill>
-                  <a:srgbClr val="0C3B44"/>
-                </a:solidFill>
-                <a:latin typeface="Arial" pitchFamily="34" charset="0"/>
-                <a:ea typeface="Arial" pitchFamily="34" charset="-122"/>
-                <a:cs typeface="Arial" pitchFamily="34" charset="-120"/>
-              </a:rPr>
               <a:t>‏המחקר מבקש לבחון את תפיסותיהם של מבוגרים ביחס לקשר שבין אורח חייהם לבריאותם, ולזהות את החסמים ואת המנופים לאימוץ הרגלים בריאים כפי שהם נחווים בשטח ולא כפי שהם משוערים מראש. בהמשך לכך מבקש המחקר לעמוד על האופן שבו נתפס תפקידם של רופא המשפחה ושל קופת החולים בקידום המניעה, ועל בסיס כל אלה לגזור המלצות יישומיות לקופות החולים ולרשויות המקומיות, המותאמות להקשר החברתי והתרבותי של אוכלוסיית הנגב.‏</a:t>
             </a:r>
-            <a:endParaRPr lang="en-US" sz="1800" dirty="0"/>
-          </a:p>
-        </p:txBody>
-      </p:sp>
-      <p:sp>
-        <p:nvSpPr>
-          <p:cNvPr id="6" name="Slide Number Placeholder 0"/>
+            <a:endParaRPr lang="en-US" sz="1700" dirty="0"/>
+          </a:p>
+        </p:txBody>
+      </p:sp>
+      <p:sp>
+        <p:nvSpPr>
+          <p:cNvPr id="9" name="Slide Number Placeholder 0"/>
           <p:cNvSpPr>
             <a:spLocks noGrp="1"/>
           </p:cNvSpPr>
@@ -8028,8 +8750,8 @@
         </p:nvSpPr>
         <p:spPr>
           <a:xfrm>
-            <a:off x="923544" y="1545336"/>
-            <a:ext cx="10344607" cy="4782312"/>
+            <a:off x="923544" y="1508760"/>
+            <a:ext cx="10344607" cy="1008888"/>
           </a:xfrm>
           <a:prstGeom prst="rect">
             <a:avLst/>
@@ -8041,7 +8763,7 @@
           <a:bodyPr wrap="square" lIns="0" tIns="0" rIns="0" bIns="0" rtlCol="0" anchor="t"/>
           <a:lstStyle/>
           <a:p>
-            <a:pPr algn="r" indent="0" marL="0">
+            <a:pPr rtl="1" algn="r" indent="0" marL="0">
               <a:lnSpc>
                 <a:spcPts val="2600"/>
               </a:lnSpc>
@@ -8060,14 +8782,117 @@
             </a:r>
             <a:endParaRPr lang="en-US" sz="1700" dirty="0"/>
           </a:p>
-          <a:p>
-            <a:pPr algn="r" indent="0" marL="0">
+        </p:txBody>
+      </p:sp>
+      <p:sp>
+        <p:nvSpPr>
+          <p:cNvPr id="7" name="Text 5"/>
+          <p:cNvSpPr txBox="1"/>
+          <p:nvPr/>
+        </p:nvSpPr>
+        <p:spPr>
+          <a:xfrm>
+            <a:off x="923544" y="2601468"/>
+            <a:ext cx="10344607" cy="361188"/>
+          </a:xfrm>
+          <a:prstGeom prst="rect">
+            <a:avLst/>
+          </a:prstGeom>
+          <a:noFill/>
+          <a:ln/>
+        </p:spPr>
+        <p:txBody>
+          <a:bodyPr wrap="square" lIns="0" tIns="0" rIns="0" bIns="0" rtlCol="0" anchor="t"/>
+          <a:lstStyle/>
+          <a:p>
+            <a:pPr rtl="1" algn="r" indent="0" marL="0">
+              <a:lnSpc>
+                <a:spcPts val="2700"/>
+              </a:lnSpc>
+              <a:buNone/>
+            </a:pPr>
+            <a:r>
+              <a:rPr lang="en-US" sz="1800" b="1" dirty="0">
+                <a:solidFill>
+                  <a:srgbClr val="0E6E7E"/>
+                </a:solidFill>
+                <a:latin typeface="Arial" pitchFamily="34" charset="0"/>
+                <a:ea typeface="Arial" pitchFamily="34" charset="-122"/>
+                <a:cs typeface="Arial" pitchFamily="34" charset="-120"/>
+              </a:rPr>
+              <a:t>‏רב-תחלואה‏</a:t>
+            </a:r>
+            <a:endParaRPr lang="en-US" sz="1800" dirty="0"/>
+          </a:p>
+        </p:txBody>
+      </p:sp>
+      <p:sp>
+        <p:nvSpPr>
+          <p:cNvPr id="8" name="Text 6"/>
+          <p:cNvSpPr txBox="1"/>
+          <p:nvPr/>
+        </p:nvSpPr>
+        <p:spPr>
+          <a:xfrm>
+            <a:off x="923544" y="3015996"/>
+            <a:ext cx="10344607" cy="1339088"/>
+          </a:xfrm>
+          <a:prstGeom prst="rect">
+            <a:avLst/>
+          </a:prstGeom>
+          <a:noFill/>
+          <a:ln/>
+        </p:spPr>
+        <p:txBody>
+          <a:bodyPr wrap="square" lIns="0" tIns="0" rIns="0" bIns="0" rtlCol="0" anchor="t"/>
+          <a:lstStyle/>
+          <a:p>
+            <a:pPr rtl="1" algn="r" indent="0" marL="0">
               <a:lnSpc>
                 <a:spcPts val="2600"/>
               </a:lnSpc>
-              <a:spcBef>
-                <a:spcPts val="1100"/>
-              </a:spcBef>
+              <a:buNone/>
+            </a:pPr>
+            <a:r>
+              <a:rPr lang="en-US" sz="1700" dirty="0">
+                <a:solidFill>
+                  <a:srgbClr val="0C3B44"/>
+                </a:solidFill>
+                <a:latin typeface="Arial" pitchFamily="34" charset="0"/>
+                <a:ea typeface="Arial" pitchFamily="34" charset="-122"/>
+                <a:cs typeface="Arial" pitchFamily="34" charset="-120"/>
+              </a:rPr>
+              <a:t>‏מאפיין בולט של מחלות אלו הוא נטייתן להופיע יחד באותו אדם. מחקר עוקבה בקרב יותר ממאה ושלושים אלף נבדקים מצא כי גורמי אורח חיים מסבירים חלק ניכר מן ההיארעות המשולבת, וכי העישון הוא הגורם התורם ביותר להתפתחותה ‏(van der Velde et al., 2024)‏. מכאן שהופעתן המשותפת אינה מקרית אלא קשורה בדפוסי התנהגות משותפים.‏</a:t>
+            </a:r>
+            <a:endParaRPr lang="en-US" sz="1700" dirty="0"/>
+          </a:p>
+        </p:txBody>
+      </p:sp>
+      <p:sp>
+        <p:nvSpPr>
+          <p:cNvPr id="9" name="Text 7"/>
+          <p:cNvSpPr txBox="1"/>
+          <p:nvPr/>
+        </p:nvSpPr>
+        <p:spPr>
+          <a:xfrm>
+            <a:off x="923544" y="4438904"/>
+            <a:ext cx="10344607" cy="361188"/>
+          </a:xfrm>
+          <a:prstGeom prst="rect">
+            <a:avLst/>
+          </a:prstGeom>
+          <a:noFill/>
+          <a:ln/>
+        </p:spPr>
+        <p:txBody>
+          <a:bodyPr wrap="square" lIns="0" tIns="0" rIns="0" bIns="0" rtlCol="0" anchor="t"/>
+          <a:lstStyle/>
+          <a:p>
+            <a:pPr rtl="1" algn="r" indent="0" marL="0">
+              <a:lnSpc>
+                <a:spcPts val="2700"/>
+              </a:lnSpc>
               <a:buNone/>
             </a:pPr>
             <a:r>
@@ -8079,18 +8904,37 @@
                 <a:ea typeface="Arial" pitchFamily="34" charset="-122"/>
                 <a:cs typeface="Arial" pitchFamily="34" charset="-120"/>
               </a:rPr>
-              <a:t>‏רב-תחלואה‏</a:t>
-            </a:r>
-            <a:endParaRPr lang="en-US" sz="1700" dirty="0"/>
-          </a:p>
-          <a:p>
-            <a:pPr algn="r" indent="0" marL="0">
+              <a:t>‏הנטל הכלכלי‏</a:t>
+            </a:r>
+            <a:endParaRPr lang="en-US" sz="1800" dirty="0"/>
+          </a:p>
+        </p:txBody>
+      </p:sp>
+      <p:sp>
+        <p:nvSpPr>
+          <p:cNvPr id="10" name="Text 8"/>
+          <p:cNvSpPr txBox="1"/>
+          <p:nvPr/>
+        </p:nvSpPr>
+        <p:spPr>
+          <a:xfrm>
+            <a:off x="923544" y="4853432"/>
+            <a:ext cx="10344607" cy="1008888"/>
+          </a:xfrm>
+          <a:prstGeom prst="rect">
+            <a:avLst/>
+          </a:prstGeom>
+          <a:noFill/>
+          <a:ln/>
+        </p:spPr>
+        <p:txBody>
+          <a:bodyPr wrap="square" lIns="0" tIns="0" rIns="0" bIns="0" rtlCol="0" anchor="t"/>
+          <a:lstStyle/>
+          <a:p>
+            <a:pPr rtl="1" algn="r" indent="0" marL="0">
               <a:lnSpc>
                 <a:spcPts val="2600"/>
               </a:lnSpc>
-              <a:spcBef>
-                <a:spcPts val="700"/>
-              </a:spcBef>
               <a:buNone/>
             </a:pPr>
             <a:r>
@@ -8102,61 +8946,15 @@
                 <a:ea typeface="Arial" pitchFamily="34" charset="-122"/>
                 <a:cs typeface="Arial" pitchFamily="34" charset="-120"/>
               </a:rPr>
-              <a:t>‏מאפיין בולט של מחלות אלו הוא נטייתן להופיע יחד באותו אדם. מחקר עוקבה בקרב יותר ממאה ושלושים אלף נבדקים מצא כי גורמי אורח חיים מסבירים חלק ניכר מן ההיארעות המשולבת, וכי העישון הוא הגורם התורם ביותר להתפתחותה ‏(van der Velde et al., 2024)‏. מכאן שהופעתן המשותפת אינה מקרית אלא קשורה בדפוסי התנהגות משותפים.‏</a:t>
+              <a:t>‏מחקר ישראלי שהתבסס על נתוניהם של למעלה ממיליון ושלושת רבעי מיליון מבוגרים מצא קשר מובהק בין עלייה במדד מסת הגוף לבין שכיחותן של סוכרת, יתר לחץ דם ומחלת לב איסכמית, וכן בין עלייה זו לבין גידול בעלות הטיפול הרפואי ‏(Reges et al., 2020)‏. מכאן שההשקעה במניעה היא שיקול כלכלי ולא בריאותי בלבד.‏</a:t>
             </a:r>
             <a:endParaRPr lang="en-US" sz="1700" dirty="0"/>
           </a:p>
-          <a:p>
-            <a:pPr algn="r" indent="0" marL="0">
-              <a:lnSpc>
-                <a:spcPts val="2600"/>
-              </a:lnSpc>
-              <a:spcBef>
-                <a:spcPts val="1100"/>
-              </a:spcBef>
-              <a:buNone/>
-            </a:pPr>
-            <a:r>
-              <a:rPr lang="en-US" sz="1800" b="1" dirty="0">
-                <a:solidFill>
-                  <a:srgbClr val="0E6E7E"/>
-                </a:solidFill>
-                <a:latin typeface="Arial" pitchFamily="34" charset="0"/>
-                <a:ea typeface="Arial" pitchFamily="34" charset="-122"/>
-                <a:cs typeface="Arial" pitchFamily="34" charset="-120"/>
-              </a:rPr>
-              <a:t>‏הנטל הכלכלי‏</a:t>
-            </a:r>
-            <a:endParaRPr lang="en-US" sz="1700" dirty="0"/>
-          </a:p>
-          <a:p>
-            <a:pPr algn="r" indent="0" marL="0">
-              <a:lnSpc>
-                <a:spcPts val="2600"/>
-              </a:lnSpc>
-              <a:spcBef>
-                <a:spcPts val="700"/>
-              </a:spcBef>
-              <a:buNone/>
-            </a:pPr>
-            <a:r>
-              <a:rPr lang="en-US" sz="1700" dirty="0">
-                <a:solidFill>
-                  <a:srgbClr val="0C3B44"/>
-                </a:solidFill>
-                <a:latin typeface="Arial" pitchFamily="34" charset="0"/>
-                <a:ea typeface="Arial" pitchFamily="34" charset="-122"/>
-                <a:cs typeface="Arial" pitchFamily="34" charset="-120"/>
-              </a:rPr>
-              <a:t>‏מחקר ישראלי שהתבסס על נתוניהם של למעלה ממיליון ושלושת רבעי מיליון מבוגרים מצא קשר מובהק בין עלייה במדד מסת הגוף לבין שכיחותן של סוכרת, יתר לחץ דם ומחלת לב איסכמית, וכן בין עלייה זו לבין גידול בעלות הטיפול הרפואי ‏(Reges et al., 2020)‏. מכאן שההשקעה במניעה היא שיקול כלכלי ולא בריאותי בלבד.‏</a:t>
-            </a:r>
-            <a:endParaRPr lang="en-US" sz="1700" dirty="0"/>
-          </a:p>
-        </p:txBody>
-      </p:sp>
-      <p:sp>
-        <p:nvSpPr>
-          <p:cNvPr id="7" name="Slide Number Placeholder 0"/>
+        </p:txBody>
+      </p:sp>
+      <p:sp>
+        <p:nvSpPr>
+          <p:cNvPr id="11" name="Slide Number Placeholder 0"/>
           <p:cNvSpPr>
             <a:spLocks noGrp="1"/>
           </p:cNvSpPr>
@@ -8379,8 +9177,8 @@
         </p:nvSpPr>
         <p:spPr>
           <a:xfrm>
-            <a:off x="923544" y="1545336"/>
-            <a:ext cx="10344607" cy="4782312"/>
+            <a:off x="923544" y="1508760"/>
+            <a:ext cx="10344607" cy="348488"/>
           </a:xfrm>
           <a:prstGeom prst="rect">
             <a:avLst/>
@@ -8392,7 +9190,7 @@
           <a:bodyPr wrap="square" lIns="0" tIns="0" rIns="0" bIns="0" rtlCol="0" anchor="t"/>
           <a:lstStyle/>
           <a:p>
-            <a:pPr algn="r" indent="0" marL="0">
+            <a:pPr rtl="1" algn="r" indent="0" marL="0">
               <a:lnSpc>
                 <a:spcPts val="2600"/>
               </a:lnSpc>
@@ -8411,14 +9209,117 @@
             </a:r>
             <a:endParaRPr lang="en-US" sz="1700" dirty="0"/>
           </a:p>
-          <a:p>
-            <a:pPr algn="r" indent="0" marL="0">
+        </p:txBody>
+      </p:sp>
+      <p:sp>
+        <p:nvSpPr>
+          <p:cNvPr id="7" name="Text 5"/>
+          <p:cNvSpPr txBox="1"/>
+          <p:nvPr/>
+        </p:nvSpPr>
+        <p:spPr>
+          <a:xfrm>
+            <a:off x="923544" y="1996948"/>
+            <a:ext cx="10344607" cy="361188"/>
+          </a:xfrm>
+          <a:prstGeom prst="rect">
+            <a:avLst/>
+          </a:prstGeom>
+          <a:noFill/>
+          <a:ln/>
+        </p:spPr>
+        <p:txBody>
+          <a:bodyPr wrap="square" lIns="0" tIns="0" rIns="0" bIns="0" rtlCol="0" anchor="t"/>
+          <a:lstStyle/>
+          <a:p>
+            <a:pPr rtl="1" algn="r" indent="0" marL="0">
+              <a:lnSpc>
+                <a:spcPts val="2700"/>
+              </a:lnSpc>
+              <a:buNone/>
+            </a:pPr>
+            <a:r>
+              <a:rPr lang="en-US" sz="1800" b="1" dirty="0">
+                <a:solidFill>
+                  <a:srgbClr val="0E6E7E"/>
+                </a:solidFill>
+                <a:latin typeface="Arial" pitchFamily="34" charset="0"/>
+                <a:ea typeface="Arial" pitchFamily="34" charset="-122"/>
+                <a:cs typeface="Arial" pitchFamily="34" charset="-120"/>
+              </a:rPr>
+              <a:t>‏התזונה‏</a:t>
+            </a:r>
+            <a:endParaRPr lang="en-US" sz="1800" dirty="0"/>
+          </a:p>
+        </p:txBody>
+      </p:sp>
+      <p:sp>
+        <p:nvSpPr>
+          <p:cNvPr id="8" name="Text 6"/>
+          <p:cNvSpPr txBox="1"/>
+          <p:nvPr/>
+        </p:nvSpPr>
+        <p:spPr>
+          <a:xfrm>
+            <a:off x="923544" y="2447036"/>
+            <a:ext cx="10344607" cy="1339088"/>
+          </a:xfrm>
+          <a:prstGeom prst="rect">
+            <a:avLst/>
+          </a:prstGeom>
+          <a:noFill/>
+          <a:ln/>
+        </p:spPr>
+        <p:txBody>
+          <a:bodyPr wrap="square" lIns="0" tIns="0" rIns="0" bIns="0" rtlCol="0" anchor="t"/>
+          <a:lstStyle/>
+          <a:p>
+            <a:pPr rtl="1" algn="r" indent="0" marL="0">
               <a:lnSpc>
                 <a:spcPts val="2600"/>
               </a:lnSpc>
-              <a:spcBef>
-                <a:spcPts val="1100"/>
-              </a:spcBef>
+              <a:buNone/>
+            </a:pPr>
+            <a:r>
+              <a:rPr lang="en-US" sz="1700" dirty="0">
+                <a:solidFill>
+                  <a:srgbClr val="0C3B44"/>
+                </a:solidFill>
+                <a:latin typeface="Arial" pitchFamily="34" charset="0"/>
+                <a:ea typeface="Arial" pitchFamily="34" charset="-122"/>
+                <a:cs typeface="Arial" pitchFamily="34" charset="-120"/>
+              </a:rPr>
+              <a:t>‏סקירת-על שבחנה שמונה עשרה מטא-אנליזות מצאה כי הדיאטה הים-תיכונית קשורה בהפחתת התמותה ממחלות לב וכלי דם ‏(Hareer et al., 2024)‏, וסקירה שיטתית עדכנית מצאה כי היצמדות גבוהה אליה קשורה בתמותה כללית מופחתת ‏(Laffond et al., 2023)‏. סקירה של שלושים ניסויים מבוקרים הראתה כי דיאטת DASH מורידה באופן מובהק את לחץ הדם ‏(Filippou et al., 2020)‏.‏</a:t>
+            </a:r>
+            <a:endParaRPr lang="en-US" sz="1700" dirty="0"/>
+          </a:p>
+        </p:txBody>
+      </p:sp>
+      <p:sp>
+        <p:nvSpPr>
+          <p:cNvPr id="9" name="Text 7"/>
+          <p:cNvSpPr txBox="1"/>
+          <p:nvPr/>
+        </p:nvSpPr>
+        <p:spPr>
+          <a:xfrm>
+            <a:off x="923544" y="3925824"/>
+            <a:ext cx="10344607" cy="361188"/>
+          </a:xfrm>
+          <a:prstGeom prst="rect">
+            <a:avLst/>
+          </a:prstGeom>
+          <a:noFill/>
+          <a:ln/>
+        </p:spPr>
+        <p:txBody>
+          <a:bodyPr wrap="square" lIns="0" tIns="0" rIns="0" bIns="0" rtlCol="0" anchor="t"/>
+          <a:lstStyle/>
+          <a:p>
+            <a:pPr rtl="1" algn="r" indent="0" marL="0">
+              <a:lnSpc>
+                <a:spcPts val="2700"/>
+              </a:lnSpc>
               <a:buNone/>
             </a:pPr>
             <a:r>
@@ -8430,18 +9331,37 @@
                 <a:ea typeface="Arial" pitchFamily="34" charset="-122"/>
                 <a:cs typeface="Arial" pitchFamily="34" charset="-120"/>
               </a:rPr>
-              <a:t>‏התזונה‏</a:t>
-            </a:r>
-            <a:endParaRPr lang="en-US" sz="1700" dirty="0"/>
-          </a:p>
-          <a:p>
-            <a:pPr algn="r" indent="0" marL="0">
+              <a:t>‏הפעילות הגופנית‏</a:t>
+            </a:r>
+            <a:endParaRPr lang="en-US" sz="1800" dirty="0"/>
+          </a:p>
+        </p:txBody>
+      </p:sp>
+      <p:sp>
+        <p:nvSpPr>
+          <p:cNvPr id="10" name="Text 8"/>
+          <p:cNvSpPr txBox="1"/>
+          <p:nvPr/>
+        </p:nvSpPr>
+        <p:spPr>
+          <a:xfrm>
+            <a:off x="923544" y="4375912"/>
+            <a:ext cx="10344607" cy="1339088"/>
+          </a:xfrm>
+          <a:prstGeom prst="rect">
+            <a:avLst/>
+          </a:prstGeom>
+          <a:noFill/>
+          <a:ln/>
+        </p:spPr>
+        <p:txBody>
+          <a:bodyPr wrap="square" lIns="0" tIns="0" rIns="0" bIns="0" rtlCol="0" anchor="t"/>
+          <a:lstStyle/>
+          <a:p>
+            <a:pPr rtl="1" algn="r" indent="0" marL="0">
               <a:lnSpc>
                 <a:spcPts val="2600"/>
               </a:lnSpc>
-              <a:spcBef>
-                <a:spcPts val="700"/>
-              </a:spcBef>
               <a:buNone/>
             </a:pPr>
             <a:r>
@@ -8453,61 +9373,15 @@
                 <a:ea typeface="Arial" pitchFamily="34" charset="-122"/>
                 <a:cs typeface="Arial" pitchFamily="34" charset="-120"/>
               </a:rPr>
-              <a:t>‏סקירת-על שבחנה שמונה עשרה מטא-אנליזות מצאה כי הדיאטה הים-תיכונית קשורה בהפחתת התמותה ממחלות לב וכלי דם ‏(Hareer et al., 2024)‏, וסקירה שיטתית עדכנית מצאה כי היצמדות גבוהה אליה קשורה בתמותה כללית מופחתת ‏(Laffond et al., 2023)‏. סקירה של שלושים ניסויים מבוקרים הראתה כי דיאטת DASH מורידה באופן מובהק את לחץ הדם ‏(Filippou et al., 2020)‏.‏</a:t>
+              <a:t>‏מטא-אנליזה של מחקרי עוקבה מצאה יחס מינון-תגובה, שלפיו כל עלייה בהיקף הפעילות קשורה בירידה בתמותה בקרב חולים במחלות לא מדבקות ‏(Geidl et al., 2020)‏. כלומר אין מדובר בסף שמעבר לו מושגת תועלת, אלא בקשר רציף שבו כל תוספת תורמת. שילובם של שני הרכיבים יוצר אפקט משלים, ואשכול של הרגלים בריאים נמצא קשור לסיכון מופחת לתחלואה ולתמותה על פני קבוצות חברתיות-כלכליות שונות ‏(Lai et al., 2024; Zhang et al., 2021)‏.‏</a:t>
             </a:r>
             <a:endParaRPr lang="en-US" sz="1700" dirty="0"/>
           </a:p>
-          <a:p>
-            <a:pPr algn="r" indent="0" marL="0">
-              <a:lnSpc>
-                <a:spcPts val="2600"/>
-              </a:lnSpc>
-              <a:spcBef>
-                <a:spcPts val="1100"/>
-              </a:spcBef>
-              <a:buNone/>
-            </a:pPr>
-            <a:r>
-              <a:rPr lang="en-US" sz="1800" b="1" dirty="0">
-                <a:solidFill>
-                  <a:srgbClr val="0E6E7E"/>
-                </a:solidFill>
-                <a:latin typeface="Arial" pitchFamily="34" charset="0"/>
-                <a:ea typeface="Arial" pitchFamily="34" charset="-122"/>
-                <a:cs typeface="Arial" pitchFamily="34" charset="-120"/>
-              </a:rPr>
-              <a:t>‏הפעילות הגופנית‏</a:t>
-            </a:r>
-            <a:endParaRPr lang="en-US" sz="1700" dirty="0"/>
-          </a:p>
-          <a:p>
-            <a:pPr algn="r" indent="0" marL="0">
-              <a:lnSpc>
-                <a:spcPts val="2600"/>
-              </a:lnSpc>
-              <a:spcBef>
-                <a:spcPts val="700"/>
-              </a:spcBef>
-              <a:buNone/>
-            </a:pPr>
-            <a:r>
-              <a:rPr lang="en-US" sz="1700" dirty="0">
-                <a:solidFill>
-                  <a:srgbClr val="0C3B44"/>
-                </a:solidFill>
-                <a:latin typeface="Arial" pitchFamily="34" charset="0"/>
-                <a:ea typeface="Arial" pitchFamily="34" charset="-122"/>
-                <a:cs typeface="Arial" pitchFamily="34" charset="-120"/>
-              </a:rPr>
-              <a:t>‏מטא-אנליזה של מחקרי עוקבה מצאה יחס מינון-תגובה, שלפיו כל עלייה בהיקף הפעילות קשורה בירידה בתמותה בקרב חולים במחלות לא מדבקות ‏(Geidl et al., 2020)‏. כלומר אין מדובר בסף שמעבר לו מושגת תועלת, אלא בקשר רציף שבו כל תוספת תורמת. שילובם של שני הרכיבים יוצר אפקט משלים, ואשכול של הרגלים בריאים נמצא קשור לסיכון מופחת לתחלואה ולתמותה על פני קבוצות חברתיות-כלכליות שונות ‏(Lai et al., 2024; Zhang et al., 2021)‏.‏</a:t>
-            </a:r>
-            <a:endParaRPr lang="en-US" sz="1700" dirty="0"/>
-          </a:p>
-        </p:txBody>
-      </p:sp>
-      <p:sp>
-        <p:nvSpPr>
-          <p:cNvPr id="7" name="Slide Number Placeholder 0"/>
+        </p:txBody>
+      </p:sp>
+      <p:sp>
+        <p:nvSpPr>
+          <p:cNvPr id="11" name="Slide Number Placeholder 0"/>
           <p:cNvSpPr>
             <a:spLocks noGrp="1"/>
           </p:cNvSpPr>
@@ -8691,8 +9565,8 @@
         </p:nvSpPr>
         <p:spPr>
           <a:xfrm>
-            <a:off x="923544" y="1325880"/>
-            <a:ext cx="10344607" cy="5001768"/>
+            <a:off x="923544" y="1289304"/>
+            <a:ext cx="10344607" cy="1008888"/>
           </a:xfrm>
           <a:prstGeom prst="rect">
             <a:avLst/>
@@ -8704,7 +9578,7 @@
           <a:bodyPr wrap="square" lIns="0" tIns="0" rIns="0" bIns="0" rtlCol="0" anchor="t"/>
           <a:lstStyle/>
           <a:p>
-            <a:pPr algn="r" indent="0" marL="0">
+            <a:pPr rtl="1" algn="r" indent="0" marL="0">
               <a:lnSpc>
                 <a:spcPts val="2600"/>
               </a:lnSpc>
@@ -8723,14 +9597,33 @@
             </a:r>
             <a:endParaRPr lang="en-US" sz="1700" dirty="0"/>
           </a:p>
-          <a:p>
-            <a:pPr algn="r" indent="0" marL="0">
+        </p:txBody>
+      </p:sp>
+      <p:sp>
+        <p:nvSpPr>
+          <p:cNvPr id="6" name="Text 4"/>
+          <p:cNvSpPr txBox="1"/>
+          <p:nvPr/>
+        </p:nvSpPr>
+        <p:spPr>
+          <a:xfrm>
+            <a:off x="923544" y="2387092"/>
+            <a:ext cx="10344607" cy="1339088"/>
+          </a:xfrm>
+          <a:prstGeom prst="rect">
+            <a:avLst/>
+          </a:prstGeom>
+          <a:noFill/>
+          <a:ln/>
+        </p:spPr>
+        <p:txBody>
+          <a:bodyPr wrap="square" lIns="0" tIns="0" rIns="0" bIns="0" rtlCol="0" anchor="t"/>
+          <a:lstStyle/>
+          <a:p>
+            <a:pPr rtl="1" algn="r" indent="0" marL="0">
               <a:lnSpc>
                 <a:spcPts val="2600"/>
               </a:lnSpc>
-              <a:spcBef>
-                <a:spcPts val="700"/>
-              </a:spcBef>
               <a:buNone/>
             </a:pPr>
             <a:r>
@@ -8746,14 +9639,33 @@
             </a:r>
             <a:endParaRPr lang="en-US" sz="1700" dirty="0"/>
           </a:p>
-          <a:p>
-            <a:pPr algn="r" indent="0" marL="0">
+        </p:txBody>
+      </p:sp>
+      <p:sp>
+        <p:nvSpPr>
+          <p:cNvPr id="7" name="Text 5"/>
+          <p:cNvSpPr txBox="1"/>
+          <p:nvPr/>
+        </p:nvSpPr>
+        <p:spPr>
+          <a:xfrm>
+            <a:off x="923544" y="3815080"/>
+            <a:ext cx="10344607" cy="1008888"/>
+          </a:xfrm>
+          <a:prstGeom prst="rect">
+            <a:avLst/>
+          </a:prstGeom>
+          <a:noFill/>
+          <a:ln/>
+        </p:spPr>
+        <p:txBody>
+          <a:bodyPr wrap="square" lIns="0" tIns="0" rIns="0" bIns="0" rtlCol="0" anchor="t"/>
+          <a:lstStyle/>
+          <a:p>
+            <a:pPr rtl="1" algn="r" indent="0" marL="0">
               <a:lnSpc>
                 <a:spcPts val="2600"/>
               </a:lnSpc>
-              <a:spcBef>
-                <a:spcPts val="700"/>
-              </a:spcBef>
               <a:buNone/>
             </a:pPr>
             <a:r>
@@ -8773,7 +9685,7 @@
       </p:sp>
       <p:sp>
         <p:nvSpPr>
-          <p:cNvPr id="6" name="Slide Number Placeholder 0"/>
+          <p:cNvPr id="8" name="Slide Number Placeholder 0"/>
           <p:cNvSpPr>
             <a:spLocks noGrp="1"/>
           </p:cNvSpPr>
@@ -8957,8 +9869,8 @@
         </p:nvSpPr>
         <p:spPr>
           <a:xfrm>
-            <a:off x="923544" y="1325880"/>
-            <a:ext cx="10344607" cy="5001768"/>
+            <a:off x="923544" y="1289304"/>
+            <a:ext cx="10344607" cy="1339088"/>
           </a:xfrm>
           <a:prstGeom prst="rect">
             <a:avLst/>
@@ -8970,7 +9882,7 @@
           <a:bodyPr wrap="square" lIns="0" tIns="0" rIns="0" bIns="0" rtlCol="0" anchor="t"/>
           <a:lstStyle/>
           <a:p>
-            <a:pPr algn="r" indent="0" marL="0">
+            <a:pPr rtl="1" algn="r" indent="0" marL="0">
               <a:lnSpc>
                 <a:spcPts val="2600"/>
               </a:lnSpc>
@@ -8989,14 +9901,33 @@
             </a:r>
             <a:endParaRPr lang="en-US" sz="1700" dirty="0"/>
           </a:p>
-          <a:p>
-            <a:pPr algn="r" indent="0" marL="0">
+        </p:txBody>
+      </p:sp>
+      <p:sp>
+        <p:nvSpPr>
+          <p:cNvPr id="6" name="Text 4"/>
+          <p:cNvSpPr txBox="1"/>
+          <p:nvPr/>
+        </p:nvSpPr>
+        <p:spPr>
+          <a:xfrm>
+            <a:off x="923544" y="2717292"/>
+            <a:ext cx="10344607" cy="1669288"/>
+          </a:xfrm>
+          <a:prstGeom prst="rect">
+            <a:avLst/>
+          </a:prstGeom>
+          <a:noFill/>
+          <a:ln/>
+        </p:spPr>
+        <p:txBody>
+          <a:bodyPr wrap="square" lIns="0" tIns="0" rIns="0" bIns="0" rtlCol="0" anchor="t"/>
+          <a:lstStyle/>
+          <a:p>
+            <a:pPr rtl="1" algn="r" indent="0" marL="0">
               <a:lnSpc>
                 <a:spcPts val="2600"/>
               </a:lnSpc>
-              <a:spcBef>
-                <a:spcPts val="700"/>
-              </a:spcBef>
               <a:buNone/>
             </a:pPr>
             <a:r>
@@ -9012,14 +9943,33 @@
             </a:r>
             <a:endParaRPr lang="en-US" sz="1700" dirty="0"/>
           </a:p>
-          <a:p>
-            <a:pPr algn="r" indent="0" marL="0">
+        </p:txBody>
+      </p:sp>
+      <p:sp>
+        <p:nvSpPr>
+          <p:cNvPr id="7" name="Text 5"/>
+          <p:cNvSpPr txBox="1"/>
+          <p:nvPr/>
+        </p:nvSpPr>
+        <p:spPr>
+          <a:xfrm>
+            <a:off x="923544" y="4475480"/>
+            <a:ext cx="10344607" cy="1008888"/>
+          </a:xfrm>
+          <a:prstGeom prst="rect">
+            <a:avLst/>
+          </a:prstGeom>
+          <a:noFill/>
+          <a:ln/>
+        </p:spPr>
+        <p:txBody>
+          <a:bodyPr wrap="square" lIns="0" tIns="0" rIns="0" bIns="0" rtlCol="0" anchor="t"/>
+          <a:lstStyle/>
+          <a:p>
+            <a:pPr rtl="1" algn="r" indent="0" marL="0">
               <a:lnSpc>
                 <a:spcPts val="2600"/>
               </a:lnSpc>
-              <a:spcBef>
-                <a:spcPts val="700"/>
-              </a:spcBef>
               <a:buNone/>
             </a:pPr>
             <a:r>
@@ -9039,7 +9989,7 @@
       </p:sp>
       <p:sp>
         <p:nvSpPr>
-          <p:cNvPr id="6" name="Slide Number Placeholder 0"/>
+          <p:cNvPr id="8" name="Slide Number Placeholder 0"/>
           <p:cNvSpPr>
             <a:spLocks noGrp="1"/>
           </p:cNvSpPr>
@@ -9223,8 +10173,8 @@
         </p:nvSpPr>
         <p:spPr>
           <a:xfrm>
-            <a:off x="923544" y="1325880"/>
-            <a:ext cx="10344607" cy="5001768"/>
+            <a:off x="923544" y="1289304"/>
+            <a:ext cx="10344607" cy="1669288"/>
           </a:xfrm>
           <a:prstGeom prst="rect">
             <a:avLst/>
@@ -9236,7 +10186,7 @@
           <a:bodyPr wrap="square" lIns="0" tIns="0" rIns="0" bIns="0" rtlCol="0" anchor="t"/>
           <a:lstStyle/>
           <a:p>
-            <a:pPr algn="r" indent="0" marL="0">
+            <a:pPr rtl="1" algn="r" indent="0" marL="0">
               <a:lnSpc>
                 <a:spcPts val="2600"/>
               </a:lnSpc>
@@ -9255,14 +10205,33 @@
             </a:r>
             <a:endParaRPr lang="en-US" sz="1700" dirty="0"/>
           </a:p>
-          <a:p>
-            <a:pPr algn="r" indent="0" marL="0">
+        </p:txBody>
+      </p:sp>
+      <p:sp>
+        <p:nvSpPr>
+          <p:cNvPr id="6" name="Text 4"/>
+          <p:cNvSpPr txBox="1"/>
+          <p:nvPr/>
+        </p:nvSpPr>
+        <p:spPr>
+          <a:xfrm>
+            <a:off x="923544" y="3047492"/>
+            <a:ext cx="10344607" cy="678688"/>
+          </a:xfrm>
+          <a:prstGeom prst="rect">
+            <a:avLst/>
+          </a:prstGeom>
+          <a:noFill/>
+          <a:ln/>
+        </p:spPr>
+        <p:txBody>
+          <a:bodyPr wrap="square" lIns="0" tIns="0" rIns="0" bIns="0" rtlCol="0" anchor="t"/>
+          <a:lstStyle/>
+          <a:p>
+            <a:pPr rtl="1" algn="r" indent="0" marL="0">
               <a:lnSpc>
                 <a:spcPts val="2600"/>
               </a:lnSpc>
-              <a:spcBef>
-                <a:spcPts val="700"/>
-              </a:spcBef>
               <a:buNone/>
             </a:pPr>
             <a:r>
@@ -9278,14 +10247,33 @@
             </a:r>
             <a:endParaRPr lang="en-US" sz="1700" dirty="0"/>
           </a:p>
-          <a:p>
-            <a:pPr algn="r" indent="0" marL="0">
+        </p:txBody>
+      </p:sp>
+      <p:sp>
+        <p:nvSpPr>
+          <p:cNvPr id="7" name="Text 5"/>
+          <p:cNvSpPr txBox="1"/>
+          <p:nvPr/>
+        </p:nvSpPr>
+        <p:spPr>
+          <a:xfrm>
+            <a:off x="923544" y="3815080"/>
+            <a:ext cx="10344607" cy="1339088"/>
+          </a:xfrm>
+          <a:prstGeom prst="rect">
+            <a:avLst/>
+          </a:prstGeom>
+          <a:noFill/>
+          <a:ln/>
+        </p:spPr>
+        <p:txBody>
+          <a:bodyPr wrap="square" lIns="0" tIns="0" rIns="0" bIns="0" rtlCol="0" anchor="t"/>
+          <a:lstStyle/>
+          <a:p>
+            <a:pPr rtl="1" algn="r" indent="0" marL="0">
               <a:lnSpc>
                 <a:spcPts val="2600"/>
               </a:lnSpc>
-              <a:spcBef>
-                <a:spcPts val="700"/>
-              </a:spcBef>
               <a:buNone/>
             </a:pPr>
             <a:r>
@@ -9305,7 +10293,7 @@
       </p:sp>
       <p:sp>
         <p:nvSpPr>
-          <p:cNvPr id="6" name="Slide Number Placeholder 0"/>
+          <p:cNvPr id="8" name="Slide Number Placeholder 0"/>
           <p:cNvSpPr>
             <a:spLocks noGrp="1"/>
           </p:cNvSpPr>
@@ -9528,8 +10516,8 @@
         </p:nvSpPr>
         <p:spPr>
           <a:xfrm>
-            <a:off x="923544" y="1545336"/>
-            <a:ext cx="10344607" cy="4782312"/>
+            <a:off x="923544" y="1508760"/>
+            <a:ext cx="10344607" cy="1339088"/>
           </a:xfrm>
           <a:prstGeom prst="rect">
             <a:avLst/>
@@ -9541,7 +10529,7 @@
           <a:bodyPr wrap="square" lIns="0" tIns="0" rIns="0" bIns="0" rtlCol="0" anchor="t"/>
           <a:lstStyle/>
           <a:p>
-            <a:pPr algn="r" indent="0" marL="0">
+            <a:pPr rtl="1" algn="r" indent="0" marL="0">
               <a:lnSpc>
                 <a:spcPts val="2600"/>
               </a:lnSpc>
@@ -9560,14 +10548,33 @@
             </a:r>
             <a:endParaRPr lang="en-US" sz="1700" dirty="0"/>
           </a:p>
-          <a:p>
-            <a:pPr algn="r" indent="0" marL="0">
+        </p:txBody>
+      </p:sp>
+      <p:sp>
+        <p:nvSpPr>
+          <p:cNvPr id="7" name="Text 5"/>
+          <p:cNvSpPr txBox="1"/>
+          <p:nvPr/>
+        </p:nvSpPr>
+        <p:spPr>
+          <a:xfrm>
+            <a:off x="923544" y="2936748"/>
+            <a:ext cx="10344607" cy="678688"/>
+          </a:xfrm>
+          <a:prstGeom prst="rect">
+            <a:avLst/>
+          </a:prstGeom>
+          <a:noFill/>
+          <a:ln/>
+        </p:spPr>
+        <p:txBody>
+          <a:bodyPr wrap="square" lIns="0" tIns="0" rIns="0" bIns="0" rtlCol="0" anchor="t"/>
+          <a:lstStyle/>
+          <a:p>
+            <a:pPr rtl="1" algn="r" indent="0" marL="0">
               <a:lnSpc>
                 <a:spcPts val="2600"/>
               </a:lnSpc>
-              <a:spcBef>
-                <a:spcPts val="700"/>
-              </a:spcBef>
               <a:buNone/>
             </a:pPr>
             <a:r>
@@ -9583,14 +10590,33 @@
             </a:r>
             <a:endParaRPr lang="en-US" sz="1700" dirty="0"/>
           </a:p>
-          <a:p>
-            <a:pPr algn="r" indent="0" marL="0">
+        </p:txBody>
+      </p:sp>
+      <p:sp>
+        <p:nvSpPr>
+          <p:cNvPr id="8" name="Text 6"/>
+          <p:cNvSpPr txBox="1"/>
+          <p:nvPr/>
+        </p:nvSpPr>
+        <p:spPr>
+          <a:xfrm>
+            <a:off x="923544" y="3704336"/>
+            <a:ext cx="10344607" cy="1008888"/>
+          </a:xfrm>
+          <a:prstGeom prst="rect">
+            <a:avLst/>
+          </a:prstGeom>
+          <a:noFill/>
+          <a:ln/>
+        </p:spPr>
+        <p:txBody>
+          <a:bodyPr wrap="square" lIns="0" tIns="0" rIns="0" bIns="0" rtlCol="0" anchor="t"/>
+          <a:lstStyle/>
+          <a:p>
+            <a:pPr rtl="1" algn="r" indent="0" marL="0">
               <a:lnSpc>
                 <a:spcPts val="2600"/>
               </a:lnSpc>
-              <a:spcBef>
-                <a:spcPts val="700"/>
-              </a:spcBef>
               <a:buNone/>
             </a:pPr>
             <a:r>
@@ -9610,7 +10636,7 @@
       </p:sp>
       <p:sp>
         <p:nvSpPr>
-          <p:cNvPr id="7" name="Slide Number Placeholder 0"/>
+          <p:cNvPr id="9" name="Slide Number Placeholder 0"/>
           <p:cNvSpPr>
             <a:spLocks noGrp="1"/>
           </p:cNvSpPr>
